--- a/docs/MIDREPORT_public.pptx
+++ b/docs/MIDREPORT_public.pptx
@@ -3090,14 +3090,100 @@
       <p:grpSpPr/>
       <p:sp>
         <p:nvSpPr>
-          <p:cNvPr id="2" name="TextBox 1"/>
+          <p:cNvPr id="2" name="Rectangle 1"/>
+          <p:cNvSpPr/>
+          <p:nvPr/>
+        </p:nvSpPr>
+        <p:spPr>
+          <a:xfrm>
+            <a:off x="0" y="0"/>
+            <a:ext cx="12191695" cy="6858000"/>
+          </a:xfrm>
+          <a:prstGeom prst="rect">
+            <a:avLst/>
+          </a:prstGeom>
+          <a:solidFill>
+            <a:srgbClr val="FAF8F5"/>
+          </a:solidFill>
+          <a:ln>
+            <a:noFill/>
+          </a:ln>
+        </p:spPr>
+        <p:style>
+          <a:lnRef idx="1">
+            <a:schemeClr val="accent1"/>
+          </a:lnRef>
+          <a:fillRef idx="3">
+            <a:schemeClr val="accent1"/>
+          </a:fillRef>
+          <a:effectRef idx="2">
+            <a:schemeClr val="accent1"/>
+          </a:effectRef>
+          <a:fontRef idx="minor">
+            <a:schemeClr val="lt1"/>
+          </a:fontRef>
+        </p:style>
+        <p:txBody>
+          <a:bodyPr rtlCol="0" anchor="ctr"/>
+          <a:lstStyle/>
+          <a:p>
+            <a:pPr algn="ctr"/>
+          </a:p>
+        </p:txBody>
+      </p:sp>
+      <p:sp>
+        <p:nvSpPr>
+          <p:cNvPr id="3" name="Rectangle 2"/>
+          <p:cNvSpPr/>
+          <p:nvPr/>
+        </p:nvSpPr>
+        <p:spPr>
+          <a:xfrm>
+            <a:off x="0" y="0"/>
+            <a:ext cx="105156" cy="6858000"/>
+          </a:xfrm>
+          <a:prstGeom prst="rect">
+            <a:avLst/>
+          </a:prstGeom>
+          <a:solidFill>
+            <a:srgbClr val="9D1B32"/>
+          </a:solidFill>
+          <a:ln>
+            <a:noFill/>
+          </a:ln>
+        </p:spPr>
+        <p:style>
+          <a:lnRef idx="1">
+            <a:schemeClr val="accent1"/>
+          </a:lnRef>
+          <a:fillRef idx="3">
+            <a:schemeClr val="accent1"/>
+          </a:fillRef>
+          <a:effectRef idx="2">
+            <a:schemeClr val="accent1"/>
+          </a:effectRef>
+          <a:fontRef idx="minor">
+            <a:schemeClr val="lt1"/>
+          </a:fontRef>
+        </p:style>
+        <p:txBody>
+          <a:bodyPr rtlCol="0" anchor="ctr"/>
+          <a:lstStyle/>
+          <a:p>
+            <a:pPr algn="ctr"/>
+          </a:p>
+        </p:txBody>
+      </p:sp>
+      <p:sp>
+        <p:nvSpPr>
+          <p:cNvPr id="4" name="TextBox 3"/>
           <p:cNvSpPr txBox="1"/>
           <p:nvPr/>
         </p:nvSpPr>
         <p:spPr>
           <a:xfrm>
-            <a:off x="320040" y="164592"/>
-            <a:ext cx="11521440" cy="548640"/>
+            <a:off x="310896" y="128016"/>
+            <a:ext cx="6949440" cy="182880"/>
           </a:xfrm>
           <a:prstGeom prst="rect">
             <a:avLst/>
@@ -3105,37 +3191,44 @@
           <a:noFill/>
         </p:spPr>
         <p:txBody>
-          <a:bodyPr wrap="square">
+          <a:bodyPr wrap="square" lIns="0" rIns="0" tIns="0" bIns="0">
             <a:spAutoFit/>
           </a:bodyPr>
           <a:lstStyle/>
           <a:p>
-            <a:pPr>
+            <a:pPr algn="l">
+              <a:lnSpc>
+                <a:spcPct val="108000"/>
+              </a:lnSpc>
+              <a:spcBef>
+                <a:spcPts val="0"/>
+              </a:spcBef>
               <a:spcAft>
-                <a:spcPts val="200"/>
+                <a:spcPts val="0"/>
               </a:spcAft>
             </a:pPr>
             <a:r>
-              <a:rPr sz="2400" b="1">
-                <a:solidFill>
-                  <a:srgbClr val="1F4E79"/>
-                </a:solidFill>
-              </a:rPr>
-              <a:t>How Much PENCIL Can You Afford?  Compute-allocation for link prediction</a:t>
-            </a:r>
-          </a:p>
-        </p:txBody>
-      </p:sp>
-      <p:sp>
-        <p:nvSpPr>
-          <p:cNvPr id="3" name="TextBox 2"/>
+              <a:rPr sz="819" b="1" i="0">
+                <a:solidFill>
+                  <a:srgbClr val="9D1B32"/>
+                </a:solidFill>
+                <a:latin typeface="Segoe UI"/>
+              </a:rPr>
+              <a:t>DA4022 MID-PROJECT REPORT   ·   SELF-PROPOSED (ANCHOR #2)   ·   EXTENDING PENCIL (ICML 2026)</a:t>
+            </a:r>
+          </a:p>
+        </p:txBody>
+      </p:sp>
+      <p:sp>
+        <p:nvSpPr>
+          <p:cNvPr id="5" name="TextBox 4"/>
           <p:cNvSpPr txBox="1"/>
           <p:nvPr/>
         </p:nvSpPr>
         <p:spPr>
           <a:xfrm>
-            <a:off x="320040" y="713232"/>
-            <a:ext cx="11521440" cy="320040"/>
+            <a:off x="310896" y="310896"/>
+            <a:ext cx="6995160" cy="365760"/>
           </a:xfrm>
           <a:prstGeom prst="rect">
             <a:avLst/>
@@ -3143,37 +3236,53 @@
           <a:noFill/>
         </p:spPr>
         <p:txBody>
-          <a:bodyPr wrap="square">
+          <a:bodyPr wrap="square" lIns="0" rIns="0" tIns="0" bIns="0">
             <a:spAutoFit/>
           </a:bodyPr>
           <a:lstStyle/>
           <a:p>
-            <a:pPr>
+            <a:pPr algn="l">
+              <a:lnSpc>
+                <a:spcPct val="108000"/>
+              </a:lnSpc>
+              <a:spcBef>
+                <a:spcPts val="0"/>
+              </a:spcBef>
               <a:spcAft>
-                <a:spcPts val="200"/>
+                <a:spcPts val="0"/>
               </a:spcAft>
             </a:pPr>
             <a:r>
-              <a:rPr sz="1100" b="0">
-                <a:solidFill>
-                  <a:srgbClr val="404040"/>
-                </a:solidFill>
-              </a:rPr>
-              <a:t>DA4022 mid-project update  |  Amit Kumar · Ashmit Satpute · Arnav Kshirsagar · Pranav Shalya · Atharv Wankhede</a:t>
-            </a:r>
-          </a:p>
-        </p:txBody>
-      </p:sp>
-      <p:sp>
-        <p:nvSpPr>
-          <p:cNvPr id="4" name="TextBox 3"/>
+              <a:rPr sz="1920" b="1" i="0">
+                <a:solidFill>
+                  <a:srgbClr val="12161C"/>
+                </a:solidFill>
+                <a:latin typeface="Georgia"/>
+              </a:rPr>
+              <a:t>How Much PENCIL Can You Afford?</a:t>
+            </a:r>
+            <a:r>
+              <a:rPr sz="1140" b="1" i="0">
+                <a:solidFill>
+                  <a:srgbClr val="333B45"/>
+                </a:solidFill>
+                <a:latin typeface="Segoe UI"/>
+              </a:rPr>
+              <a:t>   Compute-Allocation Laws for Link Prediction</a:t>
+            </a:r>
+          </a:p>
+        </p:txBody>
+      </p:sp>
+      <p:sp>
+        <p:nvSpPr>
+          <p:cNvPr id="6" name="TextBox 5"/>
           <p:cNvSpPr txBox="1"/>
           <p:nvPr/>
         </p:nvSpPr>
         <p:spPr>
           <a:xfrm>
-            <a:off x="320040" y="1143000"/>
-            <a:ext cx="4343400" cy="5577840"/>
+            <a:off x="7360920" y="173736"/>
+            <a:ext cx="877824" cy="493776"/>
           </a:xfrm>
           <a:prstGeom prst="rect">
             <a:avLst/>
@@ -3181,317 +3290,3036 @@
           <a:noFill/>
         </p:spPr>
         <p:txBody>
-          <a:bodyPr wrap="square">
+          <a:bodyPr wrap="square" lIns="0" rIns="0" tIns="0" bIns="0">
             <a:spAutoFit/>
           </a:bodyPr>
           <a:lstStyle/>
           <a:p>
-            <a:pPr>
+            <a:pPr algn="l">
+              <a:lnSpc>
+                <a:spcPct val="100000"/>
+              </a:lnSpc>
+              <a:spcBef>
+                <a:spcPts val="0"/>
+              </a:spcBef>
               <a:spcAft>
-                <a:spcPts val="200"/>
+                <a:spcPts val="0"/>
               </a:spcAft>
             </a:pPr>
             <a:r>
-              <a:rPr sz="1250" b="1">
-                <a:solidFill>
-                  <a:srgbClr val="1F4E79"/>
-                </a:solidFill>
-              </a:rPr>
-              <a:t>WHAT WE BUILT</a:t>
-            </a:r>
-          </a:p>
-          <a:p>
-            <a:pPr>
+              <a:rPr sz="880" b="1" i="0">
+                <a:solidFill>
+                  <a:srgbClr val="12161C"/>
+                </a:solidFill>
+                <a:latin typeface="Segoe UI"/>
+              </a:rPr>
+              <a:t>Amit</a:t>
+            </a:r>
+          </a:p>
+          <a:p>
+            <a:pPr algn="l">
+              <a:lnSpc>
+                <a:spcPct val="100000"/>
+              </a:lnSpc>
+              <a:spcBef>
+                <a:spcPts val="0"/>
+              </a:spcBef>
               <a:spcAft>
-                <a:spcPts val="200"/>
+                <a:spcPts val="100"/>
               </a:spcAft>
             </a:pPr>
             <a:r>
-              <a:rPr sz="1100" b="0">
-                <a:solidFill>
-                  <a:srgbClr val="404040"/>
-                </a:solidFill>
-              </a:rPr>
-              <a:t>• Reproduced PENCIL on one free T4: test MRR 44.0 (paper: 42.2).</a:t>
-            </a:r>
-          </a:p>
-          <a:p>
-            <a:pPr>
+              <a:rPr sz="850" b="0" i="0">
+                <a:solidFill>
+                  <a:srgbClr val="333B45"/>
+                </a:solidFill>
+                <a:latin typeface="Segoe UI"/>
+              </a:rPr>
+              <a:t>Kumar</a:t>
+            </a:r>
+          </a:p>
+          <a:p>
+            <a:pPr algn="l">
+              <a:lnSpc>
+                <a:spcPct val="100000"/>
+              </a:lnSpc>
+              <a:spcBef>
+                <a:spcPts val="0"/>
+              </a:spcBef>
               <a:spcAft>
-                <a:spcPts val="200"/>
+                <a:spcPts val="0"/>
               </a:spcAft>
             </a:pPr>
             <a:r>
-              <a:rPr sz="1100" b="0">
-                <a:solidFill>
-                  <a:srgbClr val="404040"/>
-                </a:solidFill>
-              </a:rPr>
-              <a:t>• Retrieve-then-rerank: Adamic–Adar (AA) ranks every candidate; PENCIL re-scores only the top k.</a:t>
-            </a:r>
-          </a:p>
-          <a:p>
-            <a:pPr>
+              <a:rPr sz="750" b="0" i="0">
+                <a:solidFill>
+                  <a:srgbClr val="6E7781"/>
+                </a:solidFill>
+                <a:latin typeface="Consolas"/>
+              </a:rPr>
+              <a:t>DA4022</a:t>
+            </a:r>
+          </a:p>
+        </p:txBody>
+      </p:sp>
+      <p:sp>
+        <p:nvSpPr>
+          <p:cNvPr id="7" name="Rectangle 6"/>
+          <p:cNvSpPr/>
+          <p:nvPr/>
+        </p:nvSpPr>
+        <p:spPr>
+          <a:xfrm>
+            <a:off x="8247888" y="201168"/>
+            <a:ext cx="9144" cy="438912"/>
+          </a:xfrm>
+          <a:prstGeom prst="rect">
+            <a:avLst/>
+          </a:prstGeom>
+          <a:solidFill>
+            <a:srgbClr val="DCE1E7"/>
+          </a:solidFill>
+          <a:ln>
+            <a:noFill/>
+          </a:ln>
+        </p:spPr>
+        <p:style>
+          <a:lnRef idx="1">
+            <a:schemeClr val="accent1"/>
+          </a:lnRef>
+          <a:fillRef idx="3">
+            <a:schemeClr val="accent1"/>
+          </a:fillRef>
+          <a:effectRef idx="2">
+            <a:schemeClr val="accent1"/>
+          </a:effectRef>
+          <a:fontRef idx="minor">
+            <a:schemeClr val="lt1"/>
+          </a:fontRef>
+        </p:style>
+        <p:txBody>
+          <a:bodyPr rtlCol="0" anchor="ctr"/>
+          <a:lstStyle/>
+          <a:p>
+            <a:pPr algn="ctr"/>
+          </a:p>
+        </p:txBody>
+      </p:sp>
+      <p:sp>
+        <p:nvSpPr>
+          <p:cNvPr id="8" name="TextBox 7"/>
+          <p:cNvSpPr txBox="1"/>
+          <p:nvPr/>
+        </p:nvSpPr>
+        <p:spPr>
+          <a:xfrm>
+            <a:off x="8284464" y="173736"/>
+            <a:ext cx="877824" cy="493776"/>
+          </a:xfrm>
+          <a:prstGeom prst="rect">
+            <a:avLst/>
+          </a:prstGeom>
+          <a:noFill/>
+        </p:spPr>
+        <p:txBody>
+          <a:bodyPr wrap="square" lIns="0" rIns="0" tIns="0" bIns="0">
+            <a:spAutoFit/>
+          </a:bodyPr>
+          <a:lstStyle/>
+          <a:p>
+            <a:pPr algn="l">
+              <a:lnSpc>
+                <a:spcPct val="100000"/>
+              </a:lnSpc>
+              <a:spcBef>
+                <a:spcPts val="0"/>
+              </a:spcBef>
               <a:spcAft>
-                <a:spcPts val="200"/>
+                <a:spcPts val="0"/>
               </a:spcAft>
             </a:pPr>
             <a:r>
-              <a:rPr sz="1100" b="0">
-                <a:solidFill>
-                  <a:srgbClr val="404040"/>
-                </a:solidFill>
-              </a:rPr>
-              <a:t>• Two inference knobs, no retraining: k = how many re-ranked; s = sampling budget per candidate (hops × neighbours).</a:t>
-            </a:r>
-          </a:p>
-          <a:p>
-            <a:pPr>
+              <a:rPr sz="880" b="1" i="0">
+                <a:solidFill>
+                  <a:srgbClr val="12161C"/>
+                </a:solidFill>
+                <a:latin typeface="Segoe UI"/>
+              </a:rPr>
+              <a:t>Ashmit</a:t>
+            </a:r>
+          </a:p>
+          <a:p>
+            <a:pPr algn="l">
+              <a:lnSpc>
+                <a:spcPct val="100000"/>
+              </a:lnSpc>
+              <a:spcBef>
+                <a:spcPts val="0"/>
+              </a:spcBef>
               <a:spcAft>
-                <a:spcPts val="200"/>
+                <a:spcPts val="100"/>
               </a:spcAft>
             </a:pPr>
             <a:r>
-              <a:rPr sz="1100" b="0">
-                <a:solidFill>
-                  <a:srgbClr val="404040"/>
-                </a:solidFill>
-              </a:rPr>
-              <a:t>• Cora: 6 settings of s × 3 seeds × 12 values of k. Cost = measured T4 forward time.</a:t>
-            </a:r>
-          </a:p>
-          <a:p>
-            <a:pPr>
+              <a:rPr sz="850" b="0" i="0">
+                <a:solidFill>
+                  <a:srgbClr val="333B45"/>
+                </a:solidFill>
+                <a:latin typeface="Segoe UI"/>
+              </a:rPr>
+              <a:t>Satpute</a:t>
+            </a:r>
+          </a:p>
+          <a:p>
+            <a:pPr algn="l">
+              <a:lnSpc>
+                <a:spcPct val="100000"/>
+              </a:lnSpc>
+              <a:spcBef>
+                <a:spcPts val="0"/>
+              </a:spcBef>
               <a:spcAft>
-                <a:spcPts val="200"/>
+                <a:spcPts val="0"/>
               </a:spcAft>
             </a:pPr>
             <a:r>
-              <a:rPr sz="1100" b="0">
-                <a:solidFill>
-                  <a:srgbClr val="404040"/>
-                </a:solidFill>
-              </a:rPr>
-              <a:t>• Checks: our AA/CN reproduce the HeaRT benchmark exactly (31.87 / 20.99); our metric matches the repo evaluator (Δ &lt; 10⁻⁷).</a:t>
-            </a:r>
-          </a:p>
-          <a:p>
-            <a:pPr>
+              <a:rPr sz="750" b="0" i="0">
+                <a:solidFill>
+                  <a:srgbClr val="6E7781"/>
+                </a:solidFill>
+                <a:latin typeface="Consolas"/>
+              </a:rPr>
+              <a:t>DA4022</a:t>
+            </a:r>
+          </a:p>
+        </p:txBody>
+      </p:sp>
+      <p:sp>
+        <p:nvSpPr>
+          <p:cNvPr id="9" name="Rectangle 8"/>
+          <p:cNvSpPr/>
+          <p:nvPr/>
+        </p:nvSpPr>
+        <p:spPr>
+          <a:xfrm>
+            <a:off x="9171432" y="201168"/>
+            <a:ext cx="9144" cy="438912"/>
+          </a:xfrm>
+          <a:prstGeom prst="rect">
+            <a:avLst/>
+          </a:prstGeom>
+          <a:solidFill>
+            <a:srgbClr val="DCE1E7"/>
+          </a:solidFill>
+          <a:ln>
+            <a:noFill/>
+          </a:ln>
+        </p:spPr>
+        <p:style>
+          <a:lnRef idx="1">
+            <a:schemeClr val="accent1"/>
+          </a:lnRef>
+          <a:fillRef idx="3">
+            <a:schemeClr val="accent1"/>
+          </a:fillRef>
+          <a:effectRef idx="2">
+            <a:schemeClr val="accent1"/>
+          </a:effectRef>
+          <a:fontRef idx="minor">
+            <a:schemeClr val="lt1"/>
+          </a:fontRef>
+        </p:style>
+        <p:txBody>
+          <a:bodyPr rtlCol="0" anchor="ctr"/>
+          <a:lstStyle/>
+          <a:p>
+            <a:pPr algn="ctr"/>
+          </a:p>
+        </p:txBody>
+      </p:sp>
+      <p:sp>
+        <p:nvSpPr>
+          <p:cNvPr id="10" name="TextBox 9"/>
+          <p:cNvSpPr txBox="1"/>
+          <p:nvPr/>
+        </p:nvSpPr>
+        <p:spPr>
+          <a:xfrm>
+            <a:off x="9208008" y="173736"/>
+            <a:ext cx="877824" cy="493776"/>
+          </a:xfrm>
+          <a:prstGeom prst="rect">
+            <a:avLst/>
+          </a:prstGeom>
+          <a:noFill/>
+        </p:spPr>
+        <p:txBody>
+          <a:bodyPr wrap="square" lIns="0" rIns="0" tIns="0" bIns="0">
+            <a:spAutoFit/>
+          </a:bodyPr>
+          <a:lstStyle/>
+          <a:p>
+            <a:pPr algn="l">
+              <a:lnSpc>
+                <a:spcPct val="100000"/>
+              </a:lnSpc>
+              <a:spcBef>
+                <a:spcPts val="0"/>
+              </a:spcBef>
               <a:spcAft>
-                <a:spcPts val="200"/>
+                <a:spcPts val="0"/>
               </a:spcAft>
             </a:pPr>
             <a:r>
-              <a:rPr sz="400" b="0">
-                <a:solidFill>
-                  <a:srgbClr val="404040"/>
-                </a:solidFill>
-              </a:rPr>
-              <a:t/>
-            </a:r>
-          </a:p>
-          <a:p>
-            <a:pPr>
+              <a:rPr sz="880" b="1" i="0">
+                <a:solidFill>
+                  <a:srgbClr val="12161C"/>
+                </a:solidFill>
+                <a:latin typeface="Segoe UI"/>
+              </a:rPr>
+              <a:t>Arnav</a:t>
+            </a:r>
+          </a:p>
+          <a:p>
+            <a:pPr algn="l">
+              <a:lnSpc>
+                <a:spcPct val="100000"/>
+              </a:lnSpc>
+              <a:spcBef>
+                <a:spcPts val="0"/>
+              </a:spcBef>
               <a:spcAft>
-                <a:spcPts val="200"/>
+                <a:spcPts val="100"/>
               </a:spcAft>
             </a:pPr>
             <a:r>
-              <a:rPr sz="1250" b="1">
-                <a:solidFill>
-                  <a:srgbClr val="1F4E79"/>
-                </a:solidFill>
-              </a:rPr>
-              <a:t>FINDINGS SO FAR</a:t>
-            </a:r>
-          </a:p>
-          <a:p>
-            <a:pPr>
+              <a:rPr sz="850" b="0" i="0">
+                <a:solidFill>
+                  <a:srgbClr val="333B45"/>
+                </a:solidFill>
+                <a:latin typeface="Segoe UI"/>
+              </a:rPr>
+              <a:t>Kshirsagar</a:t>
+            </a:r>
+          </a:p>
+          <a:p>
+            <a:pPr algn="l">
+              <a:lnSpc>
+                <a:spcPct val="100000"/>
+              </a:lnSpc>
+              <a:spcBef>
+                <a:spcPts val="0"/>
+              </a:spcBef>
               <a:spcAft>
-                <a:spcPts val="200"/>
+                <a:spcPts val="0"/>
               </a:spcAft>
             </a:pPr>
             <a:r>
-              <a:rPr sz="1100" b="1">
-                <a:solidFill>
-                  <a:srgbClr val="404040"/>
-                </a:solidFill>
-              </a:rPr>
-              <a:t>• Cheap regime: </a:t>
-            </a:r>
-            <a:r>
-              <a:rPr sz="1100" b="0">
-                <a:solidFill>
-                  <a:srgbClr val="404040"/>
-                </a:solidFill>
-              </a:rPr>
-              <a:t>re-ranking AA's top 20% at s = 2×5 costs 7% of full PENCIL and adds +5 MRR over AA on both splits.</a:t>
-            </a:r>
-          </a:p>
-          <a:p>
-            <a:pPr>
+              <a:rPr sz="750" b="0" i="0">
+                <a:solidFill>
+                  <a:srgbClr val="6E7781"/>
+                </a:solidFill>
+                <a:latin typeface="Consolas"/>
+              </a:rPr>
+              <a:t>DA4022</a:t>
+            </a:r>
+          </a:p>
+        </p:txBody>
+      </p:sp>
+      <p:sp>
+        <p:nvSpPr>
+          <p:cNvPr id="11" name="Rectangle 10"/>
+          <p:cNvSpPr/>
+          <p:nvPr/>
+        </p:nvSpPr>
+        <p:spPr>
+          <a:xfrm>
+            <a:off x="10094976" y="201168"/>
+            <a:ext cx="9144" cy="438912"/>
+          </a:xfrm>
+          <a:prstGeom prst="rect">
+            <a:avLst/>
+          </a:prstGeom>
+          <a:solidFill>
+            <a:srgbClr val="DCE1E7"/>
+          </a:solidFill>
+          <a:ln>
+            <a:noFill/>
+          </a:ln>
+        </p:spPr>
+        <p:style>
+          <a:lnRef idx="1">
+            <a:schemeClr val="accent1"/>
+          </a:lnRef>
+          <a:fillRef idx="3">
+            <a:schemeClr val="accent1"/>
+          </a:fillRef>
+          <a:effectRef idx="2">
+            <a:schemeClr val="accent1"/>
+          </a:effectRef>
+          <a:fontRef idx="minor">
+            <a:schemeClr val="lt1"/>
+          </a:fontRef>
+        </p:style>
+        <p:txBody>
+          <a:bodyPr rtlCol="0" anchor="ctr"/>
+          <a:lstStyle/>
+          <a:p>
+            <a:pPr algn="ctr"/>
+          </a:p>
+        </p:txBody>
+      </p:sp>
+      <p:sp>
+        <p:nvSpPr>
+          <p:cNvPr id="12" name="TextBox 11"/>
+          <p:cNvSpPr txBox="1"/>
+          <p:nvPr/>
+        </p:nvSpPr>
+        <p:spPr>
+          <a:xfrm>
+            <a:off x="10131552" y="173736"/>
+            <a:ext cx="877824" cy="493776"/>
+          </a:xfrm>
+          <a:prstGeom prst="rect">
+            <a:avLst/>
+          </a:prstGeom>
+          <a:noFill/>
+        </p:spPr>
+        <p:txBody>
+          <a:bodyPr wrap="square" lIns="0" rIns="0" tIns="0" bIns="0">
+            <a:spAutoFit/>
+          </a:bodyPr>
+          <a:lstStyle/>
+          <a:p>
+            <a:pPr algn="l">
+              <a:lnSpc>
+                <a:spcPct val="100000"/>
+              </a:lnSpc>
+              <a:spcBef>
+                <a:spcPts val="0"/>
+              </a:spcBef>
               <a:spcAft>
-                <a:spcPts val="200"/>
+                <a:spcPts val="0"/>
               </a:spcAft>
             </a:pPr>
             <a:r>
-              <a:rPr sz="1100" b="1">
-                <a:solidFill>
-                  <a:srgbClr val="404040"/>
-                </a:solidFill>
-              </a:rPr>
-              <a:t>• Halving s is free: </a:t>
-            </a:r>
-            <a:r>
-              <a:rPr sz="1100" b="0">
-                <a:solidFill>
-                  <a:srgbClr val="404040"/>
-                </a:solidFill>
-              </a:rPr>
-              <a:t>s = 2×10 matches full PENCIL on test and validation at 67% of the compute. s = 2×5 is cheaper but unstable (seed std up to 4.1).</a:t>
-            </a:r>
-          </a:p>
-          <a:p>
-            <a:pPr>
+              <a:rPr sz="880" b="1" i="0">
+                <a:solidFill>
+                  <a:srgbClr val="12161C"/>
+                </a:solidFill>
+                <a:latin typeface="Segoe UI"/>
+              </a:rPr>
+              <a:t>Pranav</a:t>
+            </a:r>
+          </a:p>
+          <a:p>
+            <a:pPr algn="l">
+              <a:lnSpc>
+                <a:spcPct val="100000"/>
+              </a:lnSpc>
+              <a:spcBef>
+                <a:spcPts val="0"/>
+              </a:spcBef>
               <a:spcAft>
-                <a:spcPts val="200"/>
+                <a:spcPts val="100"/>
               </a:spcAft>
             </a:pPr>
             <a:r>
-              <a:rPr sz="1100" b="1">
-                <a:solidFill>
-                  <a:srgbClr val="404040"/>
-                </a:solidFill>
-              </a:rPr>
-              <a:t>• Re-ranking the top 10% does nothing: </a:t>
-            </a:r>
-            <a:r>
-              <a:rPr sz="1100" b="0">
-                <a:solidFill>
-                  <a:srgbClr val="404040"/>
-                </a:solidFill>
-              </a:rPr>
-              <a:t>AA's top picks are already true links. PENCIL earns its cost only where AA is blind: 57% of true test links share no neighbour.</a:t>
-            </a:r>
-          </a:p>
-          <a:p>
-            <a:pPr>
+              <a:rPr sz="850" b="0" i="0">
+                <a:solidFill>
+                  <a:srgbClr val="333B45"/>
+                </a:solidFill>
+                <a:latin typeface="Segoe UI"/>
+              </a:rPr>
+              <a:t>Shalya</a:t>
+            </a:r>
+          </a:p>
+          <a:p>
+            <a:pPr algn="l">
+              <a:lnSpc>
+                <a:spcPct val="100000"/>
+              </a:lnSpc>
+              <a:spcBef>
+                <a:spcPts val="0"/>
+              </a:spcBef>
               <a:spcAft>
-                <a:spcPts val="200"/>
+                <a:spcPts val="0"/>
               </a:spcAft>
             </a:pPr>
             <a:r>
-              <a:rPr sz="1100" b="1">
-                <a:solidFill>
-                  <a:srgbClr val="404040"/>
-                </a:solidFill>
-              </a:rPr>
-              <a:t>• k and s interact: </a:t>
-            </a:r>
-            <a:r>
-              <a:rPr sz="1100" b="0">
-                <a:solidFill>
-                  <a:srgbClr val="404040"/>
-                </a:solidFill>
-              </a:rPr>
-              <a:t>a weak re-ranker (1 hop) peaks at k = 20% and then hurts (35 → 20 MRR); the full one keeps improving.</a:t>
-            </a:r>
-          </a:p>
-          <a:p>
-            <a:pPr>
+              <a:rPr sz="750" b="0" i="0">
+                <a:solidFill>
+                  <a:srgbClr val="6E7781"/>
+                </a:solidFill>
+                <a:latin typeface="Consolas"/>
+              </a:rPr>
+              <a:t>DA4022</a:t>
+            </a:r>
+          </a:p>
+        </p:txBody>
+      </p:sp>
+      <p:sp>
+        <p:nvSpPr>
+          <p:cNvPr id="13" name="Rectangle 12"/>
+          <p:cNvSpPr/>
+          <p:nvPr/>
+        </p:nvSpPr>
+        <p:spPr>
+          <a:xfrm>
+            <a:off x="11018520" y="201168"/>
+            <a:ext cx="9144" cy="438912"/>
+          </a:xfrm>
+          <a:prstGeom prst="rect">
+            <a:avLst/>
+          </a:prstGeom>
+          <a:solidFill>
+            <a:srgbClr val="DCE1E7"/>
+          </a:solidFill>
+          <a:ln>
+            <a:noFill/>
+          </a:ln>
+        </p:spPr>
+        <p:style>
+          <a:lnRef idx="1">
+            <a:schemeClr val="accent1"/>
+          </a:lnRef>
+          <a:fillRef idx="3">
+            <a:schemeClr val="accent1"/>
+          </a:fillRef>
+          <a:effectRef idx="2">
+            <a:schemeClr val="accent1"/>
+          </a:effectRef>
+          <a:fontRef idx="minor">
+            <a:schemeClr val="lt1"/>
+          </a:fontRef>
+        </p:style>
+        <p:txBody>
+          <a:bodyPr rtlCol="0" anchor="ctr"/>
+          <a:lstStyle/>
+          <a:p>
+            <a:pPr algn="ctr"/>
+          </a:p>
+        </p:txBody>
+      </p:sp>
+      <p:sp>
+        <p:nvSpPr>
+          <p:cNvPr id="14" name="TextBox 13"/>
+          <p:cNvSpPr txBox="1"/>
+          <p:nvPr/>
+        </p:nvSpPr>
+        <p:spPr>
+          <a:xfrm>
+            <a:off x="11055096" y="173736"/>
+            <a:ext cx="877824" cy="493776"/>
+          </a:xfrm>
+          <a:prstGeom prst="rect">
+            <a:avLst/>
+          </a:prstGeom>
+          <a:noFill/>
+        </p:spPr>
+        <p:txBody>
+          <a:bodyPr wrap="square" lIns="0" rIns="0" tIns="0" bIns="0">
+            <a:spAutoFit/>
+          </a:bodyPr>
+          <a:lstStyle/>
+          <a:p>
+            <a:pPr algn="l">
+              <a:lnSpc>
+                <a:spcPct val="100000"/>
+              </a:lnSpc>
+              <a:spcBef>
+                <a:spcPts val="0"/>
+              </a:spcBef>
               <a:spcAft>
-                <a:spcPts val="200"/>
+                <a:spcPts val="0"/>
               </a:spcAft>
             </a:pPr>
             <a:r>
-              <a:rPr sz="400" b="0">
-                <a:solidFill>
-                  <a:srgbClr val="404040"/>
-                </a:solidFill>
-              </a:rPr>
-              <a:t/>
-            </a:r>
-          </a:p>
-          <a:p>
-            <a:pPr>
+              <a:rPr sz="880" b="1" i="0">
+                <a:solidFill>
+                  <a:srgbClr val="12161C"/>
+                </a:solidFill>
+                <a:latin typeface="Segoe UI"/>
+              </a:rPr>
+              <a:t>Atharv</a:t>
+            </a:r>
+          </a:p>
+          <a:p>
+            <a:pPr algn="l">
+              <a:lnSpc>
+                <a:spcPct val="100000"/>
+              </a:lnSpc>
+              <a:spcBef>
+                <a:spcPts val="0"/>
+              </a:spcBef>
               <a:spcAft>
-                <a:spcPts val="200"/>
+                <a:spcPts val="100"/>
               </a:spcAft>
             </a:pPr>
             <a:r>
-              <a:rPr sz="1250" b="1">
-                <a:solidFill>
-                  <a:srgbClr val="1F4E79"/>
-                </a:solidFill>
-              </a:rPr>
-              <a:t>NEXT (→ Nov 26)</a:t>
-            </a:r>
-          </a:p>
-          <a:p>
-            <a:pPr>
+              <a:rPr sz="850" b="0" i="0">
+                <a:solidFill>
+                  <a:srgbClr val="333B45"/>
+                </a:solidFill>
+                <a:latin typeface="Segoe UI"/>
+              </a:rPr>
+              <a:t>Wankhede</a:t>
+            </a:r>
+          </a:p>
+          <a:p>
+            <a:pPr algn="l">
+              <a:lnSpc>
+                <a:spcPct val="100000"/>
+              </a:lnSpc>
+              <a:spcBef>
+                <a:spcPts val="0"/>
+              </a:spcBef>
               <a:spcAft>
-                <a:spcPts val="200"/>
+                <a:spcPts val="0"/>
               </a:spcAft>
             </a:pPr>
             <a:r>
-              <a:rPr sz="1100" b="0">
-                <a:solidFill>
-                  <a:srgbClr val="404040"/>
-                </a:solidFill>
-              </a:rPr>
-              <a:t>• citeseer + ogbl-collab, and HeaRT per-query hard negatives.</a:t>
-            </a:r>
-          </a:p>
-          <a:p>
-            <a:pPr>
+              <a:rPr sz="750" b="0" i="0">
+                <a:solidFill>
+                  <a:srgbClr val="6E7781"/>
+                </a:solidFill>
+                <a:latin typeface="Consolas"/>
+              </a:rPr>
+              <a:t>DA4022</a:t>
+            </a:r>
+          </a:p>
+        </p:txBody>
+      </p:sp>
+      <p:sp>
+        <p:nvSpPr>
+          <p:cNvPr id="15" name="Rectangle 14"/>
+          <p:cNvSpPr/>
+          <p:nvPr/>
+        </p:nvSpPr>
+        <p:spPr>
+          <a:xfrm>
+            <a:off x="310896" y="731520"/>
+            <a:ext cx="713232" cy="34747"/>
+          </a:xfrm>
+          <a:prstGeom prst="rect">
+            <a:avLst/>
+          </a:prstGeom>
+          <a:solidFill>
+            <a:srgbClr val="9D1B32"/>
+          </a:solidFill>
+          <a:ln>
+            <a:noFill/>
+          </a:ln>
+        </p:spPr>
+        <p:style>
+          <a:lnRef idx="1">
+            <a:schemeClr val="accent1"/>
+          </a:lnRef>
+          <a:fillRef idx="3">
+            <a:schemeClr val="accent1"/>
+          </a:fillRef>
+          <a:effectRef idx="2">
+            <a:schemeClr val="accent1"/>
+          </a:effectRef>
+          <a:fontRef idx="minor">
+            <a:schemeClr val="lt1"/>
+          </a:fontRef>
+        </p:style>
+        <p:txBody>
+          <a:bodyPr rtlCol="0" anchor="ctr"/>
+          <a:lstStyle/>
+          <a:p>
+            <a:pPr algn="ctr"/>
+          </a:p>
+        </p:txBody>
+      </p:sp>
+      <p:sp>
+        <p:nvSpPr>
+          <p:cNvPr id="16" name="Rectangle 15"/>
+          <p:cNvSpPr/>
+          <p:nvPr/>
+        </p:nvSpPr>
+        <p:spPr>
+          <a:xfrm>
+            <a:off x="1060704" y="747979"/>
+            <a:ext cx="10899648" cy="10972"/>
+          </a:xfrm>
+          <a:prstGeom prst="rect">
+            <a:avLst/>
+          </a:prstGeom>
+          <a:solidFill>
+            <a:srgbClr val="DCE1E7"/>
+          </a:solidFill>
+          <a:ln>
+            <a:noFill/>
+          </a:ln>
+        </p:spPr>
+        <p:style>
+          <a:lnRef idx="1">
+            <a:schemeClr val="accent1"/>
+          </a:lnRef>
+          <a:fillRef idx="3">
+            <a:schemeClr val="accent1"/>
+          </a:fillRef>
+          <a:effectRef idx="2">
+            <a:schemeClr val="accent1"/>
+          </a:effectRef>
+          <a:fontRef idx="minor">
+            <a:schemeClr val="lt1"/>
+          </a:fontRef>
+        </p:style>
+        <p:txBody>
+          <a:bodyPr rtlCol="0" anchor="ctr"/>
+          <a:lstStyle/>
+          <a:p>
+            <a:pPr algn="ctr"/>
+          </a:p>
+        </p:txBody>
+      </p:sp>
+      <p:sp>
+        <p:nvSpPr>
+          <p:cNvPr id="17" name="TextBox 16"/>
+          <p:cNvSpPr txBox="1"/>
+          <p:nvPr/>
+        </p:nvSpPr>
+        <p:spPr>
+          <a:xfrm>
+            <a:off x="310896" y="822960"/>
+            <a:ext cx="3913632" cy="182880"/>
+          </a:xfrm>
+          <a:prstGeom prst="rect">
+            <a:avLst/>
+          </a:prstGeom>
+          <a:noFill/>
+        </p:spPr>
+        <p:txBody>
+          <a:bodyPr wrap="square" lIns="0" rIns="0" tIns="0" bIns="0">
+            <a:spAutoFit/>
+          </a:bodyPr>
+          <a:lstStyle/>
+          <a:p>
+            <a:pPr algn="l">
+              <a:lnSpc>
+                <a:spcPct val="108000"/>
+              </a:lnSpc>
+              <a:spcBef>
+                <a:spcPts val="0"/>
+              </a:spcBef>
               <a:spcAft>
-                <a:spcPts val="200"/>
+                <a:spcPts val="0"/>
               </a:spcAft>
             </a:pPr>
             <a:r>
-              <a:rPr sz="1100" b="0">
-                <a:solidFill>
-                  <a:srgbClr val="404040"/>
-                </a:solidFill>
-              </a:rPr>
-              <a:t>• Fit a (k, s) rule on validation; test it on a graph it never saw.</a:t>
-            </a:r>
-          </a:p>
-          <a:p>
-            <a:pPr>
+              <a:rPr sz="830" b="1" i="0">
+                <a:solidFill>
+                  <a:srgbClr val="9D1B32"/>
+                </a:solidFill>
+                <a:latin typeface="Segoe UI"/>
+              </a:rPr>
+              <a:t>I.  TWO-STAGE RETRIEVE-THEN-RERANK PIPELINE</a:t>
+            </a:r>
+          </a:p>
+        </p:txBody>
+      </p:sp>
+      <p:sp>
+        <p:nvSpPr>
+          <p:cNvPr id="18" name="Rectangle 17"/>
+          <p:cNvSpPr/>
+          <p:nvPr/>
+        </p:nvSpPr>
+        <p:spPr>
+          <a:xfrm>
+            <a:off x="310896" y="1014984"/>
+            <a:ext cx="3913632" cy="1024128"/>
+          </a:xfrm>
+          <a:prstGeom prst="rect">
+            <a:avLst/>
+          </a:prstGeom>
+          <a:solidFill>
+            <a:srgbClr val="FFFFFF"/>
+          </a:solidFill>
+          <a:ln w="10160">
+            <a:solidFill>
+              <a:srgbClr val="DCE1E7"/>
+            </a:solidFill>
+          </a:ln>
+        </p:spPr>
+        <p:style>
+          <a:lnRef idx="1">
+            <a:schemeClr val="accent1"/>
+          </a:lnRef>
+          <a:fillRef idx="3">
+            <a:schemeClr val="accent1"/>
+          </a:fillRef>
+          <a:effectRef idx="2">
+            <a:schemeClr val="accent1"/>
+          </a:effectRef>
+          <a:fontRef idx="minor">
+            <a:schemeClr val="lt1"/>
+          </a:fontRef>
+        </p:style>
+        <p:txBody>
+          <a:bodyPr rtlCol="0" anchor="ctr"/>
+          <a:lstStyle/>
+          <a:p>
+            <a:pPr algn="ctr"/>
+          </a:p>
+        </p:txBody>
+      </p:sp>
+      <p:sp>
+        <p:nvSpPr>
+          <p:cNvPr id="19" name="Rectangle 18"/>
+          <p:cNvSpPr/>
+          <p:nvPr/>
+        </p:nvSpPr>
+        <p:spPr>
+          <a:xfrm>
+            <a:off x="310896" y="1014984"/>
+            <a:ext cx="41148" cy="1024128"/>
+          </a:xfrm>
+          <a:prstGeom prst="rect">
+            <a:avLst/>
+          </a:prstGeom>
+          <a:solidFill>
+            <a:srgbClr val="1F3A5F"/>
+          </a:solidFill>
+          <a:ln>
+            <a:noFill/>
+          </a:ln>
+        </p:spPr>
+        <p:style>
+          <a:lnRef idx="1">
+            <a:schemeClr val="accent1"/>
+          </a:lnRef>
+          <a:fillRef idx="3">
+            <a:schemeClr val="accent1"/>
+          </a:fillRef>
+          <a:effectRef idx="2">
+            <a:schemeClr val="accent1"/>
+          </a:effectRef>
+          <a:fontRef idx="minor">
+            <a:schemeClr val="lt1"/>
+          </a:fontRef>
+        </p:style>
+        <p:txBody>
+          <a:bodyPr rtlCol="0" anchor="ctr"/>
+          <a:lstStyle/>
+          <a:p>
+            <a:pPr algn="ctr"/>
+          </a:p>
+        </p:txBody>
+      </p:sp>
+      <p:sp>
+        <p:nvSpPr>
+          <p:cNvPr id="20" name="Rounded Rectangle 19"/>
+          <p:cNvSpPr/>
+          <p:nvPr/>
+        </p:nvSpPr>
+        <p:spPr>
+          <a:xfrm>
+            <a:off x="420624" y="1097280"/>
+            <a:ext cx="969264" cy="493776"/>
+          </a:xfrm>
+          <a:prstGeom prst="roundRect">
+            <a:avLst>
+              <a:gd name="adj" fmla="val 8000"/>
+            </a:avLst>
+          </a:prstGeom>
+          <a:solidFill>
+            <a:srgbClr val="F0F3F6"/>
+          </a:solidFill>
+          <a:ln w="9525">
+            <a:solidFill>
+              <a:srgbClr val="DCE1E7"/>
+            </a:solidFill>
+          </a:ln>
+        </p:spPr>
+        <p:style>
+          <a:lnRef idx="1">
+            <a:schemeClr val="accent1"/>
+          </a:lnRef>
+          <a:fillRef idx="3">
+            <a:schemeClr val="accent1"/>
+          </a:fillRef>
+          <a:effectRef idx="2">
+            <a:schemeClr val="accent1"/>
+          </a:effectRef>
+          <a:fontRef idx="minor">
+            <a:schemeClr val="lt1"/>
+          </a:fontRef>
+        </p:style>
+        <p:txBody>
+          <a:bodyPr rtlCol="0" anchor="ctr"/>
+          <a:lstStyle/>
+          <a:p>
+            <a:pPr algn="ctr"/>
+          </a:p>
+        </p:txBody>
+      </p:sp>
+      <p:sp>
+        <p:nvSpPr>
+          <p:cNvPr id="21" name="TextBox 20"/>
+          <p:cNvSpPr txBox="1"/>
+          <p:nvPr/>
+        </p:nvSpPr>
+        <p:spPr>
+          <a:xfrm>
+            <a:off x="438912" y="1124712"/>
+            <a:ext cx="932688" cy="438912"/>
+          </a:xfrm>
+          <a:prstGeom prst="rect">
+            <a:avLst/>
+          </a:prstGeom>
+          <a:noFill/>
+        </p:spPr>
+        <p:txBody>
+          <a:bodyPr wrap="square" lIns="0" rIns="0" tIns="0" bIns="0">
+            <a:spAutoFit/>
+          </a:bodyPr>
+          <a:lstStyle/>
+          <a:p>
+            <a:pPr algn="ctr">
+              <a:lnSpc>
+                <a:spcPct val="102000"/>
+              </a:lnSpc>
+              <a:spcBef>
+                <a:spcPts val="0"/>
+              </a:spcBef>
               <a:spcAft>
-                <a:spcPts val="200"/>
+                <a:spcPts val="0"/>
               </a:spcAft>
             </a:pPr>
             <a:r>
-              <a:rPr sz="1100" b="0">
-                <a:solidFill>
-                  <a:srgbClr val="404040"/>
-                </a:solidFill>
-              </a:rPr>
-              <a:t>• Proper latency and memory benchmark (repeats, batch size 1).</a:t>
-            </a:r>
-          </a:p>
-          <a:p>
-            <a:pPr>
+              <a:rPr sz="780" b="1" i="0">
+                <a:solidFill>
+                  <a:srgbClr val="12161C"/>
+                </a:solidFill>
+                <a:latin typeface="Segoe UI"/>
+              </a:rPr>
+              <a:t>Candidate Pool
+</a:t>
+            </a:r>
+            <a:r>
+              <a:rPr sz="660" b="0" i="0">
+                <a:solidFill>
+                  <a:srgbClr val="6E7781"/>
+                </a:solidFill>
+                <a:latin typeface="Segoe UI"/>
+              </a:rPr>
+              <a:t>N pairs (Pool) or
+501 / query (HeaRT)</a:t>
+            </a:r>
+          </a:p>
+        </p:txBody>
+      </p:sp>
+      <p:sp>
+        <p:nvSpPr>
+          <p:cNvPr id="22" name="TextBox 21"/>
+          <p:cNvSpPr txBox="1"/>
+          <p:nvPr/>
+        </p:nvSpPr>
+        <p:spPr>
+          <a:xfrm>
+            <a:off x="1399032" y="1216152"/>
+            <a:ext cx="192024" cy="228600"/>
+          </a:xfrm>
+          <a:prstGeom prst="rect">
+            <a:avLst/>
+          </a:prstGeom>
+          <a:noFill/>
+        </p:spPr>
+        <p:txBody>
+          <a:bodyPr wrap="square" lIns="0" rIns="0" tIns="0" bIns="0">
+            <a:spAutoFit/>
+          </a:bodyPr>
+          <a:lstStyle/>
+          <a:p>
+            <a:pPr algn="ctr">
+              <a:lnSpc>
+                <a:spcPct val="108000"/>
+              </a:lnSpc>
+              <a:spcBef>
+                <a:spcPts val="0"/>
+              </a:spcBef>
               <a:spcAft>
-                <a:spcPts val="200"/>
+                <a:spcPts val="0"/>
               </a:spcAft>
             </a:pPr>
             <a:r>
-              <a:rPr sz="1100" b="0">
-                <a:solidFill>
-                  <a:srgbClr val="404040"/>
-                </a:solidFill>
-              </a:rPr>
-              <a:t>• Training axis: 93% of final MRR is reached by epoch 42 of 150.</a:t>
-            </a:r>
+              <a:rPr sz="1150" b="1" i="0">
+                <a:solidFill>
+                  <a:srgbClr val="6E7781"/>
+                </a:solidFill>
+                <a:latin typeface="Segoe UI"/>
+              </a:rPr>
+              <a:t>→</a:t>
+            </a:r>
+          </a:p>
+        </p:txBody>
+      </p:sp>
+      <p:sp>
+        <p:nvSpPr>
+          <p:cNvPr id="23" name="Rounded Rectangle 22"/>
+          <p:cNvSpPr/>
+          <p:nvPr/>
+        </p:nvSpPr>
+        <p:spPr>
+          <a:xfrm>
+            <a:off x="1600200" y="1097280"/>
+            <a:ext cx="1133856" cy="493776"/>
+          </a:xfrm>
+          <a:prstGeom prst="roundRect">
+            <a:avLst>
+              <a:gd name="adj" fmla="val 8000"/>
+            </a:avLst>
+          </a:prstGeom>
+          <a:solidFill>
+            <a:srgbClr val="F5EFE4"/>
+          </a:solidFill>
+          <a:ln w="11430">
+            <a:solidFill>
+              <a:srgbClr val="B85D14"/>
+            </a:solidFill>
+          </a:ln>
+        </p:spPr>
+        <p:style>
+          <a:lnRef idx="1">
+            <a:schemeClr val="accent1"/>
+          </a:lnRef>
+          <a:fillRef idx="3">
+            <a:schemeClr val="accent1"/>
+          </a:fillRef>
+          <a:effectRef idx="2">
+            <a:schemeClr val="accent1"/>
+          </a:effectRef>
+          <a:fontRef idx="minor">
+            <a:schemeClr val="lt1"/>
+          </a:fontRef>
+        </p:style>
+        <p:txBody>
+          <a:bodyPr rtlCol="0" anchor="ctr"/>
+          <a:lstStyle/>
+          <a:p>
+            <a:pPr algn="ctr"/>
+          </a:p>
+        </p:txBody>
+      </p:sp>
+      <p:sp>
+        <p:nvSpPr>
+          <p:cNvPr id="24" name="TextBox 23"/>
+          <p:cNvSpPr txBox="1"/>
+          <p:nvPr/>
+        </p:nvSpPr>
+        <p:spPr>
+          <a:xfrm>
+            <a:off x="1618488" y="1124712"/>
+            <a:ext cx="1097280" cy="438912"/>
+          </a:xfrm>
+          <a:prstGeom prst="rect">
+            <a:avLst/>
+          </a:prstGeom>
+          <a:noFill/>
+        </p:spPr>
+        <p:txBody>
+          <a:bodyPr wrap="square" lIns="0" rIns="0" tIns="0" bIns="0">
+            <a:spAutoFit/>
+          </a:bodyPr>
+          <a:lstStyle/>
+          <a:p>
+            <a:pPr algn="ctr">
+              <a:lnSpc>
+                <a:spcPct val="102000"/>
+              </a:lnSpc>
+              <a:spcBef>
+                <a:spcPts val="0"/>
+              </a:spcBef>
+              <a:spcAft>
+                <a:spcPts val="0"/>
+              </a:spcAft>
+            </a:pPr>
+            <a:r>
+              <a:rPr sz="760" b="1" i="0">
+                <a:solidFill>
+                  <a:srgbClr val="B85D14"/>
+                </a:solidFill>
+                <a:latin typeface="Segoe UI"/>
+              </a:rPr>
+              <a:t>Stage 1 · Adamic–Adar
+</a:t>
+            </a:r>
+            <a:r>
+              <a:rPr sz="660" b="0" i="0">
+                <a:solidFill>
+                  <a:srgbClr val="333B45"/>
+                </a:solidFill>
+                <a:latin typeface="Segoe UI"/>
+              </a:rPr>
+              <a:t>CPU &lt;1 ms · 0% GPU
+ranks &amp; shortlists top k</a:t>
+            </a:r>
+          </a:p>
+        </p:txBody>
+      </p:sp>
+      <p:sp>
+        <p:nvSpPr>
+          <p:cNvPr id="25" name="TextBox 24"/>
+          <p:cNvSpPr txBox="1"/>
+          <p:nvPr/>
+        </p:nvSpPr>
+        <p:spPr>
+          <a:xfrm>
+            <a:off x="2743200" y="1216152"/>
+            <a:ext cx="192024" cy="228600"/>
+          </a:xfrm>
+          <a:prstGeom prst="rect">
+            <a:avLst/>
+          </a:prstGeom>
+          <a:noFill/>
+        </p:spPr>
+        <p:txBody>
+          <a:bodyPr wrap="square" lIns="0" rIns="0" tIns="0" bIns="0">
+            <a:spAutoFit/>
+          </a:bodyPr>
+          <a:lstStyle/>
+          <a:p>
+            <a:pPr algn="ctr">
+              <a:lnSpc>
+                <a:spcPct val="108000"/>
+              </a:lnSpc>
+              <a:spcBef>
+                <a:spcPts val="0"/>
+              </a:spcBef>
+              <a:spcAft>
+                <a:spcPts val="0"/>
+              </a:spcAft>
+            </a:pPr>
+            <a:r>
+              <a:rPr sz="1150" b="1" i="0">
+                <a:solidFill>
+                  <a:srgbClr val="9D1B32"/>
+                </a:solidFill>
+                <a:latin typeface="Segoe UI"/>
+              </a:rPr>
+              <a:t>→</a:t>
+            </a:r>
+          </a:p>
+        </p:txBody>
+      </p:sp>
+      <p:sp>
+        <p:nvSpPr>
+          <p:cNvPr id="26" name="Rounded Rectangle 25"/>
+          <p:cNvSpPr/>
+          <p:nvPr/>
+        </p:nvSpPr>
+        <p:spPr>
+          <a:xfrm>
+            <a:off x="2944368" y="1097280"/>
+            <a:ext cx="1188720" cy="493776"/>
+          </a:xfrm>
+          <a:prstGeom prst="roundRect">
+            <a:avLst>
+              <a:gd name="adj" fmla="val 8000"/>
+            </a:avLst>
+          </a:prstGeom>
+          <a:solidFill>
+            <a:srgbClr val="F0F3F6"/>
+          </a:solidFill>
+          <a:ln w="12700">
+            <a:solidFill>
+              <a:srgbClr val="1F3A5F"/>
+            </a:solidFill>
+          </a:ln>
+        </p:spPr>
+        <p:style>
+          <a:lnRef idx="1">
+            <a:schemeClr val="accent1"/>
+          </a:lnRef>
+          <a:fillRef idx="3">
+            <a:schemeClr val="accent1"/>
+          </a:fillRef>
+          <a:effectRef idx="2">
+            <a:schemeClr val="accent1"/>
+          </a:effectRef>
+          <a:fontRef idx="minor">
+            <a:schemeClr val="lt1"/>
+          </a:fontRef>
+        </p:style>
+        <p:txBody>
+          <a:bodyPr rtlCol="0" anchor="ctr"/>
+          <a:lstStyle/>
+          <a:p>
+            <a:pPr algn="ctr"/>
+          </a:p>
+        </p:txBody>
+      </p:sp>
+      <p:sp>
+        <p:nvSpPr>
+          <p:cNvPr id="27" name="TextBox 26"/>
+          <p:cNvSpPr txBox="1"/>
+          <p:nvPr/>
+        </p:nvSpPr>
+        <p:spPr>
+          <a:xfrm>
+            <a:off x="2962656" y="1124712"/>
+            <a:ext cx="1152144" cy="438912"/>
+          </a:xfrm>
+          <a:prstGeom prst="rect">
+            <a:avLst/>
+          </a:prstGeom>
+          <a:noFill/>
+        </p:spPr>
+        <p:txBody>
+          <a:bodyPr wrap="square" lIns="0" rIns="0" tIns="0" bIns="0">
+            <a:spAutoFit/>
+          </a:bodyPr>
+          <a:lstStyle/>
+          <a:p>
+            <a:pPr algn="ctr">
+              <a:lnSpc>
+                <a:spcPct val="102000"/>
+              </a:lnSpc>
+              <a:spcBef>
+                <a:spcPts val="0"/>
+              </a:spcBef>
+              <a:spcAft>
+                <a:spcPts val="0"/>
+              </a:spcAft>
+            </a:pPr>
+            <a:r>
+              <a:rPr sz="780" b="1" i="0">
+                <a:solidFill>
+                  <a:srgbClr val="1F3A5F"/>
+                </a:solidFill>
+                <a:latin typeface="Segoe UI"/>
+              </a:rPr>
+              <a:t>Stage 2 · PENCIL
+</a:t>
+            </a:r>
+            <a:r>
+              <a:rPr sz="660" b="0" i="0">
+                <a:solidFill>
+                  <a:srgbClr val="333B45"/>
+                </a:solidFill>
+                <a:latin typeface="Segoe UI"/>
+              </a:rPr>
+              <a:t>Transformer re-scores
+top k with budget s</a:t>
+            </a:r>
+          </a:p>
+        </p:txBody>
+      </p:sp>
+      <p:sp>
+        <p:nvSpPr>
+          <p:cNvPr id="28" name="Rectangle 27"/>
+          <p:cNvSpPr/>
+          <p:nvPr/>
+        </p:nvSpPr>
+        <p:spPr>
+          <a:xfrm>
+            <a:off x="420624" y="1655064"/>
+            <a:ext cx="3712463" cy="310896"/>
+          </a:xfrm>
+          <a:prstGeom prst="rect">
+            <a:avLst/>
+          </a:prstGeom>
+          <a:solidFill>
+            <a:srgbClr val="FAF8F5"/>
+          </a:solidFill>
+          <a:ln w="6350">
+            <a:solidFill>
+              <a:srgbClr val="DCE1E7"/>
+            </a:solidFill>
+          </a:ln>
+        </p:spPr>
+        <p:style>
+          <a:lnRef idx="1">
+            <a:schemeClr val="accent1"/>
+          </a:lnRef>
+          <a:fillRef idx="3">
+            <a:schemeClr val="accent1"/>
+          </a:fillRef>
+          <a:effectRef idx="2">
+            <a:schemeClr val="accent1"/>
+          </a:effectRef>
+          <a:fontRef idx="minor">
+            <a:schemeClr val="lt1"/>
+          </a:fontRef>
+        </p:style>
+        <p:txBody>
+          <a:bodyPr rtlCol="0" anchor="ctr"/>
+          <a:lstStyle/>
+          <a:p>
+            <a:pPr algn="ctr"/>
+          </a:p>
+        </p:txBody>
+      </p:sp>
+      <p:sp>
+        <p:nvSpPr>
+          <p:cNvPr id="29" name="TextBox 28"/>
+          <p:cNvSpPr txBox="1"/>
+          <p:nvPr/>
+        </p:nvSpPr>
+        <p:spPr>
+          <a:xfrm>
+            <a:off x="475488" y="1682496"/>
+            <a:ext cx="3621024" cy="256032"/>
+          </a:xfrm>
+          <a:prstGeom prst="rect">
+            <a:avLst/>
+          </a:prstGeom>
+          <a:noFill/>
+        </p:spPr>
+        <p:txBody>
+          <a:bodyPr wrap="square" lIns="0" rIns="0" tIns="0" bIns="0">
+            <a:spAutoFit/>
+          </a:bodyPr>
+          <a:lstStyle/>
+          <a:p>
+            <a:pPr algn="l">
+              <a:lnSpc>
+                <a:spcPct val="108000"/>
+              </a:lnSpc>
+              <a:spcBef>
+                <a:spcPts val="0"/>
+              </a:spcBef>
+              <a:spcAft>
+                <a:spcPts val="0"/>
+              </a:spcAft>
+            </a:pPr>
+            <a:r>
+              <a:rPr sz="720" b="1" i="0">
+                <a:solidFill>
+                  <a:srgbClr val="9D1B32"/>
+                </a:solidFill>
+                <a:latin typeface="Segoe UI"/>
+              </a:rPr>
+              <a:t>TWO INFERENCE KNOBS (NO RETRAINING):   </a:t>
+            </a:r>
+            <a:r>
+              <a:rPr sz="780" b="1" i="0">
+                <a:solidFill>
+                  <a:srgbClr val="12161C"/>
+                </a:solidFill>
+                <a:latin typeface="Consolas"/>
+              </a:rPr>
+              <a:t>k</a:t>
+            </a:r>
+            <a:r>
+              <a:rPr sz="720" b="0" i="0">
+                <a:solidFill>
+                  <a:srgbClr val="333B45"/>
+                </a:solidFill>
+                <a:latin typeface="Segoe UI"/>
+              </a:rPr>
+              <a:t> = shortlist re-ranked (0–100%)   ·   </a:t>
+            </a:r>
+            <a:r>
+              <a:rPr sz="780" b="1" i="0">
+                <a:solidFill>
+                  <a:srgbClr val="12161C"/>
+                </a:solidFill>
+                <a:latin typeface="Consolas"/>
+              </a:rPr>
+              <a:t>s</a:t>
+            </a:r>
+            <a:r>
+              <a:rPr sz="720" b="0" i="0">
+                <a:solidFill>
+                  <a:srgbClr val="333B45"/>
+                </a:solidFill>
+                <a:latin typeface="Segoe UI"/>
+              </a:rPr>
+              <a:t> = subgraph hops×fanout</a:t>
+            </a:r>
+          </a:p>
+        </p:txBody>
+      </p:sp>
+      <p:sp>
+        <p:nvSpPr>
+          <p:cNvPr id="30" name="TextBox 29"/>
+          <p:cNvSpPr txBox="1"/>
+          <p:nvPr/>
+        </p:nvSpPr>
+        <p:spPr>
+          <a:xfrm>
+            <a:off x="310896" y="2112264"/>
+            <a:ext cx="3913632" cy="182880"/>
+          </a:xfrm>
+          <a:prstGeom prst="rect">
+            <a:avLst/>
+          </a:prstGeom>
+          <a:noFill/>
+        </p:spPr>
+        <p:txBody>
+          <a:bodyPr wrap="square" lIns="0" rIns="0" tIns="0" bIns="0">
+            <a:spAutoFit/>
+          </a:bodyPr>
+          <a:lstStyle/>
+          <a:p>
+            <a:pPr algn="l">
+              <a:lnSpc>
+                <a:spcPct val="108000"/>
+              </a:lnSpc>
+              <a:spcBef>
+                <a:spcPts val="0"/>
+              </a:spcBef>
+              <a:spcAft>
+                <a:spcPts val="0"/>
+              </a:spcAft>
+            </a:pPr>
+            <a:r>
+              <a:rPr sz="830" b="1" i="0">
+                <a:solidFill>
+                  <a:srgbClr val="9D1B32"/>
+                </a:solidFill>
+                <a:latin typeface="Segoe UI"/>
+              </a:rPr>
+              <a:t>II.  FREE-GPU REPRODUCTION &amp; AUDIT (PAPER USED 4–8× A100)</a:t>
+            </a:r>
+          </a:p>
+        </p:txBody>
+      </p:sp>
+      <p:sp>
+        <p:nvSpPr>
+          <p:cNvPr id="31" name="Rectangle 30"/>
+          <p:cNvSpPr/>
+          <p:nvPr/>
+        </p:nvSpPr>
+        <p:spPr>
+          <a:xfrm>
+            <a:off x="310896" y="2304288"/>
+            <a:ext cx="1261872" cy="676656"/>
+          </a:xfrm>
+          <a:prstGeom prst="rect">
+            <a:avLst/>
+          </a:prstGeom>
+          <a:solidFill>
+            <a:srgbClr val="FFFFFF"/>
+          </a:solidFill>
+          <a:ln w="10160">
+            <a:solidFill>
+              <a:srgbClr val="DCE1E7"/>
+            </a:solidFill>
+          </a:ln>
+        </p:spPr>
+        <p:style>
+          <a:lnRef idx="1">
+            <a:schemeClr val="accent1"/>
+          </a:lnRef>
+          <a:fillRef idx="3">
+            <a:schemeClr val="accent1"/>
+          </a:fillRef>
+          <a:effectRef idx="2">
+            <a:schemeClr val="accent1"/>
+          </a:effectRef>
+          <a:fontRef idx="minor">
+            <a:schemeClr val="lt1"/>
+          </a:fontRef>
+        </p:style>
+        <p:txBody>
+          <a:bodyPr rtlCol="0" anchor="ctr"/>
+          <a:lstStyle/>
+          <a:p>
+            <a:pPr algn="ctr"/>
+          </a:p>
+        </p:txBody>
+      </p:sp>
+      <p:sp>
+        <p:nvSpPr>
+          <p:cNvPr id="32" name="Rectangle 31"/>
+          <p:cNvSpPr/>
+          <p:nvPr/>
+        </p:nvSpPr>
+        <p:spPr>
+          <a:xfrm>
+            <a:off x="310896" y="2304288"/>
+            <a:ext cx="1261872" cy="36576"/>
+          </a:xfrm>
+          <a:prstGeom prst="rect">
+            <a:avLst/>
+          </a:prstGeom>
+          <a:solidFill>
+            <a:srgbClr val="1F3A5F"/>
+          </a:solidFill>
+          <a:ln>
+            <a:noFill/>
+          </a:ln>
+        </p:spPr>
+        <p:style>
+          <a:lnRef idx="1">
+            <a:schemeClr val="accent1"/>
+          </a:lnRef>
+          <a:fillRef idx="3">
+            <a:schemeClr val="accent1"/>
+          </a:fillRef>
+          <a:effectRef idx="2">
+            <a:schemeClr val="accent1"/>
+          </a:effectRef>
+          <a:fontRef idx="minor">
+            <a:schemeClr val="lt1"/>
+          </a:fontRef>
+        </p:style>
+        <p:txBody>
+          <a:bodyPr rtlCol="0" anchor="ctr"/>
+          <a:lstStyle/>
+          <a:p>
+            <a:pPr algn="ctr"/>
+          </a:p>
+        </p:txBody>
+      </p:sp>
+      <p:sp>
+        <p:nvSpPr>
+          <p:cNvPr id="33" name="TextBox 32"/>
+          <p:cNvSpPr txBox="1"/>
+          <p:nvPr/>
+        </p:nvSpPr>
+        <p:spPr>
+          <a:xfrm>
+            <a:off x="384048" y="2359152"/>
+            <a:ext cx="1115568" cy="585216"/>
+          </a:xfrm>
+          <a:prstGeom prst="rect">
+            <a:avLst/>
+          </a:prstGeom>
+          <a:noFill/>
+        </p:spPr>
+        <p:txBody>
+          <a:bodyPr wrap="square" lIns="0" rIns="0" tIns="0" bIns="0">
+            <a:spAutoFit/>
+          </a:bodyPr>
+          <a:lstStyle/>
+          <a:p>
+            <a:pPr algn="l">
+              <a:lnSpc>
+                <a:spcPct val="100000"/>
+              </a:lnSpc>
+              <a:spcBef>
+                <a:spcPts val="0"/>
+              </a:spcBef>
+              <a:spcAft>
+                <a:spcPts val="0"/>
+              </a:spcAft>
+            </a:pPr>
+            <a:r>
+              <a:rPr sz="1350" b="1" i="0">
+                <a:solidFill>
+                  <a:srgbClr val="1F3A5F"/>
+                </a:solidFill>
+                <a:latin typeface="Georgia"/>
+              </a:rPr>
+              <a:t>44.00</a:t>
+            </a:r>
+          </a:p>
+          <a:p>
+            <a:pPr algn="l">
+              <a:lnSpc>
+                <a:spcPct val="100000"/>
+              </a:lnSpc>
+              <a:spcBef>
+                <a:spcPts val="100"/>
+              </a:spcBef>
+              <a:spcAft>
+                <a:spcPts val="0"/>
+              </a:spcAft>
+            </a:pPr>
+            <a:r>
+              <a:rPr sz="780" b="1" i="0">
+                <a:solidFill>
+                  <a:srgbClr val="12161C"/>
+                </a:solidFill>
+                <a:latin typeface="Segoe UI"/>
+              </a:rPr>
+              <a:t>Cora Test MRR</a:t>
+            </a:r>
+          </a:p>
+          <a:p>
+            <a:pPr algn="l">
+              <a:lnSpc>
+                <a:spcPct val="100000"/>
+              </a:lnSpc>
+              <a:spcBef>
+                <a:spcPts val="100"/>
+              </a:spcBef>
+              <a:spcAft>
+                <a:spcPts val="0"/>
+              </a:spcAft>
+            </a:pPr>
+            <a:r>
+              <a:rPr sz="670" b="0" i="0">
+                <a:solidFill>
+                  <a:srgbClr val="6E7781"/>
+                </a:solidFill>
+                <a:latin typeface="Segoe UI"/>
+              </a:rPr>
+              <a:t>Paper: 42.23 · 1×T4, 3.2h</a:t>
+            </a:r>
+          </a:p>
+        </p:txBody>
+      </p:sp>
+      <p:sp>
+        <p:nvSpPr>
+          <p:cNvPr id="34" name="Rectangle 33"/>
+          <p:cNvSpPr/>
+          <p:nvPr/>
+        </p:nvSpPr>
+        <p:spPr>
+          <a:xfrm>
+            <a:off x="1636776" y="2304288"/>
+            <a:ext cx="1261872" cy="676656"/>
+          </a:xfrm>
+          <a:prstGeom prst="rect">
+            <a:avLst/>
+          </a:prstGeom>
+          <a:solidFill>
+            <a:srgbClr val="FFFFFF"/>
+          </a:solidFill>
+          <a:ln w="10160">
+            <a:solidFill>
+              <a:srgbClr val="DCE1E7"/>
+            </a:solidFill>
+          </a:ln>
+        </p:spPr>
+        <p:style>
+          <a:lnRef idx="1">
+            <a:schemeClr val="accent1"/>
+          </a:lnRef>
+          <a:fillRef idx="3">
+            <a:schemeClr val="accent1"/>
+          </a:fillRef>
+          <a:effectRef idx="2">
+            <a:schemeClr val="accent1"/>
+          </a:effectRef>
+          <a:fontRef idx="minor">
+            <a:schemeClr val="lt1"/>
+          </a:fontRef>
+        </p:style>
+        <p:txBody>
+          <a:bodyPr rtlCol="0" anchor="ctr"/>
+          <a:lstStyle/>
+          <a:p>
+            <a:pPr algn="ctr"/>
+          </a:p>
+        </p:txBody>
+      </p:sp>
+      <p:sp>
+        <p:nvSpPr>
+          <p:cNvPr id="35" name="Rectangle 34"/>
+          <p:cNvSpPr/>
+          <p:nvPr/>
+        </p:nvSpPr>
+        <p:spPr>
+          <a:xfrm>
+            <a:off x="1636776" y="2304288"/>
+            <a:ext cx="1261872" cy="36576"/>
+          </a:xfrm>
+          <a:prstGeom prst="rect">
+            <a:avLst/>
+          </a:prstGeom>
+          <a:solidFill>
+            <a:srgbClr val="14746F"/>
+          </a:solidFill>
+          <a:ln>
+            <a:noFill/>
+          </a:ln>
+        </p:spPr>
+        <p:style>
+          <a:lnRef idx="1">
+            <a:schemeClr val="accent1"/>
+          </a:lnRef>
+          <a:fillRef idx="3">
+            <a:schemeClr val="accent1"/>
+          </a:fillRef>
+          <a:effectRef idx="2">
+            <a:schemeClr val="accent1"/>
+          </a:effectRef>
+          <a:fontRef idx="minor">
+            <a:schemeClr val="lt1"/>
+          </a:fontRef>
+        </p:style>
+        <p:txBody>
+          <a:bodyPr rtlCol="0" anchor="ctr"/>
+          <a:lstStyle/>
+          <a:p>
+            <a:pPr algn="ctr"/>
+          </a:p>
+        </p:txBody>
+      </p:sp>
+      <p:sp>
+        <p:nvSpPr>
+          <p:cNvPr id="36" name="TextBox 35"/>
+          <p:cNvSpPr txBox="1"/>
+          <p:nvPr/>
+        </p:nvSpPr>
+        <p:spPr>
+          <a:xfrm>
+            <a:off x="1709928" y="2359152"/>
+            <a:ext cx="1115568" cy="585216"/>
+          </a:xfrm>
+          <a:prstGeom prst="rect">
+            <a:avLst/>
+          </a:prstGeom>
+          <a:noFill/>
+        </p:spPr>
+        <p:txBody>
+          <a:bodyPr wrap="square" lIns="0" rIns="0" tIns="0" bIns="0">
+            <a:spAutoFit/>
+          </a:bodyPr>
+          <a:lstStyle/>
+          <a:p>
+            <a:pPr algn="l">
+              <a:lnSpc>
+                <a:spcPct val="100000"/>
+              </a:lnSpc>
+              <a:spcBef>
+                <a:spcPts val="0"/>
+              </a:spcBef>
+              <a:spcAft>
+                <a:spcPts val="0"/>
+              </a:spcAft>
+            </a:pPr>
+            <a:r>
+              <a:rPr sz="1350" b="1" i="0">
+                <a:solidFill>
+                  <a:srgbClr val="14746F"/>
+                </a:solidFill>
+                <a:latin typeface="Georgia"/>
+              </a:rPr>
+              <a:t>50.46</a:t>
+            </a:r>
+          </a:p>
+          <a:p>
+            <a:pPr algn="l">
+              <a:lnSpc>
+                <a:spcPct val="100000"/>
+              </a:lnSpc>
+              <a:spcBef>
+                <a:spcPts val="100"/>
+              </a:spcBef>
+              <a:spcAft>
+                <a:spcPts val="0"/>
+              </a:spcAft>
+            </a:pPr>
+            <a:r>
+              <a:rPr sz="780" b="1" i="0">
+                <a:solidFill>
+                  <a:srgbClr val="12161C"/>
+                </a:solidFill>
+                <a:latin typeface="Segoe UI"/>
+              </a:rPr>
+              <a:t>Citeseer Test MRR</a:t>
+            </a:r>
+          </a:p>
+          <a:p>
+            <a:pPr algn="l">
+              <a:lnSpc>
+                <a:spcPct val="100000"/>
+              </a:lnSpc>
+              <a:spcBef>
+                <a:spcPts val="100"/>
+              </a:spcBef>
+              <a:spcAft>
+                <a:spcPts val="0"/>
+              </a:spcAft>
+            </a:pPr>
+            <a:r>
+              <a:rPr sz="670" b="0" i="0">
+                <a:solidFill>
+                  <a:srgbClr val="6E7781"/>
+                </a:solidFill>
+                <a:latin typeface="Segoe UI"/>
+              </a:rPr>
+              <a:t>Paper: 47.51 · 2×T4, 1.0h</a:t>
+            </a:r>
+          </a:p>
+        </p:txBody>
+      </p:sp>
+      <p:sp>
+        <p:nvSpPr>
+          <p:cNvPr id="37" name="Rectangle 36"/>
+          <p:cNvSpPr/>
+          <p:nvPr/>
+        </p:nvSpPr>
+        <p:spPr>
+          <a:xfrm>
+            <a:off x="2962656" y="2304288"/>
+            <a:ext cx="1261872" cy="676656"/>
+          </a:xfrm>
+          <a:prstGeom prst="rect">
+            <a:avLst/>
+          </a:prstGeom>
+          <a:solidFill>
+            <a:srgbClr val="FFFFFF"/>
+          </a:solidFill>
+          <a:ln w="10160">
+            <a:solidFill>
+              <a:srgbClr val="DCE1E7"/>
+            </a:solidFill>
+          </a:ln>
+        </p:spPr>
+        <p:style>
+          <a:lnRef idx="1">
+            <a:schemeClr val="accent1"/>
+          </a:lnRef>
+          <a:fillRef idx="3">
+            <a:schemeClr val="accent1"/>
+          </a:fillRef>
+          <a:effectRef idx="2">
+            <a:schemeClr val="accent1"/>
+          </a:effectRef>
+          <a:fontRef idx="minor">
+            <a:schemeClr val="lt1"/>
+          </a:fontRef>
+        </p:style>
+        <p:txBody>
+          <a:bodyPr rtlCol="0" anchor="ctr"/>
+          <a:lstStyle/>
+          <a:p>
+            <a:pPr algn="ctr"/>
+          </a:p>
+        </p:txBody>
+      </p:sp>
+      <p:sp>
+        <p:nvSpPr>
+          <p:cNvPr id="38" name="Rectangle 37"/>
+          <p:cNvSpPr/>
+          <p:nvPr/>
+        </p:nvSpPr>
+        <p:spPr>
+          <a:xfrm>
+            <a:off x="2962656" y="2304288"/>
+            <a:ext cx="1261872" cy="36576"/>
+          </a:xfrm>
+          <a:prstGeom prst="rect">
+            <a:avLst/>
+          </a:prstGeom>
+          <a:solidFill>
+            <a:srgbClr val="9D1B32"/>
+          </a:solidFill>
+          <a:ln>
+            <a:noFill/>
+          </a:ln>
+        </p:spPr>
+        <p:style>
+          <a:lnRef idx="1">
+            <a:schemeClr val="accent1"/>
+          </a:lnRef>
+          <a:fillRef idx="3">
+            <a:schemeClr val="accent1"/>
+          </a:fillRef>
+          <a:effectRef idx="2">
+            <a:schemeClr val="accent1"/>
+          </a:effectRef>
+          <a:fontRef idx="minor">
+            <a:schemeClr val="lt1"/>
+          </a:fontRef>
+        </p:style>
+        <p:txBody>
+          <a:bodyPr rtlCol="0" anchor="ctr"/>
+          <a:lstStyle/>
+          <a:p>
+            <a:pPr algn="ctr"/>
+          </a:p>
+        </p:txBody>
+      </p:sp>
+      <p:sp>
+        <p:nvSpPr>
+          <p:cNvPr id="39" name="TextBox 38"/>
+          <p:cNvSpPr txBox="1"/>
+          <p:nvPr/>
+        </p:nvSpPr>
+        <p:spPr>
+          <a:xfrm>
+            <a:off x="3035808" y="2359152"/>
+            <a:ext cx="1115568" cy="585216"/>
+          </a:xfrm>
+          <a:prstGeom prst="rect">
+            <a:avLst/>
+          </a:prstGeom>
+          <a:noFill/>
+        </p:spPr>
+        <p:txBody>
+          <a:bodyPr wrap="square" lIns="0" rIns="0" tIns="0" bIns="0">
+            <a:spAutoFit/>
+          </a:bodyPr>
+          <a:lstStyle/>
+          <a:p>
+            <a:pPr algn="l">
+              <a:lnSpc>
+                <a:spcPct val="100000"/>
+              </a:lnSpc>
+              <a:spcBef>
+                <a:spcPts val="0"/>
+              </a:spcBef>
+              <a:spcAft>
+                <a:spcPts val="0"/>
+              </a:spcAft>
+            </a:pPr>
+            <a:r>
+              <a:rPr sz="1350" b="1" i="0">
+                <a:solidFill>
+                  <a:srgbClr val="9D1B32"/>
+                </a:solidFill>
+                <a:latin typeface="Georgia"/>
+              </a:rPr>
+              <a:t>112 Runs</a:t>
+            </a:r>
+          </a:p>
+          <a:p>
+            <a:pPr algn="l">
+              <a:lnSpc>
+                <a:spcPct val="100000"/>
+              </a:lnSpc>
+              <a:spcBef>
+                <a:spcPts val="100"/>
+              </a:spcBef>
+              <a:spcAft>
+                <a:spcPts val="0"/>
+              </a:spcAft>
+            </a:pPr>
+            <a:r>
+              <a:rPr sz="780" b="1" i="0">
+                <a:solidFill>
+                  <a:srgbClr val="12161C"/>
+                </a:solidFill>
+                <a:latin typeface="Segoe UI"/>
+              </a:rPr>
+              <a:t>4 Regimes Audited</a:t>
+            </a:r>
+          </a:p>
+          <a:p>
+            <a:pPr algn="l">
+              <a:lnSpc>
+                <a:spcPct val="100000"/>
+              </a:lnSpc>
+              <a:spcBef>
+                <a:spcPts val="100"/>
+              </a:spcBef>
+              <a:spcAft>
+                <a:spcPts val="0"/>
+              </a:spcAft>
+            </a:pPr>
+            <a:r>
+              <a:rPr sz="670" b="0" i="0">
+                <a:solidFill>
+                  <a:srgbClr val="6E7781"/>
+                </a:solidFill>
+                <a:latin typeface="Segoe UI"/>
+              </a:rPr>
+              <a:t>HeaRT AA exact · Δ&lt;10⁻⁷</a:t>
+            </a:r>
+          </a:p>
+        </p:txBody>
+      </p:sp>
+      <p:sp>
+        <p:nvSpPr>
+          <p:cNvPr id="40" name="TextBox 39"/>
+          <p:cNvSpPr txBox="1"/>
+          <p:nvPr/>
+        </p:nvSpPr>
+        <p:spPr>
+          <a:xfrm>
+            <a:off x="310896" y="3063240"/>
+            <a:ext cx="3913632" cy="182880"/>
+          </a:xfrm>
+          <a:prstGeom prst="rect">
+            <a:avLst/>
+          </a:prstGeom>
+          <a:noFill/>
+        </p:spPr>
+        <p:txBody>
+          <a:bodyPr wrap="square" lIns="0" rIns="0" tIns="0" bIns="0">
+            <a:spAutoFit/>
+          </a:bodyPr>
+          <a:lstStyle/>
+          <a:p>
+            <a:pPr algn="l">
+              <a:lnSpc>
+                <a:spcPct val="108000"/>
+              </a:lnSpc>
+              <a:spcBef>
+                <a:spcPts val="0"/>
+              </a:spcBef>
+              <a:spcAft>
+                <a:spcPts val="0"/>
+              </a:spcAft>
+            </a:pPr>
+            <a:r>
+              <a:rPr sz="830" b="1" i="0">
+                <a:solidFill>
+                  <a:srgbClr val="9D1B32"/>
+                </a:solidFill>
+                <a:latin typeface="Segoe UI"/>
+              </a:rPr>
+              <a:t>III.  FOUR EMPIRICAL COMPUTE-ALLOCATION FINDINGS</a:t>
+            </a:r>
+          </a:p>
+        </p:txBody>
+      </p:sp>
+      <p:sp>
+        <p:nvSpPr>
+          <p:cNvPr id="41" name="Rectangle 40"/>
+          <p:cNvSpPr/>
+          <p:nvPr/>
+        </p:nvSpPr>
+        <p:spPr>
+          <a:xfrm>
+            <a:off x="310896" y="3264408"/>
+            <a:ext cx="3913632" cy="768096"/>
+          </a:xfrm>
+          <a:prstGeom prst="rect">
+            <a:avLst/>
+          </a:prstGeom>
+          <a:solidFill>
+            <a:srgbClr val="FFFFFF"/>
+          </a:solidFill>
+          <a:ln w="8890">
+            <a:solidFill>
+              <a:srgbClr val="DCE1E7"/>
+            </a:solidFill>
+          </a:ln>
+        </p:spPr>
+        <p:style>
+          <a:lnRef idx="1">
+            <a:schemeClr val="accent1"/>
+          </a:lnRef>
+          <a:fillRef idx="3">
+            <a:schemeClr val="accent1"/>
+          </a:fillRef>
+          <a:effectRef idx="2">
+            <a:schemeClr val="accent1"/>
+          </a:effectRef>
+          <a:fontRef idx="minor">
+            <a:schemeClr val="lt1"/>
+          </a:fontRef>
+        </p:style>
+        <p:txBody>
+          <a:bodyPr rtlCol="0" anchor="ctr"/>
+          <a:lstStyle/>
+          <a:p>
+            <a:pPr algn="ctr"/>
+          </a:p>
+        </p:txBody>
+      </p:sp>
+      <p:sp>
+        <p:nvSpPr>
+          <p:cNvPr id="42" name="Rectangle 41"/>
+          <p:cNvSpPr/>
+          <p:nvPr/>
+        </p:nvSpPr>
+        <p:spPr>
+          <a:xfrm>
+            <a:off x="310896" y="3264408"/>
+            <a:ext cx="384048" cy="768096"/>
+          </a:xfrm>
+          <a:prstGeom prst="rect">
+            <a:avLst/>
+          </a:prstGeom>
+          <a:solidFill>
+            <a:srgbClr val="F9F1F2"/>
+          </a:solidFill>
+          <a:ln>
+            <a:noFill/>
+          </a:ln>
+        </p:spPr>
+        <p:style>
+          <a:lnRef idx="1">
+            <a:schemeClr val="accent1"/>
+          </a:lnRef>
+          <a:fillRef idx="3">
+            <a:schemeClr val="accent1"/>
+          </a:fillRef>
+          <a:effectRef idx="2">
+            <a:schemeClr val="accent1"/>
+          </a:effectRef>
+          <a:fontRef idx="minor">
+            <a:schemeClr val="lt1"/>
+          </a:fontRef>
+        </p:style>
+        <p:txBody>
+          <a:bodyPr rtlCol="0" anchor="ctr"/>
+          <a:lstStyle/>
+          <a:p>
+            <a:pPr algn="ctr"/>
+          </a:p>
+        </p:txBody>
+      </p:sp>
+      <p:sp>
+        <p:nvSpPr>
+          <p:cNvPr id="43" name="Rectangle 42"/>
+          <p:cNvSpPr/>
+          <p:nvPr/>
+        </p:nvSpPr>
+        <p:spPr>
+          <a:xfrm>
+            <a:off x="310896" y="3264408"/>
+            <a:ext cx="36576" cy="768096"/>
+          </a:xfrm>
+          <a:prstGeom prst="rect">
+            <a:avLst/>
+          </a:prstGeom>
+          <a:solidFill>
+            <a:srgbClr val="9D1B32"/>
+          </a:solidFill>
+          <a:ln>
+            <a:noFill/>
+          </a:ln>
+        </p:spPr>
+        <p:style>
+          <a:lnRef idx="1">
+            <a:schemeClr val="accent1"/>
+          </a:lnRef>
+          <a:fillRef idx="3">
+            <a:schemeClr val="accent1"/>
+          </a:fillRef>
+          <a:effectRef idx="2">
+            <a:schemeClr val="accent1"/>
+          </a:effectRef>
+          <a:fontRef idx="minor">
+            <a:schemeClr val="lt1"/>
+          </a:fontRef>
+        </p:style>
+        <p:txBody>
+          <a:bodyPr rtlCol="0" anchor="ctr"/>
+          <a:lstStyle/>
+          <a:p>
+            <a:pPr algn="ctr"/>
+          </a:p>
+        </p:txBody>
+      </p:sp>
+      <p:sp>
+        <p:nvSpPr>
+          <p:cNvPr id="44" name="TextBox 43"/>
+          <p:cNvSpPr txBox="1"/>
+          <p:nvPr/>
+        </p:nvSpPr>
+        <p:spPr>
+          <a:xfrm>
+            <a:off x="347472" y="3465576"/>
+            <a:ext cx="347472" cy="365760"/>
+          </a:xfrm>
+          <a:prstGeom prst="rect">
+            <a:avLst/>
+          </a:prstGeom>
+          <a:noFill/>
+        </p:spPr>
+        <p:txBody>
+          <a:bodyPr wrap="square" lIns="0" rIns="0" tIns="0" bIns="0">
+            <a:spAutoFit/>
+          </a:bodyPr>
+          <a:lstStyle/>
+          <a:p>
+            <a:pPr algn="ctr">
+              <a:lnSpc>
+                <a:spcPct val="108000"/>
+              </a:lnSpc>
+              <a:spcBef>
+                <a:spcPts val="0"/>
+              </a:spcBef>
+              <a:spcAft>
+                <a:spcPts val="0"/>
+              </a:spcAft>
+            </a:pPr>
+            <a:r>
+              <a:rPr sz="1250" b="1" i="0">
+                <a:solidFill>
+                  <a:srgbClr val="9D1B32"/>
+                </a:solidFill>
+                <a:latin typeface="Georgia"/>
+              </a:rPr>
+              <a:t>01</a:t>
+            </a:r>
+          </a:p>
+        </p:txBody>
+      </p:sp>
+      <p:sp>
+        <p:nvSpPr>
+          <p:cNvPr id="45" name="TextBox 44"/>
+          <p:cNvSpPr txBox="1"/>
+          <p:nvPr/>
+        </p:nvSpPr>
+        <p:spPr>
+          <a:xfrm>
+            <a:off x="768096" y="3310127"/>
+            <a:ext cx="3383280" cy="704088"/>
+          </a:xfrm>
+          <a:prstGeom prst="rect">
+            <a:avLst/>
+          </a:prstGeom>
+          <a:noFill/>
+        </p:spPr>
+        <p:txBody>
+          <a:bodyPr wrap="square" lIns="0" rIns="0" tIns="0" bIns="0">
+            <a:spAutoFit/>
+          </a:bodyPr>
+          <a:lstStyle/>
+          <a:p>
+            <a:pPr algn="l">
+              <a:lnSpc>
+                <a:spcPct val="102000"/>
+              </a:lnSpc>
+              <a:spcBef>
+                <a:spcPts val="0"/>
+              </a:spcBef>
+              <a:spcAft>
+                <a:spcPts val="150"/>
+              </a:spcAft>
+            </a:pPr>
+            <a:r>
+              <a:rPr sz="880" b="1" i="0">
+                <a:solidFill>
+                  <a:srgbClr val="12161C"/>
+                </a:solidFill>
+                <a:latin typeface="Segoe UI"/>
+              </a:rPr>
+              <a:t>Official s = 2×20 over-reads in 3 of 4 regimes</a:t>
+            </a:r>
+          </a:p>
+          <a:p>
+            <a:pPr algn="l">
+              <a:lnSpc>
+                <a:spcPct val="106000"/>
+              </a:lnSpc>
+              <a:spcBef>
+                <a:spcPts val="0"/>
+              </a:spcBef>
+              <a:spcAft>
+                <a:spcPts val="0"/>
+              </a:spcAft>
+            </a:pPr>
+            <a:r>
+              <a:rPr sz="735" b="0" i="0">
+                <a:solidFill>
+                  <a:srgbClr val="333B45"/>
+                </a:solidFill>
+                <a:latin typeface="Segoe UI"/>
+              </a:rPr>
+              <a:t>Halving fanout to s = 2×10 (~65% GPU, 40% less VRAM) matches Cora (42.9 vs 43.7) and beats full PENCIL on Citeseer Pool (51.4 vs 49.7) and Cora HeaRT (14.3 vs 13.3). Only Citeseer HeaRT needs full 2×20 (17.8 vs 14.2).</a:t>
+            </a:r>
+          </a:p>
+        </p:txBody>
+      </p:sp>
+      <p:sp>
+        <p:nvSpPr>
+          <p:cNvPr id="46" name="Rectangle 45"/>
+          <p:cNvSpPr/>
+          <p:nvPr/>
+        </p:nvSpPr>
+        <p:spPr>
+          <a:xfrm>
+            <a:off x="310896" y="4078224"/>
+            <a:ext cx="3913632" cy="768096"/>
+          </a:xfrm>
+          <a:prstGeom prst="rect">
+            <a:avLst/>
+          </a:prstGeom>
+          <a:solidFill>
+            <a:srgbClr val="FFFFFF"/>
+          </a:solidFill>
+          <a:ln w="8890">
+            <a:solidFill>
+              <a:srgbClr val="DCE1E7"/>
+            </a:solidFill>
+          </a:ln>
+        </p:spPr>
+        <p:style>
+          <a:lnRef idx="1">
+            <a:schemeClr val="accent1"/>
+          </a:lnRef>
+          <a:fillRef idx="3">
+            <a:schemeClr val="accent1"/>
+          </a:fillRef>
+          <a:effectRef idx="2">
+            <a:schemeClr val="accent1"/>
+          </a:effectRef>
+          <a:fontRef idx="minor">
+            <a:schemeClr val="lt1"/>
+          </a:fontRef>
+        </p:style>
+        <p:txBody>
+          <a:bodyPr rtlCol="0" anchor="ctr"/>
+          <a:lstStyle/>
+          <a:p>
+            <a:pPr algn="ctr"/>
+          </a:p>
+        </p:txBody>
+      </p:sp>
+      <p:sp>
+        <p:nvSpPr>
+          <p:cNvPr id="47" name="Rectangle 46"/>
+          <p:cNvSpPr/>
+          <p:nvPr/>
+        </p:nvSpPr>
+        <p:spPr>
+          <a:xfrm>
+            <a:off x="310896" y="4078224"/>
+            <a:ext cx="384048" cy="768096"/>
+          </a:xfrm>
+          <a:prstGeom prst="rect">
+            <a:avLst/>
+          </a:prstGeom>
+          <a:solidFill>
+            <a:srgbClr val="F9F1F2"/>
+          </a:solidFill>
+          <a:ln>
+            <a:noFill/>
+          </a:ln>
+        </p:spPr>
+        <p:style>
+          <a:lnRef idx="1">
+            <a:schemeClr val="accent1"/>
+          </a:lnRef>
+          <a:fillRef idx="3">
+            <a:schemeClr val="accent1"/>
+          </a:fillRef>
+          <a:effectRef idx="2">
+            <a:schemeClr val="accent1"/>
+          </a:effectRef>
+          <a:fontRef idx="minor">
+            <a:schemeClr val="lt1"/>
+          </a:fontRef>
+        </p:style>
+        <p:txBody>
+          <a:bodyPr rtlCol="0" anchor="ctr"/>
+          <a:lstStyle/>
+          <a:p>
+            <a:pPr algn="ctr"/>
+          </a:p>
+        </p:txBody>
+      </p:sp>
+      <p:sp>
+        <p:nvSpPr>
+          <p:cNvPr id="48" name="Rectangle 47"/>
+          <p:cNvSpPr/>
+          <p:nvPr/>
+        </p:nvSpPr>
+        <p:spPr>
+          <a:xfrm>
+            <a:off x="310896" y="4078224"/>
+            <a:ext cx="36576" cy="768096"/>
+          </a:xfrm>
+          <a:prstGeom prst="rect">
+            <a:avLst/>
+          </a:prstGeom>
+          <a:solidFill>
+            <a:srgbClr val="9D1B32"/>
+          </a:solidFill>
+          <a:ln>
+            <a:noFill/>
+          </a:ln>
+        </p:spPr>
+        <p:style>
+          <a:lnRef idx="1">
+            <a:schemeClr val="accent1"/>
+          </a:lnRef>
+          <a:fillRef idx="3">
+            <a:schemeClr val="accent1"/>
+          </a:fillRef>
+          <a:effectRef idx="2">
+            <a:schemeClr val="accent1"/>
+          </a:effectRef>
+          <a:fontRef idx="minor">
+            <a:schemeClr val="lt1"/>
+          </a:fontRef>
+        </p:style>
+        <p:txBody>
+          <a:bodyPr rtlCol="0" anchor="ctr"/>
+          <a:lstStyle/>
+          <a:p>
+            <a:pPr algn="ctr"/>
+          </a:p>
+        </p:txBody>
+      </p:sp>
+      <p:sp>
+        <p:nvSpPr>
+          <p:cNvPr id="49" name="TextBox 48"/>
+          <p:cNvSpPr txBox="1"/>
+          <p:nvPr/>
+        </p:nvSpPr>
+        <p:spPr>
+          <a:xfrm>
+            <a:off x="347472" y="4279392"/>
+            <a:ext cx="347472" cy="365760"/>
+          </a:xfrm>
+          <a:prstGeom prst="rect">
+            <a:avLst/>
+          </a:prstGeom>
+          <a:noFill/>
+        </p:spPr>
+        <p:txBody>
+          <a:bodyPr wrap="square" lIns="0" rIns="0" tIns="0" bIns="0">
+            <a:spAutoFit/>
+          </a:bodyPr>
+          <a:lstStyle/>
+          <a:p>
+            <a:pPr algn="ctr">
+              <a:lnSpc>
+                <a:spcPct val="108000"/>
+              </a:lnSpc>
+              <a:spcBef>
+                <a:spcPts val="0"/>
+              </a:spcBef>
+              <a:spcAft>
+                <a:spcPts val="0"/>
+              </a:spcAft>
+            </a:pPr>
+            <a:r>
+              <a:rPr sz="1250" b="1" i="0">
+                <a:solidFill>
+                  <a:srgbClr val="9D1B32"/>
+                </a:solidFill>
+                <a:latin typeface="Georgia"/>
+              </a:rPr>
+              <a:t>02</a:t>
+            </a:r>
+          </a:p>
+        </p:txBody>
+      </p:sp>
+      <p:sp>
+        <p:nvSpPr>
+          <p:cNvPr id="50" name="TextBox 49"/>
+          <p:cNvSpPr txBox="1"/>
+          <p:nvPr/>
+        </p:nvSpPr>
+        <p:spPr>
+          <a:xfrm>
+            <a:off x="768096" y="4123944"/>
+            <a:ext cx="3383280" cy="704088"/>
+          </a:xfrm>
+          <a:prstGeom prst="rect">
+            <a:avLst/>
+          </a:prstGeom>
+          <a:noFill/>
+        </p:spPr>
+        <p:txBody>
+          <a:bodyPr wrap="square" lIns="0" rIns="0" tIns="0" bIns="0">
+            <a:spAutoFit/>
+          </a:bodyPr>
+          <a:lstStyle/>
+          <a:p>
+            <a:pPr algn="l">
+              <a:lnSpc>
+                <a:spcPct val="102000"/>
+              </a:lnSpc>
+              <a:spcBef>
+                <a:spcPts val="0"/>
+              </a:spcBef>
+              <a:spcAft>
+                <a:spcPts val="150"/>
+              </a:spcAft>
+            </a:pPr>
+            <a:r>
+              <a:rPr sz="880" b="1" i="0">
+                <a:solidFill>
+                  <a:srgbClr val="12161C"/>
+                </a:solidFill>
+                <a:latin typeface="Segoe UI"/>
+              </a:rPr>
+              <a:t>Frugal hybrid (≤10% GPU) beats heuristics in all 4 tests</a:t>
+            </a:r>
+          </a:p>
+          <a:p>
+            <a:pPr algn="l">
+              <a:lnSpc>
+                <a:spcPct val="106000"/>
+              </a:lnSpc>
+              <a:spcBef>
+                <a:spcPts val="0"/>
+              </a:spcBef>
+              <a:spcAft>
+                <a:spcPts val="0"/>
+              </a:spcAft>
+            </a:pPr>
+            <a:r>
+              <a:rPr sz="735" b="0" i="0">
+                <a:solidFill>
+                  <a:srgbClr val="333B45"/>
+                </a:solidFill>
+                <a:latin typeface="Segoe UI"/>
+              </a:rPr>
+              <a:t>Choosing (k, s) on validation alone under a 10% compute cap lifts Test MRR over Adamic–Adar everywhere: 33.1 → 38.4 on Cora (7% GPU) and 11.0 → 13.8 on Citeseer HeaRT (8% GPU).</a:t>
+            </a:r>
+          </a:p>
+        </p:txBody>
+      </p:sp>
+      <p:sp>
+        <p:nvSpPr>
+          <p:cNvPr id="51" name="Rectangle 50"/>
+          <p:cNvSpPr/>
+          <p:nvPr/>
+        </p:nvSpPr>
+        <p:spPr>
+          <a:xfrm>
+            <a:off x="310896" y="4892040"/>
+            <a:ext cx="3913632" cy="768096"/>
+          </a:xfrm>
+          <a:prstGeom prst="rect">
+            <a:avLst/>
+          </a:prstGeom>
+          <a:solidFill>
+            <a:srgbClr val="FFFFFF"/>
+          </a:solidFill>
+          <a:ln w="8890">
+            <a:solidFill>
+              <a:srgbClr val="DCE1E7"/>
+            </a:solidFill>
+          </a:ln>
+        </p:spPr>
+        <p:style>
+          <a:lnRef idx="1">
+            <a:schemeClr val="accent1"/>
+          </a:lnRef>
+          <a:fillRef idx="3">
+            <a:schemeClr val="accent1"/>
+          </a:fillRef>
+          <a:effectRef idx="2">
+            <a:schemeClr val="accent1"/>
+          </a:effectRef>
+          <a:fontRef idx="minor">
+            <a:schemeClr val="lt1"/>
+          </a:fontRef>
+        </p:style>
+        <p:txBody>
+          <a:bodyPr rtlCol="0" anchor="ctr"/>
+          <a:lstStyle/>
+          <a:p>
+            <a:pPr algn="ctr"/>
+          </a:p>
+        </p:txBody>
+      </p:sp>
+      <p:sp>
+        <p:nvSpPr>
+          <p:cNvPr id="52" name="Rectangle 51"/>
+          <p:cNvSpPr/>
+          <p:nvPr/>
+        </p:nvSpPr>
+        <p:spPr>
+          <a:xfrm>
+            <a:off x="310896" y="4892040"/>
+            <a:ext cx="384048" cy="768096"/>
+          </a:xfrm>
+          <a:prstGeom prst="rect">
+            <a:avLst/>
+          </a:prstGeom>
+          <a:solidFill>
+            <a:srgbClr val="F9F1F2"/>
+          </a:solidFill>
+          <a:ln>
+            <a:noFill/>
+          </a:ln>
+        </p:spPr>
+        <p:style>
+          <a:lnRef idx="1">
+            <a:schemeClr val="accent1"/>
+          </a:lnRef>
+          <a:fillRef idx="3">
+            <a:schemeClr val="accent1"/>
+          </a:fillRef>
+          <a:effectRef idx="2">
+            <a:schemeClr val="accent1"/>
+          </a:effectRef>
+          <a:fontRef idx="minor">
+            <a:schemeClr val="lt1"/>
+          </a:fontRef>
+        </p:style>
+        <p:txBody>
+          <a:bodyPr rtlCol="0" anchor="ctr"/>
+          <a:lstStyle/>
+          <a:p>
+            <a:pPr algn="ctr"/>
+          </a:p>
+        </p:txBody>
+      </p:sp>
+      <p:sp>
+        <p:nvSpPr>
+          <p:cNvPr id="53" name="Rectangle 52"/>
+          <p:cNvSpPr/>
+          <p:nvPr/>
+        </p:nvSpPr>
+        <p:spPr>
+          <a:xfrm>
+            <a:off x="310896" y="4892040"/>
+            <a:ext cx="36576" cy="768096"/>
+          </a:xfrm>
+          <a:prstGeom prst="rect">
+            <a:avLst/>
+          </a:prstGeom>
+          <a:solidFill>
+            <a:srgbClr val="9D1B32"/>
+          </a:solidFill>
+          <a:ln>
+            <a:noFill/>
+          </a:ln>
+        </p:spPr>
+        <p:style>
+          <a:lnRef idx="1">
+            <a:schemeClr val="accent1"/>
+          </a:lnRef>
+          <a:fillRef idx="3">
+            <a:schemeClr val="accent1"/>
+          </a:fillRef>
+          <a:effectRef idx="2">
+            <a:schemeClr val="accent1"/>
+          </a:effectRef>
+          <a:fontRef idx="minor">
+            <a:schemeClr val="lt1"/>
+          </a:fontRef>
+        </p:style>
+        <p:txBody>
+          <a:bodyPr rtlCol="0" anchor="ctr"/>
+          <a:lstStyle/>
+          <a:p>
+            <a:pPr algn="ctr"/>
+          </a:p>
+        </p:txBody>
+      </p:sp>
+      <p:sp>
+        <p:nvSpPr>
+          <p:cNvPr id="54" name="TextBox 53"/>
+          <p:cNvSpPr txBox="1"/>
+          <p:nvPr/>
+        </p:nvSpPr>
+        <p:spPr>
+          <a:xfrm>
+            <a:off x="347472" y="5093207"/>
+            <a:ext cx="347472" cy="365760"/>
+          </a:xfrm>
+          <a:prstGeom prst="rect">
+            <a:avLst/>
+          </a:prstGeom>
+          <a:noFill/>
+        </p:spPr>
+        <p:txBody>
+          <a:bodyPr wrap="square" lIns="0" rIns="0" tIns="0" bIns="0">
+            <a:spAutoFit/>
+          </a:bodyPr>
+          <a:lstStyle/>
+          <a:p>
+            <a:pPr algn="ctr">
+              <a:lnSpc>
+                <a:spcPct val="108000"/>
+              </a:lnSpc>
+              <a:spcBef>
+                <a:spcPts val="0"/>
+              </a:spcBef>
+              <a:spcAft>
+                <a:spcPts val="0"/>
+              </a:spcAft>
+            </a:pPr>
+            <a:r>
+              <a:rPr sz="1250" b="1" i="0">
+                <a:solidFill>
+                  <a:srgbClr val="9D1B32"/>
+                </a:solidFill>
+                <a:latin typeface="Georgia"/>
+              </a:rPr>
+              <a:t>03</a:t>
+            </a:r>
+          </a:p>
+        </p:txBody>
+      </p:sp>
+      <p:sp>
+        <p:nvSpPr>
+          <p:cNvPr id="55" name="TextBox 54"/>
+          <p:cNvSpPr txBox="1"/>
+          <p:nvPr/>
+        </p:nvSpPr>
+        <p:spPr>
+          <a:xfrm>
+            <a:off x="768096" y="4937759"/>
+            <a:ext cx="3383280" cy="704088"/>
+          </a:xfrm>
+          <a:prstGeom prst="rect">
+            <a:avLst/>
+          </a:prstGeom>
+          <a:noFill/>
+        </p:spPr>
+        <p:txBody>
+          <a:bodyPr wrap="square" lIns="0" rIns="0" tIns="0" bIns="0">
+            <a:spAutoFit/>
+          </a:bodyPr>
+          <a:lstStyle/>
+          <a:p>
+            <a:pPr algn="l">
+              <a:lnSpc>
+                <a:spcPct val="102000"/>
+              </a:lnSpc>
+              <a:spcBef>
+                <a:spcPts val="0"/>
+              </a:spcBef>
+              <a:spcAft>
+                <a:spcPts val="150"/>
+              </a:spcAft>
+            </a:pPr>
+            <a:r>
+              <a:rPr sz="880" b="1" i="0">
+                <a:solidFill>
+                  <a:srgbClr val="12161C"/>
+                </a:solidFill>
+                <a:latin typeface="Segoe UI"/>
+              </a:rPr>
+              <a:t>Top-10% re-ranking is wasted; PENCIL pays off in the 0-CN tail</a:t>
+            </a:r>
+          </a:p>
+          <a:p>
+            <a:pPr algn="l">
+              <a:lnSpc>
+                <a:spcPct val="106000"/>
+              </a:lnSpc>
+              <a:spcBef>
+                <a:spcPts val="0"/>
+              </a:spcBef>
+              <a:spcAft>
+                <a:spcPts val="0"/>
+              </a:spcAft>
+            </a:pPr>
+            <a:r>
+              <a:rPr sz="735" b="0" i="0">
+                <a:solidFill>
+                  <a:srgbClr val="333B45"/>
+                </a:solidFill>
+                <a:latin typeface="Segoe UI"/>
+              </a:rPr>
+              <a:t>AA's top decile is already true links, so re-ranking k ≤ 10% changes nothing. PENCIL earns its FLOPs where AA is blind: 57.3% of true Cora test links share zero common neighbours.</a:t>
+            </a:r>
+          </a:p>
+        </p:txBody>
+      </p:sp>
+      <p:sp>
+        <p:nvSpPr>
+          <p:cNvPr id="56" name="Rectangle 55"/>
+          <p:cNvSpPr/>
+          <p:nvPr/>
+        </p:nvSpPr>
+        <p:spPr>
+          <a:xfrm>
+            <a:off x="310896" y="5705856"/>
+            <a:ext cx="3913632" cy="768096"/>
+          </a:xfrm>
+          <a:prstGeom prst="rect">
+            <a:avLst/>
+          </a:prstGeom>
+          <a:solidFill>
+            <a:srgbClr val="FFFFFF"/>
+          </a:solidFill>
+          <a:ln w="8890">
+            <a:solidFill>
+              <a:srgbClr val="DCE1E7"/>
+            </a:solidFill>
+          </a:ln>
+        </p:spPr>
+        <p:style>
+          <a:lnRef idx="1">
+            <a:schemeClr val="accent1"/>
+          </a:lnRef>
+          <a:fillRef idx="3">
+            <a:schemeClr val="accent1"/>
+          </a:fillRef>
+          <a:effectRef idx="2">
+            <a:schemeClr val="accent1"/>
+          </a:effectRef>
+          <a:fontRef idx="minor">
+            <a:schemeClr val="lt1"/>
+          </a:fontRef>
+        </p:style>
+        <p:txBody>
+          <a:bodyPr rtlCol="0" anchor="ctr"/>
+          <a:lstStyle/>
+          <a:p>
+            <a:pPr algn="ctr"/>
+          </a:p>
+        </p:txBody>
+      </p:sp>
+      <p:sp>
+        <p:nvSpPr>
+          <p:cNvPr id="57" name="Rectangle 56"/>
+          <p:cNvSpPr/>
+          <p:nvPr/>
+        </p:nvSpPr>
+        <p:spPr>
+          <a:xfrm>
+            <a:off x="310896" y="5705856"/>
+            <a:ext cx="384048" cy="768096"/>
+          </a:xfrm>
+          <a:prstGeom prst="rect">
+            <a:avLst/>
+          </a:prstGeom>
+          <a:solidFill>
+            <a:srgbClr val="F9F1F2"/>
+          </a:solidFill>
+          <a:ln>
+            <a:noFill/>
+          </a:ln>
+        </p:spPr>
+        <p:style>
+          <a:lnRef idx="1">
+            <a:schemeClr val="accent1"/>
+          </a:lnRef>
+          <a:fillRef idx="3">
+            <a:schemeClr val="accent1"/>
+          </a:fillRef>
+          <a:effectRef idx="2">
+            <a:schemeClr val="accent1"/>
+          </a:effectRef>
+          <a:fontRef idx="minor">
+            <a:schemeClr val="lt1"/>
+          </a:fontRef>
+        </p:style>
+        <p:txBody>
+          <a:bodyPr rtlCol="0" anchor="ctr"/>
+          <a:lstStyle/>
+          <a:p>
+            <a:pPr algn="ctr"/>
+          </a:p>
+        </p:txBody>
+      </p:sp>
+      <p:sp>
+        <p:nvSpPr>
+          <p:cNvPr id="58" name="Rectangle 57"/>
+          <p:cNvSpPr/>
+          <p:nvPr/>
+        </p:nvSpPr>
+        <p:spPr>
+          <a:xfrm>
+            <a:off x="310896" y="5705856"/>
+            <a:ext cx="36576" cy="768096"/>
+          </a:xfrm>
+          <a:prstGeom prst="rect">
+            <a:avLst/>
+          </a:prstGeom>
+          <a:solidFill>
+            <a:srgbClr val="9D1B32"/>
+          </a:solidFill>
+          <a:ln>
+            <a:noFill/>
+          </a:ln>
+        </p:spPr>
+        <p:style>
+          <a:lnRef idx="1">
+            <a:schemeClr val="accent1"/>
+          </a:lnRef>
+          <a:fillRef idx="3">
+            <a:schemeClr val="accent1"/>
+          </a:fillRef>
+          <a:effectRef idx="2">
+            <a:schemeClr val="accent1"/>
+          </a:effectRef>
+          <a:fontRef idx="minor">
+            <a:schemeClr val="lt1"/>
+          </a:fontRef>
+        </p:style>
+        <p:txBody>
+          <a:bodyPr rtlCol="0" anchor="ctr"/>
+          <a:lstStyle/>
+          <a:p>
+            <a:pPr algn="ctr"/>
+          </a:p>
+        </p:txBody>
+      </p:sp>
+      <p:sp>
+        <p:nvSpPr>
+          <p:cNvPr id="59" name="TextBox 58"/>
+          <p:cNvSpPr txBox="1"/>
+          <p:nvPr/>
+        </p:nvSpPr>
+        <p:spPr>
+          <a:xfrm>
+            <a:off x="347472" y="5907024"/>
+            <a:ext cx="347472" cy="365760"/>
+          </a:xfrm>
+          <a:prstGeom prst="rect">
+            <a:avLst/>
+          </a:prstGeom>
+          <a:noFill/>
+        </p:spPr>
+        <p:txBody>
+          <a:bodyPr wrap="square" lIns="0" rIns="0" tIns="0" bIns="0">
+            <a:spAutoFit/>
+          </a:bodyPr>
+          <a:lstStyle/>
+          <a:p>
+            <a:pPr algn="ctr">
+              <a:lnSpc>
+                <a:spcPct val="108000"/>
+              </a:lnSpc>
+              <a:spcBef>
+                <a:spcPts val="0"/>
+              </a:spcBef>
+              <a:spcAft>
+                <a:spcPts val="0"/>
+              </a:spcAft>
+            </a:pPr>
+            <a:r>
+              <a:rPr sz="1250" b="1" i="0">
+                <a:solidFill>
+                  <a:srgbClr val="9D1B32"/>
+                </a:solidFill>
+                <a:latin typeface="Georgia"/>
+              </a:rPr>
+              <a:t>04</a:t>
+            </a:r>
+          </a:p>
+        </p:txBody>
+      </p:sp>
+      <p:sp>
+        <p:nvSpPr>
+          <p:cNvPr id="60" name="TextBox 59"/>
+          <p:cNvSpPr txBox="1"/>
+          <p:nvPr/>
+        </p:nvSpPr>
+        <p:spPr>
+          <a:xfrm>
+            <a:off x="768096" y="5751576"/>
+            <a:ext cx="3383280" cy="704088"/>
+          </a:xfrm>
+          <a:prstGeom prst="rect">
+            <a:avLst/>
+          </a:prstGeom>
+          <a:noFill/>
+        </p:spPr>
+        <p:txBody>
+          <a:bodyPr wrap="square" lIns="0" rIns="0" tIns="0" bIns="0">
+            <a:spAutoFit/>
+          </a:bodyPr>
+          <a:lstStyle/>
+          <a:p>
+            <a:pPr algn="l">
+              <a:lnSpc>
+                <a:spcPct val="102000"/>
+              </a:lnSpc>
+              <a:spcBef>
+                <a:spcPts val="0"/>
+              </a:spcBef>
+              <a:spcAft>
+                <a:spcPts val="150"/>
+              </a:spcAft>
+            </a:pPr>
+            <a:r>
+              <a:rPr sz="880" b="1" i="0">
+                <a:solidFill>
+                  <a:srgbClr val="12161C"/>
+                </a:solidFill>
+                <a:latin typeface="Segoe UI"/>
+              </a:rPr>
+              <a:t>Cross-graph budget rules beat noisy local validation</a:t>
+            </a:r>
+          </a:p>
+          <a:p>
+            <a:pPr algn="l">
+              <a:lnSpc>
+                <a:spcPct val="106000"/>
+              </a:lnSpc>
+              <a:spcBef>
+                <a:spcPts val="0"/>
+              </a:spcBef>
+              <a:spcAft>
+                <a:spcPts val="0"/>
+              </a:spcAft>
+            </a:pPr>
+            <a:r>
+              <a:rPr sz="735" b="0" i="0">
+                <a:solidFill>
+                  <a:srgbClr val="333B45"/>
+                </a:solidFill>
+                <a:latin typeface="Segoe UI"/>
+              </a:rPr>
+              <a:t>Applying Cora's validation-chosen (k, s) unchanged to Citeseer Pool beats Citeseer's own validation pick at every cap ≤ 50% (44.9 vs 37.9 MRR at 25% cap) because small-graph validation is noisy.</a:t>
+            </a:r>
+          </a:p>
+        </p:txBody>
+      </p:sp>
+      <p:sp>
+        <p:nvSpPr>
+          <p:cNvPr id="61" name="TextBox 60"/>
+          <p:cNvSpPr txBox="1"/>
+          <p:nvPr/>
+        </p:nvSpPr>
+        <p:spPr>
+          <a:xfrm>
+            <a:off x="4370832" y="822960"/>
+            <a:ext cx="7589520" cy="182880"/>
+          </a:xfrm>
+          <a:prstGeom prst="rect">
+            <a:avLst/>
+          </a:prstGeom>
+          <a:noFill/>
+        </p:spPr>
+        <p:txBody>
+          <a:bodyPr wrap="square" lIns="0" rIns="0" tIns="0" bIns="0">
+            <a:spAutoFit/>
+          </a:bodyPr>
+          <a:lstStyle/>
+          <a:p>
+            <a:pPr algn="l">
+              <a:lnSpc>
+                <a:spcPct val="108000"/>
+              </a:lnSpc>
+              <a:spcBef>
+                <a:spcPts val="0"/>
+              </a:spcBef>
+              <a:spcAft>
+                <a:spcPts val="0"/>
+              </a:spcAft>
+            </a:pPr>
+            <a:r>
+              <a:rPr sz="830" b="1" i="0">
+                <a:solidFill>
+                  <a:srgbClr val="9D1B32"/>
+                </a:solidFill>
+                <a:latin typeface="Segoe UI"/>
+              </a:rPr>
+              <a:t>IV.  SHORTLIST SWEEP, PARETO FRONTIER &amp; HARD-NEGATIVE (HeaRT) REGIMES</a:t>
+            </a:r>
+          </a:p>
+        </p:txBody>
+      </p:sp>
+      <p:sp>
+        <p:nvSpPr>
+          <p:cNvPr id="62" name="Rectangle 61"/>
+          <p:cNvSpPr/>
+          <p:nvPr/>
+        </p:nvSpPr>
+        <p:spPr>
+          <a:xfrm>
+            <a:off x="4370832" y="1014984"/>
+            <a:ext cx="7589520" cy="2432304"/>
+          </a:xfrm>
+          <a:prstGeom prst="rect">
+            <a:avLst/>
+          </a:prstGeom>
+          <a:solidFill>
+            <a:srgbClr val="FFFFFF"/>
+          </a:solidFill>
+          <a:ln w="10160">
+            <a:solidFill>
+              <a:srgbClr val="DCE1E7"/>
+            </a:solidFill>
+          </a:ln>
+        </p:spPr>
+        <p:style>
+          <a:lnRef idx="1">
+            <a:schemeClr val="accent1"/>
+          </a:lnRef>
+          <a:fillRef idx="3">
+            <a:schemeClr val="accent1"/>
+          </a:fillRef>
+          <a:effectRef idx="2">
+            <a:schemeClr val="accent1"/>
+          </a:effectRef>
+          <a:fontRef idx="minor">
+            <a:schemeClr val="lt1"/>
+          </a:fontRef>
+        </p:style>
+        <p:txBody>
+          <a:bodyPr rtlCol="0" anchor="ctr"/>
+          <a:lstStyle/>
+          <a:p>
+            <a:pPr algn="ctr"/>
           </a:p>
         </p:txBody>
       </p:sp>
       <p:pic>
         <p:nvPicPr>
-          <p:cNvPr id="5" name="Picture 4" descr="fig_mid.png"/>
+          <p:cNvPr id="63" name="Picture 62" descr="fig_mid.png"/>
           <p:cNvPicPr>
             <a:picLocks noChangeAspect="1"/>
           </p:cNvPicPr>
@@ -3505,432 +6333,24 @@
         </p:blipFill>
         <p:spPr>
           <a:xfrm>
-            <a:off x="4800600" y="1188720"/>
-            <a:ext cx="7178040" cy="2534491"/>
+            <a:off x="4407408" y="1033271"/>
+            <a:ext cx="7516368" cy="2257715"/>
           </a:xfrm>
           <a:prstGeom prst="rect">
             <a:avLst/>
           </a:prstGeom>
         </p:spPr>
       </p:pic>
-      <p:graphicFrame>
-        <p:nvGraphicFramePr>
-          <p:cNvPr id="6" name="Table 5"/>
-          <p:cNvGraphicFramePr>
-            <a:graphicFrameLocks noGrp="1"/>
-          </p:cNvGraphicFramePr>
-          <p:nvPr/>
-        </p:nvGraphicFramePr>
-        <p:xfrm>
-          <a:off x="4983480" y="3840480"/>
-          <a:ext cx="6949440" cy="1737360"/>
-        </p:xfrm>
-        <a:graphic>
-          <a:graphicData uri="http://schemas.openxmlformats.org/drawingml/2006/table">
-            <a:tbl>
-              <a:tblPr firstRow="1" bandRow="1">
-                <a:tableStyleId>{5C22544A-7EE6-4342-B048-85BDC9FD1C3A}</a:tableStyleId>
-              </a:tblPr>
-              <a:tblGrid>
-                <a:gridCol w="3017520"/>
-                <a:gridCol w="1371600"/>
-                <a:gridCol w="1371600"/>
-                <a:gridCol w="1188720"/>
-              </a:tblGrid>
-              <a:tr h="289560">
-                <a:tc>
-                  <a:txBody>
-                    <a:bodyPr/>
-                    <a:lstStyle/>
-                    <a:p>
-                      <a:pPr algn="l"/>
-                      <a:r>
-                        <a:rPr sz="1050" b="1"/>
-                        <a:t>Setting (cora)</a:t>
-                      </a:r>
-                    </a:p>
-                  </a:txBody>
-                  <a:tcPr/>
-                </a:tc>
-                <a:tc>
-                  <a:txBody>
-                    <a:bodyPr/>
-                    <a:lstStyle/>
-                    <a:p>
-                      <a:pPr algn="ctr"/>
-                      <a:r>
-                        <a:rPr sz="1050" b="1"/>
-                        <a:t>test MRR</a:t>
-                      </a:r>
-                    </a:p>
-                  </a:txBody>
-                  <a:tcPr/>
-                </a:tc>
-                <a:tc>
-                  <a:txBody>
-                    <a:bodyPr/>
-                    <a:lstStyle/>
-                    <a:p>
-                      <a:pPr algn="ctr"/>
-                      <a:r>
-                        <a:rPr sz="1050" b="1"/>
-                        <a:t>valid MRR</a:t>
-                      </a:r>
-                    </a:p>
-                  </a:txBody>
-                  <a:tcPr/>
-                </a:tc>
-                <a:tc>
-                  <a:txBody>
-                    <a:bodyPr/>
-                    <a:lstStyle/>
-                    <a:p>
-                      <a:pPr algn="ctr"/>
-                      <a:r>
-                        <a:rPr sz="1050" b="1"/>
-                        <a:t>compute</a:t>
-                      </a:r>
-                    </a:p>
-                  </a:txBody>
-                  <a:tcPr/>
-                </a:tc>
-              </a:tr>
-              <a:tr h="289560">
-                <a:tc>
-                  <a:txBody>
-                    <a:bodyPr/>
-                    <a:lstStyle/>
-                    <a:p>
-                      <a:pPr algn="l"/>
-                      <a:r>
-                        <a:rPr sz="1050" b="0"/>
-                        <a:t>Adamic–Adar alone (degree tie-break)</a:t>
-                      </a:r>
-                    </a:p>
-                  </a:txBody>
-                  <a:tcPr/>
-                </a:tc>
-                <a:tc>
-                  <a:txBody>
-                    <a:bodyPr/>
-                    <a:lstStyle/>
-                    <a:p>
-                      <a:pPr algn="ctr"/>
-                      <a:r>
-                        <a:rPr sz="1050" b="0"/>
-                        <a:t>33.1</a:t>
-                      </a:r>
-                    </a:p>
-                  </a:txBody>
-                  <a:tcPr/>
-                </a:tc>
-                <a:tc>
-                  <a:txBody>
-                    <a:bodyPr/>
-                    <a:lstStyle/>
-                    <a:p>
-                      <a:pPr algn="ctr"/>
-                      <a:r>
-                        <a:rPr sz="1050" b="0"/>
-                        <a:t>38.1</a:t>
-                      </a:r>
-                    </a:p>
-                  </a:txBody>
-                  <a:tcPr/>
-                </a:tc>
-                <a:tc>
-                  <a:txBody>
-                    <a:bodyPr/>
-                    <a:lstStyle/>
-                    <a:p>
-                      <a:pPr algn="ctr"/>
-                      <a:r>
-                        <a:rPr sz="1050" b="0"/>
-                        <a:t>0%</a:t>
-                      </a:r>
-                    </a:p>
-                  </a:txBody>
-                  <a:tcPr/>
-                </a:tc>
-              </a:tr>
-              <a:tr h="289560">
-                <a:tc>
-                  <a:txBody>
-                    <a:bodyPr/>
-                    <a:lstStyle/>
-                    <a:p>
-                      <a:pPr algn="l"/>
-                      <a:r>
-                        <a:rPr sz="1050" b="1">
-                          <a:solidFill>
-                            <a:srgbClr val="A50021"/>
-                          </a:solidFill>
-                        </a:rPr>
-                        <a:t>AA top-20% → PENCIL, s = 2×5</a:t>
-                      </a:r>
-                    </a:p>
-                  </a:txBody>
-                  <a:tcPr/>
-                </a:tc>
-                <a:tc>
-                  <a:txBody>
-                    <a:bodyPr/>
-                    <a:lstStyle/>
-                    <a:p>
-                      <a:pPr algn="ctr"/>
-                      <a:r>
-                        <a:rPr sz="1050" b="1">
-                          <a:solidFill>
-                            <a:srgbClr val="A50021"/>
-                          </a:solidFill>
-                        </a:rPr>
-                        <a:t>38.4 ± 0.1</a:t>
-                      </a:r>
-                    </a:p>
-                  </a:txBody>
-                  <a:tcPr/>
-                </a:tc>
-                <a:tc>
-                  <a:txBody>
-                    <a:bodyPr/>
-                    <a:lstStyle/>
-                    <a:p>
-                      <a:pPr algn="ctr"/>
-                      <a:r>
-                        <a:rPr sz="1050" b="1">
-                          <a:solidFill>
-                            <a:srgbClr val="A50021"/>
-                          </a:solidFill>
-                        </a:rPr>
-                        <a:t>43.1 ± 0.1</a:t>
-                      </a:r>
-                    </a:p>
-                  </a:txBody>
-                  <a:tcPr/>
-                </a:tc>
-                <a:tc>
-                  <a:txBody>
-                    <a:bodyPr/>
-                    <a:lstStyle/>
-                    <a:p>
-                      <a:pPr algn="ctr"/>
-                      <a:r>
-                        <a:rPr sz="1050" b="1">
-                          <a:solidFill>
-                            <a:srgbClr val="A50021"/>
-                          </a:solidFill>
-                        </a:rPr>
-                        <a:t>7%</a:t>
-                      </a:r>
-                    </a:p>
-                  </a:txBody>
-                  <a:tcPr/>
-                </a:tc>
-              </a:tr>
-              <a:tr h="289560">
-                <a:tc>
-                  <a:txBody>
-                    <a:bodyPr/>
-                    <a:lstStyle/>
-                    <a:p>
-                      <a:pPr algn="l"/>
-                      <a:r>
-                        <a:rPr sz="1050" b="1">
-                          <a:solidFill>
-                            <a:srgbClr val="A50021"/>
-                          </a:solidFill>
-                        </a:rPr>
-                        <a:t>All → PENCIL, s = 2×10</a:t>
-                      </a:r>
-                    </a:p>
-                  </a:txBody>
-                  <a:tcPr/>
-                </a:tc>
-                <a:tc>
-                  <a:txBody>
-                    <a:bodyPr/>
-                    <a:lstStyle/>
-                    <a:p>
-                      <a:pPr algn="ctr"/>
-                      <a:r>
-                        <a:rPr sz="1050" b="1">
-                          <a:solidFill>
-                            <a:srgbClr val="A50021"/>
-                          </a:solidFill>
-                        </a:rPr>
-                        <a:t>42.9 ± 1.9</a:t>
-                      </a:r>
-                    </a:p>
-                  </a:txBody>
-                  <a:tcPr/>
-                </a:tc>
-                <a:tc>
-                  <a:txBody>
-                    <a:bodyPr/>
-                    <a:lstStyle/>
-                    <a:p>
-                      <a:pPr algn="ctr"/>
-                      <a:r>
-                        <a:rPr sz="1050" b="1">
-                          <a:solidFill>
-                            <a:srgbClr val="A50021"/>
-                          </a:solidFill>
-                        </a:rPr>
-                        <a:t>59.7 ± 0.5</a:t>
-                      </a:r>
-                    </a:p>
-                  </a:txBody>
-                  <a:tcPr/>
-                </a:tc>
-                <a:tc>
-                  <a:txBody>
-                    <a:bodyPr/>
-                    <a:lstStyle/>
-                    <a:p>
-                      <a:pPr algn="ctr"/>
-                      <a:r>
-                        <a:rPr sz="1050" b="1">
-                          <a:solidFill>
-                            <a:srgbClr val="A50021"/>
-                          </a:solidFill>
-                        </a:rPr>
-                        <a:t>67%</a:t>
-                      </a:r>
-                    </a:p>
-                  </a:txBody>
-                  <a:tcPr/>
-                </a:tc>
-              </a:tr>
-              <a:tr h="289560">
-                <a:tc>
-                  <a:txBody>
-                    <a:bodyPr/>
-                    <a:lstStyle/>
-                    <a:p>
-                      <a:pPr algn="l"/>
-                      <a:r>
-                        <a:rPr sz="1050" b="0"/>
-                        <a:t>All → PENCIL, s = 2×5</a:t>
-                      </a:r>
-                    </a:p>
-                  </a:txBody>
-                  <a:tcPr/>
-                </a:tc>
-                <a:tc>
-                  <a:txBody>
-                    <a:bodyPr/>
-                    <a:lstStyle/>
-                    <a:p>
-                      <a:pPr algn="ctr"/>
-                      <a:r>
-                        <a:rPr sz="1050" b="0"/>
-                        <a:t>42.9 ± 4.1</a:t>
-                      </a:r>
-                    </a:p>
-                  </a:txBody>
-                  <a:tcPr/>
-                </a:tc>
-                <a:tc>
-                  <a:txBody>
-                    <a:bodyPr/>
-                    <a:lstStyle/>
-                    <a:p>
-                      <a:pPr algn="ctr"/>
-                      <a:r>
-                        <a:rPr sz="1050" b="0"/>
-                        <a:t>52.4 ± 2.8</a:t>
-                      </a:r>
-                    </a:p>
-                  </a:txBody>
-                  <a:tcPr/>
-                </a:tc>
-                <a:tc>
-                  <a:txBody>
-                    <a:bodyPr/>
-                    <a:lstStyle/>
-                    <a:p>
-                      <a:pPr algn="ctr"/>
-                      <a:r>
-                        <a:rPr sz="1050" b="0"/>
-                        <a:t>36%</a:t>
-                      </a:r>
-                    </a:p>
-                  </a:txBody>
-                  <a:tcPr/>
-                </a:tc>
-              </a:tr>
-              <a:tr h="289560">
-                <a:tc>
-                  <a:txBody>
-                    <a:bodyPr/>
-                    <a:lstStyle/>
-                    <a:p>
-                      <a:pPr algn="l"/>
-                      <a:r>
-                        <a:rPr sz="1050" b="0"/>
-                        <a:t>Full PENCIL (official s = 2×20)</a:t>
-                      </a:r>
-                    </a:p>
-                  </a:txBody>
-                  <a:tcPr/>
-                </a:tc>
-                <a:tc>
-                  <a:txBody>
-                    <a:bodyPr/>
-                    <a:lstStyle/>
-                    <a:p>
-                      <a:pPr algn="ctr"/>
-                      <a:r>
-                        <a:rPr sz="1050" b="0"/>
-                        <a:t>43.7 ± 0.9</a:t>
-                      </a:r>
-                    </a:p>
-                  </a:txBody>
-                  <a:tcPr/>
-                </a:tc>
-                <a:tc>
-                  <a:txBody>
-                    <a:bodyPr/>
-                    <a:lstStyle/>
-                    <a:p>
-                      <a:pPr algn="ctr"/>
-                      <a:r>
-                        <a:rPr sz="1050" b="0"/>
-                        <a:t>59.8 ± 0.3</a:t>
-                      </a:r>
-                    </a:p>
-                  </a:txBody>
-                  <a:tcPr/>
-                </a:tc>
-                <a:tc>
-                  <a:txBody>
-                    <a:bodyPr/>
-                    <a:lstStyle/>
-                    <a:p>
-                      <a:pPr algn="ctr"/>
-                      <a:r>
-                        <a:rPr sz="1050" b="0"/>
-                        <a:t>100%</a:t>
-                      </a:r>
-                    </a:p>
-                  </a:txBody>
-                  <a:tcPr/>
-                </a:tc>
-              </a:tr>
-            </a:tbl>
-          </a:graphicData>
-        </a:graphic>
-      </p:graphicFrame>
-      <p:sp>
-        <p:nvSpPr>
-          <p:cNvPr id="7" name="TextBox 6"/>
+      <p:sp>
+        <p:nvSpPr>
+          <p:cNvPr id="64" name="TextBox 63"/>
           <p:cNvSpPr txBox="1"/>
           <p:nvPr/>
         </p:nvSpPr>
         <p:spPr>
           <a:xfrm>
-            <a:off x="4983480" y="5669280"/>
-            <a:ext cx="6949440" cy="1097280"/>
+            <a:off x="4370832" y="3511296"/>
+            <a:ext cx="7589520" cy="182880"/>
           </a:xfrm>
           <a:prstGeom prst="rect">
             <a:avLst/>
@@ -3938,23 +6358,2661 @@
           <a:noFill/>
         </p:spPr>
         <p:txBody>
-          <a:bodyPr wrap="square">
+          <a:bodyPr wrap="square" lIns="0" rIns="0" tIns="0" bIns="0">
             <a:spAutoFit/>
           </a:bodyPr>
           <a:lstStyle/>
           <a:p>
-            <a:pPr>
+            <a:pPr algn="l">
+              <a:lnSpc>
+                <a:spcPct val="108000"/>
+              </a:lnSpc>
+              <a:spcBef>
+                <a:spcPts val="0"/>
+              </a:spcBef>
+              <a:spcAft>
+                <a:spcPts val="0"/>
+              </a:spcAft>
+            </a:pPr>
+            <a:r>
+              <a:rPr sz="830" b="1" i="0">
+                <a:solidFill>
+                  <a:srgbClr val="9D1B32"/>
+                </a:solidFill>
+                <a:latin typeface="Segoe UI"/>
+              </a:rPr>
+              <a:t>V.  VALIDATION-SELECTED OPERATING POINTS &amp; CROSS-GRAPH TRANSFER  (TEST MRR ×100, MEAN ± STD)</a:t>
+            </a:r>
+          </a:p>
+        </p:txBody>
+      </p:sp>
+      <p:sp>
+        <p:nvSpPr>
+          <p:cNvPr id="65" name="Rectangle 64"/>
+          <p:cNvSpPr/>
+          <p:nvPr/>
+        </p:nvSpPr>
+        <p:spPr>
+          <a:xfrm>
+            <a:off x="4370832" y="3703320"/>
+            <a:ext cx="7589520" cy="329184"/>
+          </a:xfrm>
+          <a:prstGeom prst="rect">
+            <a:avLst/>
+          </a:prstGeom>
+          <a:solidFill>
+            <a:srgbClr val="1F3A5F"/>
+          </a:solidFill>
+          <a:ln>
+            <a:noFill/>
+          </a:ln>
+        </p:spPr>
+        <p:style>
+          <a:lnRef idx="1">
+            <a:schemeClr val="accent1"/>
+          </a:lnRef>
+          <a:fillRef idx="3">
+            <a:schemeClr val="accent1"/>
+          </a:fillRef>
+          <a:effectRef idx="2">
+            <a:schemeClr val="accent1"/>
+          </a:effectRef>
+          <a:fontRef idx="minor">
+            <a:schemeClr val="lt1"/>
+          </a:fontRef>
+        </p:style>
+        <p:txBody>
+          <a:bodyPr rtlCol="0" anchor="ctr"/>
+          <a:lstStyle/>
+          <a:p>
+            <a:pPr algn="ctr"/>
+          </a:p>
+        </p:txBody>
+      </p:sp>
+      <p:sp>
+        <p:nvSpPr>
+          <p:cNvPr id="66" name="TextBox 65"/>
+          <p:cNvSpPr txBox="1"/>
+          <p:nvPr/>
+        </p:nvSpPr>
+        <p:spPr>
+          <a:xfrm>
+            <a:off x="4425696" y="3739896"/>
+            <a:ext cx="2322576" cy="274320"/>
+          </a:xfrm>
+          <a:prstGeom prst="rect">
+            <a:avLst/>
+          </a:prstGeom>
+          <a:noFill/>
+        </p:spPr>
+        <p:txBody>
+          <a:bodyPr wrap="square" lIns="0" rIns="0" tIns="0" bIns="0">
+            <a:spAutoFit/>
+          </a:bodyPr>
+          <a:lstStyle/>
+          <a:p>
+            <a:pPr algn="l">
+              <a:lnSpc>
+                <a:spcPct val="100000"/>
+              </a:lnSpc>
+              <a:spcBef>
+                <a:spcPts val="0"/>
+              </a:spcBef>
+              <a:spcAft>
+                <a:spcPts val="0"/>
+              </a:spcAft>
+            </a:pPr>
+            <a:r>
+              <a:rPr sz="760" b="1" i="0">
+                <a:solidFill>
+                  <a:srgbClr val="FFFFFF"/>
+                </a:solidFill>
+                <a:latin typeface="Segoe UI"/>
+              </a:rPr>
+              <a:t>Operating Point / Policy</a:t>
+            </a:r>
+          </a:p>
+        </p:txBody>
+      </p:sp>
+      <p:sp>
+        <p:nvSpPr>
+          <p:cNvPr id="67" name="TextBox 66"/>
+          <p:cNvSpPr txBox="1"/>
+          <p:nvPr/>
+        </p:nvSpPr>
+        <p:spPr>
+          <a:xfrm>
+            <a:off x="6858000" y="3739896"/>
+            <a:ext cx="1133856" cy="274320"/>
+          </a:xfrm>
+          <a:prstGeom prst="rect">
+            <a:avLst/>
+          </a:prstGeom>
+          <a:noFill/>
+        </p:spPr>
+        <p:txBody>
+          <a:bodyPr wrap="square" lIns="0" rIns="0" tIns="0" bIns="0">
+            <a:spAutoFit/>
+          </a:bodyPr>
+          <a:lstStyle/>
+          <a:p>
+            <a:pPr algn="ctr">
+              <a:lnSpc>
+                <a:spcPct val="100000"/>
+              </a:lnSpc>
+              <a:spcBef>
+                <a:spcPts val="0"/>
+              </a:spcBef>
+              <a:spcAft>
+                <a:spcPts val="0"/>
+              </a:spcAft>
+            </a:pPr>
+            <a:r>
+              <a:rPr sz="760" b="1" i="0">
+                <a:solidFill>
+                  <a:srgbClr val="FFFFFF"/>
+                </a:solidFill>
+                <a:latin typeface="Segoe UI"/>
+              </a:rPr>
+              <a:t>Cora Pool
+(527 shared neg)</a:t>
+            </a:r>
+          </a:p>
+        </p:txBody>
+      </p:sp>
+      <p:sp>
+        <p:nvSpPr>
+          <p:cNvPr id="68" name="TextBox 67"/>
+          <p:cNvSpPr txBox="1"/>
+          <p:nvPr/>
+        </p:nvSpPr>
+        <p:spPr>
+          <a:xfrm>
+            <a:off x="8101584" y="3739896"/>
+            <a:ext cx="1207007" cy="274320"/>
+          </a:xfrm>
+          <a:prstGeom prst="rect">
+            <a:avLst/>
+          </a:prstGeom>
+          <a:noFill/>
+        </p:spPr>
+        <p:txBody>
+          <a:bodyPr wrap="square" lIns="0" rIns="0" tIns="0" bIns="0">
+            <a:spAutoFit/>
+          </a:bodyPr>
+          <a:lstStyle/>
+          <a:p>
+            <a:pPr algn="ctr">
+              <a:lnSpc>
+                <a:spcPct val="100000"/>
+              </a:lnSpc>
+              <a:spcBef>
+                <a:spcPts val="0"/>
+              </a:spcBef>
+              <a:spcAft>
+                <a:spcPts val="0"/>
+              </a:spcAft>
+            </a:pPr>
+            <a:r>
+              <a:rPr sz="760" b="1" i="0">
+                <a:solidFill>
+                  <a:srgbClr val="FFFFFF"/>
+                </a:solidFill>
+                <a:latin typeface="Segoe UI"/>
+              </a:rPr>
+              <a:t>Citeseer Pool
+(455 shared neg)</a:t>
+            </a:r>
+          </a:p>
+        </p:txBody>
+      </p:sp>
+      <p:sp>
+        <p:nvSpPr>
+          <p:cNvPr id="69" name="TextBox 68"/>
+          <p:cNvSpPr txBox="1"/>
+          <p:nvPr/>
+        </p:nvSpPr>
+        <p:spPr>
+          <a:xfrm>
+            <a:off x="9418320" y="3739896"/>
+            <a:ext cx="1170431" cy="274320"/>
+          </a:xfrm>
+          <a:prstGeom prst="rect">
+            <a:avLst/>
+          </a:prstGeom>
+          <a:noFill/>
+        </p:spPr>
+        <p:txBody>
+          <a:bodyPr wrap="square" lIns="0" rIns="0" tIns="0" bIns="0">
+            <a:spAutoFit/>
+          </a:bodyPr>
+          <a:lstStyle/>
+          <a:p>
+            <a:pPr algn="ctr">
+              <a:lnSpc>
+                <a:spcPct val="100000"/>
+              </a:lnSpc>
+              <a:spcBef>
+                <a:spcPts val="0"/>
+              </a:spcBef>
+              <a:spcAft>
+                <a:spcPts val="0"/>
+              </a:spcAft>
+            </a:pPr>
+            <a:r>
+              <a:rPr sz="760" b="1" i="0">
+                <a:solidFill>
+                  <a:srgbClr val="FFFFFF"/>
+                </a:solidFill>
+                <a:latin typeface="Segoe UI"/>
+              </a:rPr>
+              <a:t>Cora HeaRT
+(500 hard/query)</a:t>
+            </a:r>
+          </a:p>
+        </p:txBody>
+      </p:sp>
+      <p:sp>
+        <p:nvSpPr>
+          <p:cNvPr id="70" name="TextBox 69"/>
+          <p:cNvSpPr txBox="1"/>
+          <p:nvPr/>
+        </p:nvSpPr>
+        <p:spPr>
+          <a:xfrm>
+            <a:off x="10698480" y="3739896"/>
+            <a:ext cx="1207007" cy="274320"/>
+          </a:xfrm>
+          <a:prstGeom prst="rect">
+            <a:avLst/>
+          </a:prstGeom>
+          <a:noFill/>
+        </p:spPr>
+        <p:txBody>
+          <a:bodyPr wrap="square" lIns="0" rIns="0" tIns="0" bIns="0">
+            <a:spAutoFit/>
+          </a:bodyPr>
+          <a:lstStyle/>
+          <a:p>
+            <a:pPr algn="ctr">
+              <a:lnSpc>
+                <a:spcPct val="100000"/>
+              </a:lnSpc>
+              <a:spcBef>
+                <a:spcPts val="0"/>
+              </a:spcBef>
+              <a:spcAft>
+                <a:spcPts val="0"/>
+              </a:spcAft>
+            </a:pPr>
+            <a:r>
+              <a:rPr sz="760" b="1" i="0">
+                <a:solidFill>
+                  <a:srgbClr val="FFFFFF"/>
+                </a:solidFill>
+                <a:latin typeface="Segoe UI"/>
+              </a:rPr>
+              <a:t>Citeseer HeaRT
+(500 hard/query)</a:t>
+            </a:r>
+          </a:p>
+        </p:txBody>
+      </p:sp>
+      <p:sp>
+        <p:nvSpPr>
+          <p:cNvPr id="71" name="Rectangle 70"/>
+          <p:cNvSpPr/>
+          <p:nvPr/>
+        </p:nvSpPr>
+        <p:spPr>
+          <a:xfrm>
+            <a:off x="4370832" y="4032504"/>
+            <a:ext cx="7589520" cy="288036"/>
+          </a:xfrm>
+          <a:prstGeom prst="rect">
+            <a:avLst/>
+          </a:prstGeom>
+          <a:solidFill>
+            <a:srgbClr val="FFFFFF"/>
+          </a:solidFill>
+          <a:ln>
+            <a:noFill/>
+          </a:ln>
+        </p:spPr>
+        <p:style>
+          <a:lnRef idx="1">
+            <a:schemeClr val="accent1"/>
+          </a:lnRef>
+          <a:fillRef idx="3">
+            <a:schemeClr val="accent1"/>
+          </a:fillRef>
+          <a:effectRef idx="2">
+            <a:schemeClr val="accent1"/>
+          </a:effectRef>
+          <a:fontRef idx="minor">
+            <a:schemeClr val="lt1"/>
+          </a:fontRef>
+        </p:style>
+        <p:txBody>
+          <a:bodyPr rtlCol="0" anchor="ctr"/>
+          <a:lstStyle/>
+          <a:p>
+            <a:pPr algn="ctr"/>
+          </a:p>
+        </p:txBody>
+      </p:sp>
+      <p:sp>
+        <p:nvSpPr>
+          <p:cNvPr id="72" name="Rectangle 71"/>
+          <p:cNvSpPr/>
+          <p:nvPr/>
+        </p:nvSpPr>
+        <p:spPr>
+          <a:xfrm>
+            <a:off x="4370832" y="4311396"/>
+            <a:ext cx="7589520" cy="9144"/>
+          </a:xfrm>
+          <a:prstGeom prst="rect">
+            <a:avLst/>
+          </a:prstGeom>
+          <a:solidFill>
+            <a:srgbClr val="DCE1E7"/>
+          </a:solidFill>
+          <a:ln>
+            <a:noFill/>
+          </a:ln>
+        </p:spPr>
+        <p:style>
+          <a:lnRef idx="1">
+            <a:schemeClr val="accent1"/>
+          </a:lnRef>
+          <a:fillRef idx="3">
+            <a:schemeClr val="accent1"/>
+          </a:fillRef>
+          <a:effectRef idx="2">
+            <a:schemeClr val="accent1"/>
+          </a:effectRef>
+          <a:fontRef idx="minor">
+            <a:schemeClr val="lt1"/>
+          </a:fontRef>
+        </p:style>
+        <p:txBody>
+          <a:bodyPr rtlCol="0" anchor="ctr"/>
+          <a:lstStyle/>
+          <a:p>
+            <a:pPr algn="ctr"/>
+          </a:p>
+        </p:txBody>
+      </p:sp>
+      <p:sp>
+        <p:nvSpPr>
+          <p:cNvPr id="73" name="TextBox 72"/>
+          <p:cNvSpPr txBox="1"/>
+          <p:nvPr/>
+        </p:nvSpPr>
+        <p:spPr>
+          <a:xfrm>
+            <a:off x="4434840" y="4087368"/>
+            <a:ext cx="2304288" cy="214884"/>
+          </a:xfrm>
+          <a:prstGeom prst="rect">
+            <a:avLst/>
+          </a:prstGeom>
+          <a:noFill/>
+        </p:spPr>
+        <p:txBody>
+          <a:bodyPr wrap="square" lIns="0" rIns="0" tIns="0" bIns="0">
+            <a:spAutoFit/>
+          </a:bodyPr>
+          <a:lstStyle/>
+          <a:p>
+            <a:pPr algn="l">
+              <a:lnSpc>
+                <a:spcPct val="100000"/>
+              </a:lnSpc>
+              <a:spcBef>
+                <a:spcPts val="0"/>
+              </a:spcBef>
+              <a:spcAft>
+                <a:spcPts val="0"/>
+              </a:spcAft>
+            </a:pPr>
+            <a:r>
+              <a:rPr sz="760" b="0" i="0">
+                <a:solidFill>
+                  <a:srgbClr val="12161C"/>
+                </a:solidFill>
+                <a:latin typeface="Segoe UI"/>
+              </a:rPr>
+              <a:t>Chance level (random ranking)</a:t>
+            </a:r>
+          </a:p>
+        </p:txBody>
+      </p:sp>
+      <p:sp>
+        <p:nvSpPr>
+          <p:cNvPr id="74" name="TextBox 73"/>
+          <p:cNvSpPr txBox="1"/>
+          <p:nvPr/>
+        </p:nvSpPr>
+        <p:spPr>
+          <a:xfrm>
+            <a:off x="6867144" y="4087368"/>
+            <a:ext cx="1115568" cy="214884"/>
+          </a:xfrm>
+          <a:prstGeom prst="rect">
+            <a:avLst/>
+          </a:prstGeom>
+          <a:noFill/>
+        </p:spPr>
+        <p:txBody>
+          <a:bodyPr wrap="square" lIns="0" rIns="0" tIns="0" bIns="0">
+            <a:spAutoFit/>
+          </a:bodyPr>
+          <a:lstStyle/>
+          <a:p>
+            <a:pPr algn="ctr">
+              <a:lnSpc>
+                <a:spcPct val="100000"/>
+              </a:lnSpc>
+              <a:spcBef>
+                <a:spcPts val="0"/>
+              </a:spcBef>
+              <a:spcAft>
+                <a:spcPts val="0"/>
+              </a:spcAft>
+            </a:pPr>
+            <a:r>
+              <a:rPr sz="750" b="0" i="0">
+                <a:solidFill>
+                  <a:srgbClr val="333B45"/>
+                </a:solidFill>
+                <a:latin typeface="Consolas"/>
+              </a:rPr>
+              <a:t>1.3</a:t>
+            </a:r>
+          </a:p>
+        </p:txBody>
+      </p:sp>
+      <p:sp>
+        <p:nvSpPr>
+          <p:cNvPr id="75" name="TextBox 74"/>
+          <p:cNvSpPr txBox="1"/>
+          <p:nvPr/>
+        </p:nvSpPr>
+        <p:spPr>
+          <a:xfrm>
+            <a:off x="8110728" y="4087368"/>
+            <a:ext cx="1188719" cy="214884"/>
+          </a:xfrm>
+          <a:prstGeom prst="rect">
+            <a:avLst/>
+          </a:prstGeom>
+          <a:noFill/>
+        </p:spPr>
+        <p:txBody>
+          <a:bodyPr wrap="square" lIns="0" rIns="0" tIns="0" bIns="0">
+            <a:spAutoFit/>
+          </a:bodyPr>
+          <a:lstStyle/>
+          <a:p>
+            <a:pPr algn="ctr">
+              <a:lnSpc>
+                <a:spcPct val="100000"/>
+              </a:lnSpc>
+              <a:spcBef>
+                <a:spcPts val="0"/>
+              </a:spcBef>
+              <a:spcAft>
+                <a:spcPts val="0"/>
+              </a:spcAft>
+            </a:pPr>
+            <a:r>
+              <a:rPr sz="750" b="0" i="0">
+                <a:solidFill>
+                  <a:srgbClr val="333B45"/>
+                </a:solidFill>
+                <a:latin typeface="Consolas"/>
+              </a:rPr>
+              <a:t>1.5</a:t>
+            </a:r>
+          </a:p>
+        </p:txBody>
+      </p:sp>
+      <p:sp>
+        <p:nvSpPr>
+          <p:cNvPr id="76" name="TextBox 75"/>
+          <p:cNvSpPr txBox="1"/>
+          <p:nvPr/>
+        </p:nvSpPr>
+        <p:spPr>
+          <a:xfrm>
+            <a:off x="9427464" y="4087368"/>
+            <a:ext cx="1152143" cy="214884"/>
+          </a:xfrm>
+          <a:prstGeom prst="rect">
+            <a:avLst/>
+          </a:prstGeom>
+          <a:noFill/>
+        </p:spPr>
+        <p:txBody>
+          <a:bodyPr wrap="square" lIns="0" rIns="0" tIns="0" bIns="0">
+            <a:spAutoFit/>
+          </a:bodyPr>
+          <a:lstStyle/>
+          <a:p>
+            <a:pPr algn="ctr">
+              <a:lnSpc>
+                <a:spcPct val="100000"/>
+              </a:lnSpc>
+              <a:spcBef>
+                <a:spcPts val="0"/>
+              </a:spcBef>
+              <a:spcAft>
+                <a:spcPts val="0"/>
+              </a:spcAft>
+            </a:pPr>
+            <a:r>
+              <a:rPr sz="750" b="0" i="0">
+                <a:solidFill>
+                  <a:srgbClr val="333B45"/>
+                </a:solidFill>
+                <a:latin typeface="Consolas"/>
+              </a:rPr>
+              <a:t>1.4</a:t>
+            </a:r>
+          </a:p>
+        </p:txBody>
+      </p:sp>
+      <p:sp>
+        <p:nvSpPr>
+          <p:cNvPr id="77" name="TextBox 76"/>
+          <p:cNvSpPr txBox="1"/>
+          <p:nvPr/>
+        </p:nvSpPr>
+        <p:spPr>
+          <a:xfrm>
+            <a:off x="10707624" y="4087368"/>
+            <a:ext cx="1188719" cy="214884"/>
+          </a:xfrm>
+          <a:prstGeom prst="rect">
+            <a:avLst/>
+          </a:prstGeom>
+          <a:noFill/>
+        </p:spPr>
+        <p:txBody>
+          <a:bodyPr wrap="square" lIns="0" rIns="0" tIns="0" bIns="0">
+            <a:spAutoFit/>
+          </a:bodyPr>
+          <a:lstStyle/>
+          <a:p>
+            <a:pPr algn="ctr">
+              <a:lnSpc>
+                <a:spcPct val="100000"/>
+              </a:lnSpc>
+              <a:spcBef>
+                <a:spcPts val="0"/>
+              </a:spcBef>
+              <a:spcAft>
+                <a:spcPts val="0"/>
+              </a:spcAft>
+            </a:pPr>
+            <a:r>
+              <a:rPr sz="750" b="0" i="0">
+                <a:solidFill>
+                  <a:srgbClr val="333B45"/>
+                </a:solidFill>
+                <a:latin typeface="Consolas"/>
+              </a:rPr>
+              <a:t>1.4</a:t>
+            </a:r>
+          </a:p>
+        </p:txBody>
+      </p:sp>
+      <p:sp>
+        <p:nvSpPr>
+          <p:cNvPr id="78" name="Rectangle 77"/>
+          <p:cNvSpPr/>
+          <p:nvPr/>
+        </p:nvSpPr>
+        <p:spPr>
+          <a:xfrm>
+            <a:off x="4370832" y="4320540"/>
+            <a:ext cx="7589520" cy="288036"/>
+          </a:xfrm>
+          <a:prstGeom prst="rect">
+            <a:avLst/>
+          </a:prstGeom>
+          <a:solidFill>
+            <a:srgbClr val="FFFFFF"/>
+          </a:solidFill>
+          <a:ln>
+            <a:noFill/>
+          </a:ln>
+        </p:spPr>
+        <p:style>
+          <a:lnRef idx="1">
+            <a:schemeClr val="accent1"/>
+          </a:lnRef>
+          <a:fillRef idx="3">
+            <a:schemeClr val="accent1"/>
+          </a:fillRef>
+          <a:effectRef idx="2">
+            <a:schemeClr val="accent1"/>
+          </a:effectRef>
+          <a:fontRef idx="minor">
+            <a:schemeClr val="lt1"/>
+          </a:fontRef>
+        </p:style>
+        <p:txBody>
+          <a:bodyPr rtlCol="0" anchor="ctr"/>
+          <a:lstStyle/>
+          <a:p>
+            <a:pPr algn="ctr"/>
+          </a:p>
+        </p:txBody>
+      </p:sp>
+      <p:sp>
+        <p:nvSpPr>
+          <p:cNvPr id="79" name="Rectangle 78"/>
+          <p:cNvSpPr/>
+          <p:nvPr/>
+        </p:nvSpPr>
+        <p:spPr>
+          <a:xfrm>
+            <a:off x="4370832" y="4599432"/>
+            <a:ext cx="7589520" cy="9144"/>
+          </a:xfrm>
+          <a:prstGeom prst="rect">
+            <a:avLst/>
+          </a:prstGeom>
+          <a:solidFill>
+            <a:srgbClr val="DCE1E7"/>
+          </a:solidFill>
+          <a:ln>
+            <a:noFill/>
+          </a:ln>
+        </p:spPr>
+        <p:style>
+          <a:lnRef idx="1">
+            <a:schemeClr val="accent1"/>
+          </a:lnRef>
+          <a:fillRef idx="3">
+            <a:schemeClr val="accent1"/>
+          </a:fillRef>
+          <a:effectRef idx="2">
+            <a:schemeClr val="accent1"/>
+          </a:effectRef>
+          <a:fontRef idx="minor">
+            <a:schemeClr val="lt1"/>
+          </a:fontRef>
+        </p:style>
+        <p:txBody>
+          <a:bodyPr rtlCol="0" anchor="ctr"/>
+          <a:lstStyle/>
+          <a:p>
+            <a:pPr algn="ctr"/>
+          </a:p>
+        </p:txBody>
+      </p:sp>
+      <p:sp>
+        <p:nvSpPr>
+          <p:cNvPr id="80" name="TextBox 79"/>
+          <p:cNvSpPr txBox="1"/>
+          <p:nvPr/>
+        </p:nvSpPr>
+        <p:spPr>
+          <a:xfrm>
+            <a:off x="4434840" y="4375404"/>
+            <a:ext cx="2304288" cy="214884"/>
+          </a:xfrm>
+          <a:prstGeom prst="rect">
+            <a:avLst/>
+          </a:prstGeom>
+          <a:noFill/>
+        </p:spPr>
+        <p:txBody>
+          <a:bodyPr wrap="square" lIns="0" rIns="0" tIns="0" bIns="0">
+            <a:spAutoFit/>
+          </a:bodyPr>
+          <a:lstStyle/>
+          <a:p>
+            <a:pPr algn="l">
+              <a:lnSpc>
+                <a:spcPct val="100000"/>
+              </a:lnSpc>
+              <a:spcBef>
+                <a:spcPts val="0"/>
+              </a:spcBef>
+              <a:spcAft>
+                <a:spcPts val="0"/>
+              </a:spcAft>
+            </a:pPr>
+            <a:r>
+              <a:rPr sz="760" b="0" i="0">
+                <a:solidFill>
+                  <a:srgbClr val="12161C"/>
+                </a:solidFill>
+                <a:latin typeface="Segoe UI"/>
+              </a:rPr>
+              <a:t>Adamic–Adar (AA) alone  [0% GPU, &lt;1 ms CPU]</a:t>
+            </a:r>
+          </a:p>
+        </p:txBody>
+      </p:sp>
+      <p:sp>
+        <p:nvSpPr>
+          <p:cNvPr id="81" name="TextBox 80"/>
+          <p:cNvSpPr txBox="1"/>
+          <p:nvPr/>
+        </p:nvSpPr>
+        <p:spPr>
+          <a:xfrm>
+            <a:off x="6867144" y="4375404"/>
+            <a:ext cx="1115568" cy="214884"/>
+          </a:xfrm>
+          <a:prstGeom prst="rect">
+            <a:avLst/>
+          </a:prstGeom>
+          <a:noFill/>
+        </p:spPr>
+        <p:txBody>
+          <a:bodyPr wrap="square" lIns="0" rIns="0" tIns="0" bIns="0">
+            <a:spAutoFit/>
+          </a:bodyPr>
+          <a:lstStyle/>
+          <a:p>
+            <a:pPr algn="ctr">
+              <a:lnSpc>
+                <a:spcPct val="100000"/>
+              </a:lnSpc>
+              <a:spcBef>
+                <a:spcPts val="0"/>
+              </a:spcBef>
+              <a:spcAft>
+                <a:spcPts val="0"/>
+              </a:spcAft>
+            </a:pPr>
+            <a:r>
+              <a:rPr sz="750" b="0" i="0">
+                <a:solidFill>
+                  <a:srgbClr val="333B45"/>
+                </a:solidFill>
+                <a:latin typeface="Consolas"/>
+              </a:rPr>
+              <a:t>33.1  (31.9 avg)</a:t>
+            </a:r>
+          </a:p>
+        </p:txBody>
+      </p:sp>
+      <p:sp>
+        <p:nvSpPr>
+          <p:cNvPr id="82" name="TextBox 81"/>
+          <p:cNvSpPr txBox="1"/>
+          <p:nvPr/>
+        </p:nvSpPr>
+        <p:spPr>
+          <a:xfrm>
+            <a:off x="8110728" y="4375404"/>
+            <a:ext cx="1188719" cy="214884"/>
+          </a:xfrm>
+          <a:prstGeom prst="rect">
+            <a:avLst/>
+          </a:prstGeom>
+          <a:noFill/>
+        </p:spPr>
+        <p:txBody>
+          <a:bodyPr wrap="square" lIns="0" rIns="0" tIns="0" bIns="0">
+            <a:spAutoFit/>
+          </a:bodyPr>
+          <a:lstStyle/>
+          <a:p>
+            <a:pPr algn="ctr">
+              <a:lnSpc>
+                <a:spcPct val="100000"/>
+              </a:lnSpc>
+              <a:spcBef>
+                <a:spcPts val="0"/>
+              </a:spcBef>
+              <a:spcAft>
+                <a:spcPts val="0"/>
+              </a:spcAft>
+            </a:pPr>
+            <a:r>
+              <a:rPr sz="750" b="0" i="0">
+                <a:solidFill>
+                  <a:srgbClr val="333B45"/>
+                </a:solidFill>
+                <a:latin typeface="Consolas"/>
+              </a:rPr>
+              <a:t>31.5  (29.4 avg)</a:t>
+            </a:r>
+          </a:p>
+        </p:txBody>
+      </p:sp>
+      <p:sp>
+        <p:nvSpPr>
+          <p:cNvPr id="83" name="TextBox 82"/>
+          <p:cNvSpPr txBox="1"/>
+          <p:nvPr/>
+        </p:nvSpPr>
+        <p:spPr>
+          <a:xfrm>
+            <a:off x="9427464" y="4375404"/>
+            <a:ext cx="1152143" cy="214884"/>
+          </a:xfrm>
+          <a:prstGeom prst="rect">
+            <a:avLst/>
+          </a:prstGeom>
+          <a:noFill/>
+        </p:spPr>
+        <p:txBody>
+          <a:bodyPr wrap="square" lIns="0" rIns="0" tIns="0" bIns="0">
+            <a:spAutoFit/>
+          </a:bodyPr>
+          <a:lstStyle/>
+          <a:p>
+            <a:pPr algn="ctr">
+              <a:lnSpc>
+                <a:spcPct val="100000"/>
+              </a:lnSpc>
+              <a:spcBef>
+                <a:spcPts val="0"/>
+              </a:spcBef>
+              <a:spcAft>
+                <a:spcPts val="0"/>
+              </a:spcAft>
+            </a:pPr>
+            <a:r>
+              <a:rPr sz="750" b="0" i="0">
+                <a:solidFill>
+                  <a:srgbClr val="333B45"/>
+                </a:solidFill>
+                <a:latin typeface="Consolas"/>
+              </a:rPr>
+              <a:t>12.0  (11.9 avg)</a:t>
+            </a:r>
+          </a:p>
+        </p:txBody>
+      </p:sp>
+      <p:sp>
+        <p:nvSpPr>
+          <p:cNvPr id="84" name="TextBox 83"/>
+          <p:cNvSpPr txBox="1"/>
+          <p:nvPr/>
+        </p:nvSpPr>
+        <p:spPr>
+          <a:xfrm>
+            <a:off x="10707624" y="4375404"/>
+            <a:ext cx="1188719" cy="214884"/>
+          </a:xfrm>
+          <a:prstGeom prst="rect">
+            <a:avLst/>
+          </a:prstGeom>
+          <a:noFill/>
+        </p:spPr>
+        <p:txBody>
+          <a:bodyPr wrap="square" lIns="0" rIns="0" tIns="0" bIns="0">
+            <a:spAutoFit/>
+          </a:bodyPr>
+          <a:lstStyle/>
+          <a:p>
+            <a:pPr algn="ctr">
+              <a:lnSpc>
+                <a:spcPct val="100000"/>
+              </a:lnSpc>
+              <a:spcBef>
+                <a:spcPts val="0"/>
+              </a:spcBef>
+              <a:spcAft>
+                <a:spcPts val="0"/>
+              </a:spcAft>
+            </a:pPr>
+            <a:r>
+              <a:rPr sz="750" b="0" i="0">
+                <a:solidFill>
+                  <a:srgbClr val="333B45"/>
+                </a:solidFill>
+                <a:latin typeface="Consolas"/>
+              </a:rPr>
+              <a:t>11.0  (10.8 avg)</a:t>
+            </a:r>
+          </a:p>
+        </p:txBody>
+      </p:sp>
+      <p:sp>
+        <p:nvSpPr>
+          <p:cNvPr id="85" name="Rectangle 84"/>
+          <p:cNvSpPr/>
+          <p:nvPr/>
+        </p:nvSpPr>
+        <p:spPr>
+          <a:xfrm>
+            <a:off x="4370832" y="4608576"/>
+            <a:ext cx="7589520" cy="288036"/>
+          </a:xfrm>
+          <a:prstGeom prst="rect">
+            <a:avLst/>
+          </a:prstGeom>
+          <a:solidFill>
+            <a:srgbClr val="F5EFE4"/>
+          </a:solidFill>
+          <a:ln>
+            <a:noFill/>
+          </a:ln>
+        </p:spPr>
+        <p:style>
+          <a:lnRef idx="1">
+            <a:schemeClr val="accent1"/>
+          </a:lnRef>
+          <a:fillRef idx="3">
+            <a:schemeClr val="accent1"/>
+          </a:fillRef>
+          <a:effectRef idx="2">
+            <a:schemeClr val="accent1"/>
+          </a:effectRef>
+          <a:fontRef idx="minor">
+            <a:schemeClr val="lt1"/>
+          </a:fontRef>
+        </p:style>
+        <p:txBody>
+          <a:bodyPr rtlCol="0" anchor="ctr"/>
+          <a:lstStyle/>
+          <a:p>
+            <a:pPr algn="ctr"/>
+          </a:p>
+        </p:txBody>
+      </p:sp>
+      <p:sp>
+        <p:nvSpPr>
+          <p:cNvPr id="86" name="Rectangle 85"/>
+          <p:cNvSpPr/>
+          <p:nvPr/>
+        </p:nvSpPr>
+        <p:spPr>
+          <a:xfrm>
+            <a:off x="4370832" y="4887468"/>
+            <a:ext cx="7589520" cy="9144"/>
+          </a:xfrm>
+          <a:prstGeom prst="rect">
+            <a:avLst/>
+          </a:prstGeom>
+          <a:solidFill>
+            <a:srgbClr val="DCE1E7"/>
+          </a:solidFill>
+          <a:ln>
+            <a:noFill/>
+          </a:ln>
+        </p:spPr>
+        <p:style>
+          <a:lnRef idx="1">
+            <a:schemeClr val="accent1"/>
+          </a:lnRef>
+          <a:fillRef idx="3">
+            <a:schemeClr val="accent1"/>
+          </a:fillRef>
+          <a:effectRef idx="2">
+            <a:schemeClr val="accent1"/>
+          </a:effectRef>
+          <a:fontRef idx="minor">
+            <a:schemeClr val="lt1"/>
+          </a:fontRef>
+        </p:style>
+        <p:txBody>
+          <a:bodyPr rtlCol="0" anchor="ctr"/>
+          <a:lstStyle/>
+          <a:p>
+            <a:pPr algn="ctr"/>
+          </a:p>
+        </p:txBody>
+      </p:sp>
+      <p:sp>
+        <p:nvSpPr>
+          <p:cNvPr id="87" name="Rectangle 86"/>
+          <p:cNvSpPr/>
+          <p:nvPr/>
+        </p:nvSpPr>
+        <p:spPr>
+          <a:xfrm>
+            <a:off x="4370832" y="4608576"/>
+            <a:ext cx="36576" cy="288036"/>
+          </a:xfrm>
+          <a:prstGeom prst="rect">
+            <a:avLst/>
+          </a:prstGeom>
+          <a:solidFill>
+            <a:srgbClr val="9D1B32"/>
+          </a:solidFill>
+          <a:ln>
+            <a:noFill/>
+          </a:ln>
+        </p:spPr>
+        <p:style>
+          <a:lnRef idx="1">
+            <a:schemeClr val="accent1"/>
+          </a:lnRef>
+          <a:fillRef idx="3">
+            <a:schemeClr val="accent1"/>
+          </a:fillRef>
+          <a:effectRef idx="2">
+            <a:schemeClr val="accent1"/>
+          </a:effectRef>
+          <a:fontRef idx="minor">
+            <a:schemeClr val="lt1"/>
+          </a:fontRef>
+        </p:style>
+        <p:txBody>
+          <a:bodyPr rtlCol="0" anchor="ctr"/>
+          <a:lstStyle/>
+          <a:p>
+            <a:pPr algn="ctr"/>
+          </a:p>
+        </p:txBody>
+      </p:sp>
+      <p:sp>
+        <p:nvSpPr>
+          <p:cNvPr id="88" name="TextBox 87"/>
+          <p:cNvSpPr txBox="1"/>
+          <p:nvPr/>
+        </p:nvSpPr>
+        <p:spPr>
+          <a:xfrm>
+            <a:off x="4434840" y="4663440"/>
+            <a:ext cx="2304288" cy="214884"/>
+          </a:xfrm>
+          <a:prstGeom prst="rect">
+            <a:avLst/>
+          </a:prstGeom>
+          <a:noFill/>
+        </p:spPr>
+        <p:txBody>
+          <a:bodyPr wrap="square" lIns="0" rIns="0" tIns="0" bIns="0">
+            <a:spAutoFit/>
+          </a:bodyPr>
+          <a:lstStyle/>
+          <a:p>
+            <a:pPr algn="l">
+              <a:lnSpc>
+                <a:spcPct val="100000"/>
+              </a:lnSpc>
+              <a:spcBef>
+                <a:spcPts val="0"/>
+              </a:spcBef>
+              <a:spcAft>
+                <a:spcPts val="0"/>
+              </a:spcAft>
+            </a:pPr>
+            <a:r>
+              <a:rPr sz="760" b="1" i="0">
+                <a:solidFill>
+                  <a:srgbClr val="12161C"/>
+                </a:solidFill>
+                <a:latin typeface="Segoe UI"/>
+              </a:rPr>
+              <a:t>★ Frugal Hybrid  [val-picked ≤ 10% GPU cap]</a:t>
+            </a:r>
+          </a:p>
+        </p:txBody>
+      </p:sp>
+      <p:sp>
+        <p:nvSpPr>
+          <p:cNvPr id="89" name="TextBox 88"/>
+          <p:cNvSpPr txBox="1"/>
+          <p:nvPr/>
+        </p:nvSpPr>
+        <p:spPr>
+          <a:xfrm>
+            <a:off x="6867144" y="4663440"/>
+            <a:ext cx="1115568" cy="214884"/>
+          </a:xfrm>
+          <a:prstGeom prst="rect">
+            <a:avLst/>
+          </a:prstGeom>
+          <a:noFill/>
+        </p:spPr>
+        <p:txBody>
+          <a:bodyPr wrap="square" lIns="0" rIns="0" tIns="0" bIns="0">
+            <a:spAutoFit/>
+          </a:bodyPr>
+          <a:lstStyle/>
+          <a:p>
+            <a:pPr algn="ctr">
+              <a:lnSpc>
+                <a:spcPct val="100000"/>
+              </a:lnSpc>
+              <a:spcBef>
+                <a:spcPts val="0"/>
+              </a:spcBef>
+              <a:spcAft>
+                <a:spcPts val="0"/>
+              </a:spcAft>
+            </a:pPr>
+            <a:r>
+              <a:rPr sz="750" b="1" i="0">
+                <a:solidFill>
+                  <a:srgbClr val="9D1B32"/>
+                </a:solidFill>
+                <a:latin typeface="Consolas"/>
+              </a:rPr>
+              <a:t>38.4 ± 0.1  (7%)</a:t>
+            </a:r>
+          </a:p>
+        </p:txBody>
+      </p:sp>
+      <p:sp>
+        <p:nvSpPr>
+          <p:cNvPr id="90" name="TextBox 89"/>
+          <p:cNvSpPr txBox="1"/>
+          <p:nvPr/>
+        </p:nvSpPr>
+        <p:spPr>
+          <a:xfrm>
+            <a:off x="8110728" y="4663440"/>
+            <a:ext cx="1188719" cy="214884"/>
+          </a:xfrm>
+          <a:prstGeom prst="rect">
+            <a:avLst/>
+          </a:prstGeom>
+          <a:noFill/>
+        </p:spPr>
+        <p:txBody>
+          <a:bodyPr wrap="square" lIns="0" rIns="0" tIns="0" bIns="0">
+            <a:spAutoFit/>
+          </a:bodyPr>
+          <a:lstStyle/>
+          <a:p>
+            <a:pPr algn="ctr">
+              <a:lnSpc>
+                <a:spcPct val="100000"/>
+              </a:lnSpc>
+              <a:spcBef>
+                <a:spcPts val="0"/>
+              </a:spcBef>
+              <a:spcAft>
+                <a:spcPts val="0"/>
+              </a:spcAft>
+            </a:pPr>
+            <a:r>
+              <a:rPr sz="750" b="1" i="0">
+                <a:solidFill>
+                  <a:srgbClr val="12161C"/>
+                </a:solidFill>
+                <a:latin typeface="Consolas"/>
+              </a:rPr>
+              <a:t>34.7 ± 2.6  (9%)</a:t>
+            </a:r>
+          </a:p>
+        </p:txBody>
+      </p:sp>
+      <p:sp>
+        <p:nvSpPr>
+          <p:cNvPr id="91" name="TextBox 90"/>
+          <p:cNvSpPr txBox="1"/>
+          <p:nvPr/>
+        </p:nvSpPr>
+        <p:spPr>
+          <a:xfrm>
+            <a:off x="9427464" y="4663440"/>
+            <a:ext cx="1152143" cy="214884"/>
+          </a:xfrm>
+          <a:prstGeom prst="rect">
+            <a:avLst/>
+          </a:prstGeom>
+          <a:noFill/>
+        </p:spPr>
+        <p:txBody>
+          <a:bodyPr wrap="square" lIns="0" rIns="0" tIns="0" bIns="0">
+            <a:spAutoFit/>
+          </a:bodyPr>
+          <a:lstStyle/>
+          <a:p>
+            <a:pPr algn="ctr">
+              <a:lnSpc>
+                <a:spcPct val="100000"/>
+              </a:lnSpc>
+              <a:spcBef>
+                <a:spcPts val="0"/>
+              </a:spcBef>
+              <a:spcAft>
+                <a:spcPts val="0"/>
+              </a:spcAft>
+            </a:pPr>
+            <a:r>
+              <a:rPr sz="750" b="1" i="0">
+                <a:solidFill>
+                  <a:srgbClr val="12161C"/>
+                </a:solidFill>
+                <a:latin typeface="Consolas"/>
+              </a:rPr>
+              <a:t>12.8 ± 0.2  (0.4%)</a:t>
+            </a:r>
+          </a:p>
+        </p:txBody>
+      </p:sp>
+      <p:sp>
+        <p:nvSpPr>
+          <p:cNvPr id="92" name="TextBox 91"/>
+          <p:cNvSpPr txBox="1"/>
+          <p:nvPr/>
+        </p:nvSpPr>
+        <p:spPr>
+          <a:xfrm>
+            <a:off x="10707624" y="4663440"/>
+            <a:ext cx="1188719" cy="214884"/>
+          </a:xfrm>
+          <a:prstGeom prst="rect">
+            <a:avLst/>
+          </a:prstGeom>
+          <a:noFill/>
+        </p:spPr>
+        <p:txBody>
+          <a:bodyPr wrap="square" lIns="0" rIns="0" tIns="0" bIns="0">
+            <a:spAutoFit/>
+          </a:bodyPr>
+          <a:lstStyle/>
+          <a:p>
+            <a:pPr algn="ctr">
+              <a:lnSpc>
+                <a:spcPct val="100000"/>
+              </a:lnSpc>
+              <a:spcBef>
+                <a:spcPts val="0"/>
+              </a:spcBef>
+              <a:spcAft>
+                <a:spcPts val="0"/>
+              </a:spcAft>
+            </a:pPr>
+            <a:r>
+              <a:rPr sz="750" b="1" i="0">
+                <a:solidFill>
+                  <a:srgbClr val="12161C"/>
+                </a:solidFill>
+                <a:latin typeface="Consolas"/>
+              </a:rPr>
+              <a:t>13.8 ± 0.5  (8%)</a:t>
+            </a:r>
+          </a:p>
+        </p:txBody>
+      </p:sp>
+      <p:sp>
+        <p:nvSpPr>
+          <p:cNvPr id="93" name="Rectangle 92"/>
+          <p:cNvSpPr/>
+          <p:nvPr/>
+        </p:nvSpPr>
+        <p:spPr>
+          <a:xfrm>
+            <a:off x="4370832" y="4896612"/>
+            <a:ext cx="7589520" cy="288036"/>
+          </a:xfrm>
+          <a:prstGeom prst="rect">
+            <a:avLst/>
+          </a:prstGeom>
+          <a:solidFill>
+            <a:srgbClr val="FFFFFF"/>
+          </a:solidFill>
+          <a:ln>
+            <a:noFill/>
+          </a:ln>
+        </p:spPr>
+        <p:style>
+          <a:lnRef idx="1">
+            <a:schemeClr val="accent1"/>
+          </a:lnRef>
+          <a:fillRef idx="3">
+            <a:schemeClr val="accent1"/>
+          </a:fillRef>
+          <a:effectRef idx="2">
+            <a:schemeClr val="accent1"/>
+          </a:effectRef>
+          <a:fontRef idx="minor">
+            <a:schemeClr val="lt1"/>
+          </a:fontRef>
+        </p:style>
+        <p:txBody>
+          <a:bodyPr rtlCol="0" anchor="ctr"/>
+          <a:lstStyle/>
+          <a:p>
+            <a:pPr algn="ctr"/>
+          </a:p>
+        </p:txBody>
+      </p:sp>
+      <p:sp>
+        <p:nvSpPr>
+          <p:cNvPr id="94" name="Rectangle 93"/>
+          <p:cNvSpPr/>
+          <p:nvPr/>
+        </p:nvSpPr>
+        <p:spPr>
+          <a:xfrm>
+            <a:off x="4370832" y="5175504"/>
+            <a:ext cx="7589520" cy="9144"/>
+          </a:xfrm>
+          <a:prstGeom prst="rect">
+            <a:avLst/>
+          </a:prstGeom>
+          <a:solidFill>
+            <a:srgbClr val="DCE1E7"/>
+          </a:solidFill>
+          <a:ln>
+            <a:noFill/>
+          </a:ln>
+        </p:spPr>
+        <p:style>
+          <a:lnRef idx="1">
+            <a:schemeClr val="accent1"/>
+          </a:lnRef>
+          <a:fillRef idx="3">
+            <a:schemeClr val="accent1"/>
+          </a:fillRef>
+          <a:effectRef idx="2">
+            <a:schemeClr val="accent1"/>
+          </a:effectRef>
+          <a:fontRef idx="minor">
+            <a:schemeClr val="lt1"/>
+          </a:fontRef>
+        </p:style>
+        <p:txBody>
+          <a:bodyPr rtlCol="0" anchor="ctr"/>
+          <a:lstStyle/>
+          <a:p>
+            <a:pPr algn="ctr"/>
+          </a:p>
+        </p:txBody>
+      </p:sp>
+      <p:sp>
+        <p:nvSpPr>
+          <p:cNvPr id="95" name="Rectangle 94"/>
+          <p:cNvSpPr/>
+          <p:nvPr/>
+        </p:nvSpPr>
+        <p:spPr>
+          <a:xfrm>
+            <a:off x="4370832" y="4896612"/>
+            <a:ext cx="36576" cy="288036"/>
+          </a:xfrm>
+          <a:prstGeom prst="rect">
+            <a:avLst/>
+          </a:prstGeom>
+          <a:solidFill>
+            <a:srgbClr val="9D1B32"/>
+          </a:solidFill>
+          <a:ln>
+            <a:noFill/>
+          </a:ln>
+        </p:spPr>
+        <p:style>
+          <a:lnRef idx="1">
+            <a:schemeClr val="accent1"/>
+          </a:lnRef>
+          <a:fillRef idx="3">
+            <a:schemeClr val="accent1"/>
+          </a:fillRef>
+          <a:effectRef idx="2">
+            <a:schemeClr val="accent1"/>
+          </a:effectRef>
+          <a:fontRef idx="minor">
+            <a:schemeClr val="lt1"/>
+          </a:fontRef>
+        </p:style>
+        <p:txBody>
+          <a:bodyPr rtlCol="0" anchor="ctr"/>
+          <a:lstStyle/>
+          <a:p>
+            <a:pPr algn="ctr"/>
+          </a:p>
+        </p:txBody>
+      </p:sp>
+      <p:sp>
+        <p:nvSpPr>
+          <p:cNvPr id="96" name="TextBox 95"/>
+          <p:cNvSpPr txBox="1"/>
+          <p:nvPr/>
+        </p:nvSpPr>
+        <p:spPr>
+          <a:xfrm>
+            <a:off x="4434840" y="4951476"/>
+            <a:ext cx="2304288" cy="214884"/>
+          </a:xfrm>
+          <a:prstGeom prst="rect">
+            <a:avLst/>
+          </a:prstGeom>
+          <a:noFill/>
+        </p:spPr>
+        <p:txBody>
+          <a:bodyPr wrap="square" lIns="0" rIns="0" tIns="0" bIns="0">
+            <a:spAutoFit/>
+          </a:bodyPr>
+          <a:lstStyle/>
+          <a:p>
+            <a:pPr algn="l">
+              <a:lnSpc>
+                <a:spcPct val="100000"/>
+              </a:lnSpc>
+              <a:spcBef>
+                <a:spcPts val="0"/>
+              </a:spcBef>
+              <a:spcAft>
+                <a:spcPts val="0"/>
+              </a:spcAft>
+            </a:pPr>
+            <a:r>
+              <a:rPr sz="760" b="1" i="0">
+                <a:solidFill>
+                  <a:srgbClr val="12161C"/>
+                </a:solidFill>
+                <a:latin typeface="Segoe UI"/>
+              </a:rPr>
+              <a:t>★ Cross-Graph Rule  [Cora → Citeseer, 25% cap]</a:t>
+            </a:r>
+          </a:p>
+        </p:txBody>
+      </p:sp>
+      <p:sp>
+        <p:nvSpPr>
+          <p:cNvPr id="97" name="TextBox 96"/>
+          <p:cNvSpPr txBox="1"/>
+          <p:nvPr/>
+        </p:nvSpPr>
+        <p:spPr>
+          <a:xfrm>
+            <a:off x="6867144" y="4951476"/>
+            <a:ext cx="1115568" cy="214884"/>
+          </a:xfrm>
+          <a:prstGeom prst="rect">
+            <a:avLst/>
+          </a:prstGeom>
+          <a:noFill/>
+        </p:spPr>
+        <p:txBody>
+          <a:bodyPr wrap="square" lIns="0" rIns="0" tIns="0" bIns="0">
+            <a:spAutoFit/>
+          </a:bodyPr>
+          <a:lstStyle/>
+          <a:p>
+            <a:pPr algn="ctr">
+              <a:lnSpc>
+                <a:spcPct val="100000"/>
+              </a:lnSpc>
+              <a:spcBef>
+                <a:spcPts val="0"/>
+              </a:spcBef>
+              <a:spcAft>
+                <a:spcPts val="0"/>
+              </a:spcAft>
+            </a:pPr>
+            <a:r>
+              <a:rPr sz="750" b="1" i="0">
+                <a:solidFill>
+                  <a:srgbClr val="12161C"/>
+                </a:solidFill>
+                <a:latin typeface="Consolas"/>
+              </a:rPr>
+              <a:t>42.0 ± 3.9  (24%)</a:t>
+            </a:r>
+          </a:p>
+        </p:txBody>
+      </p:sp>
+      <p:sp>
+        <p:nvSpPr>
+          <p:cNvPr id="98" name="TextBox 97"/>
+          <p:cNvSpPr txBox="1"/>
+          <p:nvPr/>
+        </p:nvSpPr>
+        <p:spPr>
+          <a:xfrm>
+            <a:off x="8110728" y="4951476"/>
+            <a:ext cx="1188719" cy="214884"/>
+          </a:xfrm>
+          <a:prstGeom prst="rect">
+            <a:avLst/>
+          </a:prstGeom>
+          <a:noFill/>
+        </p:spPr>
+        <p:txBody>
+          <a:bodyPr wrap="square" lIns="0" rIns="0" tIns="0" bIns="0">
+            <a:spAutoFit/>
+          </a:bodyPr>
+          <a:lstStyle/>
+          <a:p>
+            <a:pPr algn="ctr">
+              <a:lnSpc>
+                <a:spcPct val="100000"/>
+              </a:lnSpc>
+              <a:spcBef>
+                <a:spcPts val="0"/>
+              </a:spcBef>
+              <a:spcAft>
+                <a:spcPts val="0"/>
+              </a:spcAft>
+            </a:pPr>
+            <a:r>
+              <a:rPr sz="750" b="1" i="0">
+                <a:solidFill>
+                  <a:srgbClr val="9D1B32"/>
+                </a:solidFill>
+                <a:latin typeface="Consolas"/>
+              </a:rPr>
+              <a:t>44.9  (beats own 37.9)</a:t>
+            </a:r>
+          </a:p>
+        </p:txBody>
+      </p:sp>
+      <p:sp>
+        <p:nvSpPr>
+          <p:cNvPr id="99" name="TextBox 98"/>
+          <p:cNvSpPr txBox="1"/>
+          <p:nvPr/>
+        </p:nvSpPr>
+        <p:spPr>
+          <a:xfrm>
+            <a:off x="9427464" y="4951476"/>
+            <a:ext cx="1152143" cy="214884"/>
+          </a:xfrm>
+          <a:prstGeom prst="rect">
+            <a:avLst/>
+          </a:prstGeom>
+          <a:noFill/>
+        </p:spPr>
+        <p:txBody>
+          <a:bodyPr wrap="square" lIns="0" rIns="0" tIns="0" bIns="0">
+            <a:spAutoFit/>
+          </a:bodyPr>
+          <a:lstStyle/>
+          <a:p>
+            <a:pPr algn="ctr">
+              <a:lnSpc>
+                <a:spcPct val="100000"/>
+              </a:lnSpc>
+              <a:spcBef>
+                <a:spcPts val="0"/>
+              </a:spcBef>
+              <a:spcAft>
+                <a:spcPts val="0"/>
+              </a:spcAft>
+            </a:pPr>
+            <a:r>
+              <a:rPr sz="750" b="1" i="0">
+                <a:solidFill>
+                  <a:srgbClr val="12161C"/>
+                </a:solidFill>
+                <a:latin typeface="Consolas"/>
+              </a:rPr>
+              <a:t>12.9 ± 0.1  (23%)</a:t>
+            </a:r>
+          </a:p>
+        </p:txBody>
+      </p:sp>
+      <p:sp>
+        <p:nvSpPr>
+          <p:cNvPr id="100" name="TextBox 99"/>
+          <p:cNvSpPr txBox="1"/>
+          <p:nvPr/>
+        </p:nvSpPr>
+        <p:spPr>
+          <a:xfrm>
+            <a:off x="10707624" y="4951476"/>
+            <a:ext cx="1188719" cy="214884"/>
+          </a:xfrm>
+          <a:prstGeom prst="rect">
+            <a:avLst/>
+          </a:prstGeom>
+          <a:noFill/>
+        </p:spPr>
+        <p:txBody>
+          <a:bodyPr wrap="square" lIns="0" rIns="0" tIns="0" bIns="0">
+            <a:spAutoFit/>
+          </a:bodyPr>
+          <a:lstStyle/>
+          <a:p>
+            <a:pPr algn="ctr">
+              <a:lnSpc>
+                <a:spcPct val="100000"/>
+              </a:lnSpc>
+              <a:spcBef>
+                <a:spcPts val="0"/>
+              </a:spcBef>
+              <a:spcAft>
+                <a:spcPts val="0"/>
+              </a:spcAft>
+            </a:pPr>
+            <a:r>
+              <a:rPr sz="750" b="1" i="0">
+                <a:solidFill>
+                  <a:srgbClr val="12161C"/>
+                </a:solidFill>
+                <a:latin typeface="Consolas"/>
+              </a:rPr>
+              <a:t>13.8  (21% GPU)</a:t>
+            </a:r>
+          </a:p>
+        </p:txBody>
+      </p:sp>
+      <p:sp>
+        <p:nvSpPr>
+          <p:cNvPr id="101" name="Rectangle 100"/>
+          <p:cNvSpPr/>
+          <p:nvPr/>
+        </p:nvSpPr>
+        <p:spPr>
+          <a:xfrm>
+            <a:off x="4370832" y="5184648"/>
+            <a:ext cx="7589520" cy="288036"/>
+          </a:xfrm>
+          <a:prstGeom prst="rect">
+            <a:avLst/>
+          </a:prstGeom>
+          <a:solidFill>
+            <a:srgbClr val="F5EFE4"/>
+          </a:solidFill>
+          <a:ln>
+            <a:noFill/>
+          </a:ln>
+        </p:spPr>
+        <p:style>
+          <a:lnRef idx="1">
+            <a:schemeClr val="accent1"/>
+          </a:lnRef>
+          <a:fillRef idx="3">
+            <a:schemeClr val="accent1"/>
+          </a:fillRef>
+          <a:effectRef idx="2">
+            <a:schemeClr val="accent1"/>
+          </a:effectRef>
+          <a:fontRef idx="minor">
+            <a:schemeClr val="lt1"/>
+          </a:fontRef>
+        </p:style>
+        <p:txBody>
+          <a:bodyPr rtlCol="0" anchor="ctr"/>
+          <a:lstStyle/>
+          <a:p>
+            <a:pPr algn="ctr"/>
+          </a:p>
+        </p:txBody>
+      </p:sp>
+      <p:sp>
+        <p:nvSpPr>
+          <p:cNvPr id="102" name="Rectangle 101"/>
+          <p:cNvSpPr/>
+          <p:nvPr/>
+        </p:nvSpPr>
+        <p:spPr>
+          <a:xfrm>
+            <a:off x="4370832" y="5463540"/>
+            <a:ext cx="7589520" cy="9144"/>
+          </a:xfrm>
+          <a:prstGeom prst="rect">
+            <a:avLst/>
+          </a:prstGeom>
+          <a:solidFill>
+            <a:srgbClr val="DCE1E7"/>
+          </a:solidFill>
+          <a:ln>
+            <a:noFill/>
+          </a:ln>
+        </p:spPr>
+        <p:style>
+          <a:lnRef idx="1">
+            <a:schemeClr val="accent1"/>
+          </a:lnRef>
+          <a:fillRef idx="3">
+            <a:schemeClr val="accent1"/>
+          </a:fillRef>
+          <a:effectRef idx="2">
+            <a:schemeClr val="accent1"/>
+          </a:effectRef>
+          <a:fontRef idx="minor">
+            <a:schemeClr val="lt1"/>
+          </a:fontRef>
+        </p:style>
+        <p:txBody>
+          <a:bodyPr rtlCol="0" anchor="ctr"/>
+          <a:lstStyle/>
+          <a:p>
+            <a:pPr algn="ctr"/>
+          </a:p>
+        </p:txBody>
+      </p:sp>
+      <p:sp>
+        <p:nvSpPr>
+          <p:cNvPr id="103" name="Rectangle 102"/>
+          <p:cNvSpPr/>
+          <p:nvPr/>
+        </p:nvSpPr>
+        <p:spPr>
+          <a:xfrm>
+            <a:off x="4370832" y="5184648"/>
+            <a:ext cx="36576" cy="288036"/>
+          </a:xfrm>
+          <a:prstGeom prst="rect">
+            <a:avLst/>
+          </a:prstGeom>
+          <a:solidFill>
+            <a:srgbClr val="9D1B32"/>
+          </a:solidFill>
+          <a:ln>
+            <a:noFill/>
+          </a:ln>
+        </p:spPr>
+        <p:style>
+          <a:lnRef idx="1">
+            <a:schemeClr val="accent1"/>
+          </a:lnRef>
+          <a:fillRef idx="3">
+            <a:schemeClr val="accent1"/>
+          </a:fillRef>
+          <a:effectRef idx="2">
+            <a:schemeClr val="accent1"/>
+          </a:effectRef>
+          <a:fontRef idx="minor">
+            <a:schemeClr val="lt1"/>
+          </a:fontRef>
+        </p:style>
+        <p:txBody>
+          <a:bodyPr rtlCol="0" anchor="ctr"/>
+          <a:lstStyle/>
+          <a:p>
+            <a:pPr algn="ctr"/>
+          </a:p>
+        </p:txBody>
+      </p:sp>
+      <p:sp>
+        <p:nvSpPr>
+          <p:cNvPr id="104" name="TextBox 103"/>
+          <p:cNvSpPr txBox="1"/>
+          <p:nvPr/>
+        </p:nvSpPr>
+        <p:spPr>
+          <a:xfrm>
+            <a:off x="4434840" y="5239512"/>
+            <a:ext cx="2304288" cy="214884"/>
+          </a:xfrm>
+          <a:prstGeom prst="rect">
+            <a:avLst/>
+          </a:prstGeom>
+          <a:noFill/>
+        </p:spPr>
+        <p:txBody>
+          <a:bodyPr wrap="square" lIns="0" rIns="0" tIns="0" bIns="0">
+            <a:spAutoFit/>
+          </a:bodyPr>
+          <a:lstStyle/>
+          <a:p>
+            <a:pPr algn="l">
+              <a:lnSpc>
+                <a:spcPct val="100000"/>
+              </a:lnSpc>
+              <a:spcBef>
+                <a:spcPts val="0"/>
+              </a:spcBef>
+              <a:spcAft>
+                <a:spcPts val="0"/>
+              </a:spcAft>
+            </a:pPr>
+            <a:r>
+              <a:rPr sz="760" b="1" i="0">
+                <a:solidFill>
+                  <a:srgbClr val="12161C"/>
+                </a:solidFill>
+                <a:latin typeface="Segoe UI"/>
+              </a:rPr>
+              <a:t>★ Half-Fanout PENCIL  [s = 2×10, all candidates]</a:t>
+            </a:r>
+          </a:p>
+        </p:txBody>
+      </p:sp>
+      <p:sp>
+        <p:nvSpPr>
+          <p:cNvPr id="105" name="TextBox 104"/>
+          <p:cNvSpPr txBox="1"/>
+          <p:nvPr/>
+        </p:nvSpPr>
+        <p:spPr>
+          <a:xfrm>
+            <a:off x="6867144" y="5239512"/>
+            <a:ext cx="1115568" cy="214884"/>
+          </a:xfrm>
+          <a:prstGeom prst="rect">
+            <a:avLst/>
+          </a:prstGeom>
+          <a:noFill/>
+        </p:spPr>
+        <p:txBody>
+          <a:bodyPr wrap="square" lIns="0" rIns="0" tIns="0" bIns="0">
+            <a:spAutoFit/>
+          </a:bodyPr>
+          <a:lstStyle/>
+          <a:p>
+            <a:pPr algn="ctr">
+              <a:lnSpc>
+                <a:spcPct val="100000"/>
+              </a:lnSpc>
+              <a:spcBef>
+                <a:spcPts val="0"/>
+              </a:spcBef>
+              <a:spcAft>
+                <a:spcPts val="0"/>
+              </a:spcAft>
+            </a:pPr>
+            <a:r>
+              <a:rPr sz="750" b="1" i="0">
+                <a:solidFill>
+                  <a:srgbClr val="12161C"/>
+                </a:solidFill>
+                <a:latin typeface="Consolas"/>
+              </a:rPr>
+              <a:t>42.9 ± 1.9  (67%)</a:t>
+            </a:r>
+          </a:p>
+        </p:txBody>
+      </p:sp>
+      <p:sp>
+        <p:nvSpPr>
+          <p:cNvPr id="106" name="TextBox 105"/>
+          <p:cNvSpPr txBox="1"/>
+          <p:nvPr/>
+        </p:nvSpPr>
+        <p:spPr>
+          <a:xfrm>
+            <a:off x="8110728" y="5239512"/>
+            <a:ext cx="1188719" cy="214884"/>
+          </a:xfrm>
+          <a:prstGeom prst="rect">
+            <a:avLst/>
+          </a:prstGeom>
+          <a:noFill/>
+        </p:spPr>
+        <p:txBody>
+          <a:bodyPr wrap="square" lIns="0" rIns="0" tIns="0" bIns="0">
+            <a:spAutoFit/>
+          </a:bodyPr>
+          <a:lstStyle/>
+          <a:p>
+            <a:pPr algn="ctr">
+              <a:lnSpc>
+                <a:spcPct val="100000"/>
+              </a:lnSpc>
+              <a:spcBef>
+                <a:spcPts val="0"/>
+              </a:spcBef>
+              <a:spcAft>
+                <a:spcPts val="0"/>
+              </a:spcAft>
+            </a:pPr>
+            <a:r>
+              <a:rPr sz="750" b="1" i="0">
+                <a:solidFill>
+                  <a:srgbClr val="9D1B32"/>
+                </a:solidFill>
+                <a:latin typeface="Consolas"/>
+              </a:rPr>
+              <a:t>51.4 ± 0.7  (63%)</a:t>
+            </a:r>
+          </a:p>
+        </p:txBody>
+      </p:sp>
+      <p:sp>
+        <p:nvSpPr>
+          <p:cNvPr id="107" name="TextBox 106"/>
+          <p:cNvSpPr txBox="1"/>
+          <p:nvPr/>
+        </p:nvSpPr>
+        <p:spPr>
+          <a:xfrm>
+            <a:off x="9427464" y="5239512"/>
+            <a:ext cx="1152143" cy="214884"/>
+          </a:xfrm>
+          <a:prstGeom prst="rect">
+            <a:avLst/>
+          </a:prstGeom>
+          <a:noFill/>
+        </p:spPr>
+        <p:txBody>
+          <a:bodyPr wrap="square" lIns="0" rIns="0" tIns="0" bIns="0">
+            <a:spAutoFit/>
+          </a:bodyPr>
+          <a:lstStyle/>
+          <a:p>
+            <a:pPr algn="ctr">
+              <a:lnSpc>
+                <a:spcPct val="100000"/>
+              </a:lnSpc>
+              <a:spcBef>
+                <a:spcPts val="0"/>
+              </a:spcBef>
+              <a:spcAft>
+                <a:spcPts val="0"/>
+              </a:spcAft>
+            </a:pPr>
+            <a:r>
+              <a:rPr sz="750" b="1" i="0">
+                <a:solidFill>
+                  <a:srgbClr val="9D1B32"/>
+                </a:solidFill>
+                <a:latin typeface="Consolas"/>
+              </a:rPr>
+              <a:t>14.3 ± 0.0  (65%)</a:t>
+            </a:r>
+          </a:p>
+        </p:txBody>
+      </p:sp>
+      <p:sp>
+        <p:nvSpPr>
+          <p:cNvPr id="108" name="TextBox 107"/>
+          <p:cNvSpPr txBox="1"/>
+          <p:nvPr/>
+        </p:nvSpPr>
+        <p:spPr>
+          <a:xfrm>
+            <a:off x="10707624" y="5239512"/>
+            <a:ext cx="1188719" cy="214884"/>
+          </a:xfrm>
+          <a:prstGeom prst="rect">
+            <a:avLst/>
+          </a:prstGeom>
+          <a:noFill/>
+        </p:spPr>
+        <p:txBody>
+          <a:bodyPr wrap="square" lIns="0" rIns="0" tIns="0" bIns="0">
+            <a:spAutoFit/>
+          </a:bodyPr>
+          <a:lstStyle/>
+          <a:p>
+            <a:pPr algn="ctr">
+              <a:lnSpc>
+                <a:spcPct val="100000"/>
+              </a:lnSpc>
+              <a:spcBef>
+                <a:spcPts val="0"/>
+              </a:spcBef>
+              <a:spcAft>
+                <a:spcPts val="0"/>
+              </a:spcAft>
+            </a:pPr>
+            <a:r>
+              <a:rPr sz="750" b="1" i="0">
+                <a:solidFill>
+                  <a:srgbClr val="12161C"/>
+                </a:solidFill>
+                <a:latin typeface="Consolas"/>
+              </a:rPr>
+              <a:t>14.2 ± 0.0  (69%)</a:t>
+            </a:r>
+          </a:p>
+        </p:txBody>
+      </p:sp>
+      <p:sp>
+        <p:nvSpPr>
+          <p:cNvPr id="109" name="Rectangle 108"/>
+          <p:cNvSpPr/>
+          <p:nvPr/>
+        </p:nvSpPr>
+        <p:spPr>
+          <a:xfrm>
+            <a:off x="4370832" y="5472684"/>
+            <a:ext cx="7589520" cy="288036"/>
+          </a:xfrm>
+          <a:prstGeom prst="rect">
+            <a:avLst/>
+          </a:prstGeom>
+          <a:solidFill>
+            <a:srgbClr val="FFFFFF"/>
+          </a:solidFill>
+          <a:ln>
+            <a:noFill/>
+          </a:ln>
+        </p:spPr>
+        <p:style>
+          <a:lnRef idx="1">
+            <a:schemeClr val="accent1"/>
+          </a:lnRef>
+          <a:fillRef idx="3">
+            <a:schemeClr val="accent1"/>
+          </a:fillRef>
+          <a:effectRef idx="2">
+            <a:schemeClr val="accent1"/>
+          </a:effectRef>
+          <a:fontRef idx="minor">
+            <a:schemeClr val="lt1"/>
+          </a:fontRef>
+        </p:style>
+        <p:txBody>
+          <a:bodyPr rtlCol="0" anchor="ctr"/>
+          <a:lstStyle/>
+          <a:p>
+            <a:pPr algn="ctr"/>
+          </a:p>
+        </p:txBody>
+      </p:sp>
+      <p:sp>
+        <p:nvSpPr>
+          <p:cNvPr id="110" name="Rectangle 109"/>
+          <p:cNvSpPr/>
+          <p:nvPr/>
+        </p:nvSpPr>
+        <p:spPr>
+          <a:xfrm>
+            <a:off x="4370832" y="5751576"/>
+            <a:ext cx="7589520" cy="9144"/>
+          </a:xfrm>
+          <a:prstGeom prst="rect">
+            <a:avLst/>
+          </a:prstGeom>
+          <a:solidFill>
+            <a:srgbClr val="DCE1E7"/>
+          </a:solidFill>
+          <a:ln>
+            <a:noFill/>
+          </a:ln>
+        </p:spPr>
+        <p:style>
+          <a:lnRef idx="1">
+            <a:schemeClr val="accent1"/>
+          </a:lnRef>
+          <a:fillRef idx="3">
+            <a:schemeClr val="accent1"/>
+          </a:fillRef>
+          <a:effectRef idx="2">
+            <a:schemeClr val="accent1"/>
+          </a:effectRef>
+          <a:fontRef idx="minor">
+            <a:schemeClr val="lt1"/>
+          </a:fontRef>
+        </p:style>
+        <p:txBody>
+          <a:bodyPr rtlCol="0" anchor="ctr"/>
+          <a:lstStyle/>
+          <a:p>
+            <a:pPr algn="ctr"/>
+          </a:p>
+        </p:txBody>
+      </p:sp>
+      <p:sp>
+        <p:nvSpPr>
+          <p:cNvPr id="111" name="TextBox 110"/>
+          <p:cNvSpPr txBox="1"/>
+          <p:nvPr/>
+        </p:nvSpPr>
+        <p:spPr>
+          <a:xfrm>
+            <a:off x="4434840" y="5527548"/>
+            <a:ext cx="2304288" cy="214884"/>
+          </a:xfrm>
+          <a:prstGeom prst="rect">
+            <a:avLst/>
+          </a:prstGeom>
+          <a:noFill/>
+        </p:spPr>
+        <p:txBody>
+          <a:bodyPr wrap="square" lIns="0" rIns="0" tIns="0" bIns="0">
+            <a:spAutoFit/>
+          </a:bodyPr>
+          <a:lstStyle/>
+          <a:p>
+            <a:pPr algn="l">
+              <a:lnSpc>
+                <a:spcPct val="100000"/>
+              </a:lnSpc>
+              <a:spcBef>
+                <a:spcPts val="0"/>
+              </a:spcBef>
+              <a:spcAft>
+                <a:spcPts val="0"/>
+              </a:spcAft>
+            </a:pPr>
+            <a:r>
+              <a:rPr sz="760" b="0" i="0">
+                <a:solidFill>
+                  <a:srgbClr val="12161C"/>
+                </a:solidFill>
+                <a:latin typeface="Segoe UI"/>
+              </a:rPr>
+              <a:t>Official Full PENCIL  [s = 2×20, 100% GPU, 2.2 GB]</a:t>
+            </a:r>
+          </a:p>
+        </p:txBody>
+      </p:sp>
+      <p:sp>
+        <p:nvSpPr>
+          <p:cNvPr id="112" name="TextBox 111"/>
+          <p:cNvSpPr txBox="1"/>
+          <p:nvPr/>
+        </p:nvSpPr>
+        <p:spPr>
+          <a:xfrm>
+            <a:off x="6867144" y="5527548"/>
+            <a:ext cx="1115568" cy="214884"/>
+          </a:xfrm>
+          <a:prstGeom prst="rect">
+            <a:avLst/>
+          </a:prstGeom>
+          <a:noFill/>
+        </p:spPr>
+        <p:txBody>
+          <a:bodyPr wrap="square" lIns="0" rIns="0" tIns="0" bIns="0">
+            <a:spAutoFit/>
+          </a:bodyPr>
+          <a:lstStyle/>
+          <a:p>
+            <a:pPr algn="ctr">
+              <a:lnSpc>
+                <a:spcPct val="100000"/>
+              </a:lnSpc>
+              <a:spcBef>
+                <a:spcPts val="0"/>
+              </a:spcBef>
+              <a:spcAft>
+                <a:spcPts val="0"/>
+              </a:spcAft>
+            </a:pPr>
+            <a:r>
+              <a:rPr sz="750" b="0" i="0">
+                <a:solidFill>
+                  <a:srgbClr val="333B45"/>
+                </a:solidFill>
+                <a:latin typeface="Consolas"/>
+              </a:rPr>
+              <a:t>43.7 ± 0.9  (100%)</a:t>
+            </a:r>
+          </a:p>
+        </p:txBody>
+      </p:sp>
+      <p:sp>
+        <p:nvSpPr>
+          <p:cNvPr id="113" name="TextBox 112"/>
+          <p:cNvSpPr txBox="1"/>
+          <p:nvPr/>
+        </p:nvSpPr>
+        <p:spPr>
+          <a:xfrm>
+            <a:off x="8110728" y="5527548"/>
+            <a:ext cx="1188719" cy="214884"/>
+          </a:xfrm>
+          <a:prstGeom prst="rect">
+            <a:avLst/>
+          </a:prstGeom>
+          <a:noFill/>
+        </p:spPr>
+        <p:txBody>
+          <a:bodyPr wrap="square" lIns="0" rIns="0" tIns="0" bIns="0">
+            <a:spAutoFit/>
+          </a:bodyPr>
+          <a:lstStyle/>
+          <a:p>
+            <a:pPr algn="ctr">
+              <a:lnSpc>
+                <a:spcPct val="100000"/>
+              </a:lnSpc>
+              <a:spcBef>
+                <a:spcPts val="0"/>
+              </a:spcBef>
+              <a:spcAft>
+                <a:spcPts val="0"/>
+              </a:spcAft>
+            </a:pPr>
+            <a:r>
+              <a:rPr sz="750" b="0" i="0">
+                <a:solidFill>
+                  <a:srgbClr val="333B45"/>
+                </a:solidFill>
+                <a:latin typeface="Consolas"/>
+              </a:rPr>
+              <a:t>49.7 ± 0.2  (100%)</a:t>
+            </a:r>
+          </a:p>
+        </p:txBody>
+      </p:sp>
+      <p:sp>
+        <p:nvSpPr>
+          <p:cNvPr id="114" name="TextBox 113"/>
+          <p:cNvSpPr txBox="1"/>
+          <p:nvPr/>
+        </p:nvSpPr>
+        <p:spPr>
+          <a:xfrm>
+            <a:off x="9427464" y="5527548"/>
+            <a:ext cx="1152143" cy="214884"/>
+          </a:xfrm>
+          <a:prstGeom prst="rect">
+            <a:avLst/>
+          </a:prstGeom>
+          <a:noFill/>
+        </p:spPr>
+        <p:txBody>
+          <a:bodyPr wrap="square" lIns="0" rIns="0" tIns="0" bIns="0">
+            <a:spAutoFit/>
+          </a:bodyPr>
+          <a:lstStyle/>
+          <a:p>
+            <a:pPr algn="ctr">
+              <a:lnSpc>
+                <a:spcPct val="100000"/>
+              </a:lnSpc>
+              <a:spcBef>
+                <a:spcPts val="0"/>
+              </a:spcBef>
+              <a:spcAft>
+                <a:spcPts val="0"/>
+              </a:spcAft>
+            </a:pPr>
+            <a:r>
+              <a:rPr sz="750" b="0" i="0">
+                <a:solidFill>
+                  <a:srgbClr val="333B45"/>
+                </a:solidFill>
+                <a:latin typeface="Consolas"/>
+              </a:rPr>
+              <a:t>13.3 ± 0.1  (100%)</a:t>
+            </a:r>
+          </a:p>
+        </p:txBody>
+      </p:sp>
+      <p:sp>
+        <p:nvSpPr>
+          <p:cNvPr id="115" name="TextBox 114"/>
+          <p:cNvSpPr txBox="1"/>
+          <p:nvPr/>
+        </p:nvSpPr>
+        <p:spPr>
+          <a:xfrm>
+            <a:off x="10707624" y="5527548"/>
+            <a:ext cx="1188719" cy="214884"/>
+          </a:xfrm>
+          <a:prstGeom prst="rect">
+            <a:avLst/>
+          </a:prstGeom>
+          <a:noFill/>
+        </p:spPr>
+        <p:txBody>
+          <a:bodyPr wrap="square" lIns="0" rIns="0" tIns="0" bIns="0">
+            <a:spAutoFit/>
+          </a:bodyPr>
+          <a:lstStyle/>
+          <a:p>
+            <a:pPr algn="ctr">
+              <a:lnSpc>
+                <a:spcPct val="100000"/>
+              </a:lnSpc>
+              <a:spcBef>
+                <a:spcPts val="0"/>
+              </a:spcBef>
+              <a:spcAft>
+                <a:spcPts val="0"/>
+              </a:spcAft>
+            </a:pPr>
+            <a:r>
+              <a:rPr sz="750" b="1" i="0">
+                <a:solidFill>
+                  <a:srgbClr val="333B45"/>
+                </a:solidFill>
+                <a:latin typeface="Consolas"/>
+              </a:rPr>
+              <a:t>17.8 ± 0.1  (100%)</a:t>
+            </a:r>
+          </a:p>
+        </p:txBody>
+      </p:sp>
+      <p:sp>
+        <p:nvSpPr>
+          <p:cNvPr id="116" name="Rectangle 115"/>
+          <p:cNvSpPr/>
+          <p:nvPr/>
+        </p:nvSpPr>
+        <p:spPr>
+          <a:xfrm>
+            <a:off x="4370832" y="5760720"/>
+            <a:ext cx="7589520" cy="20116"/>
+          </a:xfrm>
+          <a:prstGeom prst="rect">
+            <a:avLst/>
+          </a:prstGeom>
+          <a:solidFill>
+            <a:srgbClr val="12161C"/>
+          </a:solidFill>
+          <a:ln>
+            <a:noFill/>
+          </a:ln>
+        </p:spPr>
+        <p:style>
+          <a:lnRef idx="1">
+            <a:schemeClr val="accent1"/>
+          </a:lnRef>
+          <a:fillRef idx="3">
+            <a:schemeClr val="accent1"/>
+          </a:fillRef>
+          <a:effectRef idx="2">
+            <a:schemeClr val="accent1"/>
+          </a:effectRef>
+          <a:fontRef idx="minor">
+            <a:schemeClr val="lt1"/>
+          </a:fontRef>
+        </p:style>
+        <p:txBody>
+          <a:bodyPr rtlCol="0" anchor="ctr"/>
+          <a:lstStyle/>
+          <a:p>
+            <a:pPr algn="ctr"/>
+          </a:p>
+        </p:txBody>
+      </p:sp>
+      <p:sp>
+        <p:nvSpPr>
+          <p:cNvPr id="117" name="TextBox 116"/>
+          <p:cNvSpPr txBox="1"/>
+          <p:nvPr/>
+        </p:nvSpPr>
+        <p:spPr>
+          <a:xfrm>
+            <a:off x="4370832" y="5797296"/>
+            <a:ext cx="7589520" cy="201168"/>
+          </a:xfrm>
+          <a:prstGeom prst="rect">
+            <a:avLst/>
+          </a:prstGeom>
+          <a:noFill/>
+        </p:spPr>
+        <p:txBody>
+          <a:bodyPr wrap="square" lIns="0" rIns="0" tIns="0" bIns="0">
+            <a:spAutoFit/>
+          </a:bodyPr>
+          <a:lstStyle/>
+          <a:p>
+            <a:pPr algn="l">
+              <a:lnSpc>
+                <a:spcPct val="108000"/>
+              </a:lnSpc>
+              <a:spcBef>
+                <a:spcPts val="0"/>
+              </a:spcBef>
+              <a:spcAft>
+                <a:spcPts val="0"/>
+              </a:spcAft>
+            </a:pPr>
+            <a:r>
+              <a:rPr sz="710" b="1" i="0">
+                <a:solidFill>
+                  <a:srgbClr val="333B45"/>
+                </a:solidFill>
+                <a:latin typeface="Segoe UI"/>
+              </a:rPr>
+              <a:t>Protocol note: </a:t>
+            </a:r>
+            <a:r>
+              <a:rPr sz="710" b="0" i="0">
+                <a:solidFill>
+                  <a:srgbClr val="6E7781"/>
+                </a:solidFill>
+                <a:latin typeface="Segoe UI"/>
+              </a:rPr>
+              <a:t>Parentheses in AA row show ties-averaged MRR (matching published HeaRT tables: 31.87, 29.37, 11.91, 10.82); degree tie-break lifts AA to 33.1 / 31.5. Peak VRAM under HeaRT drops from </a:t>
+            </a:r>
+            <a:r>
+              <a:rPr sz="710" b="1" i="0">
+                <a:solidFill>
+                  <a:srgbClr val="333B45"/>
+                </a:solidFill>
+                <a:latin typeface="Segoe UI"/>
+              </a:rPr>
+              <a:t>2,219 MB (s=2×20) → 1,347 MB (s=2×10) → 558 MB (s=2×2)</a:t>
+            </a:r>
+            <a:r>
+              <a:rPr sz="710" b="0" i="0">
+                <a:solidFill>
+                  <a:srgbClr val="6E7781"/>
+                </a:solidFill>
+                <a:latin typeface="Segoe UI"/>
+              </a:rPr>
+              <a:t>.</a:t>
+            </a:r>
+          </a:p>
+        </p:txBody>
+      </p:sp>
+      <p:sp>
+        <p:nvSpPr>
+          <p:cNvPr id="118" name="Rectangle 117"/>
+          <p:cNvSpPr/>
+          <p:nvPr/>
+        </p:nvSpPr>
+        <p:spPr>
+          <a:xfrm>
+            <a:off x="4370832" y="5998464"/>
+            <a:ext cx="1426464" cy="621792"/>
+          </a:xfrm>
+          <a:prstGeom prst="rect">
+            <a:avLst/>
+          </a:prstGeom>
+          <a:solidFill>
+            <a:srgbClr val="9D1B32"/>
+          </a:solidFill>
+          <a:ln>
+            <a:noFill/>
+          </a:ln>
+        </p:spPr>
+        <p:style>
+          <a:lnRef idx="1">
+            <a:schemeClr val="accent1"/>
+          </a:lnRef>
+          <a:fillRef idx="3">
+            <a:schemeClr val="accent1"/>
+          </a:fillRef>
+          <a:effectRef idx="2">
+            <a:schemeClr val="accent1"/>
+          </a:effectRef>
+          <a:fontRef idx="minor">
+            <a:schemeClr val="lt1"/>
+          </a:fontRef>
+        </p:style>
+        <p:txBody>
+          <a:bodyPr rtlCol="0" anchor="ctr"/>
+          <a:lstStyle/>
+          <a:p>
+            <a:pPr algn="ctr"/>
+          </a:p>
+        </p:txBody>
+      </p:sp>
+      <p:sp>
+        <p:nvSpPr>
+          <p:cNvPr id="119" name="TextBox 118"/>
+          <p:cNvSpPr txBox="1"/>
+          <p:nvPr/>
+        </p:nvSpPr>
+        <p:spPr>
+          <a:xfrm>
+            <a:off x="4443984" y="6117336"/>
+            <a:ext cx="1280160" cy="438912"/>
+          </a:xfrm>
+          <a:prstGeom prst="rect">
+            <a:avLst/>
+          </a:prstGeom>
+          <a:noFill/>
+        </p:spPr>
+        <p:txBody>
+          <a:bodyPr wrap="square" lIns="0" rIns="0" tIns="0" bIns="0">
+            <a:spAutoFit/>
+          </a:bodyPr>
+          <a:lstStyle/>
+          <a:p>
+            <a:pPr algn="ctr">
+              <a:lnSpc>
+                <a:spcPct val="105000"/>
+              </a:lnSpc>
+              <a:spcBef>
+                <a:spcPts val="0"/>
+              </a:spcBef>
+              <a:spcAft>
+                <a:spcPts val="0"/>
+              </a:spcAft>
+            </a:pPr>
+            <a:r>
+              <a:rPr sz="819" b="1" i="0">
+                <a:solidFill>
+                  <a:srgbClr val="FFFFFF"/>
+                </a:solidFill>
+                <a:latin typeface="Segoe UI"/>
+              </a:rPr>
+              <a:t>ROADMAP → NOV 26</a:t>
+            </a:r>
+          </a:p>
+          <a:p>
+            <a:pPr algn="ctr">
+              <a:lnSpc>
+                <a:spcPct val="100000"/>
+              </a:lnSpc>
+              <a:spcBef>
+                <a:spcPts val="200"/>
+              </a:spcBef>
+              <a:spcAft>
+                <a:spcPts val="0"/>
+              </a:spcAft>
+            </a:pPr>
+            <a:r>
+              <a:rPr sz="700" b="0" i="0">
+                <a:solidFill>
+                  <a:srgbClr val="F5EFE4"/>
+                </a:solidFill>
+                <a:latin typeface="Segoe UI"/>
+              </a:rPr>
+              <a:t>Final Report · Video · Code</a:t>
+            </a:r>
+          </a:p>
+        </p:txBody>
+      </p:sp>
+      <p:sp>
+        <p:nvSpPr>
+          <p:cNvPr id="120" name="Rectangle 119"/>
+          <p:cNvSpPr/>
+          <p:nvPr/>
+        </p:nvSpPr>
+        <p:spPr>
+          <a:xfrm>
+            <a:off x="5797296" y="5998464"/>
+            <a:ext cx="6163056" cy="621792"/>
+          </a:xfrm>
+          <a:prstGeom prst="rect">
+            <a:avLst/>
+          </a:prstGeom>
+          <a:solidFill>
+            <a:srgbClr val="F5EFE4"/>
+          </a:solidFill>
+          <a:ln w="9525">
+            <a:solidFill>
+              <a:srgbClr val="B85D14"/>
+            </a:solidFill>
+          </a:ln>
+        </p:spPr>
+        <p:style>
+          <a:lnRef idx="1">
+            <a:schemeClr val="accent1"/>
+          </a:lnRef>
+          <a:fillRef idx="3">
+            <a:schemeClr val="accent1"/>
+          </a:fillRef>
+          <a:effectRef idx="2">
+            <a:schemeClr val="accent1"/>
+          </a:effectRef>
+          <a:fontRef idx="minor">
+            <a:schemeClr val="lt1"/>
+          </a:fontRef>
+        </p:style>
+        <p:txBody>
+          <a:bodyPr rtlCol="0" anchor="ctr"/>
+          <a:lstStyle/>
+          <a:p>
+            <a:pPr algn="ctr"/>
+          </a:p>
+        </p:txBody>
+      </p:sp>
+      <p:sp>
+        <p:nvSpPr>
+          <p:cNvPr id="121" name="TextBox 120"/>
+          <p:cNvSpPr txBox="1"/>
+          <p:nvPr/>
+        </p:nvSpPr>
+        <p:spPr>
+          <a:xfrm>
+            <a:off x="5907024" y="6062472"/>
+            <a:ext cx="5980176" cy="512064"/>
+          </a:xfrm>
+          <a:prstGeom prst="rect">
+            <a:avLst/>
+          </a:prstGeom>
+          <a:noFill/>
+        </p:spPr>
+        <p:txBody>
+          <a:bodyPr wrap="square" lIns="0" rIns="0" tIns="0" bIns="0">
+            <a:spAutoFit/>
+          </a:bodyPr>
+          <a:lstStyle/>
+          <a:p>
+            <a:pPr algn="l">
+              <a:lnSpc>
+                <a:spcPct val="104000"/>
+              </a:lnSpc>
+              <a:spcBef>
+                <a:spcPts val="0"/>
+              </a:spcBef>
               <a:spcAft>
                 <a:spcPts val="200"/>
               </a:spcAft>
             </a:pPr>
             <a:r>
-              <a:rPr sz="950" b="0">
-                <a:solidFill>
-                  <a:srgbClr val="404040"/>
-                </a:solidFill>
-              </a:rPr>
-              <a:t>Protocol: cora planetoid split; each of 527 test links ranked against all 527 test negatives (chance MRR = 1.3); validation 263 vs 263. Compute = measured T4 forward time vs full PENCIL. Settings above are read off a sweep, not yet selected on validation alone — the final report will. One graph so far; timings from a single pass.</a:t>
+              <a:rPr sz="750" b="1" i="0">
+                <a:solidFill>
+                  <a:srgbClr val="12161C"/>
+                </a:solidFill>
+                <a:latin typeface="Segoe UI"/>
+              </a:rPr>
+              <a:t>1. Training-axis compute law: </a:t>
+            </a:r>
+            <a:r>
+              <a:rPr sz="740" b="0" i="0">
+                <a:solidFill>
+                  <a:srgbClr val="333B45"/>
+                </a:solidFill>
+                <a:latin typeface="Segoe UI"/>
+              </a:rPr>
+              <a:t>93% of final Cora Test MRR is reached by epoch 42 of 150 (28% of training budget), after which validation/test curves plateau.</a:t>
+            </a:r>
+          </a:p>
+          <a:p>
+            <a:pPr algn="l">
+              <a:lnSpc>
+                <a:spcPct val="104000"/>
+              </a:lnSpc>
+              <a:spcBef>
+                <a:spcPts val="0"/>
+              </a:spcBef>
+              <a:spcAft>
+                <a:spcPts val="0"/>
+              </a:spcAft>
+            </a:pPr>
+            <a:r>
+              <a:rPr sz="750" b="1" i="0">
+                <a:solidFill>
+                  <a:srgbClr val="12161C"/>
+                </a:solidFill>
+                <a:latin typeface="Segoe UI"/>
+              </a:rPr>
+              <a:t>2. Remaining deliverables: </a:t>
+            </a:r>
+            <a:r>
+              <a:rPr sz="740" b="0" i="0">
+                <a:solidFill>
+                  <a:srgbClr val="333B45"/>
+                </a:solidFill>
+                <a:latin typeface="Segoe UI"/>
+              </a:rPr>
+              <a:t>Fit closed-form (k, s) selector on validation · latency + VRAM Pareto frontier · reproducible suite &amp; 112 score dumps at </a:t>
+            </a:r>
+            <a:r>
+              <a:rPr sz="740" b="1" i="0">
+                <a:solidFill>
+                  <a:srgbClr val="9D1B32"/>
+                </a:solidFill>
+                <a:latin typeface="Consolas"/>
+              </a:rPr>
+              <a:t>github.com/Ask-812/da4022-pencil-budget</a:t>
             </a:r>
           </a:p>
         </p:txBody>

--- a/docs/MIDREPORT_public.pptx
+++ b/docs/MIDREPORT_public.pptx
@@ -3182,8 +3182,8 @@
         </p:nvSpPr>
         <p:spPr>
           <a:xfrm>
-            <a:off x="246888" y="283464"/>
-            <a:ext cx="50292" cy="6281928"/>
+            <a:off x="164592" y="182880"/>
+            <a:ext cx="45720" cy="6437376"/>
           </a:xfrm>
           <a:prstGeom prst="rect">
             <a:avLst/>
@@ -3225,8 +3225,8 @@
         </p:nvSpPr>
         <p:spPr>
           <a:xfrm>
-            <a:off x="502920" y="228600"/>
-            <a:ext cx="8046720" cy="219456"/>
+            <a:off x="356616" y="173736"/>
+            <a:ext cx="7086600" cy="164592"/>
           </a:xfrm>
           <a:prstGeom prst="rect">
             <a:avLst/>
@@ -3251,13 +3251,13 @@
               </a:spcAft>
             </a:pPr>
             <a:r>
-              <a:rPr sz="850" b="1" i="0">
+              <a:rPr sz="780" b="1" i="0">
                 <a:solidFill>
                   <a:srgbClr val="9D1B32"/>
                 </a:solidFill>
                 <a:latin typeface="Aptos"/>
               </a:rPr>
-              <a:t>DA4022  /  MID-PROJECT REPORT  /  15 OCT 2026</a:t>
+              <a:t>DA4022 MID-PROJECT REPORT  ·  SELF-PROPOSED PENCIL EXTENSION  ·  15 OCT 2026</a:t>
             </a:r>
           </a:p>
         </p:txBody>
@@ -3270,8 +3270,8 @@
         </p:nvSpPr>
         <p:spPr>
           <a:xfrm>
-            <a:off x="502920" y="457200"/>
-            <a:ext cx="7635240" cy="393192"/>
+            <a:off x="356616" y="356616"/>
+            <a:ext cx="6995160" cy="393192"/>
           </a:xfrm>
           <a:prstGeom prst="rect">
             <a:avLst/>
@@ -3296,13 +3296,13 @@
               </a:spcAft>
             </a:pPr>
             <a:r>
-              <a:rPr sz="2800" b="1" i="0">
+              <a:rPr sz="2300" b="1" i="0">
                 <a:solidFill>
                   <a:srgbClr val="171A1F"/>
                 </a:solidFill>
                 <a:latin typeface="Georgia"/>
               </a:rPr>
-              <a:t>Full-budget PENCIL is</a:t>
+              <a:t>How Much PENCIL Can You Afford?</a:t>
             </a:r>
           </a:p>
         </p:txBody>
@@ -3315,8 +3315,8 @@
         </p:nvSpPr>
         <p:spPr>
           <a:xfrm>
-            <a:off x="502920" y="914400"/>
-            <a:ext cx="7635240" cy="393192"/>
+            <a:off x="356616" y="722376"/>
+            <a:ext cx="6995160" cy="164592"/>
           </a:xfrm>
           <a:prstGeom prst="rect">
             <a:avLst/>
@@ -3341,13 +3341,13 @@
               </a:spcAft>
             </a:pPr>
             <a:r>
-              <a:rPr sz="2800" b="1" i="0">
-                <a:solidFill>
-                  <a:srgbClr val="9D1B32"/>
-                </a:solidFill>
-                <a:latin typeface="Georgia"/>
+              <a:rPr sz="880" b="1" i="0">
+                <a:solidFill>
+                  <a:srgbClr val="434952"/>
+                </a:solidFill>
+                <a:latin typeface="Aptos"/>
               </a:rPr>
-              <a:t>often unnecessary.</a:t>
+              <a:t>Compute-allocation laws for link prediction  ·  choosing shortlist k and context budget s without retraining</a:t>
             </a:r>
           </a:p>
         </p:txBody>
@@ -3360,8 +3360,8 @@
         </p:nvSpPr>
         <p:spPr>
           <a:xfrm>
-            <a:off x="8275320" y="246888"/>
-            <a:ext cx="3401568" cy="868680"/>
+            <a:off x="7360920" y="210312"/>
+            <a:ext cx="4471416" cy="548640"/>
           </a:xfrm>
           <a:prstGeom prst="rect">
             <a:avLst/>
@@ -3386,35 +3386,35 @@
               </a:spcAft>
             </a:pPr>
             <a:r>
-              <a:rPr sz="830" b="1" i="0">
-                <a:solidFill>
-                  <a:srgbClr val="777D85"/>
+              <a:rPr sz="740" b="1" i="0">
+                <a:solidFill>
+                  <a:srgbClr val="9D1B32"/>
                 </a:solidFill>
                 <a:latin typeface="Aptos"/>
               </a:rPr>
-              <a:t>HOW MUCH PENCIL CAN YOU AFFORD?</a:t>
+              <a:t>TEAM</a:t>
             </a:r>
           </a:p>
           <a:p>
             <a:pPr algn="r">
               <a:lnSpc>
-                <a:spcPct val="102000"/>
+                <a:spcPct val="105000"/>
               </a:lnSpc>
               <a:spcBef>
-                <a:spcPts val="300"/>
+                <a:spcPts val="200"/>
               </a:spcBef>
               <a:spcAft>
                 <a:spcPts val="0"/>
               </a:spcAft>
             </a:pPr>
             <a:r>
-              <a:rPr sz="1220" b="1" i="0">
-                <a:solidFill>
-                  <a:srgbClr val="203657"/>
-                </a:solidFill>
-                <a:latin typeface="Georgia"/>
+              <a:rPr sz="660" b="0" i="0">
+                <a:solidFill>
+                  <a:srgbClr val="777D85"/>
+                </a:solidFill>
+                <a:latin typeface="Aptos"/>
               </a:rPr>
-              <a:t>Compute-allocation laws for link prediction</a:t>
+              <a:t>Amit Kumar  ·  Ashmit Satpute  ·  Arnav Kshirsagar  ·  Pranav Shalya  ·  Atharv Wankhede</a:t>
             </a:r>
           </a:p>
         </p:txBody>
@@ -3427,8 +3427,8 @@
         </p:nvSpPr>
         <p:spPr>
           <a:xfrm>
-            <a:off x="502920" y="1362456"/>
-            <a:ext cx="11183112" cy="10972"/>
+            <a:off x="356616" y="932688"/>
+            <a:ext cx="11475720" cy="10972"/>
           </a:xfrm>
           <a:prstGeom prst="rect">
             <a:avLst/>
@@ -3464,19 +3464,195 @@
       </p:sp>
       <p:sp>
         <p:nvSpPr>
-          <p:cNvPr id="10" name="Rounded Rectangle 9"/>
+          <p:cNvPr id="10" name="Rectangle 9"/>
           <p:cNvSpPr/>
           <p:nvPr/>
         </p:nvSpPr>
         <p:spPr>
           <a:xfrm>
-            <a:off x="502920" y="1572768"/>
-            <a:ext cx="11183112" cy="1051560"/>
+            <a:off x="3163824" y="1097280"/>
+            <a:ext cx="10972" cy="5404104"/>
+          </a:xfrm>
+          <a:prstGeom prst="rect">
+            <a:avLst/>
+          </a:prstGeom>
+          <a:solidFill>
+            <a:srgbClr val="D9D4CB"/>
+          </a:solidFill>
+          <a:ln>
+            <a:noFill/>
+          </a:ln>
+        </p:spPr>
+        <p:style>
+          <a:lnRef idx="1">
+            <a:schemeClr val="accent1"/>
+          </a:lnRef>
+          <a:fillRef idx="3">
+            <a:schemeClr val="accent1"/>
+          </a:fillRef>
+          <a:effectRef idx="2">
+            <a:schemeClr val="accent1"/>
+          </a:effectRef>
+          <a:fontRef idx="minor">
+            <a:schemeClr val="lt1"/>
+          </a:fontRef>
+        </p:style>
+        <p:txBody>
+          <a:bodyPr rtlCol="0" anchor="ctr"/>
+          <a:lstStyle/>
+          <a:p>
+            <a:pPr algn="ctr"/>
+          </a:p>
+        </p:txBody>
+      </p:sp>
+      <p:sp>
+        <p:nvSpPr>
+          <p:cNvPr id="11" name="Rectangle 10"/>
+          <p:cNvSpPr/>
+          <p:nvPr/>
+        </p:nvSpPr>
+        <p:spPr>
+          <a:xfrm>
+            <a:off x="7251192" y="1097280"/>
+            <a:ext cx="10972" cy="5404104"/>
+          </a:xfrm>
+          <a:prstGeom prst="rect">
+            <a:avLst/>
+          </a:prstGeom>
+          <a:solidFill>
+            <a:srgbClr val="D9D4CB"/>
+          </a:solidFill>
+          <a:ln>
+            <a:noFill/>
+          </a:ln>
+        </p:spPr>
+        <p:style>
+          <a:lnRef idx="1">
+            <a:schemeClr val="accent1"/>
+          </a:lnRef>
+          <a:fillRef idx="3">
+            <a:schemeClr val="accent1"/>
+          </a:fillRef>
+          <a:effectRef idx="2">
+            <a:schemeClr val="accent1"/>
+          </a:effectRef>
+          <a:fontRef idx="minor">
+            <a:schemeClr val="lt1"/>
+          </a:fontRef>
+        </p:style>
+        <p:txBody>
+          <a:bodyPr rtlCol="0" anchor="ctr"/>
+          <a:lstStyle/>
+          <a:p>
+            <a:pPr algn="ctr"/>
+          </a:p>
+        </p:txBody>
+      </p:sp>
+      <p:sp>
+        <p:nvSpPr>
+          <p:cNvPr id="12" name="TextBox 11"/>
+          <p:cNvSpPr txBox="1"/>
+          <p:nvPr/>
+        </p:nvSpPr>
+        <p:spPr>
+          <a:xfrm>
+            <a:off x="356616" y="1051560"/>
+            <a:ext cx="2743200" cy="164592"/>
+          </a:xfrm>
+          <a:prstGeom prst="rect">
+            <a:avLst/>
+          </a:prstGeom>
+          <a:noFill/>
+        </p:spPr>
+        <p:txBody>
+          <a:bodyPr wrap="square" lIns="0" rIns="0" tIns="0" bIns="0" anchor="t">
+            <a:spAutoFit/>
+          </a:bodyPr>
+          <a:lstStyle/>
+          <a:p>
+            <a:pPr algn="l">
+              <a:lnSpc>
+                <a:spcPct val="100000"/>
+              </a:lnSpc>
+              <a:spcBef>
+                <a:spcPts val="0"/>
+              </a:spcBef>
+              <a:spcAft>
+                <a:spcPts val="0"/>
+              </a:spcAft>
+            </a:pPr>
+            <a:r>
+              <a:rPr sz="819" b="1" i="0">
+                <a:solidFill>
+                  <a:srgbClr val="9D1B32"/>
+                </a:solidFill>
+                <a:latin typeface="Aptos"/>
+              </a:rPr>
+              <a:t>01  METHOD + REPRODUCTION</a:t>
+            </a:r>
+          </a:p>
+        </p:txBody>
+      </p:sp>
+      <p:sp>
+        <p:nvSpPr>
+          <p:cNvPr id="13" name="Rounded Rectangle 12"/>
+          <p:cNvSpPr/>
+          <p:nvPr/>
+        </p:nvSpPr>
+        <p:spPr>
+          <a:xfrm>
+            <a:off x="356616" y="1280160"/>
+            <a:ext cx="2743200" cy="1197864"/>
           </a:xfrm>
           <a:prstGeom prst="roundRect">
             <a:avLst>
               <a:gd name="adj" fmla="val 8000"/>
             </a:avLst>
+          </a:prstGeom>
+          <a:solidFill>
+            <a:srgbClr val="FFFFFF"/>
+          </a:solidFill>
+          <a:ln w="8890">
+            <a:solidFill>
+              <a:srgbClr val="D9D4CB"/>
+            </a:solidFill>
+          </a:ln>
+        </p:spPr>
+        <p:style>
+          <a:lnRef idx="1">
+            <a:schemeClr val="accent1"/>
+          </a:lnRef>
+          <a:fillRef idx="3">
+            <a:schemeClr val="accent1"/>
+          </a:fillRef>
+          <a:effectRef idx="2">
+            <a:schemeClr val="accent1"/>
+          </a:effectRef>
+          <a:fontRef idx="minor">
+            <a:schemeClr val="lt1"/>
+          </a:fontRef>
+        </p:style>
+        <p:txBody>
+          <a:bodyPr rtlCol="0" anchor="ctr"/>
+          <a:lstStyle/>
+          <a:p>
+            <a:pPr algn="ctr"/>
+          </a:p>
+        </p:txBody>
+      </p:sp>
+      <p:sp>
+        <p:nvSpPr>
+          <p:cNvPr id="14" name="Rectangle 13"/>
+          <p:cNvSpPr/>
+          <p:nvPr/>
+        </p:nvSpPr>
+        <p:spPr>
+          <a:xfrm>
+            <a:off x="356616" y="1280160"/>
+            <a:ext cx="41148" cy="1197864"/>
+          </a:xfrm>
+          <a:prstGeom prst="rect">
+            <a:avLst/>
           </a:prstGeom>
           <a:solidFill>
             <a:srgbClr val="203657"/>
@@ -3509,305 +3685,14 @@
       </p:sp>
       <p:sp>
         <p:nvSpPr>
-          <p:cNvPr id="11" name="TextBox 10"/>
+          <p:cNvPr id="15" name="TextBox 14"/>
           <p:cNvSpPr txBox="1"/>
           <p:nvPr/>
         </p:nvSpPr>
         <p:spPr>
           <a:xfrm>
-            <a:off x="749808" y="1673352"/>
-            <a:ext cx="1965960" cy="786384"/>
-          </a:xfrm>
-          <a:prstGeom prst="rect">
-            <a:avLst/>
-          </a:prstGeom>
-          <a:noFill/>
-        </p:spPr>
-        <p:txBody>
-          <a:bodyPr wrap="square" lIns="0" rIns="0" tIns="0" bIns="0" anchor="ctr">
-            <a:spAutoFit/>
-          </a:bodyPr>
-          <a:lstStyle/>
-          <a:p>
-            <a:pPr algn="ctr">
-              <a:lnSpc>
-                <a:spcPct val="100000"/>
-              </a:lnSpc>
-              <a:spcBef>
-                <a:spcPts val="0"/>
-              </a:spcBef>
-              <a:spcAft>
-                <a:spcPts val="0"/>
-              </a:spcAft>
-            </a:pPr>
-            <a:r>
-              <a:rPr sz="4200" b="1" i="0">
-                <a:solidFill>
-                  <a:srgbClr val="FFFFFF"/>
-                </a:solidFill>
-                <a:latin typeface="Georgia"/>
-              </a:rPr>
-              <a:t>65%</a:t>
-            </a:r>
-          </a:p>
-        </p:txBody>
-      </p:sp>
-      <p:sp>
-        <p:nvSpPr>
-          <p:cNvPr id="12" name="TextBox 11"/>
-          <p:cNvSpPr txBox="1"/>
-          <p:nvPr/>
-        </p:nvSpPr>
-        <p:spPr>
-          <a:xfrm>
-            <a:off x="2715768" y="1746504"/>
-            <a:ext cx="868680" cy="566928"/>
-          </a:xfrm>
-          <a:prstGeom prst="rect">
-            <a:avLst/>
-          </a:prstGeom>
-          <a:noFill/>
-        </p:spPr>
-        <p:txBody>
-          <a:bodyPr wrap="square" lIns="0" rIns="0" tIns="0" bIns="0" anchor="ctr">
-            <a:spAutoFit/>
-          </a:bodyPr>
-          <a:lstStyle/>
-          <a:p>
-            <a:pPr algn="l">
-              <a:lnSpc>
-                <a:spcPct val="105000"/>
-              </a:lnSpc>
-              <a:spcBef>
-                <a:spcPts val="0"/>
-              </a:spcBef>
-              <a:spcAft>
-                <a:spcPts val="0"/>
-              </a:spcAft>
-            </a:pPr>
-            <a:r>
-              <a:rPr sz="1120" b="1" i="0">
-                <a:solidFill>
-                  <a:srgbClr val="E8EDF3"/>
-                </a:solidFill>
-                <a:latin typeface="Aptos"/>
-              </a:rPr>
-              <a:t>GPU
-budget</a:t>
-            </a:r>
-          </a:p>
-        </p:txBody>
-      </p:sp>
-      <p:sp>
-        <p:nvSpPr>
-          <p:cNvPr id="13" name="Rectangle 12"/>
-          <p:cNvSpPr/>
-          <p:nvPr/>
-        </p:nvSpPr>
-        <p:spPr>
-          <a:xfrm>
-            <a:off x="3703320" y="1792224"/>
-            <a:ext cx="13716" cy="594360"/>
-          </a:xfrm>
-          <a:prstGeom prst="rect">
-            <a:avLst/>
-          </a:prstGeom>
-          <a:solidFill>
-            <a:srgbClr val="5C6C83"/>
-          </a:solidFill>
-          <a:ln>
-            <a:noFill/>
-          </a:ln>
-        </p:spPr>
-        <p:style>
-          <a:lnRef idx="1">
-            <a:schemeClr val="accent1"/>
-          </a:lnRef>
-          <a:fillRef idx="3">
-            <a:schemeClr val="accent1"/>
-          </a:fillRef>
-          <a:effectRef idx="2">
-            <a:schemeClr val="accent1"/>
-          </a:effectRef>
-          <a:fontRef idx="minor">
-            <a:schemeClr val="lt1"/>
-          </a:fontRef>
-        </p:style>
-        <p:txBody>
-          <a:bodyPr rtlCol="0" anchor="ctr"/>
-          <a:lstStyle/>
-          <a:p>
-            <a:pPr algn="ctr"/>
-          </a:p>
-        </p:txBody>
-      </p:sp>
-      <p:sp>
-        <p:nvSpPr>
-          <p:cNvPr id="14" name="TextBox 13"/>
-          <p:cNvSpPr txBox="1"/>
-          <p:nvPr/>
-        </p:nvSpPr>
-        <p:spPr>
-          <a:xfrm>
-            <a:off x="3950208" y="1700784"/>
-            <a:ext cx="5138928" cy="658368"/>
-          </a:xfrm>
-          <a:prstGeom prst="rect">
-            <a:avLst/>
-          </a:prstGeom>
-          <a:noFill/>
-        </p:spPr>
-        <p:txBody>
-          <a:bodyPr wrap="square" lIns="0" rIns="0" tIns="0" bIns="0" anchor="ctr">
-            <a:spAutoFit/>
-          </a:bodyPr>
-          <a:lstStyle/>
-          <a:p>
-            <a:pPr algn="l">
-              <a:lnSpc>
-                <a:spcPct val="100000"/>
-              </a:lnSpc>
-              <a:spcBef>
-                <a:spcPts val="0"/>
-              </a:spcBef>
-              <a:spcAft>
-                <a:spcPts val="0"/>
-              </a:spcAft>
-            </a:pPr>
-            <a:r>
-              <a:rPr sz="2000" b="1" i="0">
-                <a:solidFill>
-                  <a:srgbClr val="FFFFFF"/>
-                </a:solidFill>
-                <a:latin typeface="Georgia"/>
-              </a:rPr>
-              <a:t>matches or beats full PENCIL</a:t>
-            </a:r>
-          </a:p>
-          <a:p>
-            <a:pPr algn="l">
-              <a:lnSpc>
-                <a:spcPct val="100000"/>
-              </a:lnSpc>
-              <a:spcBef>
-                <a:spcPts val="300"/>
-              </a:spcBef>
-              <a:spcAft>
-                <a:spcPts val="0"/>
-              </a:spcAft>
-            </a:pPr>
-            <a:r>
-              <a:rPr sz="1030" b="0" i="0">
-                <a:solidFill>
-                  <a:srgbClr val="E8EDF3"/>
-                </a:solidFill>
-                <a:latin typeface="Aptos"/>
-              </a:rPr>
-              <a:t>in 3 of 4 test regimes — with ~40% less peak VRAM on Cora HeaRT.</a:t>
-            </a:r>
-          </a:p>
-        </p:txBody>
-      </p:sp>
-      <p:sp>
-        <p:nvSpPr>
-          <p:cNvPr id="15" name="Rounded Rectangle 14"/>
-          <p:cNvSpPr/>
-          <p:nvPr/>
-        </p:nvSpPr>
-        <p:spPr>
-          <a:xfrm>
-            <a:off x="9454896" y="1792224"/>
-            <a:ext cx="1965960" cy="576072"/>
-          </a:xfrm>
-          <a:prstGeom prst="roundRect">
-            <a:avLst>
-              <a:gd name="adj" fmla="val 8000"/>
-            </a:avLst>
-          </a:prstGeom>
-          <a:solidFill>
-            <a:srgbClr val="2B4A70"/>
-          </a:solidFill>
-          <a:ln>
-            <a:noFill/>
-          </a:ln>
-        </p:spPr>
-        <p:style>
-          <a:lnRef idx="1">
-            <a:schemeClr val="accent1"/>
-          </a:lnRef>
-          <a:fillRef idx="3">
-            <a:schemeClr val="accent1"/>
-          </a:fillRef>
-          <a:effectRef idx="2">
-            <a:schemeClr val="accent1"/>
-          </a:effectRef>
-          <a:fontRef idx="minor">
-            <a:schemeClr val="lt1"/>
-          </a:fontRef>
-        </p:style>
-        <p:txBody>
-          <a:bodyPr rtlCol="0" anchor="ctr"/>
-          <a:lstStyle/>
-          <a:p>
-            <a:pPr algn="ctr"/>
-          </a:p>
-        </p:txBody>
-      </p:sp>
-      <p:sp>
-        <p:nvSpPr>
-          <p:cNvPr id="16" name="TextBox 15"/>
-          <p:cNvSpPr txBox="1"/>
-          <p:nvPr/>
-        </p:nvSpPr>
-        <p:spPr>
-          <a:xfrm>
-            <a:off x="9573768" y="1865376"/>
-            <a:ext cx="1728216" cy="402336"/>
-          </a:xfrm>
-          <a:prstGeom prst="rect">
-            <a:avLst/>
-          </a:prstGeom>
-          <a:noFill/>
-        </p:spPr>
-        <p:txBody>
-          <a:bodyPr wrap="square" lIns="0" rIns="0" tIns="0" bIns="0" anchor="ctr">
-            <a:spAutoFit/>
-          </a:bodyPr>
-          <a:lstStyle/>
-          <a:p>
-            <a:pPr algn="ctr">
-              <a:lnSpc>
-                <a:spcPct val="100000"/>
-              </a:lnSpc>
-              <a:spcBef>
-                <a:spcPts val="0"/>
-              </a:spcBef>
-              <a:spcAft>
-                <a:spcPts val="0"/>
-              </a:spcAft>
-            </a:pPr>
-            <a:r>
-              <a:rPr sz="1019" b="1" i="0">
-                <a:solidFill>
-                  <a:srgbClr val="FFFFFF"/>
-                </a:solidFill>
-                <a:latin typeface="Consolas"/>
-              </a:rPr>
-              <a:t>s = 2×10  vs  2×20</a:t>
-            </a:r>
-          </a:p>
-        </p:txBody>
-      </p:sp>
-      <p:sp>
-        <p:nvSpPr>
-          <p:cNvPr id="17" name="TextBox 16"/>
-          <p:cNvSpPr txBox="1"/>
-          <p:nvPr/>
-        </p:nvSpPr>
-        <p:spPr>
-          <a:xfrm>
-            <a:off x="502920" y="2852928"/>
-            <a:ext cx="3182112" cy="182880"/>
+            <a:off x="475488" y="1371600"/>
+            <a:ext cx="2523744" cy="365760"/>
           </a:xfrm>
           <a:prstGeom prst="rect">
             <a:avLst/>
@@ -3822,7 +3707,7 @@
           <a:p>
             <a:pPr algn="l">
               <a:lnSpc>
-                <a:spcPct val="100000"/>
+                <a:spcPct val="102000"/>
               </a:lnSpc>
               <a:spcBef>
                 <a:spcPts val="0"/>
@@ -3832,117 +3717,36 @@
               </a:spcAft>
             </a:pPr>
             <a:r>
-              <a:rPr sz="850" b="1" i="0">
+              <a:rPr sz="750" b="1" i="0">
                 <a:solidFill>
                   <a:srgbClr val="9D1B32"/>
                 </a:solidFill>
                 <a:latin typeface="Aptos"/>
               </a:rPr>
-              <a:t>THE QUESTION</a:t>
-            </a:r>
-          </a:p>
-        </p:txBody>
-      </p:sp>
-      <p:sp>
-        <p:nvSpPr>
-          <p:cNvPr id="18" name="TextBox 17"/>
-          <p:cNvSpPr txBox="1"/>
-          <p:nvPr/>
-        </p:nvSpPr>
-        <p:spPr>
-          <a:xfrm>
-            <a:off x="502920" y="3072384"/>
-            <a:ext cx="3182112" cy="658368"/>
-          </a:xfrm>
-          <a:prstGeom prst="rect">
-            <a:avLst/>
-          </a:prstGeom>
-          <a:noFill/>
-        </p:spPr>
-        <p:txBody>
-          <a:bodyPr wrap="square" lIns="0" rIns="0" tIns="0" bIns="0" anchor="t">
-            <a:spAutoFit/>
-          </a:bodyPr>
-          <a:lstStyle/>
-          <a:p>
-            <a:pPr algn="l">
-              <a:lnSpc>
-                <a:spcPct val="103000"/>
-              </a:lnSpc>
-              <a:spcBef>
-                <a:spcPts val="0"/>
-              </a:spcBef>
-              <a:spcAft>
-                <a:spcPts val="0"/>
-              </a:spcAft>
-            </a:pPr>
-            <a:r>
-              <a:rPr sz="1320" b="1" i="0">
+              <a:t>Research question</a:t>
+            </a:r>
+            <a:r>
+              <a:rPr sz="819" b="1" i="0">
                 <a:solidFill>
                   <a:srgbClr val="171A1F"/>
                 </a:solidFill>
                 <a:latin typeface="Georgia"/>
               </a:rPr>
-              <a:t>Can we spend PENCIL's GPU compute only where a cheap graph heuristic is uncertain?</a:t>
-            </a:r>
-          </a:p>
-        </p:txBody>
-      </p:sp>
-      <p:sp>
-        <p:nvSpPr>
-          <p:cNvPr id="19" name="TextBox 18"/>
-          <p:cNvSpPr txBox="1"/>
-          <p:nvPr/>
-        </p:nvSpPr>
-        <p:spPr>
-          <a:xfrm>
-            <a:off x="502920" y="3840480"/>
-            <a:ext cx="3182112" cy="182880"/>
-          </a:xfrm>
-          <a:prstGeom prst="rect">
-            <a:avLst/>
-          </a:prstGeom>
-          <a:noFill/>
-        </p:spPr>
-        <p:txBody>
-          <a:bodyPr wrap="square" lIns="0" rIns="0" tIns="0" bIns="0" anchor="t">
-            <a:spAutoFit/>
-          </a:bodyPr>
-          <a:lstStyle/>
-          <a:p>
-            <a:pPr algn="l">
-              <a:lnSpc>
-                <a:spcPct val="100000"/>
-              </a:lnSpc>
-              <a:spcBef>
-                <a:spcPts val="0"/>
-              </a:spcBef>
-              <a:spcAft>
-                <a:spcPts val="0"/>
-              </a:spcAft>
-            </a:pPr>
-            <a:r>
-              <a:rPr sz="850" b="1" i="0">
-                <a:solidFill>
-                  <a:srgbClr val="9D1B32"/>
-                </a:solidFill>
-                <a:latin typeface="Aptos"/>
-              </a:rPr>
-              <a:t>OUR INFERENCE-ONLY METHOD</a:t>
-            </a:r>
-          </a:p>
-        </p:txBody>
-      </p:sp>
-      <p:sp>
-        <p:nvSpPr>
-          <p:cNvPr id="20" name="Rounded Rectangle 19"/>
+              <a:t>  Can a cheap graph heuristic decide where expensive PENCIL inference is worth paying for?</a:t>
+            </a:r>
+          </a:p>
+        </p:txBody>
+      </p:sp>
+      <p:sp>
+        <p:nvSpPr>
+          <p:cNvPr id="16" name="Rounded Rectangle 15"/>
           <p:cNvSpPr/>
           <p:nvPr/>
         </p:nvSpPr>
         <p:spPr>
           <a:xfrm>
-            <a:off x="502920" y="4096512"/>
-            <a:ext cx="950976" cy="859536"/>
+            <a:off x="466344" y="1837943"/>
+            <a:ext cx="749808" cy="502920"/>
           </a:xfrm>
           <a:prstGeom prst="roundRect">
             <a:avLst>
@@ -3982,57 +3786,14 @@
       </p:sp>
       <p:sp>
         <p:nvSpPr>
-          <p:cNvPr id="21" name="Oval 20"/>
-          <p:cNvSpPr/>
-          <p:nvPr/>
-        </p:nvSpPr>
-        <p:spPr>
-          <a:xfrm>
-            <a:off x="576072" y="4187952"/>
-            <a:ext cx="201168" cy="201168"/>
-          </a:xfrm>
-          <a:prstGeom prst="ellipse">
-            <a:avLst/>
-          </a:prstGeom>
-          <a:solidFill>
-            <a:srgbClr val="B46318"/>
-          </a:solidFill>
-          <a:ln>
-            <a:noFill/>
-          </a:ln>
-        </p:spPr>
-        <p:style>
-          <a:lnRef idx="1">
-            <a:schemeClr val="accent1"/>
-          </a:lnRef>
-          <a:fillRef idx="3">
-            <a:schemeClr val="accent1"/>
-          </a:fillRef>
-          <a:effectRef idx="2">
-            <a:schemeClr val="accent1"/>
-          </a:effectRef>
-          <a:fontRef idx="minor">
-            <a:schemeClr val="lt1"/>
-          </a:fontRef>
-        </p:style>
-        <p:txBody>
-          <a:bodyPr rtlCol="0" anchor="ctr"/>
-          <a:lstStyle/>
-          <a:p>
-            <a:pPr algn="ctr"/>
-          </a:p>
-        </p:txBody>
-      </p:sp>
-      <p:sp>
-        <p:nvSpPr>
-          <p:cNvPr id="22" name="TextBox 21"/>
+          <p:cNvPr id="17" name="TextBox 16"/>
           <p:cNvSpPr txBox="1"/>
           <p:nvPr/>
         </p:nvSpPr>
         <p:spPr>
           <a:xfrm>
-            <a:off x="576072" y="4183380"/>
-            <a:ext cx="201168" cy="182880"/>
+            <a:off x="512064" y="1892807"/>
+            <a:ext cx="658368" cy="146304"/>
           </a:xfrm>
           <a:prstGeom prst="rect">
             <a:avLst/>
@@ -4040,7 +3801,7 @@
           <a:noFill/>
         </p:spPr>
         <p:txBody>
-          <a:bodyPr wrap="square" lIns="0" rIns="0" tIns="0" bIns="0" anchor="ctr">
+          <a:bodyPr wrap="square" lIns="0" rIns="0" tIns="0" bIns="0" anchor="t">
             <a:spAutoFit/>
           </a:bodyPr>
           <a:lstStyle/>
@@ -4057,118 +3818,27 @@
               </a:spcAft>
             </a:pPr>
             <a:r>
-              <a:rPr sz="720" b="1" i="0">
-                <a:solidFill>
-                  <a:srgbClr val="FFFFFF"/>
+              <a:rPr sz="730" b="1" i="0">
+                <a:solidFill>
+                  <a:srgbClr val="B46318"/>
                 </a:solidFill>
                 <a:latin typeface="Aptos"/>
               </a:rPr>
-              <a:t>1</a:t>
-            </a:r>
-          </a:p>
-        </p:txBody>
-      </p:sp>
-      <p:sp>
-        <p:nvSpPr>
-          <p:cNvPr id="23" name="TextBox 22"/>
+              <a:t>1  AA rank</a:t>
+            </a:r>
+          </a:p>
+        </p:txBody>
+      </p:sp>
+      <p:sp>
+        <p:nvSpPr>
+          <p:cNvPr id="18" name="TextBox 17"/>
           <p:cNvSpPr txBox="1"/>
           <p:nvPr/>
         </p:nvSpPr>
         <p:spPr>
           <a:xfrm>
-            <a:off x="822960" y="4160520"/>
-            <a:ext cx="548640" cy="201168"/>
-          </a:xfrm>
-          <a:prstGeom prst="rect">
-            <a:avLst/>
-          </a:prstGeom>
-          <a:noFill/>
-        </p:spPr>
-        <p:txBody>
-          <a:bodyPr wrap="square" lIns="0" rIns="0" tIns="0" bIns="0" anchor="t">
-            <a:spAutoFit/>
-          </a:bodyPr>
-          <a:lstStyle/>
-          <a:p>
-            <a:pPr algn="l">
-              <a:lnSpc>
-                <a:spcPct val="100000"/>
-              </a:lnSpc>
-              <a:spcBef>
-                <a:spcPts val="0"/>
-              </a:spcBef>
-              <a:spcAft>
-                <a:spcPts val="0"/>
-              </a:spcAft>
-            </a:pPr>
-            <a:r>
-              <a:rPr sz="850" b="1" i="0">
-                <a:solidFill>
-                  <a:srgbClr val="B46318"/>
-                </a:solidFill>
-                <a:latin typeface="Aptos"/>
-              </a:rPr>
-              <a:t>Rank</a:t>
-            </a:r>
-          </a:p>
-        </p:txBody>
-      </p:sp>
-      <p:sp>
-        <p:nvSpPr>
-          <p:cNvPr id="24" name="TextBox 23"/>
-          <p:cNvSpPr txBox="1"/>
-          <p:nvPr/>
-        </p:nvSpPr>
-        <p:spPr>
-          <a:xfrm>
-            <a:off x="576072" y="4443984"/>
-            <a:ext cx="804672" cy="384048"/>
-          </a:xfrm>
-          <a:prstGeom prst="rect">
-            <a:avLst/>
-          </a:prstGeom>
-          <a:noFill/>
-        </p:spPr>
-        <p:txBody>
-          <a:bodyPr wrap="square" lIns="0" rIns="0" tIns="0" bIns="0" anchor="t">
-            <a:spAutoFit/>
-          </a:bodyPr>
-          <a:lstStyle/>
-          <a:p>
-            <a:pPr algn="ctr">
-              <a:lnSpc>
-                <a:spcPct val="95000"/>
-              </a:lnSpc>
-              <a:spcBef>
-                <a:spcPts val="0"/>
-              </a:spcBef>
-              <a:spcAft>
-                <a:spcPts val="0"/>
-              </a:spcAft>
-            </a:pPr>
-            <a:r>
-              <a:rPr sz="750" b="0" i="0">
-                <a:solidFill>
-                  <a:srgbClr val="434952"/>
-                </a:solidFill>
-                <a:latin typeface="Aptos"/>
-              </a:rPr>
-              <a:t>Adamic–Adar
-on CPU</a:t>
-            </a:r>
-          </a:p>
-        </p:txBody>
-      </p:sp>
-      <p:sp>
-        <p:nvSpPr>
-          <p:cNvPr id="25" name="TextBox 24"/>
-          <p:cNvSpPr txBox="1"/>
-          <p:nvPr/>
-        </p:nvSpPr>
-        <p:spPr>
-          <a:xfrm>
-            <a:off x="1453896" y="4370832"/>
-            <a:ext cx="100584" cy="201168"/>
+            <a:off x="493776" y="2112264"/>
+            <a:ext cx="694944" cy="137160"/>
           </a:xfrm>
           <a:prstGeom prst="rect">
             <a:avLst/>
@@ -4193,27 +3863,72 @@
               </a:spcAft>
             </a:pPr>
             <a:r>
-              <a:rPr sz="1600" b="1" i="0">
+              <a:rPr sz="590" b="0" i="0">
+                <a:solidFill>
+                  <a:srgbClr val="434952"/>
+                </a:solidFill>
+                <a:latin typeface="Aptos"/>
+              </a:rPr>
+              <a:t>CPU &lt;1 ms</a:t>
+            </a:r>
+          </a:p>
+        </p:txBody>
+      </p:sp>
+      <p:sp>
+        <p:nvSpPr>
+          <p:cNvPr id="19" name="TextBox 18"/>
+          <p:cNvSpPr txBox="1"/>
+          <p:nvPr/>
+        </p:nvSpPr>
+        <p:spPr>
+          <a:xfrm>
+            <a:off x="1216152" y="1984248"/>
+            <a:ext cx="109728" cy="164592"/>
+          </a:xfrm>
+          <a:prstGeom prst="rect">
+            <a:avLst/>
+          </a:prstGeom>
+          <a:noFill/>
+        </p:spPr>
+        <p:txBody>
+          <a:bodyPr wrap="square" lIns="0" rIns="0" tIns="0" bIns="0" anchor="t">
+            <a:spAutoFit/>
+          </a:bodyPr>
+          <a:lstStyle/>
+          <a:p>
+            <a:pPr algn="ctr">
+              <a:lnSpc>
+                <a:spcPct val="100000"/>
+              </a:lnSpc>
+              <a:spcBef>
+                <a:spcPts val="0"/>
+              </a:spcBef>
+              <a:spcAft>
+                <a:spcPts val="0"/>
+              </a:spcAft>
+            </a:pPr>
+            <a:r>
+              <a:rPr sz="850" b="1" i="0">
                 <a:solidFill>
                   <a:srgbClr val="777D85"/>
                 </a:solidFill>
-                <a:latin typeface="Georgia"/>
+                <a:latin typeface="Aptos"/>
               </a:rPr>
-              <a:t>›</a:t>
-            </a:r>
-          </a:p>
-        </p:txBody>
-      </p:sp>
-      <p:sp>
-        <p:nvSpPr>
-          <p:cNvPr id="26" name="Rounded Rectangle 25"/>
+              <a:t>→</a:t>
+            </a:r>
+          </a:p>
+        </p:txBody>
+      </p:sp>
+      <p:sp>
+        <p:nvSpPr>
+          <p:cNvPr id="20" name="Rounded Rectangle 19"/>
           <p:cNvSpPr/>
           <p:nvPr/>
         </p:nvSpPr>
         <p:spPr>
           <a:xfrm>
-            <a:off x="1554480" y="4096512"/>
-            <a:ext cx="950976" cy="859536"/>
+            <a:off x="1325880" y="1837943"/>
+            <a:ext cx="749808" cy="502920"/>
           </a:xfrm>
           <a:prstGeom prst="roundRect">
             <a:avLst>
@@ -4253,57 +3968,14 @@
       </p:sp>
       <p:sp>
         <p:nvSpPr>
-          <p:cNvPr id="27" name="Oval 26"/>
-          <p:cNvSpPr/>
-          <p:nvPr/>
-        </p:nvSpPr>
-        <p:spPr>
-          <a:xfrm>
-            <a:off x="1627632" y="4187952"/>
-            <a:ext cx="201168" cy="201168"/>
-          </a:xfrm>
-          <a:prstGeom prst="ellipse">
-            <a:avLst/>
-          </a:prstGeom>
-          <a:solidFill>
-            <a:srgbClr val="9D1B32"/>
-          </a:solidFill>
-          <a:ln>
-            <a:noFill/>
-          </a:ln>
-        </p:spPr>
-        <p:style>
-          <a:lnRef idx="1">
-            <a:schemeClr val="accent1"/>
-          </a:lnRef>
-          <a:fillRef idx="3">
-            <a:schemeClr val="accent1"/>
-          </a:fillRef>
-          <a:effectRef idx="2">
-            <a:schemeClr val="accent1"/>
-          </a:effectRef>
-          <a:fontRef idx="minor">
-            <a:schemeClr val="lt1"/>
-          </a:fontRef>
-        </p:style>
-        <p:txBody>
-          <a:bodyPr rtlCol="0" anchor="ctr"/>
-          <a:lstStyle/>
-          <a:p>
-            <a:pPr algn="ctr"/>
-          </a:p>
-        </p:txBody>
-      </p:sp>
-      <p:sp>
-        <p:nvSpPr>
-          <p:cNvPr id="28" name="TextBox 27"/>
+          <p:cNvPr id="21" name="TextBox 20"/>
           <p:cNvSpPr txBox="1"/>
           <p:nvPr/>
         </p:nvSpPr>
         <p:spPr>
           <a:xfrm>
-            <a:off x="1627632" y="4183380"/>
-            <a:ext cx="201168" cy="182880"/>
+            <a:off x="1371600" y="1892807"/>
+            <a:ext cx="658368" cy="146304"/>
           </a:xfrm>
           <a:prstGeom prst="rect">
             <a:avLst/>
@@ -4311,7 +3983,7 @@
           <a:noFill/>
         </p:spPr>
         <p:txBody>
-          <a:bodyPr wrap="square" lIns="0" rIns="0" tIns="0" bIns="0" anchor="ctr">
+          <a:bodyPr wrap="square" lIns="0" rIns="0" tIns="0" bIns="0" anchor="t">
             <a:spAutoFit/>
           </a:bodyPr>
           <a:lstStyle/>
@@ -4328,118 +4000,27 @@
               </a:spcAft>
             </a:pPr>
             <a:r>
-              <a:rPr sz="720" b="1" i="0">
-                <a:solidFill>
-                  <a:srgbClr val="FFFFFF"/>
+              <a:rPr sz="730" b="1" i="0">
+                <a:solidFill>
+                  <a:srgbClr val="9D1B32"/>
                 </a:solidFill>
                 <a:latin typeface="Aptos"/>
               </a:rPr>
-              <a:t>2</a:t>
-            </a:r>
-          </a:p>
-        </p:txBody>
-      </p:sp>
-      <p:sp>
-        <p:nvSpPr>
-          <p:cNvPr id="29" name="TextBox 28"/>
+              <a:t>2  top-k</a:t>
+            </a:r>
+          </a:p>
+        </p:txBody>
+      </p:sp>
+      <p:sp>
+        <p:nvSpPr>
+          <p:cNvPr id="22" name="TextBox 21"/>
           <p:cNvSpPr txBox="1"/>
           <p:nvPr/>
         </p:nvSpPr>
         <p:spPr>
           <a:xfrm>
-            <a:off x="1874519" y="4160520"/>
-            <a:ext cx="548640" cy="201168"/>
-          </a:xfrm>
-          <a:prstGeom prst="rect">
-            <a:avLst/>
-          </a:prstGeom>
-          <a:noFill/>
-        </p:spPr>
-        <p:txBody>
-          <a:bodyPr wrap="square" lIns="0" rIns="0" tIns="0" bIns="0" anchor="t">
-            <a:spAutoFit/>
-          </a:bodyPr>
-          <a:lstStyle/>
-          <a:p>
-            <a:pPr algn="l">
-              <a:lnSpc>
-                <a:spcPct val="100000"/>
-              </a:lnSpc>
-              <a:spcBef>
-                <a:spcPts val="0"/>
-              </a:spcBef>
-              <a:spcAft>
-                <a:spcPts val="0"/>
-              </a:spcAft>
-            </a:pPr>
-            <a:r>
-              <a:rPr sz="850" b="1" i="0">
-                <a:solidFill>
-                  <a:srgbClr val="9D1B32"/>
-                </a:solidFill>
-                <a:latin typeface="Aptos"/>
-              </a:rPr>
-              <a:t>Shortlist</a:t>
-            </a:r>
-          </a:p>
-        </p:txBody>
-      </p:sp>
-      <p:sp>
-        <p:nvSpPr>
-          <p:cNvPr id="30" name="TextBox 29"/>
-          <p:cNvSpPr txBox="1"/>
-          <p:nvPr/>
-        </p:nvSpPr>
-        <p:spPr>
-          <a:xfrm>
-            <a:off x="1627632" y="4443984"/>
-            <a:ext cx="804672" cy="384048"/>
-          </a:xfrm>
-          <a:prstGeom prst="rect">
-            <a:avLst/>
-          </a:prstGeom>
-          <a:noFill/>
-        </p:spPr>
-        <p:txBody>
-          <a:bodyPr wrap="square" lIns="0" rIns="0" tIns="0" bIns="0" anchor="t">
-            <a:spAutoFit/>
-          </a:bodyPr>
-          <a:lstStyle/>
-          <a:p>
-            <a:pPr algn="ctr">
-              <a:lnSpc>
-                <a:spcPct val="95000"/>
-              </a:lnSpc>
-              <a:spcBef>
-                <a:spcPts val="0"/>
-              </a:spcBef>
-              <a:spcAft>
-                <a:spcPts val="0"/>
-              </a:spcAft>
-            </a:pPr>
-            <a:r>
-              <a:rPr sz="750" b="0" i="0">
-                <a:solidFill>
-                  <a:srgbClr val="434952"/>
-                </a:solidFill>
-                <a:latin typeface="Aptos"/>
-              </a:rPr>
-              <a:t>top k candidate
-pairs</a:t>
-            </a:r>
-          </a:p>
-        </p:txBody>
-      </p:sp>
-      <p:sp>
-        <p:nvSpPr>
-          <p:cNvPr id="31" name="TextBox 30"/>
-          <p:cNvSpPr txBox="1"/>
-          <p:nvPr/>
-        </p:nvSpPr>
-        <p:spPr>
-          <a:xfrm>
-            <a:off x="2505456" y="4370832"/>
-            <a:ext cx="100584" cy="201168"/>
+            <a:off x="1353312" y="2112264"/>
+            <a:ext cx="694944" cy="137160"/>
           </a:xfrm>
           <a:prstGeom prst="rect">
             <a:avLst/>
@@ -4464,27 +4045,72 @@
               </a:spcAft>
             </a:pPr>
             <a:r>
-              <a:rPr sz="1600" b="1" i="0">
+              <a:rPr sz="590" b="0" i="0">
+                <a:solidFill>
+                  <a:srgbClr val="434952"/>
+                </a:solidFill>
+                <a:latin typeface="Aptos"/>
+              </a:rPr>
+              <a:t>shortlist 0–100%</a:t>
+            </a:r>
+          </a:p>
+        </p:txBody>
+      </p:sp>
+      <p:sp>
+        <p:nvSpPr>
+          <p:cNvPr id="23" name="TextBox 22"/>
+          <p:cNvSpPr txBox="1"/>
+          <p:nvPr/>
+        </p:nvSpPr>
+        <p:spPr>
+          <a:xfrm>
+            <a:off x="2075688" y="1984248"/>
+            <a:ext cx="109728" cy="164592"/>
+          </a:xfrm>
+          <a:prstGeom prst="rect">
+            <a:avLst/>
+          </a:prstGeom>
+          <a:noFill/>
+        </p:spPr>
+        <p:txBody>
+          <a:bodyPr wrap="square" lIns="0" rIns="0" tIns="0" bIns="0" anchor="t">
+            <a:spAutoFit/>
+          </a:bodyPr>
+          <a:lstStyle/>
+          <a:p>
+            <a:pPr algn="ctr">
+              <a:lnSpc>
+                <a:spcPct val="100000"/>
+              </a:lnSpc>
+              <a:spcBef>
+                <a:spcPts val="0"/>
+              </a:spcBef>
+              <a:spcAft>
+                <a:spcPts val="0"/>
+              </a:spcAft>
+            </a:pPr>
+            <a:r>
+              <a:rPr sz="850" b="1" i="0">
                 <a:solidFill>
                   <a:srgbClr val="777D85"/>
                 </a:solidFill>
-                <a:latin typeface="Georgia"/>
+                <a:latin typeface="Aptos"/>
               </a:rPr>
-              <a:t>›</a:t>
-            </a:r>
-          </a:p>
-        </p:txBody>
-      </p:sp>
-      <p:sp>
-        <p:nvSpPr>
-          <p:cNvPr id="32" name="Rounded Rectangle 31"/>
+              <a:t>→</a:t>
+            </a:r>
+          </a:p>
+        </p:txBody>
+      </p:sp>
+      <p:sp>
+        <p:nvSpPr>
+          <p:cNvPr id="24" name="Rounded Rectangle 23"/>
           <p:cNvSpPr/>
           <p:nvPr/>
         </p:nvSpPr>
         <p:spPr>
           <a:xfrm>
-            <a:off x="2606039" y="4096512"/>
-            <a:ext cx="950976" cy="859536"/>
+            <a:off x="2185415" y="1837943"/>
+            <a:ext cx="749808" cy="502920"/>
           </a:xfrm>
           <a:prstGeom prst="roundRect">
             <a:avLst>
@@ -4524,57 +4150,14 @@
       </p:sp>
       <p:sp>
         <p:nvSpPr>
-          <p:cNvPr id="33" name="Oval 32"/>
-          <p:cNvSpPr/>
-          <p:nvPr/>
-        </p:nvSpPr>
-        <p:spPr>
-          <a:xfrm>
-            <a:off x="2679191" y="4187952"/>
-            <a:ext cx="201168" cy="201168"/>
-          </a:xfrm>
-          <a:prstGeom prst="ellipse">
-            <a:avLst/>
-          </a:prstGeom>
-          <a:solidFill>
-            <a:srgbClr val="203657"/>
-          </a:solidFill>
-          <a:ln>
-            <a:noFill/>
-          </a:ln>
-        </p:spPr>
-        <p:style>
-          <a:lnRef idx="1">
-            <a:schemeClr val="accent1"/>
-          </a:lnRef>
-          <a:fillRef idx="3">
-            <a:schemeClr val="accent1"/>
-          </a:fillRef>
-          <a:effectRef idx="2">
-            <a:schemeClr val="accent1"/>
-          </a:effectRef>
-          <a:fontRef idx="minor">
-            <a:schemeClr val="lt1"/>
-          </a:fontRef>
-        </p:style>
-        <p:txBody>
-          <a:bodyPr rtlCol="0" anchor="ctr"/>
-          <a:lstStyle/>
-          <a:p>
-            <a:pPr algn="ctr"/>
-          </a:p>
-        </p:txBody>
-      </p:sp>
-      <p:sp>
-        <p:nvSpPr>
-          <p:cNvPr id="34" name="TextBox 33"/>
+          <p:cNvPr id="25" name="TextBox 24"/>
           <p:cNvSpPr txBox="1"/>
           <p:nvPr/>
         </p:nvSpPr>
         <p:spPr>
           <a:xfrm>
-            <a:off x="2679191" y="4183380"/>
-            <a:ext cx="201168" cy="182880"/>
+            <a:off x="2231135" y="1892807"/>
+            <a:ext cx="658368" cy="146304"/>
           </a:xfrm>
           <a:prstGeom prst="rect">
             <a:avLst/>
@@ -4582,7 +4165,7 @@
           <a:noFill/>
         </p:spPr>
         <p:txBody>
-          <a:bodyPr wrap="square" lIns="0" rIns="0" tIns="0" bIns="0" anchor="ctr">
+          <a:bodyPr wrap="square" lIns="0" rIns="0" tIns="0" bIns="0" anchor="t">
             <a:spAutoFit/>
           </a:bodyPr>
           <a:lstStyle/>
@@ -4599,27 +4182,72 @@
               </a:spcAft>
             </a:pPr>
             <a:r>
-              <a:rPr sz="720" b="1" i="0">
-                <a:solidFill>
-                  <a:srgbClr val="FFFFFF"/>
+              <a:rPr sz="730" b="1" i="0">
+                <a:solidFill>
+                  <a:srgbClr val="203657"/>
                 </a:solidFill>
                 <a:latin typeface="Aptos"/>
               </a:rPr>
-              <a:t>3</a:t>
-            </a:r>
-          </a:p>
-        </p:txBody>
-      </p:sp>
-      <p:sp>
-        <p:nvSpPr>
-          <p:cNvPr id="35" name="TextBox 34"/>
+              <a:t>3  PENCIL</a:t>
+            </a:r>
+          </a:p>
+        </p:txBody>
+      </p:sp>
+      <p:sp>
+        <p:nvSpPr>
+          <p:cNvPr id="26" name="TextBox 25"/>
           <p:cNvSpPr txBox="1"/>
           <p:nvPr/>
         </p:nvSpPr>
         <p:spPr>
           <a:xfrm>
-            <a:off x="2926079" y="4160520"/>
-            <a:ext cx="548640" cy="201168"/>
+            <a:off x="2212847" y="2112264"/>
+            <a:ext cx="694944" cy="137160"/>
+          </a:xfrm>
+          <a:prstGeom prst="rect">
+            <a:avLst/>
+          </a:prstGeom>
+          <a:noFill/>
+        </p:spPr>
+        <p:txBody>
+          <a:bodyPr wrap="square" lIns="0" rIns="0" tIns="0" bIns="0" anchor="t">
+            <a:spAutoFit/>
+          </a:bodyPr>
+          <a:lstStyle/>
+          <a:p>
+            <a:pPr algn="ctr">
+              <a:lnSpc>
+                <a:spcPct val="100000"/>
+              </a:lnSpc>
+              <a:spcBef>
+                <a:spcPts val="0"/>
+              </a:spcBef>
+              <a:spcAft>
+                <a:spcPts val="0"/>
+              </a:spcAft>
+            </a:pPr>
+            <a:r>
+              <a:rPr sz="590" b="0" i="0">
+                <a:solidFill>
+                  <a:srgbClr val="434952"/>
+                </a:solidFill>
+                <a:latin typeface="Aptos"/>
+              </a:rPr>
+              <a:t>re-rank with s</a:t>
+            </a:r>
+          </a:p>
+        </p:txBody>
+      </p:sp>
+      <p:sp>
+        <p:nvSpPr>
+          <p:cNvPr id="27" name="TextBox 26"/>
+          <p:cNvSpPr txBox="1"/>
+          <p:nvPr/>
+        </p:nvSpPr>
+        <p:spPr>
+          <a:xfrm>
+            <a:off x="356616" y="2615184"/>
+            <a:ext cx="2743200" cy="164592"/>
           </a:xfrm>
           <a:prstGeom prst="rect">
             <a:avLst/>
@@ -4644,460 +4272,27 @@
               </a:spcAft>
             </a:pPr>
             <a:r>
-              <a:rPr sz="850" b="1" i="0">
-                <a:solidFill>
-                  <a:srgbClr val="203657"/>
+              <a:rPr sz="770" b="1" i="0">
+                <a:solidFill>
+                  <a:srgbClr val="9D1B32"/>
                 </a:solidFill>
                 <a:latin typeface="Aptos"/>
               </a:rPr>
-              <a:t>Re-rank</a:t>
-            </a:r>
-          </a:p>
-        </p:txBody>
-      </p:sp>
-      <p:sp>
-        <p:nvSpPr>
-          <p:cNvPr id="36" name="TextBox 35"/>
-          <p:cNvSpPr txBox="1"/>
-          <p:nvPr/>
-        </p:nvSpPr>
-        <p:spPr>
-          <a:xfrm>
-            <a:off x="2679191" y="4443984"/>
-            <a:ext cx="804672" cy="384048"/>
-          </a:xfrm>
-          <a:prstGeom prst="rect">
-            <a:avLst/>
-          </a:prstGeom>
-          <a:noFill/>
-        </p:spPr>
-        <p:txBody>
-          <a:bodyPr wrap="square" lIns="0" rIns="0" tIns="0" bIns="0" anchor="t">
-            <a:spAutoFit/>
-          </a:bodyPr>
-          <a:lstStyle/>
-          <a:p>
-            <a:pPr algn="ctr">
-              <a:lnSpc>
-                <a:spcPct val="95000"/>
-              </a:lnSpc>
-              <a:spcBef>
-                <a:spcPts val="0"/>
-              </a:spcBef>
-              <a:spcAft>
-                <a:spcPts val="0"/>
-              </a:spcAft>
-            </a:pPr>
-            <a:r>
-              <a:rPr sz="750" b="0" i="0">
-                <a:solidFill>
-                  <a:srgbClr val="434952"/>
-                </a:solidFill>
-                <a:latin typeface="Aptos"/>
-              </a:rPr>
-              <a:t>PENCIL with
-budget s</a:t>
-            </a:r>
-          </a:p>
-        </p:txBody>
-      </p:sp>
-      <p:sp>
-        <p:nvSpPr>
-          <p:cNvPr id="37" name="TextBox 36"/>
-          <p:cNvSpPr txBox="1"/>
-          <p:nvPr/>
-        </p:nvSpPr>
-        <p:spPr>
-          <a:xfrm>
-            <a:off x="502920" y="5175504"/>
-            <a:ext cx="3182112" cy="182880"/>
-          </a:xfrm>
-          <a:prstGeom prst="rect">
-            <a:avLst/>
-          </a:prstGeom>
-          <a:noFill/>
-        </p:spPr>
-        <p:txBody>
-          <a:bodyPr wrap="square" lIns="0" rIns="0" tIns="0" bIns="0" anchor="t">
-            <a:spAutoFit/>
-          </a:bodyPr>
-          <a:lstStyle/>
-          <a:p>
-            <a:pPr algn="l">
-              <a:lnSpc>
-                <a:spcPct val="100000"/>
-              </a:lnSpc>
-              <a:spcBef>
-                <a:spcPts val="0"/>
-              </a:spcBef>
-              <a:spcAft>
-                <a:spcPts val="0"/>
-              </a:spcAft>
-            </a:pPr>
-            <a:r>
-              <a:rPr sz="850" b="1" i="0">
-                <a:solidFill>
-                  <a:srgbClr val="9D1B32"/>
-                </a:solidFill>
-                <a:latin typeface="Aptos"/>
-              </a:rPr>
-              <a:t>MID-PROJECT STATUS</a:t>
-            </a:r>
-          </a:p>
-        </p:txBody>
-      </p:sp>
-      <p:sp>
-        <p:nvSpPr>
-          <p:cNvPr id="38" name="TextBox 37"/>
-          <p:cNvSpPr txBox="1"/>
-          <p:nvPr/>
-        </p:nvSpPr>
-        <p:spPr>
-          <a:xfrm>
-            <a:off x="502920" y="5422392"/>
-            <a:ext cx="228600" cy="201168"/>
-          </a:xfrm>
-          <a:prstGeom prst="rect">
-            <a:avLst/>
-          </a:prstGeom>
-          <a:noFill/>
-        </p:spPr>
-        <p:txBody>
-          <a:bodyPr wrap="square" lIns="0" rIns="0" tIns="0" bIns="0" anchor="t">
-            <a:spAutoFit/>
-          </a:bodyPr>
-          <a:lstStyle/>
-          <a:p>
-            <a:pPr algn="l">
-              <a:lnSpc>
-                <a:spcPct val="100000"/>
-              </a:lnSpc>
-              <a:spcBef>
-                <a:spcPts val="0"/>
-              </a:spcBef>
-              <a:spcAft>
-                <a:spcPts val="0"/>
-              </a:spcAft>
-            </a:pPr>
-            <a:r>
-              <a:rPr sz="1050" b="1" i="0">
-                <a:solidFill>
-                  <a:srgbClr val="0F7670"/>
-                </a:solidFill>
-                <a:latin typeface="Aptos"/>
-              </a:rPr>
-              <a:t>✓</a:t>
-            </a:r>
-          </a:p>
-        </p:txBody>
-      </p:sp>
-      <p:sp>
-        <p:nvSpPr>
-          <p:cNvPr id="39" name="TextBox 38"/>
-          <p:cNvSpPr txBox="1"/>
-          <p:nvPr/>
-        </p:nvSpPr>
-        <p:spPr>
-          <a:xfrm>
-            <a:off x="768096" y="5422392"/>
-            <a:ext cx="2880360" cy="228600"/>
-          </a:xfrm>
-          <a:prstGeom prst="rect">
-            <a:avLst/>
-          </a:prstGeom>
-          <a:noFill/>
-        </p:spPr>
-        <p:txBody>
-          <a:bodyPr wrap="square" lIns="0" rIns="0" tIns="0" bIns="0" anchor="t">
-            <a:spAutoFit/>
-          </a:bodyPr>
-          <a:lstStyle/>
-          <a:p>
-            <a:pPr algn="l">
-              <a:lnSpc>
-                <a:spcPct val="100000"/>
-              </a:lnSpc>
-              <a:spcBef>
-                <a:spcPts val="0"/>
-              </a:spcBef>
-              <a:spcAft>
-                <a:spcPts val="0"/>
-              </a:spcAft>
-            </a:pPr>
-            <a:r>
-              <a:rPr sz="850" b="1" i="0">
-                <a:solidFill>
-                  <a:srgbClr val="171A1F"/>
-                </a:solidFill>
-                <a:latin typeface="Aptos"/>
-              </a:rPr>
-              <a:t>Reproduced PENCIL</a:t>
-            </a:r>
-            <a:r>
-              <a:rPr sz="750" b="0" i="0">
-                <a:solidFill>
-                  <a:srgbClr val="777D85"/>
-                </a:solidFill>
-                <a:latin typeface="Aptos"/>
-              </a:rPr>
-              <a:t>  Cora 44.00 · Citeseer 50.46</a:t>
-            </a:r>
-          </a:p>
-        </p:txBody>
-      </p:sp>
-      <p:sp>
-        <p:nvSpPr>
-          <p:cNvPr id="40" name="TextBox 39"/>
-          <p:cNvSpPr txBox="1"/>
-          <p:nvPr/>
-        </p:nvSpPr>
-        <p:spPr>
-          <a:xfrm>
-            <a:off x="502920" y="5760720"/>
-            <a:ext cx="228600" cy="201168"/>
-          </a:xfrm>
-          <a:prstGeom prst="rect">
-            <a:avLst/>
-          </a:prstGeom>
-          <a:noFill/>
-        </p:spPr>
-        <p:txBody>
-          <a:bodyPr wrap="square" lIns="0" rIns="0" tIns="0" bIns="0" anchor="t">
-            <a:spAutoFit/>
-          </a:bodyPr>
-          <a:lstStyle/>
-          <a:p>
-            <a:pPr algn="l">
-              <a:lnSpc>
-                <a:spcPct val="100000"/>
-              </a:lnSpc>
-              <a:spcBef>
-                <a:spcPts val="0"/>
-              </a:spcBef>
-              <a:spcAft>
-                <a:spcPts val="0"/>
-              </a:spcAft>
-            </a:pPr>
-            <a:r>
-              <a:rPr sz="1050" b="1" i="0">
-                <a:solidFill>
-                  <a:srgbClr val="0F7670"/>
-                </a:solidFill>
-                <a:latin typeface="Aptos"/>
-              </a:rPr>
-              <a:t>✓</a:t>
-            </a:r>
-          </a:p>
-        </p:txBody>
-      </p:sp>
-      <p:sp>
-        <p:nvSpPr>
-          <p:cNvPr id="41" name="TextBox 40"/>
-          <p:cNvSpPr txBox="1"/>
-          <p:nvPr/>
-        </p:nvSpPr>
-        <p:spPr>
-          <a:xfrm>
-            <a:off x="768096" y="5760720"/>
-            <a:ext cx="2880360" cy="228600"/>
-          </a:xfrm>
-          <a:prstGeom prst="rect">
-            <a:avLst/>
-          </a:prstGeom>
-          <a:noFill/>
-        </p:spPr>
-        <p:txBody>
-          <a:bodyPr wrap="square" lIns="0" rIns="0" tIns="0" bIns="0" anchor="t">
-            <a:spAutoFit/>
-          </a:bodyPr>
-          <a:lstStyle/>
-          <a:p>
-            <a:pPr algn="l">
-              <a:lnSpc>
-                <a:spcPct val="100000"/>
-              </a:lnSpc>
-              <a:spcBef>
-                <a:spcPts val="0"/>
-              </a:spcBef>
-              <a:spcAft>
-                <a:spcPts val="0"/>
-              </a:spcAft>
-            </a:pPr>
-            <a:r>
-              <a:rPr sz="850" b="1" i="0">
-                <a:solidFill>
-                  <a:srgbClr val="171A1F"/>
-                </a:solidFill>
-                <a:latin typeface="Aptos"/>
-              </a:rPr>
-              <a:t>112 evaluation runs</a:t>
-            </a:r>
-            <a:r>
-              <a:rPr sz="750" b="0" i="0">
-                <a:solidFill>
-                  <a:srgbClr val="777D85"/>
-                </a:solidFill>
-                <a:latin typeface="Aptos"/>
-              </a:rPr>
-              <a:t>  2 graphs × 2 protocols × budgets</a:t>
-            </a:r>
-          </a:p>
-        </p:txBody>
-      </p:sp>
-      <p:sp>
-        <p:nvSpPr>
-          <p:cNvPr id="42" name="TextBox 41"/>
-          <p:cNvSpPr txBox="1"/>
-          <p:nvPr/>
-        </p:nvSpPr>
-        <p:spPr>
-          <a:xfrm>
-            <a:off x="502920" y="6099048"/>
-            <a:ext cx="228600" cy="201168"/>
-          </a:xfrm>
-          <a:prstGeom prst="rect">
-            <a:avLst/>
-          </a:prstGeom>
-          <a:noFill/>
-        </p:spPr>
-        <p:txBody>
-          <a:bodyPr wrap="square" lIns="0" rIns="0" tIns="0" bIns="0" anchor="t">
-            <a:spAutoFit/>
-          </a:bodyPr>
-          <a:lstStyle/>
-          <a:p>
-            <a:pPr algn="l">
-              <a:lnSpc>
-                <a:spcPct val="100000"/>
-              </a:lnSpc>
-              <a:spcBef>
-                <a:spcPts val="0"/>
-              </a:spcBef>
-              <a:spcAft>
-                <a:spcPts val="0"/>
-              </a:spcAft>
-            </a:pPr>
-            <a:r>
-              <a:rPr sz="1050" b="1" i="0">
-                <a:solidFill>
-                  <a:srgbClr val="B46318"/>
-                </a:solidFill>
-                <a:latin typeface="Aptos"/>
-              </a:rPr>
-              <a:t>→</a:t>
-            </a:r>
-          </a:p>
-        </p:txBody>
-      </p:sp>
-      <p:sp>
-        <p:nvSpPr>
-          <p:cNvPr id="43" name="TextBox 42"/>
-          <p:cNvSpPr txBox="1"/>
-          <p:nvPr/>
-        </p:nvSpPr>
-        <p:spPr>
-          <a:xfrm>
-            <a:off x="768096" y="6099048"/>
-            <a:ext cx="2880360" cy="228600"/>
-          </a:xfrm>
-          <a:prstGeom prst="rect">
-            <a:avLst/>
-          </a:prstGeom>
-          <a:noFill/>
-        </p:spPr>
-        <p:txBody>
-          <a:bodyPr wrap="square" lIns="0" rIns="0" tIns="0" bIns="0" anchor="t">
-            <a:spAutoFit/>
-          </a:bodyPr>
-          <a:lstStyle/>
-          <a:p>
-            <a:pPr algn="l">
-              <a:lnSpc>
-                <a:spcPct val="100000"/>
-              </a:lnSpc>
-              <a:spcBef>
-                <a:spcPts val="0"/>
-              </a:spcBef>
-              <a:spcAft>
-                <a:spcPts val="0"/>
-              </a:spcAft>
-            </a:pPr>
-            <a:r>
-              <a:rPr sz="850" b="1" i="0">
-                <a:solidFill>
-                  <a:srgbClr val="171A1F"/>
-                </a:solidFill>
-                <a:latin typeface="Aptos"/>
-              </a:rPr>
-              <a:t>Next: final decision rule</a:t>
-            </a:r>
-            <a:r>
-              <a:rPr sz="750" b="0" i="0">
-                <a:solidFill>
-                  <a:srgbClr val="777D85"/>
-                </a:solidFill>
-                <a:latin typeface="Aptos"/>
-              </a:rPr>
-              <a:t>  latency/VRAM Pareto + final report</a:t>
-            </a:r>
-          </a:p>
-        </p:txBody>
-      </p:sp>
-      <p:sp>
-        <p:nvSpPr>
-          <p:cNvPr id="44" name="TextBox 43"/>
-          <p:cNvSpPr txBox="1"/>
-          <p:nvPr/>
-        </p:nvSpPr>
-        <p:spPr>
-          <a:xfrm>
-            <a:off x="3950208" y="2852928"/>
-            <a:ext cx="7735824" cy="182880"/>
-          </a:xfrm>
-          <a:prstGeom prst="rect">
-            <a:avLst/>
-          </a:prstGeom>
-          <a:noFill/>
-        </p:spPr>
-        <p:txBody>
-          <a:bodyPr wrap="square" lIns="0" rIns="0" tIns="0" bIns="0" anchor="t">
-            <a:spAutoFit/>
-          </a:bodyPr>
-          <a:lstStyle/>
-          <a:p>
-            <a:pPr algn="l">
-              <a:lnSpc>
-                <a:spcPct val="100000"/>
-              </a:lnSpc>
-              <a:spcBef>
-                <a:spcPts val="0"/>
-              </a:spcBef>
-              <a:spcAft>
-                <a:spcPts val="0"/>
-              </a:spcAft>
-            </a:pPr>
-            <a:r>
-              <a:rPr sz="850" b="1" i="0">
-                <a:solidFill>
-                  <a:srgbClr val="9D1B32"/>
-                </a:solidFill>
-                <a:latin typeface="Aptos"/>
-              </a:rPr>
-              <a:t>HALF-FANOUT RESULT  /  TEST MRR ×100</a:t>
-            </a:r>
-          </a:p>
-        </p:txBody>
-      </p:sp>
-      <p:sp>
-        <p:nvSpPr>
-          <p:cNvPr id="45" name="Rounded Rectangle 44"/>
+              <a:t>FREE-GPU REPRODUCTION  ·  PAPER USED 4–8× A100</a:t>
+            </a:r>
+          </a:p>
+        </p:txBody>
+      </p:sp>
+      <p:sp>
+        <p:nvSpPr>
+          <p:cNvPr id="28" name="Rounded Rectangle 27"/>
           <p:cNvSpPr/>
           <p:nvPr/>
         </p:nvSpPr>
         <p:spPr>
           <a:xfrm>
-            <a:off x="3950208" y="3108960"/>
-            <a:ext cx="1851660" cy="1298448"/>
+            <a:off x="356616" y="2834640"/>
+            <a:ext cx="841248" cy="749808"/>
           </a:xfrm>
           <a:prstGeom prst="roundRect">
             <a:avLst>
@@ -5137,14 +4332,14 @@
       </p:sp>
       <p:sp>
         <p:nvSpPr>
-          <p:cNvPr id="46" name="Rectangle 45"/>
+          <p:cNvPr id="29" name="Rectangle 28"/>
           <p:cNvSpPr/>
           <p:nvPr/>
         </p:nvSpPr>
         <p:spPr>
           <a:xfrm>
-            <a:off x="3950208" y="3108960"/>
-            <a:ext cx="1851660" cy="50292"/>
+            <a:off x="356616" y="2834640"/>
+            <a:ext cx="841248" cy="36576"/>
           </a:xfrm>
           <a:prstGeom prst="rect">
             <a:avLst/>
@@ -5180,14 +4375,14 @@
       </p:sp>
       <p:sp>
         <p:nvSpPr>
-          <p:cNvPr id="47" name="TextBox 46"/>
+          <p:cNvPr id="30" name="TextBox 29"/>
           <p:cNvSpPr txBox="1"/>
           <p:nvPr/>
         </p:nvSpPr>
         <p:spPr>
           <a:xfrm>
-            <a:off x="4059936" y="3236976"/>
-            <a:ext cx="1632204" cy="219456"/>
+            <a:off x="411480" y="2944368"/>
+            <a:ext cx="731520" cy="228600"/>
           </a:xfrm>
           <a:prstGeom prst="rect">
             <a:avLst/>
@@ -5212,27 +4407,27 @@
               </a:spcAft>
             </a:pPr>
             <a:r>
-              <a:rPr sz="869" b="1" i="0">
-                <a:solidFill>
-                  <a:srgbClr val="434952"/>
-                </a:solidFill>
-                <a:latin typeface="Aptos"/>
+              <a:rPr sz="1450" b="1" i="0">
+                <a:solidFill>
+                  <a:srgbClr val="203657"/>
+                </a:solidFill>
+                <a:latin typeface="Georgia"/>
               </a:rPr>
-              <a:t>Cora · Pool</a:t>
-            </a:r>
-          </a:p>
-        </p:txBody>
-      </p:sp>
-      <p:sp>
-        <p:nvSpPr>
-          <p:cNvPr id="48" name="TextBox 47"/>
+              <a:t>44.00</a:t>
+            </a:r>
+          </a:p>
+        </p:txBody>
+      </p:sp>
+      <p:sp>
+        <p:nvSpPr>
+          <p:cNvPr id="31" name="TextBox 30"/>
           <p:cNvSpPr txBox="1"/>
           <p:nvPr/>
         </p:nvSpPr>
         <p:spPr>
           <a:xfrm>
-            <a:off x="4041648" y="3502152"/>
-            <a:ext cx="1668780" cy="384048"/>
+            <a:off x="393192" y="3191256"/>
+            <a:ext cx="768096" cy="128016"/>
           </a:xfrm>
           <a:prstGeom prst="rect">
             <a:avLst/>
@@ -5257,27 +4452,27 @@
               </a:spcAft>
             </a:pPr>
             <a:r>
-              <a:rPr sz="2200" b="1" i="0">
-                <a:solidFill>
-                  <a:srgbClr val="203657"/>
-                </a:solidFill>
-                <a:latin typeface="Georgia"/>
+              <a:rPr sz="680" b="1" i="0">
+                <a:solidFill>
+                  <a:srgbClr val="171A1F"/>
+                </a:solidFill>
+                <a:latin typeface="Aptos"/>
               </a:rPr>
-              <a:t>42.9</a:t>
-            </a:r>
-          </a:p>
-        </p:txBody>
-      </p:sp>
-      <p:sp>
-        <p:nvSpPr>
-          <p:cNvPr id="49" name="TextBox 48"/>
+              <a:t>Cora test</a:t>
+            </a:r>
+          </a:p>
+        </p:txBody>
+      </p:sp>
+      <p:sp>
+        <p:nvSpPr>
+          <p:cNvPr id="32" name="TextBox 31"/>
           <p:cNvSpPr txBox="1"/>
           <p:nvPr/>
         </p:nvSpPr>
         <p:spPr>
           <a:xfrm>
-            <a:off x="4041648" y="3867912"/>
-            <a:ext cx="1668780" cy="182880"/>
+            <a:off x="393192" y="3364992"/>
+            <a:ext cx="768096" cy="118872"/>
           </a:xfrm>
           <a:prstGeom prst="rect">
             <a:avLst/>
@@ -5302,117 +4497,27 @@
               </a:spcAft>
             </a:pPr>
             <a:r>
-              <a:rPr sz="760" b="0" i="0">
+              <a:rPr sz="620" b="0" i="0">
                 <a:solidFill>
                   <a:srgbClr val="777D85"/>
                 </a:solidFill>
                 <a:latin typeface="Consolas"/>
               </a:rPr>
-              <a:t>full: 43.7</a:t>
-            </a:r>
-          </a:p>
-        </p:txBody>
-      </p:sp>
-      <p:sp>
-        <p:nvSpPr>
-          <p:cNvPr id="50" name="Rounded Rectangle 49"/>
+              <a:t>paper 42.23</a:t>
+            </a:r>
+          </a:p>
+        </p:txBody>
+      </p:sp>
+      <p:sp>
+        <p:nvSpPr>
+          <p:cNvPr id="33" name="Rounded Rectangle 32"/>
           <p:cNvSpPr/>
           <p:nvPr/>
         </p:nvSpPr>
         <p:spPr>
           <a:xfrm>
-            <a:off x="4242816" y="4105656"/>
-            <a:ext cx="1266444" cy="210312"/>
-          </a:xfrm>
-          <a:prstGeom prst="roundRect">
-            <a:avLst>
-              <a:gd name="adj" fmla="val 8000"/>
-            </a:avLst>
-          </a:prstGeom>
-          <a:solidFill>
-            <a:srgbClr val="E8EDF3"/>
-          </a:solidFill>
-          <a:ln>
-            <a:noFill/>
-          </a:ln>
-        </p:spPr>
-        <p:style>
-          <a:lnRef idx="1">
-            <a:schemeClr val="accent1"/>
-          </a:lnRef>
-          <a:fillRef idx="3">
-            <a:schemeClr val="accent1"/>
-          </a:fillRef>
-          <a:effectRef idx="2">
-            <a:schemeClr val="accent1"/>
-          </a:effectRef>
-          <a:fontRef idx="minor">
-            <a:schemeClr val="lt1"/>
-          </a:fontRef>
-        </p:style>
-        <p:txBody>
-          <a:bodyPr rtlCol="0" anchor="ctr"/>
-          <a:lstStyle/>
-          <a:p>
-            <a:pPr algn="ctr"/>
-          </a:p>
-        </p:txBody>
-      </p:sp>
-      <p:sp>
-        <p:nvSpPr>
-          <p:cNvPr id="51" name="TextBox 50"/>
-          <p:cNvSpPr txBox="1"/>
-          <p:nvPr/>
-        </p:nvSpPr>
-        <p:spPr>
-          <a:xfrm>
-            <a:off x="4261104" y="4128515"/>
-            <a:ext cx="1229868" cy="155448"/>
-          </a:xfrm>
-          <a:prstGeom prst="rect">
-            <a:avLst/>
-          </a:prstGeom>
-          <a:noFill/>
-        </p:spPr>
-        <p:txBody>
-          <a:bodyPr wrap="square" lIns="0" rIns="0" tIns="0" bIns="0" anchor="ctr">
-            <a:spAutoFit/>
-          </a:bodyPr>
-          <a:lstStyle/>
-          <a:p>
-            <a:pPr algn="ctr">
-              <a:lnSpc>
-                <a:spcPct val="100000"/>
-              </a:lnSpc>
-              <a:spcBef>
-                <a:spcPts val="0"/>
-              </a:spcBef>
-              <a:spcAft>
-                <a:spcPts val="0"/>
-              </a:spcAft>
-            </a:pPr>
-            <a:r>
-              <a:rPr sz="700" b="1" i="0">
-                <a:solidFill>
-                  <a:srgbClr val="203657"/>
-                </a:solidFill>
-                <a:latin typeface="Aptos"/>
-              </a:rPr>
-              <a:t>MATCHES</a:t>
-            </a:r>
-          </a:p>
-        </p:txBody>
-      </p:sp>
-      <p:sp>
-        <p:nvSpPr>
-          <p:cNvPr id="52" name="Rounded Rectangle 51"/>
-          <p:cNvSpPr/>
-          <p:nvPr/>
-        </p:nvSpPr>
-        <p:spPr>
-          <a:xfrm>
-            <a:off x="5911596" y="3108960"/>
-            <a:ext cx="1851660" cy="1298448"/>
+            <a:off x="1280160" y="2834640"/>
+            <a:ext cx="841248" cy="749808"/>
           </a:xfrm>
           <a:prstGeom prst="roundRect">
             <a:avLst>
@@ -5452,14 +4557,14 @@
       </p:sp>
       <p:sp>
         <p:nvSpPr>
-          <p:cNvPr id="53" name="Rectangle 52"/>
+          <p:cNvPr id="34" name="Rectangle 33"/>
           <p:cNvSpPr/>
           <p:nvPr/>
         </p:nvSpPr>
         <p:spPr>
           <a:xfrm>
-            <a:off x="5911596" y="3108960"/>
-            <a:ext cx="1851660" cy="50292"/>
+            <a:off x="1280160" y="2834640"/>
+            <a:ext cx="841248" cy="36576"/>
           </a:xfrm>
           <a:prstGeom prst="rect">
             <a:avLst/>
@@ -5495,14 +4600,14 @@
       </p:sp>
       <p:sp>
         <p:nvSpPr>
-          <p:cNvPr id="54" name="TextBox 53"/>
+          <p:cNvPr id="35" name="TextBox 34"/>
           <p:cNvSpPr txBox="1"/>
           <p:nvPr/>
         </p:nvSpPr>
         <p:spPr>
           <a:xfrm>
-            <a:off x="6021324" y="3236976"/>
-            <a:ext cx="1632204" cy="219456"/>
+            <a:off x="1335024" y="2944368"/>
+            <a:ext cx="731520" cy="228600"/>
           </a:xfrm>
           <a:prstGeom prst="rect">
             <a:avLst/>
@@ -5527,27 +4632,27 @@
               </a:spcAft>
             </a:pPr>
             <a:r>
-              <a:rPr sz="869" b="1" i="0">
-                <a:solidFill>
-                  <a:srgbClr val="434952"/>
-                </a:solidFill>
-                <a:latin typeface="Aptos"/>
+              <a:rPr sz="1450" b="1" i="0">
+                <a:solidFill>
+                  <a:srgbClr val="0F7670"/>
+                </a:solidFill>
+                <a:latin typeface="Georgia"/>
               </a:rPr>
-              <a:t>Citeseer · Pool</a:t>
-            </a:r>
-          </a:p>
-        </p:txBody>
-      </p:sp>
-      <p:sp>
-        <p:nvSpPr>
-          <p:cNvPr id="55" name="TextBox 54"/>
+              <a:t>50.46</a:t>
+            </a:r>
+          </a:p>
+        </p:txBody>
+      </p:sp>
+      <p:sp>
+        <p:nvSpPr>
+          <p:cNvPr id="36" name="TextBox 35"/>
           <p:cNvSpPr txBox="1"/>
           <p:nvPr/>
         </p:nvSpPr>
         <p:spPr>
           <a:xfrm>
-            <a:off x="6003036" y="3502152"/>
-            <a:ext cx="1668780" cy="384048"/>
+            <a:off x="1316736" y="3191256"/>
+            <a:ext cx="768096" cy="128016"/>
           </a:xfrm>
           <a:prstGeom prst="rect">
             <a:avLst/>
@@ -5572,27 +4677,27 @@
               </a:spcAft>
             </a:pPr>
             <a:r>
-              <a:rPr sz="2200" b="1" i="0">
-                <a:solidFill>
-                  <a:srgbClr val="0F7670"/>
-                </a:solidFill>
-                <a:latin typeface="Georgia"/>
+              <a:rPr sz="680" b="1" i="0">
+                <a:solidFill>
+                  <a:srgbClr val="171A1F"/>
+                </a:solidFill>
+                <a:latin typeface="Aptos"/>
               </a:rPr>
-              <a:t>51.4</a:t>
-            </a:r>
-          </a:p>
-        </p:txBody>
-      </p:sp>
-      <p:sp>
-        <p:nvSpPr>
-          <p:cNvPr id="56" name="TextBox 55"/>
+              <a:t>Citeseer test</a:t>
+            </a:r>
+          </a:p>
+        </p:txBody>
+      </p:sp>
+      <p:sp>
+        <p:nvSpPr>
+          <p:cNvPr id="37" name="TextBox 36"/>
           <p:cNvSpPr txBox="1"/>
           <p:nvPr/>
         </p:nvSpPr>
         <p:spPr>
           <a:xfrm>
-            <a:off x="6003036" y="3867912"/>
-            <a:ext cx="1668780" cy="182880"/>
+            <a:off x="1316736" y="3364992"/>
+            <a:ext cx="768096" cy="118872"/>
           </a:xfrm>
           <a:prstGeom prst="rect">
             <a:avLst/>
@@ -5617,117 +4722,27 @@
               </a:spcAft>
             </a:pPr>
             <a:r>
-              <a:rPr sz="760" b="0" i="0">
+              <a:rPr sz="620" b="0" i="0">
                 <a:solidFill>
                   <a:srgbClr val="777D85"/>
                 </a:solidFill>
                 <a:latin typeface="Consolas"/>
               </a:rPr>
-              <a:t>full: 49.7</a:t>
-            </a:r>
-          </a:p>
-        </p:txBody>
-      </p:sp>
-      <p:sp>
-        <p:nvSpPr>
-          <p:cNvPr id="57" name="Rounded Rectangle 56"/>
+              <a:t>paper 47.51</a:t>
+            </a:r>
+          </a:p>
+        </p:txBody>
+      </p:sp>
+      <p:sp>
+        <p:nvSpPr>
+          <p:cNvPr id="38" name="Rounded Rectangle 37"/>
           <p:cNvSpPr/>
           <p:nvPr/>
         </p:nvSpPr>
         <p:spPr>
           <a:xfrm>
-            <a:off x="6204204" y="4105656"/>
-            <a:ext cx="1266444" cy="210312"/>
-          </a:xfrm>
-          <a:prstGeom prst="roundRect">
-            <a:avLst>
-              <a:gd name="adj" fmla="val 8000"/>
-            </a:avLst>
-          </a:prstGeom>
-          <a:solidFill>
-            <a:srgbClr val="E4F0ED"/>
-          </a:solidFill>
-          <a:ln>
-            <a:noFill/>
-          </a:ln>
-        </p:spPr>
-        <p:style>
-          <a:lnRef idx="1">
-            <a:schemeClr val="accent1"/>
-          </a:lnRef>
-          <a:fillRef idx="3">
-            <a:schemeClr val="accent1"/>
-          </a:fillRef>
-          <a:effectRef idx="2">
-            <a:schemeClr val="accent1"/>
-          </a:effectRef>
-          <a:fontRef idx="minor">
-            <a:schemeClr val="lt1"/>
-          </a:fontRef>
-        </p:style>
-        <p:txBody>
-          <a:bodyPr rtlCol="0" anchor="ctr"/>
-          <a:lstStyle/>
-          <a:p>
-            <a:pPr algn="ctr"/>
-          </a:p>
-        </p:txBody>
-      </p:sp>
-      <p:sp>
-        <p:nvSpPr>
-          <p:cNvPr id="58" name="TextBox 57"/>
-          <p:cNvSpPr txBox="1"/>
-          <p:nvPr/>
-        </p:nvSpPr>
-        <p:spPr>
-          <a:xfrm>
-            <a:off x="6222492" y="4128515"/>
-            <a:ext cx="1229868" cy="155448"/>
-          </a:xfrm>
-          <a:prstGeom prst="rect">
-            <a:avLst/>
-          </a:prstGeom>
-          <a:noFill/>
-        </p:spPr>
-        <p:txBody>
-          <a:bodyPr wrap="square" lIns="0" rIns="0" tIns="0" bIns="0" anchor="ctr">
-            <a:spAutoFit/>
-          </a:bodyPr>
-          <a:lstStyle/>
-          <a:p>
-            <a:pPr algn="ctr">
-              <a:lnSpc>
-                <a:spcPct val="100000"/>
-              </a:lnSpc>
-              <a:spcBef>
-                <a:spcPts val="0"/>
-              </a:spcBef>
-              <a:spcAft>
-                <a:spcPts val="0"/>
-              </a:spcAft>
-            </a:pPr>
-            <a:r>
-              <a:rPr sz="700" b="1" i="0">
-                <a:solidFill>
-                  <a:srgbClr val="0F7670"/>
-                </a:solidFill>
-                <a:latin typeface="Aptos"/>
-              </a:rPr>
-              <a:t>BEATS FULL</a:t>
-            </a:r>
-          </a:p>
-        </p:txBody>
-      </p:sp>
-      <p:sp>
-        <p:nvSpPr>
-          <p:cNvPr id="59" name="Rounded Rectangle 58"/>
-          <p:cNvSpPr/>
-          <p:nvPr/>
-        </p:nvSpPr>
-        <p:spPr>
-          <a:xfrm>
-            <a:off x="7872984" y="3108960"/>
-            <a:ext cx="1851660" cy="1298448"/>
+            <a:off x="2203704" y="2834640"/>
+            <a:ext cx="841248" cy="749808"/>
           </a:xfrm>
           <a:prstGeom prst="roundRect">
             <a:avLst>
@@ -5767,20 +4782,20 @@
       </p:sp>
       <p:sp>
         <p:nvSpPr>
-          <p:cNvPr id="60" name="Rectangle 59"/>
+          <p:cNvPr id="39" name="Rectangle 38"/>
           <p:cNvSpPr/>
           <p:nvPr/>
         </p:nvSpPr>
         <p:spPr>
           <a:xfrm>
-            <a:off x="7872984" y="3108960"/>
-            <a:ext cx="1851660" cy="50292"/>
+            <a:off x="2203704" y="2834640"/>
+            <a:ext cx="841248" cy="36576"/>
           </a:xfrm>
           <a:prstGeom prst="rect">
             <a:avLst/>
           </a:prstGeom>
           <a:solidFill>
-            <a:srgbClr val="0F7670"/>
+            <a:srgbClr val="9D1B32"/>
           </a:solidFill>
           <a:ln>
             <a:noFill/>
@@ -5810,14 +4825,14 @@
       </p:sp>
       <p:sp>
         <p:nvSpPr>
-          <p:cNvPr id="61" name="TextBox 60"/>
+          <p:cNvPr id="40" name="TextBox 39"/>
           <p:cNvSpPr txBox="1"/>
           <p:nvPr/>
         </p:nvSpPr>
         <p:spPr>
           <a:xfrm>
-            <a:off x="7982712" y="3236976"/>
-            <a:ext cx="1632204" cy="219456"/>
+            <a:off x="2258568" y="2944368"/>
+            <a:ext cx="731520" cy="228600"/>
           </a:xfrm>
           <a:prstGeom prst="rect">
             <a:avLst/>
@@ -5842,27 +4857,27 @@
               </a:spcAft>
             </a:pPr>
             <a:r>
-              <a:rPr sz="869" b="1" i="0">
-                <a:solidFill>
-                  <a:srgbClr val="434952"/>
-                </a:solidFill>
-                <a:latin typeface="Aptos"/>
+              <a:rPr sz="1450" b="1" i="0">
+                <a:solidFill>
+                  <a:srgbClr val="9D1B32"/>
+                </a:solidFill>
+                <a:latin typeface="Georgia"/>
               </a:rPr>
-              <a:t>Cora · HeaRT</a:t>
-            </a:r>
-          </a:p>
-        </p:txBody>
-      </p:sp>
-      <p:sp>
-        <p:nvSpPr>
-          <p:cNvPr id="62" name="TextBox 61"/>
+              <a:t>112</a:t>
+            </a:r>
+          </a:p>
+        </p:txBody>
+      </p:sp>
+      <p:sp>
+        <p:nvSpPr>
+          <p:cNvPr id="41" name="TextBox 40"/>
           <p:cNvSpPr txBox="1"/>
           <p:nvPr/>
         </p:nvSpPr>
         <p:spPr>
           <a:xfrm>
-            <a:off x="7964424" y="3502152"/>
-            <a:ext cx="1668780" cy="384048"/>
+            <a:off x="2240280" y="3191256"/>
+            <a:ext cx="768096" cy="128016"/>
           </a:xfrm>
           <a:prstGeom prst="rect">
             <a:avLst/>
@@ -5887,27 +4902,27 @@
               </a:spcAft>
             </a:pPr>
             <a:r>
-              <a:rPr sz="2200" b="1" i="0">
-                <a:solidFill>
-                  <a:srgbClr val="0F7670"/>
-                </a:solidFill>
-                <a:latin typeface="Georgia"/>
+              <a:rPr sz="680" b="1" i="0">
+                <a:solidFill>
+                  <a:srgbClr val="171A1F"/>
+                </a:solidFill>
+                <a:latin typeface="Aptos"/>
               </a:rPr>
-              <a:t>14.3</a:t>
-            </a:r>
-          </a:p>
-        </p:txBody>
-      </p:sp>
-      <p:sp>
-        <p:nvSpPr>
-          <p:cNvPr id="63" name="TextBox 62"/>
+              <a:t>score dumps</a:t>
+            </a:r>
+          </a:p>
+        </p:txBody>
+      </p:sp>
+      <p:sp>
+        <p:nvSpPr>
+          <p:cNvPr id="42" name="TextBox 41"/>
           <p:cNvSpPr txBox="1"/>
           <p:nvPr/>
         </p:nvSpPr>
         <p:spPr>
           <a:xfrm>
-            <a:off x="7964424" y="3867912"/>
-            <a:ext cx="1668780" cy="182880"/>
+            <a:off x="2240280" y="3364992"/>
+            <a:ext cx="768096" cy="118872"/>
           </a:xfrm>
           <a:prstGeom prst="rect">
             <a:avLst/>
@@ -5932,72 +4947,27 @@
               </a:spcAft>
             </a:pPr>
             <a:r>
-              <a:rPr sz="760" b="0" i="0">
+              <a:rPr sz="620" b="0" i="0">
                 <a:solidFill>
                   <a:srgbClr val="777D85"/>
                 </a:solidFill>
                 <a:latin typeface="Consolas"/>
               </a:rPr>
-              <a:t>full: 13.3</a:t>
-            </a:r>
-          </a:p>
-        </p:txBody>
-      </p:sp>
-      <p:sp>
-        <p:nvSpPr>
-          <p:cNvPr id="64" name="Rounded Rectangle 63"/>
-          <p:cNvSpPr/>
-          <p:nvPr/>
-        </p:nvSpPr>
-        <p:spPr>
-          <a:xfrm>
-            <a:off x="8165592" y="4105656"/>
-            <a:ext cx="1266444" cy="210312"/>
-          </a:xfrm>
-          <a:prstGeom prst="roundRect">
-            <a:avLst>
-              <a:gd name="adj" fmla="val 8000"/>
-            </a:avLst>
-          </a:prstGeom>
-          <a:solidFill>
-            <a:srgbClr val="E4F0ED"/>
-          </a:solidFill>
-          <a:ln>
-            <a:noFill/>
-          </a:ln>
-        </p:spPr>
-        <p:style>
-          <a:lnRef idx="1">
-            <a:schemeClr val="accent1"/>
-          </a:lnRef>
-          <a:fillRef idx="3">
-            <a:schemeClr val="accent1"/>
-          </a:fillRef>
-          <a:effectRef idx="2">
-            <a:schemeClr val="accent1"/>
-          </a:effectRef>
-          <a:fontRef idx="minor">
-            <a:schemeClr val="lt1"/>
-          </a:fontRef>
-        </p:style>
-        <p:txBody>
-          <a:bodyPr rtlCol="0" anchor="ctr"/>
-          <a:lstStyle/>
-          <a:p>
-            <a:pPr algn="ctr"/>
-          </a:p>
-        </p:txBody>
-      </p:sp>
-      <p:sp>
-        <p:nvSpPr>
-          <p:cNvPr id="65" name="TextBox 64"/>
+              <a:t>4 regimes</a:t>
+            </a:r>
+          </a:p>
+        </p:txBody>
+      </p:sp>
+      <p:sp>
+        <p:nvSpPr>
+          <p:cNvPr id="43" name="TextBox 42"/>
           <p:cNvSpPr txBox="1"/>
           <p:nvPr/>
         </p:nvSpPr>
         <p:spPr>
           <a:xfrm>
-            <a:off x="8183880" y="4128515"/>
-            <a:ext cx="1229868" cy="155448"/>
+            <a:off x="356616" y="3749039"/>
+            <a:ext cx="2743200" cy="164592"/>
           </a:xfrm>
           <a:prstGeom prst="rect">
             <a:avLst/>
@@ -6005,12 +4975,12 @@
           <a:noFill/>
         </p:spPr>
         <p:txBody>
-          <a:bodyPr wrap="square" lIns="0" rIns="0" tIns="0" bIns="0" anchor="ctr">
+          <a:bodyPr wrap="square" lIns="0" rIns="0" tIns="0" bIns="0" anchor="t">
             <a:spAutoFit/>
           </a:bodyPr>
           <a:lstStyle/>
           <a:p>
-            <a:pPr algn="ctr">
+            <a:pPr algn="l">
               <a:lnSpc>
                 <a:spcPct val="100000"/>
               </a:lnSpc>
@@ -6022,27 +4992,27 @@
               </a:spcAft>
             </a:pPr>
             <a:r>
-              <a:rPr sz="700" b="1" i="0">
-                <a:solidFill>
-                  <a:srgbClr val="0F7670"/>
+              <a:rPr sz="819" b="1" i="0">
+                <a:solidFill>
+                  <a:srgbClr val="9D1B32"/>
                 </a:solidFill>
                 <a:latin typeface="Aptos"/>
               </a:rPr>
-              <a:t>BEATS FULL</a:t>
-            </a:r>
-          </a:p>
-        </p:txBody>
-      </p:sp>
-      <p:sp>
-        <p:nvSpPr>
-          <p:cNvPr id="66" name="Rounded Rectangle 65"/>
+              <a:t>EXPERIMENTAL AUDIT</a:t>
+            </a:r>
+          </a:p>
+        </p:txBody>
+      </p:sp>
+      <p:sp>
+        <p:nvSpPr>
+          <p:cNvPr id="44" name="Rounded Rectangle 43"/>
           <p:cNvSpPr/>
           <p:nvPr/>
         </p:nvSpPr>
         <p:spPr>
           <a:xfrm>
-            <a:off x="9834372" y="3108960"/>
-            <a:ext cx="1851660" cy="1298448"/>
+            <a:off x="356616" y="3968496"/>
+            <a:ext cx="2743200" cy="1188720"/>
           </a:xfrm>
           <a:prstGeom prst="roundRect">
             <a:avLst>
@@ -6082,20 +5052,110 @@
       </p:sp>
       <p:sp>
         <p:nvSpPr>
-          <p:cNvPr id="67" name="Rectangle 66"/>
+          <p:cNvPr id="45" name="TextBox 44"/>
+          <p:cNvSpPr txBox="1"/>
+          <p:nvPr/>
+        </p:nvSpPr>
+        <p:spPr>
+          <a:xfrm>
+            <a:off x="475488" y="4078224"/>
+            <a:ext cx="749808" cy="164592"/>
+          </a:xfrm>
+          <a:prstGeom prst="rect">
+            <a:avLst/>
+          </a:prstGeom>
+          <a:noFill/>
+        </p:spPr>
+        <p:txBody>
+          <a:bodyPr wrap="square" lIns="0" rIns="0" tIns="0" bIns="0" anchor="t">
+            <a:spAutoFit/>
+          </a:bodyPr>
+          <a:lstStyle/>
+          <a:p>
+            <a:pPr algn="l">
+              <a:lnSpc>
+                <a:spcPct val="100000"/>
+              </a:lnSpc>
+              <a:spcBef>
+                <a:spcPts val="0"/>
+              </a:spcBef>
+              <a:spcAft>
+                <a:spcPts val="0"/>
+              </a:spcAft>
+            </a:pPr>
+            <a:r>
+              <a:rPr sz="700" b="1" i="0">
+                <a:solidFill>
+                  <a:srgbClr val="203657"/>
+                </a:solidFill>
+                <a:latin typeface="Aptos"/>
+              </a:rPr>
+              <a:t>4 regimes</a:t>
+            </a:r>
+          </a:p>
+        </p:txBody>
+      </p:sp>
+      <p:sp>
+        <p:nvSpPr>
+          <p:cNvPr id="46" name="TextBox 45"/>
+          <p:cNvSpPr txBox="1"/>
+          <p:nvPr/>
+        </p:nvSpPr>
+        <p:spPr>
+          <a:xfrm>
+            <a:off x="1197864" y="4078224"/>
+            <a:ext cx="1773936" cy="246888"/>
+          </a:xfrm>
+          <a:prstGeom prst="rect">
+            <a:avLst/>
+          </a:prstGeom>
+          <a:noFill/>
+        </p:spPr>
+        <p:txBody>
+          <a:bodyPr wrap="square" lIns="0" rIns="0" tIns="0" bIns="0" anchor="t">
+            <a:spAutoFit/>
+          </a:bodyPr>
+          <a:lstStyle/>
+          <a:p>
+            <a:pPr algn="l">
+              <a:lnSpc>
+                <a:spcPct val="100000"/>
+              </a:lnSpc>
+              <a:spcBef>
+                <a:spcPts val="0"/>
+              </a:spcBef>
+              <a:spcAft>
+                <a:spcPts val="0"/>
+              </a:spcAft>
+            </a:pPr>
+            <a:r>
+              <a:rPr sz="645" b="0" i="0">
+                <a:solidFill>
+                  <a:srgbClr val="434952"/>
+                </a:solidFill>
+                <a:latin typeface="Aptos"/>
+              </a:rPr>
+              <a:t>Cora + Citeseer × shared-pool + HeaRT hard negatives</a:t>
+            </a:r>
+          </a:p>
+        </p:txBody>
+      </p:sp>
+      <p:sp>
+        <p:nvSpPr>
+          <p:cNvPr id="47" name="Rectangle 46"/>
           <p:cNvSpPr/>
           <p:nvPr/>
         </p:nvSpPr>
         <p:spPr>
           <a:xfrm>
-            <a:off x="9834372" y="3108960"/>
-            <a:ext cx="1851660" cy="50292"/>
+            <a:off x="466344" y="4361688"/>
+            <a:ext cx="2523744" cy="7315"/>
           </a:xfrm>
           <a:prstGeom prst="rect">
             <a:avLst/>
           </a:prstGeom>
           <a:solidFill>
-            <a:srgbClr val="9D1B32"/>
+            <a:srgbClr val="D9D4CB"/>
           </a:solidFill>
           <a:ln>
             <a:noFill/>
@@ -6125,14 +5185,14 @@
       </p:sp>
       <p:sp>
         <p:nvSpPr>
-          <p:cNvPr id="68" name="TextBox 67"/>
+          <p:cNvPr id="48" name="TextBox 47"/>
           <p:cNvSpPr txBox="1"/>
           <p:nvPr/>
         </p:nvSpPr>
         <p:spPr>
           <a:xfrm>
-            <a:off x="9944100" y="3236976"/>
-            <a:ext cx="1632204" cy="219456"/>
+            <a:off x="475488" y="4425696"/>
+            <a:ext cx="749808" cy="164592"/>
           </a:xfrm>
           <a:prstGeom prst="rect">
             <a:avLst/>
@@ -6145,7 +5205,7 @@
           </a:bodyPr>
           <a:lstStyle/>
           <a:p>
-            <a:pPr algn="ctr">
+            <a:pPr algn="l">
               <a:lnSpc>
                 <a:spcPct val="100000"/>
               </a:lnSpc>
@@ -6157,27 +5217,27 @@
               </a:spcAft>
             </a:pPr>
             <a:r>
-              <a:rPr sz="869" b="1" i="0">
-                <a:solidFill>
-                  <a:srgbClr val="434952"/>
+              <a:rPr sz="700" b="1" i="0">
+                <a:solidFill>
+                  <a:srgbClr val="203657"/>
                 </a:solidFill>
                 <a:latin typeface="Aptos"/>
               </a:rPr>
-              <a:t>Citeseer · HeaRT</a:t>
-            </a:r>
-          </a:p>
-        </p:txBody>
-      </p:sp>
-      <p:sp>
-        <p:nvSpPr>
-          <p:cNvPr id="69" name="TextBox 68"/>
+              <a:t>Validation only</a:t>
+            </a:r>
+          </a:p>
+        </p:txBody>
+      </p:sp>
+      <p:sp>
+        <p:nvSpPr>
+          <p:cNvPr id="49" name="TextBox 48"/>
           <p:cNvSpPr txBox="1"/>
           <p:nvPr/>
         </p:nvSpPr>
         <p:spPr>
           <a:xfrm>
-            <a:off x="9925812" y="3502152"/>
-            <a:ext cx="1668780" cy="384048"/>
+            <a:off x="1197864" y="4425696"/>
+            <a:ext cx="1773936" cy="246888"/>
           </a:xfrm>
           <a:prstGeom prst="rect">
             <a:avLst/>
@@ -6190,7 +5250,7 @@
           </a:bodyPr>
           <a:lstStyle/>
           <a:p>
-            <a:pPr algn="ctr">
+            <a:pPr algn="l">
               <a:lnSpc>
                 <a:spcPct val="100000"/>
               </a:lnSpc>
@@ -6202,80 +5262,33 @@
               </a:spcAft>
             </a:pPr>
             <a:r>
-              <a:rPr sz="2200" b="1" i="0">
-                <a:solidFill>
-                  <a:srgbClr val="9D1B32"/>
-                </a:solidFill>
-                <a:latin typeface="Georgia"/>
+              <a:rPr sz="645" b="0" i="0">
+                <a:solidFill>
+                  <a:srgbClr val="434952"/>
+                </a:solidFill>
+                <a:latin typeface="Aptos"/>
               </a:rPr>
-              <a:t>14.2</a:t>
-            </a:r>
-          </a:p>
-        </p:txBody>
-      </p:sp>
-      <p:sp>
-        <p:nvSpPr>
-          <p:cNvPr id="70" name="TextBox 69"/>
-          <p:cNvSpPr txBox="1"/>
-          <p:nvPr/>
-        </p:nvSpPr>
-        <p:spPr>
-          <a:xfrm>
-            <a:off x="9925812" y="3867912"/>
-            <a:ext cx="1668780" cy="182880"/>
-          </a:xfrm>
-          <a:prstGeom prst="rect">
-            <a:avLst/>
-          </a:prstGeom>
-          <a:noFill/>
-        </p:spPr>
-        <p:txBody>
-          <a:bodyPr wrap="square" lIns="0" rIns="0" tIns="0" bIns="0" anchor="t">
-            <a:spAutoFit/>
-          </a:bodyPr>
-          <a:lstStyle/>
-          <a:p>
-            <a:pPr algn="ctr">
-              <a:lnSpc>
-                <a:spcPct val="100000"/>
-              </a:lnSpc>
-              <a:spcBef>
-                <a:spcPts val="0"/>
-              </a:spcBef>
-              <a:spcAft>
-                <a:spcPts val="0"/>
-              </a:spcAft>
-            </a:pPr>
-            <a:r>
-              <a:rPr sz="760" b="0" i="0">
-                <a:solidFill>
-                  <a:srgbClr val="777D85"/>
-                </a:solidFill>
-                <a:latin typeface="Consolas"/>
-              </a:rPr>
-              <a:t>full: 17.8</a:t>
-            </a:r>
-          </a:p>
-        </p:txBody>
-      </p:sp>
-      <p:sp>
-        <p:nvSpPr>
-          <p:cNvPr id="71" name="Rounded Rectangle 70"/>
+              <a:t>select (k, s) under 5%, 10%, 25%, 50%, 75%, 100% caps</a:t>
+            </a:r>
+          </a:p>
+        </p:txBody>
+      </p:sp>
+      <p:sp>
+        <p:nvSpPr>
+          <p:cNvPr id="50" name="Rectangle 49"/>
           <p:cNvSpPr/>
           <p:nvPr/>
         </p:nvSpPr>
         <p:spPr>
           <a:xfrm>
-            <a:off x="10126980" y="4105656"/>
-            <a:ext cx="1266444" cy="210312"/>
-          </a:xfrm>
-          <a:prstGeom prst="roundRect">
-            <a:avLst>
-              <a:gd name="adj" fmla="val 8000"/>
-            </a:avLst>
+            <a:off x="466344" y="4709159"/>
+            <a:ext cx="2523744" cy="7315"/>
+          </a:xfrm>
+          <a:prstGeom prst="rect">
+            <a:avLst/>
           </a:prstGeom>
           <a:solidFill>
-            <a:srgbClr val="F4E7E9"/>
+            <a:srgbClr val="D9D4CB"/>
           </a:solidFill>
           <a:ln>
             <a:noFill/>
@@ -6305,59 +5318,14 @@
       </p:sp>
       <p:sp>
         <p:nvSpPr>
-          <p:cNvPr id="72" name="TextBox 71"/>
+          <p:cNvPr id="51" name="TextBox 50"/>
           <p:cNvSpPr txBox="1"/>
           <p:nvPr/>
         </p:nvSpPr>
         <p:spPr>
           <a:xfrm>
-            <a:off x="10145268" y="4128515"/>
-            <a:ext cx="1229868" cy="155448"/>
-          </a:xfrm>
-          <a:prstGeom prst="rect">
-            <a:avLst/>
-          </a:prstGeom>
-          <a:noFill/>
-        </p:spPr>
-        <p:txBody>
-          <a:bodyPr wrap="square" lIns="0" rIns="0" tIns="0" bIns="0" anchor="ctr">
-            <a:spAutoFit/>
-          </a:bodyPr>
-          <a:lstStyle/>
-          <a:p>
-            <a:pPr algn="ctr">
-              <a:lnSpc>
-                <a:spcPct val="100000"/>
-              </a:lnSpc>
-              <a:spcBef>
-                <a:spcPts val="0"/>
-              </a:spcBef>
-              <a:spcAft>
-                <a:spcPts val="0"/>
-              </a:spcAft>
-            </a:pPr>
-            <a:r>
-              <a:rPr sz="700" b="1" i="0">
-                <a:solidFill>
-                  <a:srgbClr val="9D1B32"/>
-                </a:solidFill>
-                <a:latin typeface="Aptos"/>
-              </a:rPr>
-              <a:t>NEEDS FULL</a:t>
-            </a:r>
-          </a:p>
-        </p:txBody>
-      </p:sp>
-      <p:sp>
-        <p:nvSpPr>
-          <p:cNvPr id="73" name="TextBox 72"/>
-          <p:cNvSpPr txBox="1"/>
-          <p:nvPr/>
-        </p:nvSpPr>
-        <p:spPr>
-          <a:xfrm>
-            <a:off x="3950208" y="4599432"/>
-            <a:ext cx="7735824" cy="182880"/>
+            <a:off x="475488" y="4773168"/>
+            <a:ext cx="749808" cy="164592"/>
           </a:xfrm>
           <a:prstGeom prst="rect">
             <a:avLst/>
@@ -6382,27 +5350,294 @@
               </a:spcAft>
             </a:pPr>
             <a:r>
-              <a:rPr sz="850" b="1" i="0">
-                <a:solidFill>
-                  <a:srgbClr val="9D1B32"/>
+              <a:rPr sz="700" b="1" i="0">
+                <a:solidFill>
+                  <a:srgbClr val="203657"/>
                 </a:solidFill>
                 <a:latin typeface="Aptos"/>
               </a:rPr>
-              <a:t>THE FULL BUDGET IS NOT THE DEFAULT WINNER</a:t>
-            </a:r>
-          </a:p>
-        </p:txBody>
-      </p:sp>
-      <p:sp>
-        <p:nvSpPr>
-          <p:cNvPr id="74" name="Rounded Rectangle 73"/>
+              <a:t>Bias checks</a:t>
+            </a:r>
+          </a:p>
+        </p:txBody>
+      </p:sp>
+      <p:sp>
+        <p:nvSpPr>
+          <p:cNvPr id="52" name="TextBox 51"/>
+          <p:cNvSpPr txBox="1"/>
+          <p:nvPr/>
+        </p:nvSpPr>
+        <p:spPr>
+          <a:xfrm>
+            <a:off x="1197864" y="4773168"/>
+            <a:ext cx="1773936" cy="246888"/>
+          </a:xfrm>
+          <a:prstGeom prst="rect">
+            <a:avLst/>
+          </a:prstGeom>
+          <a:noFill/>
+        </p:spPr>
+        <p:txBody>
+          <a:bodyPr wrap="square" lIns="0" rIns="0" tIns="0" bIns="0" anchor="t">
+            <a:spAutoFit/>
+          </a:bodyPr>
+          <a:lstStyle/>
+          <a:p>
+            <a:pPr algn="l">
+              <a:lnSpc>
+                <a:spcPct val="100000"/>
+              </a:lnSpc>
+              <a:spcBef>
+                <a:spcPts val="0"/>
+              </a:spcBef>
+              <a:spcAft>
+                <a:spcPts val="0"/>
+              </a:spcAft>
+            </a:pPr>
+            <a:r>
+              <a:rPr sz="645" b="0" i="0">
+                <a:solidFill>
+                  <a:srgbClr val="434952"/>
+                </a:solidFill>
+                <a:latin typeface="Aptos"/>
+              </a:rPr>
+              <a:t>fixed float32 score collapse and shortlist tie-position bias</a:t>
+            </a:r>
+          </a:p>
+        </p:txBody>
+      </p:sp>
+      <p:sp>
+        <p:nvSpPr>
+          <p:cNvPr id="53" name="TextBox 52"/>
+          <p:cNvSpPr txBox="1"/>
+          <p:nvPr/>
+        </p:nvSpPr>
+        <p:spPr>
+          <a:xfrm>
+            <a:off x="356616" y="5330952"/>
+            <a:ext cx="2743200" cy="164592"/>
+          </a:xfrm>
+          <a:prstGeom prst="rect">
+            <a:avLst/>
+          </a:prstGeom>
+          <a:noFill/>
+        </p:spPr>
+        <p:txBody>
+          <a:bodyPr wrap="square" lIns="0" rIns="0" tIns="0" bIns="0" anchor="t">
+            <a:spAutoFit/>
+          </a:bodyPr>
+          <a:lstStyle/>
+          <a:p>
+            <a:pPr algn="l">
+              <a:lnSpc>
+                <a:spcPct val="100000"/>
+              </a:lnSpc>
+              <a:spcBef>
+                <a:spcPts val="0"/>
+              </a:spcBef>
+              <a:spcAft>
+                <a:spcPts val="0"/>
+              </a:spcAft>
+            </a:pPr>
+            <a:r>
+              <a:rPr sz="819" b="1" i="0">
+                <a:solidFill>
+                  <a:srgbClr val="9D1B32"/>
+                </a:solidFill>
+                <a:latin typeface="Aptos"/>
+              </a:rPr>
+              <a:t>ROAD TO FINAL SUBMISSION  ·  26 NOV</a:t>
+            </a:r>
+          </a:p>
+        </p:txBody>
+      </p:sp>
+      <p:sp>
+        <p:nvSpPr>
+          <p:cNvPr id="54" name="Rounded Rectangle 53"/>
           <p:cNvSpPr/>
           <p:nvPr/>
         </p:nvSpPr>
         <p:spPr>
           <a:xfrm>
-            <a:off x="3950208" y="4846320"/>
-            <a:ext cx="7735824" cy="1344168"/>
+            <a:off x="356616" y="5550408"/>
+            <a:ext cx="2743200" cy="850392"/>
+          </a:xfrm>
+          <a:prstGeom prst="roundRect">
+            <a:avLst>
+              <a:gd name="adj" fmla="val 8000"/>
+            </a:avLst>
+          </a:prstGeom>
+          <a:solidFill>
+            <a:srgbClr val="F5EADA"/>
+          </a:solidFill>
+          <a:ln w="8890">
+            <a:solidFill>
+              <a:srgbClr val="DCBE99"/>
+            </a:solidFill>
+          </a:ln>
+        </p:spPr>
+        <p:style>
+          <a:lnRef idx="1">
+            <a:schemeClr val="accent1"/>
+          </a:lnRef>
+          <a:fillRef idx="3">
+            <a:schemeClr val="accent1"/>
+          </a:fillRef>
+          <a:effectRef idx="2">
+            <a:schemeClr val="accent1"/>
+          </a:effectRef>
+          <a:fontRef idx="minor">
+            <a:schemeClr val="lt1"/>
+          </a:fontRef>
+        </p:style>
+        <p:txBody>
+          <a:bodyPr rtlCol="0" anchor="ctr"/>
+          <a:lstStyle/>
+          <a:p>
+            <a:pPr algn="ctr"/>
+          </a:p>
+        </p:txBody>
+      </p:sp>
+      <p:sp>
+        <p:nvSpPr>
+          <p:cNvPr id="55" name="TextBox 54"/>
+          <p:cNvSpPr txBox="1"/>
+          <p:nvPr/>
+        </p:nvSpPr>
+        <p:spPr>
+          <a:xfrm>
+            <a:off x="475488" y="5650992"/>
+            <a:ext cx="2505456" cy="640080"/>
+          </a:xfrm>
+          <a:prstGeom prst="rect">
+            <a:avLst/>
+          </a:prstGeom>
+          <a:noFill/>
+        </p:spPr>
+        <p:txBody>
+          <a:bodyPr wrap="square" lIns="0" rIns="0" tIns="0" bIns="0" anchor="t">
+            <a:spAutoFit/>
+          </a:bodyPr>
+          <a:lstStyle/>
+          <a:p>
+            <a:pPr algn="l">
+              <a:lnSpc>
+                <a:spcPct val="102000"/>
+              </a:lnSpc>
+              <a:spcBef>
+                <a:spcPts val="0"/>
+              </a:spcBef>
+              <a:spcAft>
+                <a:spcPts val="300"/>
+              </a:spcAft>
+            </a:pPr>
+            <a:r>
+              <a:rPr sz="720" b="1" i="0">
+                <a:solidFill>
+                  <a:srgbClr val="B46318"/>
+                </a:solidFill>
+                <a:latin typeface="Aptos"/>
+              </a:rPr>
+              <a:t>1  Training law</a:t>
+            </a:r>
+            <a:r>
+              <a:rPr sz="680" b="0" i="0">
+                <a:solidFill>
+                  <a:srgbClr val="434952"/>
+                </a:solidFill>
+                <a:latin typeface="Aptos"/>
+              </a:rPr>
+              <a:t>  93% of final Cora MRR is reached by epoch 42/150.</a:t>
+            </a:r>
+          </a:p>
+          <a:p>
+            <a:pPr algn="l">
+              <a:lnSpc>
+                <a:spcPct val="102000"/>
+              </a:lnSpc>
+              <a:spcBef>
+                <a:spcPts val="0"/>
+              </a:spcBef>
+              <a:spcAft>
+                <a:spcPts val="0"/>
+              </a:spcAft>
+            </a:pPr>
+            <a:r>
+              <a:rPr sz="720" b="1" i="0">
+                <a:solidFill>
+                  <a:srgbClr val="B46318"/>
+                </a:solidFill>
+                <a:latin typeface="Aptos"/>
+              </a:rPr>
+              <a:t>2  Deliverables</a:t>
+            </a:r>
+            <a:r>
+              <a:rPr sz="680" b="0" i="0">
+                <a:solidFill>
+                  <a:srgbClr val="434952"/>
+                </a:solidFill>
+                <a:latin typeface="Aptos"/>
+              </a:rPr>
+              <a:t>  closed-form selector · latency/VRAM Pareto · final report · PPT video · reproducible code.</a:t>
+            </a:r>
+          </a:p>
+        </p:txBody>
+      </p:sp>
+      <p:sp>
+        <p:nvSpPr>
+          <p:cNvPr id="56" name="TextBox 55"/>
+          <p:cNvSpPr txBox="1"/>
+          <p:nvPr/>
+        </p:nvSpPr>
+        <p:spPr>
+          <a:xfrm>
+            <a:off x="3246120" y="1051560"/>
+            <a:ext cx="3941063" cy="164592"/>
+          </a:xfrm>
+          <a:prstGeom prst="rect">
+            <a:avLst/>
+          </a:prstGeom>
+          <a:noFill/>
+        </p:spPr>
+        <p:txBody>
+          <a:bodyPr wrap="square" lIns="0" rIns="0" tIns="0" bIns="0" anchor="t">
+            <a:spAutoFit/>
+          </a:bodyPr>
+          <a:lstStyle/>
+          <a:p>
+            <a:pPr algn="l">
+              <a:lnSpc>
+                <a:spcPct val="100000"/>
+              </a:lnSpc>
+              <a:spcBef>
+                <a:spcPts val="0"/>
+              </a:spcBef>
+              <a:spcAft>
+                <a:spcPts val="0"/>
+              </a:spcAft>
+            </a:pPr>
+            <a:r>
+              <a:rPr sz="819" b="1" i="0">
+                <a:solidFill>
+                  <a:srgbClr val="9D1B32"/>
+                </a:solidFill>
+                <a:latin typeface="Aptos"/>
+              </a:rPr>
+              <a:t>02  FOUR EMPIRICAL COMPUTE-ALLOCATION LAWS</a:t>
+            </a:r>
+          </a:p>
+        </p:txBody>
+      </p:sp>
+      <p:sp>
+        <p:nvSpPr>
+          <p:cNvPr id="57" name="Rounded Rectangle 56"/>
+          <p:cNvSpPr/>
+          <p:nvPr/>
+        </p:nvSpPr>
+        <p:spPr>
+          <a:xfrm>
+            <a:off x="3246120" y="1280160"/>
+            <a:ext cx="3941063" cy="1024128"/>
           </a:xfrm>
           <a:prstGeom prst="roundRect">
             <a:avLst>
@@ -6440,9 +5675,1233 @@
           </a:p>
         </p:txBody>
       </p:sp>
+      <p:sp>
+        <p:nvSpPr>
+          <p:cNvPr id="58" name="Rectangle 57"/>
+          <p:cNvSpPr/>
+          <p:nvPr/>
+        </p:nvSpPr>
+        <p:spPr>
+          <a:xfrm>
+            <a:off x="3246120" y="1280160"/>
+            <a:ext cx="41148" cy="1024128"/>
+          </a:xfrm>
+          <a:prstGeom prst="rect">
+            <a:avLst/>
+          </a:prstGeom>
+          <a:solidFill>
+            <a:srgbClr val="203657"/>
+          </a:solidFill>
+          <a:ln>
+            <a:noFill/>
+          </a:ln>
+        </p:spPr>
+        <p:style>
+          <a:lnRef idx="1">
+            <a:schemeClr val="accent1"/>
+          </a:lnRef>
+          <a:fillRef idx="3">
+            <a:schemeClr val="accent1"/>
+          </a:fillRef>
+          <a:effectRef idx="2">
+            <a:schemeClr val="accent1"/>
+          </a:effectRef>
+          <a:fontRef idx="minor">
+            <a:schemeClr val="lt1"/>
+          </a:fontRef>
+        </p:style>
+        <p:txBody>
+          <a:bodyPr rtlCol="0" anchor="ctr"/>
+          <a:lstStyle/>
+          <a:p>
+            <a:pPr algn="ctr"/>
+          </a:p>
+        </p:txBody>
+      </p:sp>
+      <p:sp>
+        <p:nvSpPr>
+          <p:cNvPr id="59" name="Oval 58"/>
+          <p:cNvSpPr/>
+          <p:nvPr/>
+        </p:nvSpPr>
+        <p:spPr>
+          <a:xfrm>
+            <a:off x="3383279" y="1444751"/>
+            <a:ext cx="384048" cy="384048"/>
+          </a:xfrm>
+          <a:prstGeom prst="ellipse">
+            <a:avLst/>
+          </a:prstGeom>
+          <a:solidFill>
+            <a:srgbClr val="E8EDF3"/>
+          </a:solidFill>
+          <a:ln w="10160">
+            <a:solidFill>
+              <a:srgbClr val="203657"/>
+            </a:solidFill>
+          </a:ln>
+        </p:spPr>
+        <p:style>
+          <a:lnRef idx="1">
+            <a:schemeClr val="accent1"/>
+          </a:lnRef>
+          <a:fillRef idx="3">
+            <a:schemeClr val="accent1"/>
+          </a:fillRef>
+          <a:effectRef idx="2">
+            <a:schemeClr val="accent1"/>
+          </a:effectRef>
+          <a:fontRef idx="minor">
+            <a:schemeClr val="lt1"/>
+          </a:fontRef>
+        </p:style>
+        <p:txBody>
+          <a:bodyPr rtlCol="0" anchor="ctr"/>
+          <a:lstStyle/>
+          <a:p>
+            <a:pPr algn="ctr"/>
+          </a:p>
+        </p:txBody>
+      </p:sp>
+      <p:sp>
+        <p:nvSpPr>
+          <p:cNvPr id="60" name="TextBox 59"/>
+          <p:cNvSpPr txBox="1"/>
+          <p:nvPr/>
+        </p:nvSpPr>
+        <p:spPr>
+          <a:xfrm>
+            <a:off x="3383279" y="1508760"/>
+            <a:ext cx="384048" cy="164592"/>
+          </a:xfrm>
+          <a:prstGeom prst="rect">
+            <a:avLst/>
+          </a:prstGeom>
+          <a:noFill/>
+        </p:spPr>
+        <p:txBody>
+          <a:bodyPr wrap="square" lIns="0" rIns="0" tIns="0" bIns="0" anchor="ctr">
+            <a:spAutoFit/>
+          </a:bodyPr>
+          <a:lstStyle/>
+          <a:p>
+            <a:pPr algn="ctr">
+              <a:lnSpc>
+                <a:spcPct val="100000"/>
+              </a:lnSpc>
+              <a:spcBef>
+                <a:spcPts val="0"/>
+              </a:spcBef>
+              <a:spcAft>
+                <a:spcPts val="0"/>
+              </a:spcAft>
+            </a:pPr>
+            <a:r>
+              <a:rPr sz="800" b="1" i="0">
+                <a:solidFill>
+                  <a:srgbClr val="203657"/>
+                </a:solidFill>
+                <a:latin typeface="Georgia"/>
+              </a:rPr>
+              <a:t>01</a:t>
+            </a:r>
+          </a:p>
+        </p:txBody>
+      </p:sp>
+      <p:sp>
+        <p:nvSpPr>
+          <p:cNvPr id="61" name="TextBox 60"/>
+          <p:cNvSpPr txBox="1"/>
+          <p:nvPr/>
+        </p:nvSpPr>
+        <p:spPr>
+          <a:xfrm>
+            <a:off x="3877056" y="1399031"/>
+            <a:ext cx="3172968" cy="228600"/>
+          </a:xfrm>
+          <a:prstGeom prst="rect">
+            <a:avLst/>
+          </a:prstGeom>
+          <a:noFill/>
+        </p:spPr>
+        <p:txBody>
+          <a:bodyPr wrap="square" lIns="0" rIns="0" tIns="0" bIns="0" anchor="t">
+            <a:spAutoFit/>
+          </a:bodyPr>
+          <a:lstStyle/>
+          <a:p>
+            <a:pPr algn="l">
+              <a:lnSpc>
+                <a:spcPct val="100000"/>
+              </a:lnSpc>
+              <a:spcBef>
+                <a:spcPts val="0"/>
+              </a:spcBef>
+              <a:spcAft>
+                <a:spcPts val="0"/>
+              </a:spcAft>
+            </a:pPr>
+            <a:r>
+              <a:rPr sz="919" b="1" i="0">
+                <a:solidFill>
+                  <a:srgbClr val="171A1F"/>
+                </a:solidFill>
+                <a:latin typeface="Georgia"/>
+              </a:rPr>
+              <a:t>Half fanout is enough in 3 of 4 regimes</a:t>
+            </a:r>
+          </a:p>
+        </p:txBody>
+      </p:sp>
+      <p:sp>
+        <p:nvSpPr>
+          <p:cNvPr id="62" name="TextBox 61"/>
+          <p:cNvSpPr txBox="1"/>
+          <p:nvPr/>
+        </p:nvSpPr>
+        <p:spPr>
+          <a:xfrm>
+            <a:off x="3877056" y="1673351"/>
+            <a:ext cx="3172968" cy="521207"/>
+          </a:xfrm>
+          <a:prstGeom prst="rect">
+            <a:avLst/>
+          </a:prstGeom>
+          <a:noFill/>
+        </p:spPr>
+        <p:txBody>
+          <a:bodyPr wrap="square" lIns="0" rIns="0" tIns="0" bIns="0" anchor="t">
+            <a:spAutoFit/>
+          </a:bodyPr>
+          <a:lstStyle/>
+          <a:p>
+            <a:pPr algn="l">
+              <a:lnSpc>
+                <a:spcPct val="104000"/>
+              </a:lnSpc>
+              <a:spcBef>
+                <a:spcPts val="0"/>
+              </a:spcBef>
+              <a:spcAft>
+                <a:spcPts val="0"/>
+              </a:spcAft>
+            </a:pPr>
+            <a:r>
+              <a:rPr sz="705" b="0" i="0">
+                <a:solidFill>
+                  <a:srgbClr val="434952"/>
+                </a:solidFill>
+                <a:latin typeface="Aptos"/>
+              </a:rPr>
+              <a:t>At s=2×10 (~65% GPU), PENCIL matches Cora Pool (42.9 vs 43.7) and beats full s=2×20 on Citeseer Pool (51.4 vs 49.7) and Cora HeaRT (14.3 vs 13.3). Citeseer HeaRT is the exception: 14.2 vs 17.8.</a:t>
+            </a:r>
+          </a:p>
+        </p:txBody>
+      </p:sp>
+      <p:sp>
+        <p:nvSpPr>
+          <p:cNvPr id="63" name="Rounded Rectangle 62"/>
+          <p:cNvSpPr/>
+          <p:nvPr/>
+        </p:nvSpPr>
+        <p:spPr>
+          <a:xfrm>
+            <a:off x="3246120" y="2450592"/>
+            <a:ext cx="3941063" cy="1024128"/>
+          </a:xfrm>
+          <a:prstGeom prst="roundRect">
+            <a:avLst>
+              <a:gd name="adj" fmla="val 8000"/>
+            </a:avLst>
+          </a:prstGeom>
+          <a:solidFill>
+            <a:srgbClr val="FFFFFF"/>
+          </a:solidFill>
+          <a:ln w="8890">
+            <a:solidFill>
+              <a:srgbClr val="D9D4CB"/>
+            </a:solidFill>
+          </a:ln>
+        </p:spPr>
+        <p:style>
+          <a:lnRef idx="1">
+            <a:schemeClr val="accent1"/>
+          </a:lnRef>
+          <a:fillRef idx="3">
+            <a:schemeClr val="accent1"/>
+          </a:fillRef>
+          <a:effectRef idx="2">
+            <a:schemeClr val="accent1"/>
+          </a:effectRef>
+          <a:fontRef idx="minor">
+            <a:schemeClr val="lt1"/>
+          </a:fontRef>
+        </p:style>
+        <p:txBody>
+          <a:bodyPr rtlCol="0" anchor="ctr"/>
+          <a:lstStyle/>
+          <a:p>
+            <a:pPr algn="ctr"/>
+          </a:p>
+        </p:txBody>
+      </p:sp>
+      <p:sp>
+        <p:nvSpPr>
+          <p:cNvPr id="64" name="Rectangle 63"/>
+          <p:cNvSpPr/>
+          <p:nvPr/>
+        </p:nvSpPr>
+        <p:spPr>
+          <a:xfrm>
+            <a:off x="3246120" y="2450592"/>
+            <a:ext cx="41148" cy="1024128"/>
+          </a:xfrm>
+          <a:prstGeom prst="rect">
+            <a:avLst/>
+          </a:prstGeom>
+          <a:solidFill>
+            <a:srgbClr val="0F7670"/>
+          </a:solidFill>
+          <a:ln>
+            <a:noFill/>
+          </a:ln>
+        </p:spPr>
+        <p:style>
+          <a:lnRef idx="1">
+            <a:schemeClr val="accent1"/>
+          </a:lnRef>
+          <a:fillRef idx="3">
+            <a:schemeClr val="accent1"/>
+          </a:fillRef>
+          <a:effectRef idx="2">
+            <a:schemeClr val="accent1"/>
+          </a:effectRef>
+          <a:fontRef idx="minor">
+            <a:schemeClr val="lt1"/>
+          </a:fontRef>
+        </p:style>
+        <p:txBody>
+          <a:bodyPr rtlCol="0" anchor="ctr"/>
+          <a:lstStyle/>
+          <a:p>
+            <a:pPr algn="ctr"/>
+          </a:p>
+        </p:txBody>
+      </p:sp>
+      <p:sp>
+        <p:nvSpPr>
+          <p:cNvPr id="65" name="Oval 64"/>
+          <p:cNvSpPr/>
+          <p:nvPr/>
+        </p:nvSpPr>
+        <p:spPr>
+          <a:xfrm>
+            <a:off x="3383279" y="2615184"/>
+            <a:ext cx="384048" cy="384048"/>
+          </a:xfrm>
+          <a:prstGeom prst="ellipse">
+            <a:avLst/>
+          </a:prstGeom>
+          <a:solidFill>
+            <a:srgbClr val="E4F0ED"/>
+          </a:solidFill>
+          <a:ln w="10160">
+            <a:solidFill>
+              <a:srgbClr val="0F7670"/>
+            </a:solidFill>
+          </a:ln>
+        </p:spPr>
+        <p:style>
+          <a:lnRef idx="1">
+            <a:schemeClr val="accent1"/>
+          </a:lnRef>
+          <a:fillRef idx="3">
+            <a:schemeClr val="accent1"/>
+          </a:fillRef>
+          <a:effectRef idx="2">
+            <a:schemeClr val="accent1"/>
+          </a:effectRef>
+          <a:fontRef idx="minor">
+            <a:schemeClr val="lt1"/>
+          </a:fontRef>
+        </p:style>
+        <p:txBody>
+          <a:bodyPr rtlCol="0" anchor="ctr"/>
+          <a:lstStyle/>
+          <a:p>
+            <a:pPr algn="ctr"/>
+          </a:p>
+        </p:txBody>
+      </p:sp>
+      <p:sp>
+        <p:nvSpPr>
+          <p:cNvPr id="66" name="TextBox 65"/>
+          <p:cNvSpPr txBox="1"/>
+          <p:nvPr/>
+        </p:nvSpPr>
+        <p:spPr>
+          <a:xfrm>
+            <a:off x="3383279" y="2679192"/>
+            <a:ext cx="384048" cy="164592"/>
+          </a:xfrm>
+          <a:prstGeom prst="rect">
+            <a:avLst/>
+          </a:prstGeom>
+          <a:noFill/>
+        </p:spPr>
+        <p:txBody>
+          <a:bodyPr wrap="square" lIns="0" rIns="0" tIns="0" bIns="0" anchor="ctr">
+            <a:spAutoFit/>
+          </a:bodyPr>
+          <a:lstStyle/>
+          <a:p>
+            <a:pPr algn="ctr">
+              <a:lnSpc>
+                <a:spcPct val="100000"/>
+              </a:lnSpc>
+              <a:spcBef>
+                <a:spcPts val="0"/>
+              </a:spcBef>
+              <a:spcAft>
+                <a:spcPts val="0"/>
+              </a:spcAft>
+            </a:pPr>
+            <a:r>
+              <a:rPr sz="800" b="1" i="0">
+                <a:solidFill>
+                  <a:srgbClr val="0F7670"/>
+                </a:solidFill>
+                <a:latin typeface="Georgia"/>
+              </a:rPr>
+              <a:t>02</a:t>
+            </a:r>
+          </a:p>
+        </p:txBody>
+      </p:sp>
+      <p:sp>
+        <p:nvSpPr>
+          <p:cNvPr id="67" name="TextBox 66"/>
+          <p:cNvSpPr txBox="1"/>
+          <p:nvPr/>
+        </p:nvSpPr>
+        <p:spPr>
+          <a:xfrm>
+            <a:off x="3877056" y="2569464"/>
+            <a:ext cx="3172968" cy="228600"/>
+          </a:xfrm>
+          <a:prstGeom prst="rect">
+            <a:avLst/>
+          </a:prstGeom>
+          <a:noFill/>
+        </p:spPr>
+        <p:txBody>
+          <a:bodyPr wrap="square" lIns="0" rIns="0" tIns="0" bIns="0" anchor="t">
+            <a:spAutoFit/>
+          </a:bodyPr>
+          <a:lstStyle/>
+          <a:p>
+            <a:pPr algn="l">
+              <a:lnSpc>
+                <a:spcPct val="100000"/>
+              </a:lnSpc>
+              <a:spcBef>
+                <a:spcPts val="0"/>
+              </a:spcBef>
+              <a:spcAft>
+                <a:spcPts val="0"/>
+              </a:spcAft>
+            </a:pPr>
+            <a:r>
+              <a:rPr sz="919" b="1" i="0">
+                <a:solidFill>
+                  <a:srgbClr val="171A1F"/>
+                </a:solidFill>
+                <a:latin typeface="Georgia"/>
+              </a:rPr>
+              <a:t>A ≤10% GPU hybrid beats heuristics everywhere</a:t>
+            </a:r>
+          </a:p>
+        </p:txBody>
+      </p:sp>
+      <p:sp>
+        <p:nvSpPr>
+          <p:cNvPr id="68" name="TextBox 67"/>
+          <p:cNvSpPr txBox="1"/>
+          <p:nvPr/>
+        </p:nvSpPr>
+        <p:spPr>
+          <a:xfrm>
+            <a:off x="3877056" y="2843784"/>
+            <a:ext cx="3172968" cy="521207"/>
+          </a:xfrm>
+          <a:prstGeom prst="rect">
+            <a:avLst/>
+          </a:prstGeom>
+          <a:noFill/>
+        </p:spPr>
+        <p:txBody>
+          <a:bodyPr wrap="square" lIns="0" rIns="0" tIns="0" bIns="0" anchor="t">
+            <a:spAutoFit/>
+          </a:bodyPr>
+          <a:lstStyle/>
+          <a:p>
+            <a:pPr algn="l">
+              <a:lnSpc>
+                <a:spcPct val="104000"/>
+              </a:lnSpc>
+              <a:spcBef>
+                <a:spcPts val="0"/>
+              </a:spcBef>
+              <a:spcAft>
+                <a:spcPts val="0"/>
+              </a:spcAft>
+            </a:pPr>
+            <a:r>
+              <a:rPr sz="705" b="0" i="0">
+                <a:solidFill>
+                  <a:srgbClr val="434952"/>
+                </a:solidFill>
+                <a:latin typeface="Aptos"/>
+              </a:rPr>
+              <a:t>Validation-selected (k, s) improves over Adamic–Adar in all four tests: 33.1→38.4 on Cora Pool, 31.5→34.7 on Citeseer Pool, 12.0→12.8 on Cora HeaRT, and 11.0→13.8 on Citeseer HeaRT.</a:t>
+            </a:r>
+          </a:p>
+        </p:txBody>
+      </p:sp>
+      <p:sp>
+        <p:nvSpPr>
+          <p:cNvPr id="69" name="Rounded Rectangle 68"/>
+          <p:cNvSpPr/>
+          <p:nvPr/>
+        </p:nvSpPr>
+        <p:spPr>
+          <a:xfrm>
+            <a:off x="3246120" y="3621024"/>
+            <a:ext cx="3941063" cy="1024128"/>
+          </a:xfrm>
+          <a:prstGeom prst="roundRect">
+            <a:avLst>
+              <a:gd name="adj" fmla="val 8000"/>
+            </a:avLst>
+          </a:prstGeom>
+          <a:solidFill>
+            <a:srgbClr val="FFFFFF"/>
+          </a:solidFill>
+          <a:ln w="8890">
+            <a:solidFill>
+              <a:srgbClr val="D9D4CB"/>
+            </a:solidFill>
+          </a:ln>
+        </p:spPr>
+        <p:style>
+          <a:lnRef idx="1">
+            <a:schemeClr val="accent1"/>
+          </a:lnRef>
+          <a:fillRef idx="3">
+            <a:schemeClr val="accent1"/>
+          </a:fillRef>
+          <a:effectRef idx="2">
+            <a:schemeClr val="accent1"/>
+          </a:effectRef>
+          <a:fontRef idx="minor">
+            <a:schemeClr val="lt1"/>
+          </a:fontRef>
+        </p:style>
+        <p:txBody>
+          <a:bodyPr rtlCol="0" anchor="ctr"/>
+          <a:lstStyle/>
+          <a:p>
+            <a:pPr algn="ctr"/>
+          </a:p>
+        </p:txBody>
+      </p:sp>
+      <p:sp>
+        <p:nvSpPr>
+          <p:cNvPr id="70" name="Rectangle 69"/>
+          <p:cNvSpPr/>
+          <p:nvPr/>
+        </p:nvSpPr>
+        <p:spPr>
+          <a:xfrm>
+            <a:off x="3246120" y="3621024"/>
+            <a:ext cx="41148" cy="1024128"/>
+          </a:xfrm>
+          <a:prstGeom prst="rect">
+            <a:avLst/>
+          </a:prstGeom>
+          <a:solidFill>
+            <a:srgbClr val="B46318"/>
+          </a:solidFill>
+          <a:ln>
+            <a:noFill/>
+          </a:ln>
+        </p:spPr>
+        <p:style>
+          <a:lnRef idx="1">
+            <a:schemeClr val="accent1"/>
+          </a:lnRef>
+          <a:fillRef idx="3">
+            <a:schemeClr val="accent1"/>
+          </a:fillRef>
+          <a:effectRef idx="2">
+            <a:schemeClr val="accent1"/>
+          </a:effectRef>
+          <a:fontRef idx="minor">
+            <a:schemeClr val="lt1"/>
+          </a:fontRef>
+        </p:style>
+        <p:txBody>
+          <a:bodyPr rtlCol="0" anchor="ctr"/>
+          <a:lstStyle/>
+          <a:p>
+            <a:pPr algn="ctr"/>
+          </a:p>
+        </p:txBody>
+      </p:sp>
+      <p:sp>
+        <p:nvSpPr>
+          <p:cNvPr id="71" name="Oval 70"/>
+          <p:cNvSpPr/>
+          <p:nvPr/>
+        </p:nvSpPr>
+        <p:spPr>
+          <a:xfrm>
+            <a:off x="3383279" y="3785615"/>
+            <a:ext cx="384048" cy="384048"/>
+          </a:xfrm>
+          <a:prstGeom prst="ellipse">
+            <a:avLst/>
+          </a:prstGeom>
+          <a:solidFill>
+            <a:srgbClr val="F5EADA"/>
+          </a:solidFill>
+          <a:ln w="10160">
+            <a:solidFill>
+              <a:srgbClr val="B46318"/>
+            </a:solidFill>
+          </a:ln>
+        </p:spPr>
+        <p:style>
+          <a:lnRef idx="1">
+            <a:schemeClr val="accent1"/>
+          </a:lnRef>
+          <a:fillRef idx="3">
+            <a:schemeClr val="accent1"/>
+          </a:fillRef>
+          <a:effectRef idx="2">
+            <a:schemeClr val="accent1"/>
+          </a:effectRef>
+          <a:fontRef idx="minor">
+            <a:schemeClr val="lt1"/>
+          </a:fontRef>
+        </p:style>
+        <p:txBody>
+          <a:bodyPr rtlCol="0" anchor="ctr"/>
+          <a:lstStyle/>
+          <a:p>
+            <a:pPr algn="ctr"/>
+          </a:p>
+        </p:txBody>
+      </p:sp>
+      <p:sp>
+        <p:nvSpPr>
+          <p:cNvPr id="72" name="TextBox 71"/>
+          <p:cNvSpPr txBox="1"/>
+          <p:nvPr/>
+        </p:nvSpPr>
+        <p:spPr>
+          <a:xfrm>
+            <a:off x="3383279" y="3849624"/>
+            <a:ext cx="384048" cy="164592"/>
+          </a:xfrm>
+          <a:prstGeom prst="rect">
+            <a:avLst/>
+          </a:prstGeom>
+          <a:noFill/>
+        </p:spPr>
+        <p:txBody>
+          <a:bodyPr wrap="square" lIns="0" rIns="0" tIns="0" bIns="0" anchor="ctr">
+            <a:spAutoFit/>
+          </a:bodyPr>
+          <a:lstStyle/>
+          <a:p>
+            <a:pPr algn="ctr">
+              <a:lnSpc>
+                <a:spcPct val="100000"/>
+              </a:lnSpc>
+              <a:spcBef>
+                <a:spcPts val="0"/>
+              </a:spcBef>
+              <a:spcAft>
+                <a:spcPts val="0"/>
+              </a:spcAft>
+            </a:pPr>
+            <a:r>
+              <a:rPr sz="800" b="1" i="0">
+                <a:solidFill>
+                  <a:srgbClr val="B46318"/>
+                </a:solidFill>
+                <a:latin typeface="Georgia"/>
+              </a:rPr>
+              <a:t>03</a:t>
+            </a:r>
+          </a:p>
+        </p:txBody>
+      </p:sp>
+      <p:sp>
+        <p:nvSpPr>
+          <p:cNvPr id="73" name="TextBox 72"/>
+          <p:cNvSpPr txBox="1"/>
+          <p:nvPr/>
+        </p:nvSpPr>
+        <p:spPr>
+          <a:xfrm>
+            <a:off x="3877056" y="3739896"/>
+            <a:ext cx="3172968" cy="228600"/>
+          </a:xfrm>
+          <a:prstGeom prst="rect">
+            <a:avLst/>
+          </a:prstGeom>
+          <a:noFill/>
+        </p:spPr>
+        <p:txBody>
+          <a:bodyPr wrap="square" lIns="0" rIns="0" tIns="0" bIns="0" anchor="t">
+            <a:spAutoFit/>
+          </a:bodyPr>
+          <a:lstStyle/>
+          <a:p>
+            <a:pPr algn="l">
+              <a:lnSpc>
+                <a:spcPct val="100000"/>
+              </a:lnSpc>
+              <a:spcBef>
+                <a:spcPts val="0"/>
+              </a:spcBef>
+              <a:spcAft>
+                <a:spcPts val="0"/>
+              </a:spcAft>
+            </a:pPr>
+            <a:r>
+              <a:rPr sz="919" b="1" i="0">
+                <a:solidFill>
+                  <a:srgbClr val="171A1F"/>
+                </a:solidFill>
+                <a:latin typeface="Georgia"/>
+              </a:rPr>
+              <a:t>PENCIL pays off where graph structure is blind</a:t>
+            </a:r>
+          </a:p>
+        </p:txBody>
+      </p:sp>
+      <p:sp>
+        <p:nvSpPr>
+          <p:cNvPr id="74" name="TextBox 73"/>
+          <p:cNvSpPr txBox="1"/>
+          <p:nvPr/>
+        </p:nvSpPr>
+        <p:spPr>
+          <a:xfrm>
+            <a:off x="3877056" y="4014215"/>
+            <a:ext cx="3172968" cy="521207"/>
+          </a:xfrm>
+          <a:prstGeom prst="rect">
+            <a:avLst/>
+          </a:prstGeom>
+          <a:noFill/>
+        </p:spPr>
+        <p:txBody>
+          <a:bodyPr wrap="square" lIns="0" rIns="0" tIns="0" bIns="0" anchor="t">
+            <a:spAutoFit/>
+          </a:bodyPr>
+          <a:lstStyle/>
+          <a:p>
+            <a:pPr algn="l">
+              <a:lnSpc>
+                <a:spcPct val="104000"/>
+              </a:lnSpc>
+              <a:spcBef>
+                <a:spcPts val="0"/>
+              </a:spcBef>
+              <a:spcAft>
+                <a:spcPts val="0"/>
+              </a:spcAft>
+            </a:pPr>
+            <a:r>
+              <a:rPr sz="705" b="0" i="0">
+                <a:solidFill>
+                  <a:srgbClr val="434952"/>
+                </a:solidFill>
+                <a:latin typeface="Aptos"/>
+              </a:rPr>
+              <a:t>Re-ranking only the top 10% changes almost nothing because AA already ranks easy links highly. The useful compute lies in the zero-common-neighbour tail: 57.3% of true Cora test links have zero shared neighbours.</a:t>
+            </a:r>
+          </a:p>
+        </p:txBody>
+      </p:sp>
+      <p:sp>
+        <p:nvSpPr>
+          <p:cNvPr id="75" name="Rounded Rectangle 74"/>
+          <p:cNvSpPr/>
+          <p:nvPr/>
+        </p:nvSpPr>
+        <p:spPr>
+          <a:xfrm>
+            <a:off x="3246120" y="4791456"/>
+            <a:ext cx="3941063" cy="1024128"/>
+          </a:xfrm>
+          <a:prstGeom prst="roundRect">
+            <a:avLst>
+              <a:gd name="adj" fmla="val 8000"/>
+            </a:avLst>
+          </a:prstGeom>
+          <a:solidFill>
+            <a:srgbClr val="FFFFFF"/>
+          </a:solidFill>
+          <a:ln w="8890">
+            <a:solidFill>
+              <a:srgbClr val="D9D4CB"/>
+            </a:solidFill>
+          </a:ln>
+        </p:spPr>
+        <p:style>
+          <a:lnRef idx="1">
+            <a:schemeClr val="accent1"/>
+          </a:lnRef>
+          <a:fillRef idx="3">
+            <a:schemeClr val="accent1"/>
+          </a:fillRef>
+          <a:effectRef idx="2">
+            <a:schemeClr val="accent1"/>
+          </a:effectRef>
+          <a:fontRef idx="minor">
+            <a:schemeClr val="lt1"/>
+          </a:fontRef>
+        </p:style>
+        <p:txBody>
+          <a:bodyPr rtlCol="0" anchor="ctr"/>
+          <a:lstStyle/>
+          <a:p>
+            <a:pPr algn="ctr"/>
+          </a:p>
+        </p:txBody>
+      </p:sp>
+      <p:sp>
+        <p:nvSpPr>
+          <p:cNvPr id="76" name="Rectangle 75"/>
+          <p:cNvSpPr/>
+          <p:nvPr/>
+        </p:nvSpPr>
+        <p:spPr>
+          <a:xfrm>
+            <a:off x="3246120" y="4791456"/>
+            <a:ext cx="41148" cy="1024128"/>
+          </a:xfrm>
+          <a:prstGeom prst="rect">
+            <a:avLst/>
+          </a:prstGeom>
+          <a:solidFill>
+            <a:srgbClr val="9D1B32"/>
+          </a:solidFill>
+          <a:ln>
+            <a:noFill/>
+          </a:ln>
+        </p:spPr>
+        <p:style>
+          <a:lnRef idx="1">
+            <a:schemeClr val="accent1"/>
+          </a:lnRef>
+          <a:fillRef idx="3">
+            <a:schemeClr val="accent1"/>
+          </a:fillRef>
+          <a:effectRef idx="2">
+            <a:schemeClr val="accent1"/>
+          </a:effectRef>
+          <a:fontRef idx="minor">
+            <a:schemeClr val="lt1"/>
+          </a:fontRef>
+        </p:style>
+        <p:txBody>
+          <a:bodyPr rtlCol="0" anchor="ctr"/>
+          <a:lstStyle/>
+          <a:p>
+            <a:pPr algn="ctr"/>
+          </a:p>
+        </p:txBody>
+      </p:sp>
+      <p:sp>
+        <p:nvSpPr>
+          <p:cNvPr id="77" name="Oval 76"/>
+          <p:cNvSpPr/>
+          <p:nvPr/>
+        </p:nvSpPr>
+        <p:spPr>
+          <a:xfrm>
+            <a:off x="3383279" y="4956048"/>
+            <a:ext cx="384048" cy="384048"/>
+          </a:xfrm>
+          <a:prstGeom prst="ellipse">
+            <a:avLst/>
+          </a:prstGeom>
+          <a:solidFill>
+            <a:srgbClr val="F4E7E9"/>
+          </a:solidFill>
+          <a:ln w="10160">
+            <a:solidFill>
+              <a:srgbClr val="9D1B32"/>
+            </a:solidFill>
+          </a:ln>
+        </p:spPr>
+        <p:style>
+          <a:lnRef idx="1">
+            <a:schemeClr val="accent1"/>
+          </a:lnRef>
+          <a:fillRef idx="3">
+            <a:schemeClr val="accent1"/>
+          </a:fillRef>
+          <a:effectRef idx="2">
+            <a:schemeClr val="accent1"/>
+          </a:effectRef>
+          <a:fontRef idx="minor">
+            <a:schemeClr val="lt1"/>
+          </a:fontRef>
+        </p:style>
+        <p:txBody>
+          <a:bodyPr rtlCol="0" anchor="ctr"/>
+          <a:lstStyle/>
+          <a:p>
+            <a:pPr algn="ctr"/>
+          </a:p>
+        </p:txBody>
+      </p:sp>
+      <p:sp>
+        <p:nvSpPr>
+          <p:cNvPr id="78" name="TextBox 77"/>
+          <p:cNvSpPr txBox="1"/>
+          <p:nvPr/>
+        </p:nvSpPr>
+        <p:spPr>
+          <a:xfrm>
+            <a:off x="3383279" y="5020056"/>
+            <a:ext cx="384048" cy="164592"/>
+          </a:xfrm>
+          <a:prstGeom prst="rect">
+            <a:avLst/>
+          </a:prstGeom>
+          <a:noFill/>
+        </p:spPr>
+        <p:txBody>
+          <a:bodyPr wrap="square" lIns="0" rIns="0" tIns="0" bIns="0" anchor="ctr">
+            <a:spAutoFit/>
+          </a:bodyPr>
+          <a:lstStyle/>
+          <a:p>
+            <a:pPr algn="ctr">
+              <a:lnSpc>
+                <a:spcPct val="100000"/>
+              </a:lnSpc>
+              <a:spcBef>
+                <a:spcPts val="0"/>
+              </a:spcBef>
+              <a:spcAft>
+                <a:spcPts val="0"/>
+              </a:spcAft>
+            </a:pPr>
+            <a:r>
+              <a:rPr sz="800" b="1" i="0">
+                <a:solidFill>
+                  <a:srgbClr val="9D1B32"/>
+                </a:solidFill>
+                <a:latin typeface="Georgia"/>
+              </a:rPr>
+              <a:t>04</a:t>
+            </a:r>
+          </a:p>
+        </p:txBody>
+      </p:sp>
+      <p:sp>
+        <p:nvSpPr>
+          <p:cNvPr id="79" name="TextBox 78"/>
+          <p:cNvSpPr txBox="1"/>
+          <p:nvPr/>
+        </p:nvSpPr>
+        <p:spPr>
+          <a:xfrm>
+            <a:off x="3877056" y="4910328"/>
+            <a:ext cx="3172968" cy="228600"/>
+          </a:xfrm>
+          <a:prstGeom prst="rect">
+            <a:avLst/>
+          </a:prstGeom>
+          <a:noFill/>
+        </p:spPr>
+        <p:txBody>
+          <a:bodyPr wrap="square" lIns="0" rIns="0" tIns="0" bIns="0" anchor="t">
+            <a:spAutoFit/>
+          </a:bodyPr>
+          <a:lstStyle/>
+          <a:p>
+            <a:pPr algn="l">
+              <a:lnSpc>
+                <a:spcPct val="100000"/>
+              </a:lnSpc>
+              <a:spcBef>
+                <a:spcPts val="0"/>
+              </a:spcBef>
+              <a:spcAft>
+                <a:spcPts val="0"/>
+              </a:spcAft>
+            </a:pPr>
+            <a:r>
+              <a:rPr sz="919" b="1" i="0">
+                <a:solidFill>
+                  <a:srgbClr val="171A1F"/>
+                </a:solidFill>
+                <a:latin typeface="Georgia"/>
+              </a:rPr>
+              <a:t>Cross-graph rules can beat noisy local selection</a:t>
+            </a:r>
+          </a:p>
+        </p:txBody>
+      </p:sp>
+      <p:sp>
+        <p:nvSpPr>
+          <p:cNvPr id="80" name="TextBox 79"/>
+          <p:cNvSpPr txBox="1"/>
+          <p:nvPr/>
+        </p:nvSpPr>
+        <p:spPr>
+          <a:xfrm>
+            <a:off x="3877056" y="5184648"/>
+            <a:ext cx="3172968" cy="521207"/>
+          </a:xfrm>
+          <a:prstGeom prst="rect">
+            <a:avLst/>
+          </a:prstGeom>
+          <a:noFill/>
+        </p:spPr>
+        <p:txBody>
+          <a:bodyPr wrap="square" lIns="0" rIns="0" tIns="0" bIns="0" anchor="t">
+            <a:spAutoFit/>
+          </a:bodyPr>
+          <a:lstStyle/>
+          <a:p>
+            <a:pPr algn="l">
+              <a:lnSpc>
+                <a:spcPct val="104000"/>
+              </a:lnSpc>
+              <a:spcBef>
+                <a:spcPts val="0"/>
+              </a:spcBef>
+              <a:spcAft>
+                <a:spcPts val="0"/>
+              </a:spcAft>
+            </a:pPr>
+            <a:r>
+              <a:rPr sz="705" b="0" i="0">
+                <a:solidFill>
+                  <a:srgbClr val="434952"/>
+                </a:solidFill>
+                <a:latin typeface="Aptos"/>
+              </a:rPr>
+              <a:t>Applying Cora's validation-chosen rule unchanged to Citeseer beats Citeseer's own validation pick at every cap ≤50%; at the 25% cap, transferred MRR is 44.9 versus 37.9 from local selection.</a:t>
+            </a:r>
+          </a:p>
+        </p:txBody>
+      </p:sp>
+      <p:sp>
+        <p:nvSpPr>
+          <p:cNvPr id="81" name="Rounded Rectangle 80"/>
+          <p:cNvSpPr/>
+          <p:nvPr/>
+        </p:nvSpPr>
+        <p:spPr>
+          <a:xfrm>
+            <a:off x="3246120" y="5989320"/>
+            <a:ext cx="3941063" cy="411480"/>
+          </a:xfrm>
+          <a:prstGeom prst="roundRect">
+            <a:avLst>
+              <a:gd name="adj" fmla="val 8000"/>
+            </a:avLst>
+          </a:prstGeom>
+          <a:solidFill>
+            <a:srgbClr val="203657"/>
+          </a:solidFill>
+          <a:ln>
+            <a:noFill/>
+          </a:ln>
+        </p:spPr>
+        <p:style>
+          <a:lnRef idx="1">
+            <a:schemeClr val="accent1"/>
+          </a:lnRef>
+          <a:fillRef idx="3">
+            <a:schemeClr val="accent1"/>
+          </a:fillRef>
+          <a:effectRef idx="2">
+            <a:schemeClr val="accent1"/>
+          </a:effectRef>
+          <a:fontRef idx="minor">
+            <a:schemeClr val="lt1"/>
+          </a:fontRef>
+        </p:style>
+        <p:txBody>
+          <a:bodyPr rtlCol="0" anchor="ctr"/>
+          <a:lstStyle/>
+          <a:p>
+            <a:pPr algn="ctr"/>
+          </a:p>
+        </p:txBody>
+      </p:sp>
+      <p:sp>
+        <p:nvSpPr>
+          <p:cNvPr id="82" name="TextBox 81"/>
+          <p:cNvSpPr txBox="1"/>
+          <p:nvPr/>
+        </p:nvSpPr>
+        <p:spPr>
+          <a:xfrm>
+            <a:off x="3392424" y="6080760"/>
+            <a:ext cx="3648456" cy="210312"/>
+          </a:xfrm>
+          <a:prstGeom prst="rect">
+            <a:avLst/>
+          </a:prstGeom>
+          <a:noFill/>
+        </p:spPr>
+        <p:txBody>
+          <a:bodyPr wrap="square" lIns="0" rIns="0" tIns="0" bIns="0" anchor="ctr">
+            <a:spAutoFit/>
+          </a:bodyPr>
+          <a:lstStyle/>
+          <a:p>
+            <a:pPr algn="ctr">
+              <a:lnSpc>
+                <a:spcPct val="100000"/>
+              </a:lnSpc>
+              <a:spcBef>
+                <a:spcPts val="0"/>
+              </a:spcBef>
+              <a:spcAft>
+                <a:spcPts val="0"/>
+              </a:spcAft>
+            </a:pPr>
+            <a:r>
+              <a:rPr sz="740" b="1" i="0">
+                <a:solidFill>
+                  <a:srgbClr val="E8EDF3"/>
+                </a:solidFill>
+                <a:latin typeface="Aptos"/>
+              </a:rPr>
+              <a:t>INTERIM LAW  </a:t>
+            </a:r>
+            <a:r>
+              <a:rPr sz="760" b="1" i="0">
+                <a:solidFill>
+                  <a:srgbClr val="FFFFFF"/>
+                </a:solidFill>
+                <a:latin typeface="Aptos"/>
+              </a:rPr>
+              <a:t>reduce fanout first; reserve full context for the hard regime.</a:t>
+            </a:r>
+          </a:p>
+        </p:txBody>
+      </p:sp>
+      <p:sp>
+        <p:nvSpPr>
+          <p:cNvPr id="83" name="TextBox 82"/>
+          <p:cNvSpPr txBox="1"/>
+          <p:nvPr/>
+        </p:nvSpPr>
+        <p:spPr>
+          <a:xfrm>
+            <a:off x="7333488" y="1051560"/>
+            <a:ext cx="4498848" cy="164592"/>
+          </a:xfrm>
+          <a:prstGeom prst="rect">
+            <a:avLst/>
+          </a:prstGeom>
+          <a:noFill/>
+        </p:spPr>
+        <p:txBody>
+          <a:bodyPr wrap="square" lIns="0" rIns="0" tIns="0" bIns="0" anchor="t">
+            <a:spAutoFit/>
+          </a:bodyPr>
+          <a:lstStyle/>
+          <a:p>
+            <a:pPr algn="l">
+              <a:lnSpc>
+                <a:spcPct val="100000"/>
+              </a:lnSpc>
+              <a:spcBef>
+                <a:spcPts val="0"/>
+              </a:spcBef>
+              <a:spcAft>
+                <a:spcPts val="0"/>
+              </a:spcAft>
+            </a:pPr>
+            <a:r>
+              <a:rPr sz="819" b="1" i="0">
+                <a:solidFill>
+                  <a:srgbClr val="9D1B32"/>
+                </a:solidFill>
+                <a:latin typeface="Aptos"/>
+              </a:rPr>
+              <a:t>03  EVIDENCE ACROSS FOUR TEST REGIMES</a:t>
+            </a:r>
+          </a:p>
+        </p:txBody>
+      </p:sp>
+      <p:sp>
+        <p:nvSpPr>
+          <p:cNvPr id="84" name="Rounded Rectangle 83"/>
+          <p:cNvSpPr/>
+          <p:nvPr/>
+        </p:nvSpPr>
+        <p:spPr>
+          <a:xfrm>
+            <a:off x="7333488" y="1280160"/>
+            <a:ext cx="4498848" cy="1755648"/>
+          </a:xfrm>
+          <a:prstGeom prst="roundRect">
+            <a:avLst>
+              <a:gd name="adj" fmla="val 8000"/>
+            </a:avLst>
+          </a:prstGeom>
+          <a:solidFill>
+            <a:srgbClr val="FFFFFF"/>
+          </a:solidFill>
+          <a:ln w="8890">
+            <a:solidFill>
+              <a:srgbClr val="D9D4CB"/>
+            </a:solidFill>
+          </a:ln>
+        </p:spPr>
+        <p:style>
+          <a:lnRef idx="1">
+            <a:schemeClr val="accent1"/>
+          </a:lnRef>
+          <a:fillRef idx="3">
+            <a:schemeClr val="accent1"/>
+          </a:fillRef>
+          <a:effectRef idx="2">
+            <a:schemeClr val="accent1"/>
+          </a:effectRef>
+          <a:fontRef idx="minor">
+            <a:schemeClr val="lt1"/>
+          </a:fontRef>
+        </p:style>
+        <p:txBody>
+          <a:bodyPr rtlCol="0" anchor="ctr"/>
+          <a:lstStyle/>
+          <a:p>
+            <a:pPr algn="ctr"/>
+          </a:p>
+        </p:txBody>
+      </p:sp>
       <p:pic>
         <p:nvPicPr>
-          <p:cNvPr id="75" name="Picture 74" descr="fig_mid_v2.png"/>
+          <p:cNvPr id="85" name="Picture 84" descr="fig_mid.png"/>
           <p:cNvPicPr>
             <a:picLocks noChangeAspect="1"/>
           </p:cNvPicPr>
@@ -6456,8 +6915,8 @@
         </p:blipFill>
         <p:spPr>
           <a:xfrm>
-            <a:off x="4032504" y="4901184"/>
-            <a:ext cx="7571232" cy="1225296"/>
+            <a:off x="7406640" y="1371600"/>
+            <a:ext cx="4352544" cy="1316736"/>
           </a:xfrm>
           <a:prstGeom prst="rect">
             <a:avLst/>
@@ -6466,14 +6925,419 @@
       </p:pic>
       <p:sp>
         <p:nvSpPr>
-          <p:cNvPr id="76" name="Rectangle 75"/>
+          <p:cNvPr id="86" name="TextBox 85"/>
+          <p:cNvSpPr txBox="1"/>
+          <p:nvPr/>
+        </p:nvSpPr>
+        <p:spPr>
+          <a:xfrm>
+            <a:off x="7470648" y="2743200"/>
+            <a:ext cx="4224528" cy="173736"/>
+          </a:xfrm>
+          <a:prstGeom prst="rect">
+            <a:avLst/>
+          </a:prstGeom>
+          <a:noFill/>
+        </p:spPr>
+        <p:txBody>
+          <a:bodyPr wrap="square" lIns="0" rIns="0" tIns="0" bIns="0" anchor="t">
+            <a:spAutoFit/>
+          </a:bodyPr>
+          <a:lstStyle/>
+          <a:p>
+            <a:pPr algn="ctr">
+              <a:lnSpc>
+                <a:spcPct val="100000"/>
+              </a:lnSpc>
+              <a:spcBef>
+                <a:spcPts val="0"/>
+              </a:spcBef>
+              <a:spcAft>
+                <a:spcPts val="0"/>
+              </a:spcAft>
+            </a:pPr>
+            <a:r>
+              <a:rPr sz="650" b="0" i="0">
+                <a:solidFill>
+                  <a:srgbClr val="777D85"/>
+                </a:solidFill>
+                <a:latin typeface="Aptos"/>
+              </a:rPr>
+              <a:t>Shortlist saturation  ·  compute Pareto frontiers  ·  HeaRT hard-negative stress test</a:t>
+            </a:r>
+          </a:p>
+        </p:txBody>
+      </p:sp>
+      <p:sp>
+        <p:nvSpPr>
+          <p:cNvPr id="87" name="TextBox 86"/>
+          <p:cNvSpPr txBox="1"/>
+          <p:nvPr/>
+        </p:nvSpPr>
+        <p:spPr>
+          <a:xfrm>
+            <a:off x="7333488" y="3191256"/>
+            <a:ext cx="4498848" cy="164592"/>
+          </a:xfrm>
+          <a:prstGeom prst="rect">
+            <a:avLst/>
+          </a:prstGeom>
+          <a:noFill/>
+        </p:spPr>
+        <p:txBody>
+          <a:bodyPr wrap="square" lIns="0" rIns="0" tIns="0" bIns="0" anchor="t">
+            <a:spAutoFit/>
+          </a:bodyPr>
+          <a:lstStyle/>
+          <a:p>
+            <a:pPr algn="l">
+              <a:lnSpc>
+                <a:spcPct val="100000"/>
+              </a:lnSpc>
+              <a:spcBef>
+                <a:spcPts val="0"/>
+              </a:spcBef>
+              <a:spcAft>
+                <a:spcPts val="0"/>
+              </a:spcAft>
+            </a:pPr>
+            <a:r>
+              <a:rPr sz="819" b="1" i="0">
+                <a:solidFill>
+                  <a:srgbClr val="9D1B32"/>
+                </a:solidFill>
+                <a:latin typeface="Aptos"/>
+              </a:rPr>
+              <a:t>VALIDATION-SELECTED OPERATING POINTS  ·  TEST MRR ×100</a:t>
+            </a:r>
+          </a:p>
+        </p:txBody>
+      </p:sp>
+      <p:sp>
+        <p:nvSpPr>
+          <p:cNvPr id="88" name="Rectangle 87"/>
           <p:cNvSpPr/>
           <p:nvPr/>
         </p:nvSpPr>
         <p:spPr>
           <a:xfrm>
-            <a:off x="502920" y="6437376"/>
-            <a:ext cx="11183112" cy="10972"/>
+            <a:off x="7333488" y="3419856"/>
+            <a:ext cx="4498848" cy="365760"/>
+          </a:xfrm>
+          <a:prstGeom prst="rect">
+            <a:avLst/>
+          </a:prstGeom>
+          <a:solidFill>
+            <a:srgbClr val="203657"/>
+          </a:solidFill>
+          <a:ln>
+            <a:noFill/>
+          </a:ln>
+        </p:spPr>
+        <p:style>
+          <a:lnRef idx="1">
+            <a:schemeClr val="accent1"/>
+          </a:lnRef>
+          <a:fillRef idx="3">
+            <a:schemeClr val="accent1"/>
+          </a:fillRef>
+          <a:effectRef idx="2">
+            <a:schemeClr val="accent1"/>
+          </a:effectRef>
+          <a:fontRef idx="minor">
+            <a:schemeClr val="lt1"/>
+          </a:fontRef>
+        </p:style>
+        <p:txBody>
+          <a:bodyPr rtlCol="0" anchor="ctr"/>
+          <a:lstStyle/>
+          <a:p>
+            <a:pPr algn="ctr"/>
+          </a:p>
+        </p:txBody>
+      </p:sp>
+      <p:sp>
+        <p:nvSpPr>
+          <p:cNvPr id="89" name="TextBox 88"/>
+          <p:cNvSpPr txBox="1"/>
+          <p:nvPr/>
+        </p:nvSpPr>
+        <p:spPr>
+          <a:xfrm>
+            <a:off x="7370063" y="3483864"/>
+            <a:ext cx="1152144" cy="246888"/>
+          </a:xfrm>
+          <a:prstGeom prst="rect">
+            <a:avLst/>
+          </a:prstGeom>
+          <a:noFill/>
+        </p:spPr>
+        <p:txBody>
+          <a:bodyPr wrap="square" lIns="0" rIns="0" tIns="0" bIns="0" anchor="t">
+            <a:spAutoFit/>
+          </a:bodyPr>
+          <a:lstStyle/>
+          <a:p>
+            <a:pPr algn="l">
+              <a:lnSpc>
+                <a:spcPct val="95000"/>
+              </a:lnSpc>
+              <a:spcBef>
+                <a:spcPts val="0"/>
+              </a:spcBef>
+              <a:spcAft>
+                <a:spcPts val="0"/>
+              </a:spcAft>
+            </a:pPr>
+            <a:r>
+              <a:rPr sz="670" b="1" i="0">
+                <a:solidFill>
+                  <a:srgbClr val="FFFFFF"/>
+                </a:solidFill>
+                <a:latin typeface="Aptos"/>
+              </a:rPr>
+              <a:t>Policy</a:t>
+            </a:r>
+          </a:p>
+        </p:txBody>
+      </p:sp>
+      <p:sp>
+        <p:nvSpPr>
+          <p:cNvPr id="90" name="TextBox 89"/>
+          <p:cNvSpPr txBox="1"/>
+          <p:nvPr/>
+        </p:nvSpPr>
+        <p:spPr>
+          <a:xfrm>
+            <a:off x="8595359" y="3483864"/>
+            <a:ext cx="731520" cy="246888"/>
+          </a:xfrm>
+          <a:prstGeom prst="rect">
+            <a:avLst/>
+          </a:prstGeom>
+          <a:noFill/>
+        </p:spPr>
+        <p:txBody>
+          <a:bodyPr wrap="square" lIns="0" rIns="0" tIns="0" bIns="0" anchor="t">
+            <a:spAutoFit/>
+          </a:bodyPr>
+          <a:lstStyle/>
+          <a:p>
+            <a:pPr algn="ctr">
+              <a:lnSpc>
+                <a:spcPct val="95000"/>
+              </a:lnSpc>
+              <a:spcBef>
+                <a:spcPts val="0"/>
+              </a:spcBef>
+              <a:spcAft>
+                <a:spcPts val="0"/>
+              </a:spcAft>
+            </a:pPr>
+            <a:r>
+              <a:rPr sz="670" b="1" i="0">
+                <a:solidFill>
+                  <a:srgbClr val="FFFFFF"/>
+                </a:solidFill>
+                <a:latin typeface="Aptos"/>
+              </a:rPr>
+              <a:t>Cora
+Pool</a:t>
+            </a:r>
+          </a:p>
+        </p:txBody>
+      </p:sp>
+      <p:sp>
+        <p:nvSpPr>
+          <p:cNvPr id="91" name="TextBox 90"/>
+          <p:cNvSpPr txBox="1"/>
+          <p:nvPr/>
+        </p:nvSpPr>
+        <p:spPr>
+          <a:xfrm>
+            <a:off x="9400032" y="3483864"/>
+            <a:ext cx="731520" cy="246888"/>
+          </a:xfrm>
+          <a:prstGeom prst="rect">
+            <a:avLst/>
+          </a:prstGeom>
+          <a:noFill/>
+        </p:spPr>
+        <p:txBody>
+          <a:bodyPr wrap="square" lIns="0" rIns="0" tIns="0" bIns="0" anchor="t">
+            <a:spAutoFit/>
+          </a:bodyPr>
+          <a:lstStyle/>
+          <a:p>
+            <a:pPr algn="ctr">
+              <a:lnSpc>
+                <a:spcPct val="95000"/>
+              </a:lnSpc>
+              <a:spcBef>
+                <a:spcPts val="0"/>
+              </a:spcBef>
+              <a:spcAft>
+                <a:spcPts val="0"/>
+              </a:spcAft>
+            </a:pPr>
+            <a:r>
+              <a:rPr sz="670" b="1" i="0">
+                <a:solidFill>
+                  <a:srgbClr val="FFFFFF"/>
+                </a:solidFill>
+                <a:latin typeface="Aptos"/>
+              </a:rPr>
+              <a:t>Citeseer
+Pool</a:t>
+            </a:r>
+          </a:p>
+        </p:txBody>
+      </p:sp>
+      <p:sp>
+        <p:nvSpPr>
+          <p:cNvPr id="92" name="TextBox 91"/>
+          <p:cNvSpPr txBox="1"/>
+          <p:nvPr/>
+        </p:nvSpPr>
+        <p:spPr>
+          <a:xfrm>
+            <a:off x="10204704" y="3483864"/>
+            <a:ext cx="749808" cy="246888"/>
+          </a:xfrm>
+          <a:prstGeom prst="rect">
+            <a:avLst/>
+          </a:prstGeom>
+          <a:noFill/>
+        </p:spPr>
+        <p:txBody>
+          <a:bodyPr wrap="square" lIns="0" rIns="0" tIns="0" bIns="0" anchor="t">
+            <a:spAutoFit/>
+          </a:bodyPr>
+          <a:lstStyle/>
+          <a:p>
+            <a:pPr algn="ctr">
+              <a:lnSpc>
+                <a:spcPct val="95000"/>
+              </a:lnSpc>
+              <a:spcBef>
+                <a:spcPts val="0"/>
+              </a:spcBef>
+              <a:spcAft>
+                <a:spcPts val="0"/>
+              </a:spcAft>
+            </a:pPr>
+            <a:r>
+              <a:rPr sz="670" b="1" i="0">
+                <a:solidFill>
+                  <a:srgbClr val="FFFFFF"/>
+                </a:solidFill>
+                <a:latin typeface="Aptos"/>
+              </a:rPr>
+              <a:t>Cora
+HeaRT</a:t>
+            </a:r>
+          </a:p>
+        </p:txBody>
+      </p:sp>
+      <p:sp>
+        <p:nvSpPr>
+          <p:cNvPr id="93" name="TextBox 92"/>
+          <p:cNvSpPr txBox="1"/>
+          <p:nvPr/>
+        </p:nvSpPr>
+        <p:spPr>
+          <a:xfrm>
+            <a:off x="11027664" y="3483864"/>
+            <a:ext cx="768096" cy="246888"/>
+          </a:xfrm>
+          <a:prstGeom prst="rect">
+            <a:avLst/>
+          </a:prstGeom>
+          <a:noFill/>
+        </p:spPr>
+        <p:txBody>
+          <a:bodyPr wrap="square" lIns="0" rIns="0" tIns="0" bIns="0" anchor="t">
+            <a:spAutoFit/>
+          </a:bodyPr>
+          <a:lstStyle/>
+          <a:p>
+            <a:pPr algn="ctr">
+              <a:lnSpc>
+                <a:spcPct val="95000"/>
+              </a:lnSpc>
+              <a:spcBef>
+                <a:spcPts val="0"/>
+              </a:spcBef>
+              <a:spcAft>
+                <a:spcPts val="0"/>
+              </a:spcAft>
+            </a:pPr>
+            <a:r>
+              <a:rPr sz="670" b="1" i="0">
+                <a:solidFill>
+                  <a:srgbClr val="FFFFFF"/>
+                </a:solidFill>
+                <a:latin typeface="Aptos"/>
+              </a:rPr>
+              <a:t>Citeseer
+HeaRT</a:t>
+            </a:r>
+          </a:p>
+        </p:txBody>
+      </p:sp>
+      <p:sp>
+        <p:nvSpPr>
+          <p:cNvPr id="94" name="Rectangle 93"/>
+          <p:cNvSpPr/>
+          <p:nvPr/>
+        </p:nvSpPr>
+        <p:spPr>
+          <a:xfrm>
+            <a:off x="7333488" y="3785616"/>
+            <a:ext cx="4498848" cy="288036"/>
+          </a:xfrm>
+          <a:prstGeom prst="rect">
+            <a:avLst/>
+          </a:prstGeom>
+          <a:solidFill>
+            <a:srgbClr val="FFFFFF"/>
+          </a:solidFill>
+          <a:ln>
+            <a:noFill/>
+          </a:ln>
+        </p:spPr>
+        <p:style>
+          <a:lnRef idx="1">
+            <a:schemeClr val="accent1"/>
+          </a:lnRef>
+          <a:fillRef idx="3">
+            <a:schemeClr val="accent1"/>
+          </a:fillRef>
+          <a:effectRef idx="2">
+            <a:schemeClr val="accent1"/>
+          </a:effectRef>
+          <a:fontRef idx="minor">
+            <a:schemeClr val="lt1"/>
+          </a:fontRef>
+        </p:style>
+        <p:txBody>
+          <a:bodyPr rtlCol="0" anchor="ctr"/>
+          <a:lstStyle/>
+          <a:p>
+            <a:pPr algn="ctr"/>
+          </a:p>
+        </p:txBody>
+      </p:sp>
+      <p:sp>
+        <p:nvSpPr>
+          <p:cNvPr id="95" name="Rectangle 94"/>
+          <p:cNvSpPr/>
+          <p:nvPr/>
+        </p:nvSpPr>
+        <p:spPr>
+          <a:xfrm>
+            <a:off x="7333488" y="4066336"/>
+            <a:ext cx="4498848" cy="7315"/>
           </a:xfrm>
           <a:prstGeom prst="rect">
             <a:avLst/>
@@ -6509,14 +7373,14 @@
       </p:sp>
       <p:sp>
         <p:nvSpPr>
-          <p:cNvPr id="77" name="TextBox 76"/>
+          <p:cNvPr id="96" name="TextBox 95"/>
           <p:cNvSpPr txBox="1"/>
           <p:nvPr/>
         </p:nvSpPr>
         <p:spPr>
           <a:xfrm>
-            <a:off x="502920" y="6519672"/>
-            <a:ext cx="7589520" cy="182880"/>
+            <a:off x="7379208" y="3854196"/>
+            <a:ext cx="1133856" cy="146304"/>
           </a:xfrm>
           <a:prstGeom prst="rect">
             <a:avLst/>
@@ -6524,7 +7388,7 @@
           <a:noFill/>
         </p:spPr>
         <p:txBody>
-          <a:bodyPr wrap="square" lIns="0" rIns="0" tIns="0" bIns="0" anchor="t">
+          <a:bodyPr wrap="square" lIns="0" rIns="0" tIns="0" bIns="0" anchor="ctr">
             <a:spAutoFit/>
           </a:bodyPr>
           <a:lstStyle/>
@@ -6541,36 +7405,27 @@
               </a:spcAft>
             </a:pPr>
             <a:r>
-              <a:rPr sz="819" b="1" i="0">
-                <a:solidFill>
-                  <a:srgbClr val="9D1B32"/>
+              <a:rPr sz="660" b="1" i="0">
+                <a:solidFill>
+                  <a:srgbClr val="171A1F"/>
                 </a:solidFill>
                 <a:latin typeface="Aptos"/>
               </a:rPr>
-              <a:t>INTERIM LAW: </a:t>
-            </a:r>
-            <a:r>
-              <a:rPr sz="819" b="1" i="0">
-                <a:solidFill>
-                  <a:srgbClr val="171A1F"/>
-                </a:solidFill>
-                <a:latin typeface="Aptos"/>
-              </a:rPr>
-              <a:t>reduce neighborhood fanout first; reserve full context for the hard regime.</a:t>
-            </a:r>
-          </a:p>
-        </p:txBody>
-      </p:sp>
-      <p:sp>
-        <p:nvSpPr>
-          <p:cNvPr id="78" name="TextBox 77"/>
+              <a:t>Chance</a:t>
+            </a:r>
+          </a:p>
+        </p:txBody>
+      </p:sp>
+      <p:sp>
+        <p:nvSpPr>
+          <p:cNvPr id="97" name="TextBox 96"/>
           <p:cNvSpPr txBox="1"/>
           <p:nvPr/>
         </p:nvSpPr>
         <p:spPr>
           <a:xfrm>
-            <a:off x="7863840" y="6492240"/>
-            <a:ext cx="3822191" cy="219456"/>
+            <a:off x="8604504" y="3854196"/>
+            <a:ext cx="713232" cy="146304"/>
           </a:xfrm>
           <a:prstGeom prst="rect">
             <a:avLst/>
@@ -6578,12 +7433,12 @@
           <a:noFill/>
         </p:spPr>
         <p:txBody>
-          <a:bodyPr wrap="square" lIns="0" rIns="0" tIns="0" bIns="0" anchor="t">
+          <a:bodyPr wrap="square" lIns="0" rIns="0" tIns="0" bIns="0" anchor="ctr">
             <a:spAutoFit/>
           </a:bodyPr>
           <a:lstStyle/>
           <a:p>
-            <a:pPr algn="r">
+            <a:pPr algn="ctr">
               <a:lnSpc>
                 <a:spcPct val="100000"/>
               </a:lnSpc>
@@ -6595,13 +7450,1809 @@
               </a:spcAft>
             </a:pPr>
             <a:r>
-              <a:rPr sz="640" b="0" i="0">
-                <a:solidFill>
-                  <a:srgbClr val="777D85"/>
+              <a:rPr sz="660" b="0" i="0">
+                <a:solidFill>
+                  <a:srgbClr val="171A1F"/>
+                </a:solidFill>
+                <a:latin typeface="Consolas"/>
+              </a:rPr>
+              <a:t>1.3</a:t>
+            </a:r>
+          </a:p>
+        </p:txBody>
+      </p:sp>
+      <p:sp>
+        <p:nvSpPr>
+          <p:cNvPr id="98" name="TextBox 97"/>
+          <p:cNvSpPr txBox="1"/>
+          <p:nvPr/>
+        </p:nvSpPr>
+        <p:spPr>
+          <a:xfrm>
+            <a:off x="9409176" y="3854196"/>
+            <a:ext cx="713232" cy="146304"/>
+          </a:xfrm>
+          <a:prstGeom prst="rect">
+            <a:avLst/>
+          </a:prstGeom>
+          <a:noFill/>
+        </p:spPr>
+        <p:txBody>
+          <a:bodyPr wrap="square" lIns="0" rIns="0" tIns="0" bIns="0" anchor="ctr">
+            <a:spAutoFit/>
+          </a:bodyPr>
+          <a:lstStyle/>
+          <a:p>
+            <a:pPr algn="ctr">
+              <a:lnSpc>
+                <a:spcPct val="100000"/>
+              </a:lnSpc>
+              <a:spcBef>
+                <a:spcPts val="0"/>
+              </a:spcBef>
+              <a:spcAft>
+                <a:spcPts val="0"/>
+              </a:spcAft>
+            </a:pPr>
+            <a:r>
+              <a:rPr sz="660" b="0" i="0">
+                <a:solidFill>
+                  <a:srgbClr val="171A1F"/>
+                </a:solidFill>
+                <a:latin typeface="Consolas"/>
+              </a:rPr>
+              <a:t>1.5</a:t>
+            </a:r>
+          </a:p>
+        </p:txBody>
+      </p:sp>
+      <p:sp>
+        <p:nvSpPr>
+          <p:cNvPr id="99" name="TextBox 98"/>
+          <p:cNvSpPr txBox="1"/>
+          <p:nvPr/>
+        </p:nvSpPr>
+        <p:spPr>
+          <a:xfrm>
+            <a:off x="10213848" y="3854196"/>
+            <a:ext cx="731520" cy="146304"/>
+          </a:xfrm>
+          <a:prstGeom prst="rect">
+            <a:avLst/>
+          </a:prstGeom>
+          <a:noFill/>
+        </p:spPr>
+        <p:txBody>
+          <a:bodyPr wrap="square" lIns="0" rIns="0" tIns="0" bIns="0" anchor="ctr">
+            <a:spAutoFit/>
+          </a:bodyPr>
+          <a:lstStyle/>
+          <a:p>
+            <a:pPr algn="ctr">
+              <a:lnSpc>
+                <a:spcPct val="100000"/>
+              </a:lnSpc>
+              <a:spcBef>
+                <a:spcPts val="0"/>
+              </a:spcBef>
+              <a:spcAft>
+                <a:spcPts val="0"/>
+              </a:spcAft>
+            </a:pPr>
+            <a:r>
+              <a:rPr sz="660" b="0" i="0">
+                <a:solidFill>
+                  <a:srgbClr val="171A1F"/>
+                </a:solidFill>
+                <a:latin typeface="Consolas"/>
+              </a:rPr>
+              <a:t>1.4</a:t>
+            </a:r>
+          </a:p>
+        </p:txBody>
+      </p:sp>
+      <p:sp>
+        <p:nvSpPr>
+          <p:cNvPr id="100" name="TextBox 99"/>
+          <p:cNvSpPr txBox="1"/>
+          <p:nvPr/>
+        </p:nvSpPr>
+        <p:spPr>
+          <a:xfrm>
+            <a:off x="11036808" y="3854196"/>
+            <a:ext cx="749808" cy="146304"/>
+          </a:xfrm>
+          <a:prstGeom prst="rect">
+            <a:avLst/>
+          </a:prstGeom>
+          <a:noFill/>
+        </p:spPr>
+        <p:txBody>
+          <a:bodyPr wrap="square" lIns="0" rIns="0" tIns="0" bIns="0" anchor="ctr">
+            <a:spAutoFit/>
+          </a:bodyPr>
+          <a:lstStyle/>
+          <a:p>
+            <a:pPr algn="ctr">
+              <a:lnSpc>
+                <a:spcPct val="100000"/>
+              </a:lnSpc>
+              <a:spcBef>
+                <a:spcPts val="0"/>
+              </a:spcBef>
+              <a:spcAft>
+                <a:spcPts val="0"/>
+              </a:spcAft>
+            </a:pPr>
+            <a:r>
+              <a:rPr sz="660" b="0" i="0">
+                <a:solidFill>
+                  <a:srgbClr val="171A1F"/>
+                </a:solidFill>
+                <a:latin typeface="Consolas"/>
+              </a:rPr>
+              <a:t>1.4</a:t>
+            </a:r>
+          </a:p>
+        </p:txBody>
+      </p:sp>
+      <p:sp>
+        <p:nvSpPr>
+          <p:cNvPr id="101" name="Rectangle 100"/>
+          <p:cNvSpPr/>
+          <p:nvPr/>
+        </p:nvSpPr>
+        <p:spPr>
+          <a:xfrm>
+            <a:off x="7333488" y="4073652"/>
+            <a:ext cx="4498848" cy="288036"/>
+          </a:xfrm>
+          <a:prstGeom prst="rect">
+            <a:avLst/>
+          </a:prstGeom>
+          <a:solidFill>
+            <a:srgbClr val="FFFFFF"/>
+          </a:solidFill>
+          <a:ln>
+            <a:noFill/>
+          </a:ln>
+        </p:spPr>
+        <p:style>
+          <a:lnRef idx="1">
+            <a:schemeClr val="accent1"/>
+          </a:lnRef>
+          <a:fillRef idx="3">
+            <a:schemeClr val="accent1"/>
+          </a:fillRef>
+          <a:effectRef idx="2">
+            <a:schemeClr val="accent1"/>
+          </a:effectRef>
+          <a:fontRef idx="minor">
+            <a:schemeClr val="lt1"/>
+          </a:fontRef>
+        </p:style>
+        <p:txBody>
+          <a:bodyPr rtlCol="0" anchor="ctr"/>
+          <a:lstStyle/>
+          <a:p>
+            <a:pPr algn="ctr"/>
+          </a:p>
+        </p:txBody>
+      </p:sp>
+      <p:sp>
+        <p:nvSpPr>
+          <p:cNvPr id="102" name="Rectangle 101"/>
+          <p:cNvSpPr/>
+          <p:nvPr/>
+        </p:nvSpPr>
+        <p:spPr>
+          <a:xfrm>
+            <a:off x="7333488" y="4354372"/>
+            <a:ext cx="4498848" cy="7315"/>
+          </a:xfrm>
+          <a:prstGeom prst="rect">
+            <a:avLst/>
+          </a:prstGeom>
+          <a:solidFill>
+            <a:srgbClr val="D9D4CB"/>
+          </a:solidFill>
+          <a:ln>
+            <a:noFill/>
+          </a:ln>
+        </p:spPr>
+        <p:style>
+          <a:lnRef idx="1">
+            <a:schemeClr val="accent1"/>
+          </a:lnRef>
+          <a:fillRef idx="3">
+            <a:schemeClr val="accent1"/>
+          </a:fillRef>
+          <a:effectRef idx="2">
+            <a:schemeClr val="accent1"/>
+          </a:effectRef>
+          <a:fontRef idx="minor">
+            <a:schemeClr val="lt1"/>
+          </a:fontRef>
+        </p:style>
+        <p:txBody>
+          <a:bodyPr rtlCol="0" anchor="ctr"/>
+          <a:lstStyle/>
+          <a:p>
+            <a:pPr algn="ctr"/>
+          </a:p>
+        </p:txBody>
+      </p:sp>
+      <p:sp>
+        <p:nvSpPr>
+          <p:cNvPr id="103" name="TextBox 102"/>
+          <p:cNvSpPr txBox="1"/>
+          <p:nvPr/>
+        </p:nvSpPr>
+        <p:spPr>
+          <a:xfrm>
+            <a:off x="7379208" y="4142232"/>
+            <a:ext cx="1133856" cy="146304"/>
+          </a:xfrm>
+          <a:prstGeom prst="rect">
+            <a:avLst/>
+          </a:prstGeom>
+          <a:noFill/>
+        </p:spPr>
+        <p:txBody>
+          <a:bodyPr wrap="square" lIns="0" rIns="0" tIns="0" bIns="0" anchor="ctr">
+            <a:spAutoFit/>
+          </a:bodyPr>
+          <a:lstStyle/>
+          <a:p>
+            <a:pPr algn="l">
+              <a:lnSpc>
+                <a:spcPct val="100000"/>
+              </a:lnSpc>
+              <a:spcBef>
+                <a:spcPts val="0"/>
+              </a:spcBef>
+              <a:spcAft>
+                <a:spcPts val="0"/>
+              </a:spcAft>
+            </a:pPr>
+            <a:r>
+              <a:rPr sz="660" b="1" i="0">
+                <a:solidFill>
+                  <a:srgbClr val="171A1F"/>
                 </a:solidFill>
                 <a:latin typeface="Aptos"/>
               </a:rPr>
-              <a:t>Amit Kumar · Ashmit Satpute · Arnav Kshirsagar · Pranav Shalya · Atharv Wankhede</a:t>
+              <a:t>AA · 0% GPU</a:t>
+            </a:r>
+          </a:p>
+        </p:txBody>
+      </p:sp>
+      <p:sp>
+        <p:nvSpPr>
+          <p:cNvPr id="104" name="TextBox 103"/>
+          <p:cNvSpPr txBox="1"/>
+          <p:nvPr/>
+        </p:nvSpPr>
+        <p:spPr>
+          <a:xfrm>
+            <a:off x="8604504" y="4142232"/>
+            <a:ext cx="713232" cy="146304"/>
+          </a:xfrm>
+          <a:prstGeom prst="rect">
+            <a:avLst/>
+          </a:prstGeom>
+          <a:noFill/>
+        </p:spPr>
+        <p:txBody>
+          <a:bodyPr wrap="square" lIns="0" rIns="0" tIns="0" bIns="0" anchor="ctr">
+            <a:spAutoFit/>
+          </a:bodyPr>
+          <a:lstStyle/>
+          <a:p>
+            <a:pPr algn="ctr">
+              <a:lnSpc>
+                <a:spcPct val="100000"/>
+              </a:lnSpc>
+              <a:spcBef>
+                <a:spcPts val="0"/>
+              </a:spcBef>
+              <a:spcAft>
+                <a:spcPts val="0"/>
+              </a:spcAft>
+            </a:pPr>
+            <a:r>
+              <a:rPr sz="660" b="0" i="0">
+                <a:solidFill>
+                  <a:srgbClr val="171A1F"/>
+                </a:solidFill>
+                <a:latin typeface="Consolas"/>
+              </a:rPr>
+              <a:t>33.1</a:t>
+            </a:r>
+          </a:p>
+        </p:txBody>
+      </p:sp>
+      <p:sp>
+        <p:nvSpPr>
+          <p:cNvPr id="105" name="TextBox 104"/>
+          <p:cNvSpPr txBox="1"/>
+          <p:nvPr/>
+        </p:nvSpPr>
+        <p:spPr>
+          <a:xfrm>
+            <a:off x="9409176" y="4142232"/>
+            <a:ext cx="713232" cy="146304"/>
+          </a:xfrm>
+          <a:prstGeom prst="rect">
+            <a:avLst/>
+          </a:prstGeom>
+          <a:noFill/>
+        </p:spPr>
+        <p:txBody>
+          <a:bodyPr wrap="square" lIns="0" rIns="0" tIns="0" bIns="0" anchor="ctr">
+            <a:spAutoFit/>
+          </a:bodyPr>
+          <a:lstStyle/>
+          <a:p>
+            <a:pPr algn="ctr">
+              <a:lnSpc>
+                <a:spcPct val="100000"/>
+              </a:lnSpc>
+              <a:spcBef>
+                <a:spcPts val="0"/>
+              </a:spcBef>
+              <a:spcAft>
+                <a:spcPts val="0"/>
+              </a:spcAft>
+            </a:pPr>
+            <a:r>
+              <a:rPr sz="660" b="0" i="0">
+                <a:solidFill>
+                  <a:srgbClr val="171A1F"/>
+                </a:solidFill>
+                <a:latin typeface="Consolas"/>
+              </a:rPr>
+              <a:t>31.5</a:t>
+            </a:r>
+          </a:p>
+        </p:txBody>
+      </p:sp>
+      <p:sp>
+        <p:nvSpPr>
+          <p:cNvPr id="106" name="TextBox 105"/>
+          <p:cNvSpPr txBox="1"/>
+          <p:nvPr/>
+        </p:nvSpPr>
+        <p:spPr>
+          <a:xfrm>
+            <a:off x="10213848" y="4142232"/>
+            <a:ext cx="731520" cy="146304"/>
+          </a:xfrm>
+          <a:prstGeom prst="rect">
+            <a:avLst/>
+          </a:prstGeom>
+          <a:noFill/>
+        </p:spPr>
+        <p:txBody>
+          <a:bodyPr wrap="square" lIns="0" rIns="0" tIns="0" bIns="0" anchor="ctr">
+            <a:spAutoFit/>
+          </a:bodyPr>
+          <a:lstStyle/>
+          <a:p>
+            <a:pPr algn="ctr">
+              <a:lnSpc>
+                <a:spcPct val="100000"/>
+              </a:lnSpc>
+              <a:spcBef>
+                <a:spcPts val="0"/>
+              </a:spcBef>
+              <a:spcAft>
+                <a:spcPts val="0"/>
+              </a:spcAft>
+            </a:pPr>
+            <a:r>
+              <a:rPr sz="660" b="0" i="0">
+                <a:solidFill>
+                  <a:srgbClr val="171A1F"/>
+                </a:solidFill>
+                <a:latin typeface="Consolas"/>
+              </a:rPr>
+              <a:t>12.0</a:t>
+            </a:r>
+          </a:p>
+        </p:txBody>
+      </p:sp>
+      <p:sp>
+        <p:nvSpPr>
+          <p:cNvPr id="107" name="TextBox 106"/>
+          <p:cNvSpPr txBox="1"/>
+          <p:nvPr/>
+        </p:nvSpPr>
+        <p:spPr>
+          <a:xfrm>
+            <a:off x="11036808" y="4142232"/>
+            <a:ext cx="749808" cy="146304"/>
+          </a:xfrm>
+          <a:prstGeom prst="rect">
+            <a:avLst/>
+          </a:prstGeom>
+          <a:noFill/>
+        </p:spPr>
+        <p:txBody>
+          <a:bodyPr wrap="square" lIns="0" rIns="0" tIns="0" bIns="0" anchor="ctr">
+            <a:spAutoFit/>
+          </a:bodyPr>
+          <a:lstStyle/>
+          <a:p>
+            <a:pPr algn="ctr">
+              <a:lnSpc>
+                <a:spcPct val="100000"/>
+              </a:lnSpc>
+              <a:spcBef>
+                <a:spcPts val="0"/>
+              </a:spcBef>
+              <a:spcAft>
+                <a:spcPts val="0"/>
+              </a:spcAft>
+            </a:pPr>
+            <a:r>
+              <a:rPr sz="660" b="0" i="0">
+                <a:solidFill>
+                  <a:srgbClr val="171A1F"/>
+                </a:solidFill>
+                <a:latin typeface="Consolas"/>
+              </a:rPr>
+              <a:t>11.0</a:t>
+            </a:r>
+          </a:p>
+        </p:txBody>
+      </p:sp>
+      <p:sp>
+        <p:nvSpPr>
+          <p:cNvPr id="108" name="Rectangle 107"/>
+          <p:cNvSpPr/>
+          <p:nvPr/>
+        </p:nvSpPr>
+        <p:spPr>
+          <a:xfrm>
+            <a:off x="7333488" y="4361688"/>
+            <a:ext cx="4498848" cy="288036"/>
+          </a:xfrm>
+          <a:prstGeom prst="rect">
+            <a:avLst/>
+          </a:prstGeom>
+          <a:solidFill>
+            <a:srgbClr val="F5EADA"/>
+          </a:solidFill>
+          <a:ln>
+            <a:noFill/>
+          </a:ln>
+        </p:spPr>
+        <p:style>
+          <a:lnRef idx="1">
+            <a:schemeClr val="accent1"/>
+          </a:lnRef>
+          <a:fillRef idx="3">
+            <a:schemeClr val="accent1"/>
+          </a:fillRef>
+          <a:effectRef idx="2">
+            <a:schemeClr val="accent1"/>
+          </a:effectRef>
+          <a:fontRef idx="minor">
+            <a:schemeClr val="lt1"/>
+          </a:fontRef>
+        </p:style>
+        <p:txBody>
+          <a:bodyPr rtlCol="0" anchor="ctr"/>
+          <a:lstStyle/>
+          <a:p>
+            <a:pPr algn="ctr"/>
+          </a:p>
+        </p:txBody>
+      </p:sp>
+      <p:sp>
+        <p:nvSpPr>
+          <p:cNvPr id="109" name="Rectangle 108"/>
+          <p:cNvSpPr/>
+          <p:nvPr/>
+        </p:nvSpPr>
+        <p:spPr>
+          <a:xfrm>
+            <a:off x="7333488" y="4642408"/>
+            <a:ext cx="4498848" cy="7315"/>
+          </a:xfrm>
+          <a:prstGeom prst="rect">
+            <a:avLst/>
+          </a:prstGeom>
+          <a:solidFill>
+            <a:srgbClr val="D9D4CB"/>
+          </a:solidFill>
+          <a:ln>
+            <a:noFill/>
+          </a:ln>
+        </p:spPr>
+        <p:style>
+          <a:lnRef idx="1">
+            <a:schemeClr val="accent1"/>
+          </a:lnRef>
+          <a:fillRef idx="3">
+            <a:schemeClr val="accent1"/>
+          </a:fillRef>
+          <a:effectRef idx="2">
+            <a:schemeClr val="accent1"/>
+          </a:effectRef>
+          <a:fontRef idx="minor">
+            <a:schemeClr val="lt1"/>
+          </a:fontRef>
+        </p:style>
+        <p:txBody>
+          <a:bodyPr rtlCol="0" anchor="ctr"/>
+          <a:lstStyle/>
+          <a:p>
+            <a:pPr algn="ctr"/>
+          </a:p>
+        </p:txBody>
+      </p:sp>
+      <p:sp>
+        <p:nvSpPr>
+          <p:cNvPr id="110" name="TextBox 109"/>
+          <p:cNvSpPr txBox="1"/>
+          <p:nvPr/>
+        </p:nvSpPr>
+        <p:spPr>
+          <a:xfrm>
+            <a:off x="7379208" y="4430268"/>
+            <a:ext cx="1133856" cy="146304"/>
+          </a:xfrm>
+          <a:prstGeom prst="rect">
+            <a:avLst/>
+          </a:prstGeom>
+          <a:noFill/>
+        </p:spPr>
+        <p:txBody>
+          <a:bodyPr wrap="square" lIns="0" rIns="0" tIns="0" bIns="0" anchor="ctr">
+            <a:spAutoFit/>
+          </a:bodyPr>
+          <a:lstStyle/>
+          <a:p>
+            <a:pPr algn="l">
+              <a:lnSpc>
+                <a:spcPct val="100000"/>
+              </a:lnSpc>
+              <a:spcBef>
+                <a:spcPts val="0"/>
+              </a:spcBef>
+              <a:spcAft>
+                <a:spcPts val="0"/>
+              </a:spcAft>
+            </a:pPr>
+            <a:r>
+              <a:rPr sz="660" b="1" i="0">
+                <a:solidFill>
+                  <a:srgbClr val="171A1F"/>
+                </a:solidFill>
+                <a:latin typeface="Aptos"/>
+              </a:rPr>
+              <a:t>Hybrid · ≤10%</a:t>
+            </a:r>
+          </a:p>
+        </p:txBody>
+      </p:sp>
+      <p:sp>
+        <p:nvSpPr>
+          <p:cNvPr id="111" name="TextBox 110"/>
+          <p:cNvSpPr txBox="1"/>
+          <p:nvPr/>
+        </p:nvSpPr>
+        <p:spPr>
+          <a:xfrm>
+            <a:off x="8604504" y="4430268"/>
+            <a:ext cx="713232" cy="146304"/>
+          </a:xfrm>
+          <a:prstGeom prst="rect">
+            <a:avLst/>
+          </a:prstGeom>
+          <a:noFill/>
+        </p:spPr>
+        <p:txBody>
+          <a:bodyPr wrap="square" lIns="0" rIns="0" tIns="0" bIns="0" anchor="ctr">
+            <a:spAutoFit/>
+          </a:bodyPr>
+          <a:lstStyle/>
+          <a:p>
+            <a:pPr algn="ctr">
+              <a:lnSpc>
+                <a:spcPct val="100000"/>
+              </a:lnSpc>
+              <a:spcBef>
+                <a:spcPts val="0"/>
+              </a:spcBef>
+              <a:spcAft>
+                <a:spcPts val="0"/>
+              </a:spcAft>
+            </a:pPr>
+            <a:r>
+              <a:rPr sz="660" b="1" i="0">
+                <a:solidFill>
+                  <a:srgbClr val="B46318"/>
+                </a:solidFill>
+                <a:latin typeface="Consolas"/>
+              </a:rPr>
+              <a:t>38.4 · 7%</a:t>
+            </a:r>
+          </a:p>
+        </p:txBody>
+      </p:sp>
+      <p:sp>
+        <p:nvSpPr>
+          <p:cNvPr id="112" name="TextBox 111"/>
+          <p:cNvSpPr txBox="1"/>
+          <p:nvPr/>
+        </p:nvSpPr>
+        <p:spPr>
+          <a:xfrm>
+            <a:off x="9409176" y="4430268"/>
+            <a:ext cx="713232" cy="146304"/>
+          </a:xfrm>
+          <a:prstGeom prst="rect">
+            <a:avLst/>
+          </a:prstGeom>
+          <a:noFill/>
+        </p:spPr>
+        <p:txBody>
+          <a:bodyPr wrap="square" lIns="0" rIns="0" tIns="0" bIns="0" anchor="ctr">
+            <a:spAutoFit/>
+          </a:bodyPr>
+          <a:lstStyle/>
+          <a:p>
+            <a:pPr algn="ctr">
+              <a:lnSpc>
+                <a:spcPct val="100000"/>
+              </a:lnSpc>
+              <a:spcBef>
+                <a:spcPts val="0"/>
+              </a:spcBef>
+              <a:spcAft>
+                <a:spcPts val="0"/>
+              </a:spcAft>
+            </a:pPr>
+            <a:r>
+              <a:rPr sz="660" b="1" i="0">
+                <a:solidFill>
+                  <a:srgbClr val="171A1F"/>
+                </a:solidFill>
+                <a:latin typeface="Consolas"/>
+              </a:rPr>
+              <a:t>34.7 · 9%</a:t>
+            </a:r>
+          </a:p>
+        </p:txBody>
+      </p:sp>
+      <p:sp>
+        <p:nvSpPr>
+          <p:cNvPr id="113" name="TextBox 112"/>
+          <p:cNvSpPr txBox="1"/>
+          <p:nvPr/>
+        </p:nvSpPr>
+        <p:spPr>
+          <a:xfrm>
+            <a:off x="10213848" y="4430268"/>
+            <a:ext cx="731520" cy="146304"/>
+          </a:xfrm>
+          <a:prstGeom prst="rect">
+            <a:avLst/>
+          </a:prstGeom>
+          <a:noFill/>
+        </p:spPr>
+        <p:txBody>
+          <a:bodyPr wrap="square" lIns="0" rIns="0" tIns="0" bIns="0" anchor="ctr">
+            <a:spAutoFit/>
+          </a:bodyPr>
+          <a:lstStyle/>
+          <a:p>
+            <a:pPr algn="ctr">
+              <a:lnSpc>
+                <a:spcPct val="100000"/>
+              </a:lnSpc>
+              <a:spcBef>
+                <a:spcPts val="0"/>
+              </a:spcBef>
+              <a:spcAft>
+                <a:spcPts val="0"/>
+              </a:spcAft>
+            </a:pPr>
+            <a:r>
+              <a:rPr sz="660" b="1" i="0">
+                <a:solidFill>
+                  <a:srgbClr val="171A1F"/>
+                </a:solidFill>
+                <a:latin typeface="Consolas"/>
+              </a:rPr>
+              <a:t>12.8 · 0.4%</a:t>
+            </a:r>
+          </a:p>
+        </p:txBody>
+      </p:sp>
+      <p:sp>
+        <p:nvSpPr>
+          <p:cNvPr id="114" name="TextBox 113"/>
+          <p:cNvSpPr txBox="1"/>
+          <p:nvPr/>
+        </p:nvSpPr>
+        <p:spPr>
+          <a:xfrm>
+            <a:off x="11036808" y="4430268"/>
+            <a:ext cx="749808" cy="146304"/>
+          </a:xfrm>
+          <a:prstGeom prst="rect">
+            <a:avLst/>
+          </a:prstGeom>
+          <a:noFill/>
+        </p:spPr>
+        <p:txBody>
+          <a:bodyPr wrap="square" lIns="0" rIns="0" tIns="0" bIns="0" anchor="ctr">
+            <a:spAutoFit/>
+          </a:bodyPr>
+          <a:lstStyle/>
+          <a:p>
+            <a:pPr algn="ctr">
+              <a:lnSpc>
+                <a:spcPct val="100000"/>
+              </a:lnSpc>
+              <a:spcBef>
+                <a:spcPts val="0"/>
+              </a:spcBef>
+              <a:spcAft>
+                <a:spcPts val="0"/>
+              </a:spcAft>
+            </a:pPr>
+            <a:r>
+              <a:rPr sz="660" b="1" i="0">
+                <a:solidFill>
+                  <a:srgbClr val="B46318"/>
+                </a:solidFill>
+                <a:latin typeface="Consolas"/>
+              </a:rPr>
+              <a:t>13.8 · 8%</a:t>
+            </a:r>
+          </a:p>
+        </p:txBody>
+      </p:sp>
+      <p:sp>
+        <p:nvSpPr>
+          <p:cNvPr id="115" name="Rectangle 114"/>
+          <p:cNvSpPr/>
+          <p:nvPr/>
+        </p:nvSpPr>
+        <p:spPr>
+          <a:xfrm>
+            <a:off x="7333488" y="4649724"/>
+            <a:ext cx="4498848" cy="288036"/>
+          </a:xfrm>
+          <a:prstGeom prst="rect">
+            <a:avLst/>
+          </a:prstGeom>
+          <a:solidFill>
+            <a:srgbClr val="E4F0ED"/>
+          </a:solidFill>
+          <a:ln>
+            <a:noFill/>
+          </a:ln>
+        </p:spPr>
+        <p:style>
+          <a:lnRef idx="1">
+            <a:schemeClr val="accent1"/>
+          </a:lnRef>
+          <a:fillRef idx="3">
+            <a:schemeClr val="accent1"/>
+          </a:fillRef>
+          <a:effectRef idx="2">
+            <a:schemeClr val="accent1"/>
+          </a:effectRef>
+          <a:fontRef idx="minor">
+            <a:schemeClr val="lt1"/>
+          </a:fontRef>
+        </p:style>
+        <p:txBody>
+          <a:bodyPr rtlCol="0" anchor="ctr"/>
+          <a:lstStyle/>
+          <a:p>
+            <a:pPr algn="ctr"/>
+          </a:p>
+        </p:txBody>
+      </p:sp>
+      <p:sp>
+        <p:nvSpPr>
+          <p:cNvPr id="116" name="Rectangle 115"/>
+          <p:cNvSpPr/>
+          <p:nvPr/>
+        </p:nvSpPr>
+        <p:spPr>
+          <a:xfrm>
+            <a:off x="7333488" y="4930444"/>
+            <a:ext cx="4498848" cy="7315"/>
+          </a:xfrm>
+          <a:prstGeom prst="rect">
+            <a:avLst/>
+          </a:prstGeom>
+          <a:solidFill>
+            <a:srgbClr val="D9D4CB"/>
+          </a:solidFill>
+          <a:ln>
+            <a:noFill/>
+          </a:ln>
+        </p:spPr>
+        <p:style>
+          <a:lnRef idx="1">
+            <a:schemeClr val="accent1"/>
+          </a:lnRef>
+          <a:fillRef idx="3">
+            <a:schemeClr val="accent1"/>
+          </a:fillRef>
+          <a:effectRef idx="2">
+            <a:schemeClr val="accent1"/>
+          </a:effectRef>
+          <a:fontRef idx="minor">
+            <a:schemeClr val="lt1"/>
+          </a:fontRef>
+        </p:style>
+        <p:txBody>
+          <a:bodyPr rtlCol="0" anchor="ctr"/>
+          <a:lstStyle/>
+          <a:p>
+            <a:pPr algn="ctr"/>
+          </a:p>
+        </p:txBody>
+      </p:sp>
+      <p:sp>
+        <p:nvSpPr>
+          <p:cNvPr id="117" name="TextBox 116"/>
+          <p:cNvSpPr txBox="1"/>
+          <p:nvPr/>
+        </p:nvSpPr>
+        <p:spPr>
+          <a:xfrm>
+            <a:off x="7379208" y="4718304"/>
+            <a:ext cx="1133856" cy="146304"/>
+          </a:xfrm>
+          <a:prstGeom prst="rect">
+            <a:avLst/>
+          </a:prstGeom>
+          <a:noFill/>
+        </p:spPr>
+        <p:txBody>
+          <a:bodyPr wrap="square" lIns="0" rIns="0" tIns="0" bIns="0" anchor="ctr">
+            <a:spAutoFit/>
+          </a:bodyPr>
+          <a:lstStyle/>
+          <a:p>
+            <a:pPr algn="l">
+              <a:lnSpc>
+                <a:spcPct val="100000"/>
+              </a:lnSpc>
+              <a:spcBef>
+                <a:spcPts val="0"/>
+              </a:spcBef>
+              <a:spcAft>
+                <a:spcPts val="0"/>
+              </a:spcAft>
+            </a:pPr>
+            <a:r>
+              <a:rPr sz="660" b="1" i="0">
+                <a:solidFill>
+                  <a:srgbClr val="171A1F"/>
+                </a:solidFill>
+                <a:latin typeface="Aptos"/>
+              </a:rPr>
+              <a:t>Half · s=2×10</a:t>
+            </a:r>
+          </a:p>
+        </p:txBody>
+      </p:sp>
+      <p:sp>
+        <p:nvSpPr>
+          <p:cNvPr id="118" name="TextBox 117"/>
+          <p:cNvSpPr txBox="1"/>
+          <p:nvPr/>
+        </p:nvSpPr>
+        <p:spPr>
+          <a:xfrm>
+            <a:off x="8604504" y="4718304"/>
+            <a:ext cx="713232" cy="146304"/>
+          </a:xfrm>
+          <a:prstGeom prst="rect">
+            <a:avLst/>
+          </a:prstGeom>
+          <a:noFill/>
+        </p:spPr>
+        <p:txBody>
+          <a:bodyPr wrap="square" lIns="0" rIns="0" tIns="0" bIns="0" anchor="ctr">
+            <a:spAutoFit/>
+          </a:bodyPr>
+          <a:lstStyle/>
+          <a:p>
+            <a:pPr algn="ctr">
+              <a:lnSpc>
+                <a:spcPct val="100000"/>
+              </a:lnSpc>
+              <a:spcBef>
+                <a:spcPts val="0"/>
+              </a:spcBef>
+              <a:spcAft>
+                <a:spcPts val="0"/>
+              </a:spcAft>
+            </a:pPr>
+            <a:r>
+              <a:rPr sz="660" b="1" i="0">
+                <a:solidFill>
+                  <a:srgbClr val="171A1F"/>
+                </a:solidFill>
+                <a:latin typeface="Consolas"/>
+              </a:rPr>
+              <a:t>42.9 · 67%</a:t>
+            </a:r>
+          </a:p>
+        </p:txBody>
+      </p:sp>
+      <p:sp>
+        <p:nvSpPr>
+          <p:cNvPr id="119" name="TextBox 118"/>
+          <p:cNvSpPr txBox="1"/>
+          <p:nvPr/>
+        </p:nvSpPr>
+        <p:spPr>
+          <a:xfrm>
+            <a:off x="9409176" y="4718304"/>
+            <a:ext cx="713232" cy="146304"/>
+          </a:xfrm>
+          <a:prstGeom prst="rect">
+            <a:avLst/>
+          </a:prstGeom>
+          <a:noFill/>
+        </p:spPr>
+        <p:txBody>
+          <a:bodyPr wrap="square" lIns="0" rIns="0" tIns="0" bIns="0" anchor="ctr">
+            <a:spAutoFit/>
+          </a:bodyPr>
+          <a:lstStyle/>
+          <a:p>
+            <a:pPr algn="ctr">
+              <a:lnSpc>
+                <a:spcPct val="100000"/>
+              </a:lnSpc>
+              <a:spcBef>
+                <a:spcPts val="0"/>
+              </a:spcBef>
+              <a:spcAft>
+                <a:spcPts val="0"/>
+              </a:spcAft>
+            </a:pPr>
+            <a:r>
+              <a:rPr sz="660" b="1" i="0">
+                <a:solidFill>
+                  <a:srgbClr val="0F7670"/>
+                </a:solidFill>
+                <a:latin typeface="Consolas"/>
+              </a:rPr>
+              <a:t>51.4 · 63%</a:t>
+            </a:r>
+          </a:p>
+        </p:txBody>
+      </p:sp>
+      <p:sp>
+        <p:nvSpPr>
+          <p:cNvPr id="120" name="TextBox 119"/>
+          <p:cNvSpPr txBox="1"/>
+          <p:nvPr/>
+        </p:nvSpPr>
+        <p:spPr>
+          <a:xfrm>
+            <a:off x="10213848" y="4718304"/>
+            <a:ext cx="731520" cy="146304"/>
+          </a:xfrm>
+          <a:prstGeom prst="rect">
+            <a:avLst/>
+          </a:prstGeom>
+          <a:noFill/>
+        </p:spPr>
+        <p:txBody>
+          <a:bodyPr wrap="square" lIns="0" rIns="0" tIns="0" bIns="0" anchor="ctr">
+            <a:spAutoFit/>
+          </a:bodyPr>
+          <a:lstStyle/>
+          <a:p>
+            <a:pPr algn="ctr">
+              <a:lnSpc>
+                <a:spcPct val="100000"/>
+              </a:lnSpc>
+              <a:spcBef>
+                <a:spcPts val="0"/>
+              </a:spcBef>
+              <a:spcAft>
+                <a:spcPts val="0"/>
+              </a:spcAft>
+            </a:pPr>
+            <a:r>
+              <a:rPr sz="660" b="1" i="0">
+                <a:solidFill>
+                  <a:srgbClr val="0F7670"/>
+                </a:solidFill>
+                <a:latin typeface="Consolas"/>
+              </a:rPr>
+              <a:t>14.3 · 65%</a:t>
+            </a:r>
+          </a:p>
+        </p:txBody>
+      </p:sp>
+      <p:sp>
+        <p:nvSpPr>
+          <p:cNvPr id="121" name="TextBox 120"/>
+          <p:cNvSpPr txBox="1"/>
+          <p:nvPr/>
+        </p:nvSpPr>
+        <p:spPr>
+          <a:xfrm>
+            <a:off x="11036808" y="4718304"/>
+            <a:ext cx="749808" cy="146304"/>
+          </a:xfrm>
+          <a:prstGeom prst="rect">
+            <a:avLst/>
+          </a:prstGeom>
+          <a:noFill/>
+        </p:spPr>
+        <p:txBody>
+          <a:bodyPr wrap="square" lIns="0" rIns="0" tIns="0" bIns="0" anchor="ctr">
+            <a:spAutoFit/>
+          </a:bodyPr>
+          <a:lstStyle/>
+          <a:p>
+            <a:pPr algn="ctr">
+              <a:lnSpc>
+                <a:spcPct val="100000"/>
+              </a:lnSpc>
+              <a:spcBef>
+                <a:spcPts val="0"/>
+              </a:spcBef>
+              <a:spcAft>
+                <a:spcPts val="0"/>
+              </a:spcAft>
+            </a:pPr>
+            <a:r>
+              <a:rPr sz="660" b="1" i="0">
+                <a:solidFill>
+                  <a:srgbClr val="171A1F"/>
+                </a:solidFill>
+                <a:latin typeface="Consolas"/>
+              </a:rPr>
+              <a:t>14.2 · 69%</a:t>
+            </a:r>
+          </a:p>
+        </p:txBody>
+      </p:sp>
+      <p:sp>
+        <p:nvSpPr>
+          <p:cNvPr id="122" name="Rectangle 121"/>
+          <p:cNvSpPr/>
+          <p:nvPr/>
+        </p:nvSpPr>
+        <p:spPr>
+          <a:xfrm>
+            <a:off x="7333488" y="4937760"/>
+            <a:ext cx="4498848" cy="288036"/>
+          </a:xfrm>
+          <a:prstGeom prst="rect">
+            <a:avLst/>
+          </a:prstGeom>
+          <a:solidFill>
+            <a:srgbClr val="FFFFFF"/>
+          </a:solidFill>
+          <a:ln>
+            <a:noFill/>
+          </a:ln>
+        </p:spPr>
+        <p:style>
+          <a:lnRef idx="1">
+            <a:schemeClr val="accent1"/>
+          </a:lnRef>
+          <a:fillRef idx="3">
+            <a:schemeClr val="accent1"/>
+          </a:fillRef>
+          <a:effectRef idx="2">
+            <a:schemeClr val="accent1"/>
+          </a:effectRef>
+          <a:fontRef idx="minor">
+            <a:schemeClr val="lt1"/>
+          </a:fontRef>
+        </p:style>
+        <p:txBody>
+          <a:bodyPr rtlCol="0" anchor="ctr"/>
+          <a:lstStyle/>
+          <a:p>
+            <a:pPr algn="ctr"/>
+          </a:p>
+        </p:txBody>
+      </p:sp>
+      <p:sp>
+        <p:nvSpPr>
+          <p:cNvPr id="123" name="Rectangle 122"/>
+          <p:cNvSpPr/>
+          <p:nvPr/>
+        </p:nvSpPr>
+        <p:spPr>
+          <a:xfrm>
+            <a:off x="7333488" y="5218480"/>
+            <a:ext cx="4498848" cy="7315"/>
+          </a:xfrm>
+          <a:prstGeom prst="rect">
+            <a:avLst/>
+          </a:prstGeom>
+          <a:solidFill>
+            <a:srgbClr val="D9D4CB"/>
+          </a:solidFill>
+          <a:ln>
+            <a:noFill/>
+          </a:ln>
+        </p:spPr>
+        <p:style>
+          <a:lnRef idx="1">
+            <a:schemeClr val="accent1"/>
+          </a:lnRef>
+          <a:fillRef idx="3">
+            <a:schemeClr val="accent1"/>
+          </a:fillRef>
+          <a:effectRef idx="2">
+            <a:schemeClr val="accent1"/>
+          </a:effectRef>
+          <a:fontRef idx="minor">
+            <a:schemeClr val="lt1"/>
+          </a:fontRef>
+        </p:style>
+        <p:txBody>
+          <a:bodyPr rtlCol="0" anchor="ctr"/>
+          <a:lstStyle/>
+          <a:p>
+            <a:pPr algn="ctr"/>
+          </a:p>
+        </p:txBody>
+      </p:sp>
+      <p:sp>
+        <p:nvSpPr>
+          <p:cNvPr id="124" name="TextBox 123"/>
+          <p:cNvSpPr txBox="1"/>
+          <p:nvPr/>
+        </p:nvSpPr>
+        <p:spPr>
+          <a:xfrm>
+            <a:off x="7379208" y="5006340"/>
+            <a:ext cx="1133856" cy="146304"/>
+          </a:xfrm>
+          <a:prstGeom prst="rect">
+            <a:avLst/>
+          </a:prstGeom>
+          <a:noFill/>
+        </p:spPr>
+        <p:txBody>
+          <a:bodyPr wrap="square" lIns="0" rIns="0" tIns="0" bIns="0" anchor="ctr">
+            <a:spAutoFit/>
+          </a:bodyPr>
+          <a:lstStyle/>
+          <a:p>
+            <a:pPr algn="l">
+              <a:lnSpc>
+                <a:spcPct val="100000"/>
+              </a:lnSpc>
+              <a:spcBef>
+                <a:spcPts val="0"/>
+              </a:spcBef>
+              <a:spcAft>
+                <a:spcPts val="0"/>
+              </a:spcAft>
+            </a:pPr>
+            <a:r>
+              <a:rPr sz="660" b="1" i="0">
+                <a:solidFill>
+                  <a:srgbClr val="171A1F"/>
+                </a:solidFill>
+                <a:latin typeface="Aptos"/>
+              </a:rPr>
+              <a:t>Full · s=2×20</a:t>
+            </a:r>
+          </a:p>
+        </p:txBody>
+      </p:sp>
+      <p:sp>
+        <p:nvSpPr>
+          <p:cNvPr id="125" name="TextBox 124"/>
+          <p:cNvSpPr txBox="1"/>
+          <p:nvPr/>
+        </p:nvSpPr>
+        <p:spPr>
+          <a:xfrm>
+            <a:off x="8604504" y="5006340"/>
+            <a:ext cx="713232" cy="146304"/>
+          </a:xfrm>
+          <a:prstGeom prst="rect">
+            <a:avLst/>
+          </a:prstGeom>
+          <a:noFill/>
+        </p:spPr>
+        <p:txBody>
+          <a:bodyPr wrap="square" lIns="0" rIns="0" tIns="0" bIns="0" anchor="ctr">
+            <a:spAutoFit/>
+          </a:bodyPr>
+          <a:lstStyle/>
+          <a:p>
+            <a:pPr algn="ctr">
+              <a:lnSpc>
+                <a:spcPct val="100000"/>
+              </a:lnSpc>
+              <a:spcBef>
+                <a:spcPts val="0"/>
+              </a:spcBef>
+              <a:spcAft>
+                <a:spcPts val="0"/>
+              </a:spcAft>
+            </a:pPr>
+            <a:r>
+              <a:rPr sz="660" b="0" i="0">
+                <a:solidFill>
+                  <a:srgbClr val="171A1F"/>
+                </a:solidFill>
+                <a:latin typeface="Consolas"/>
+              </a:rPr>
+              <a:t>43.7</a:t>
+            </a:r>
+          </a:p>
+        </p:txBody>
+      </p:sp>
+      <p:sp>
+        <p:nvSpPr>
+          <p:cNvPr id="126" name="TextBox 125"/>
+          <p:cNvSpPr txBox="1"/>
+          <p:nvPr/>
+        </p:nvSpPr>
+        <p:spPr>
+          <a:xfrm>
+            <a:off x="9409176" y="5006340"/>
+            <a:ext cx="713232" cy="146304"/>
+          </a:xfrm>
+          <a:prstGeom prst="rect">
+            <a:avLst/>
+          </a:prstGeom>
+          <a:noFill/>
+        </p:spPr>
+        <p:txBody>
+          <a:bodyPr wrap="square" lIns="0" rIns="0" tIns="0" bIns="0" anchor="ctr">
+            <a:spAutoFit/>
+          </a:bodyPr>
+          <a:lstStyle/>
+          <a:p>
+            <a:pPr algn="ctr">
+              <a:lnSpc>
+                <a:spcPct val="100000"/>
+              </a:lnSpc>
+              <a:spcBef>
+                <a:spcPts val="0"/>
+              </a:spcBef>
+              <a:spcAft>
+                <a:spcPts val="0"/>
+              </a:spcAft>
+            </a:pPr>
+            <a:r>
+              <a:rPr sz="660" b="0" i="0">
+                <a:solidFill>
+                  <a:srgbClr val="171A1F"/>
+                </a:solidFill>
+                <a:latin typeface="Consolas"/>
+              </a:rPr>
+              <a:t>49.7</a:t>
+            </a:r>
+          </a:p>
+        </p:txBody>
+      </p:sp>
+      <p:sp>
+        <p:nvSpPr>
+          <p:cNvPr id="127" name="TextBox 126"/>
+          <p:cNvSpPr txBox="1"/>
+          <p:nvPr/>
+        </p:nvSpPr>
+        <p:spPr>
+          <a:xfrm>
+            <a:off x="10213848" y="5006340"/>
+            <a:ext cx="731520" cy="146304"/>
+          </a:xfrm>
+          <a:prstGeom prst="rect">
+            <a:avLst/>
+          </a:prstGeom>
+          <a:noFill/>
+        </p:spPr>
+        <p:txBody>
+          <a:bodyPr wrap="square" lIns="0" rIns="0" tIns="0" bIns="0" anchor="ctr">
+            <a:spAutoFit/>
+          </a:bodyPr>
+          <a:lstStyle/>
+          <a:p>
+            <a:pPr algn="ctr">
+              <a:lnSpc>
+                <a:spcPct val="100000"/>
+              </a:lnSpc>
+              <a:spcBef>
+                <a:spcPts val="0"/>
+              </a:spcBef>
+              <a:spcAft>
+                <a:spcPts val="0"/>
+              </a:spcAft>
+            </a:pPr>
+            <a:r>
+              <a:rPr sz="660" b="0" i="0">
+                <a:solidFill>
+                  <a:srgbClr val="171A1F"/>
+                </a:solidFill>
+                <a:latin typeface="Consolas"/>
+              </a:rPr>
+              <a:t>13.3</a:t>
+            </a:r>
+          </a:p>
+        </p:txBody>
+      </p:sp>
+      <p:sp>
+        <p:nvSpPr>
+          <p:cNvPr id="128" name="TextBox 127"/>
+          <p:cNvSpPr txBox="1"/>
+          <p:nvPr/>
+        </p:nvSpPr>
+        <p:spPr>
+          <a:xfrm>
+            <a:off x="11036808" y="5006340"/>
+            <a:ext cx="749808" cy="146304"/>
+          </a:xfrm>
+          <a:prstGeom prst="rect">
+            <a:avLst/>
+          </a:prstGeom>
+          <a:noFill/>
+        </p:spPr>
+        <p:txBody>
+          <a:bodyPr wrap="square" lIns="0" rIns="0" tIns="0" bIns="0" anchor="ctr">
+            <a:spAutoFit/>
+          </a:bodyPr>
+          <a:lstStyle/>
+          <a:p>
+            <a:pPr algn="ctr">
+              <a:lnSpc>
+                <a:spcPct val="100000"/>
+              </a:lnSpc>
+              <a:spcBef>
+                <a:spcPts val="0"/>
+              </a:spcBef>
+              <a:spcAft>
+                <a:spcPts val="0"/>
+              </a:spcAft>
+            </a:pPr>
+            <a:r>
+              <a:rPr sz="660" b="0" i="0">
+                <a:solidFill>
+                  <a:srgbClr val="171A1F"/>
+                </a:solidFill>
+                <a:latin typeface="Consolas"/>
+              </a:rPr>
+              <a:t>17.8</a:t>
+            </a:r>
+          </a:p>
+        </p:txBody>
+      </p:sp>
+      <p:sp>
+        <p:nvSpPr>
+          <p:cNvPr id="129" name="Rectangle 128"/>
+          <p:cNvSpPr/>
+          <p:nvPr/>
+        </p:nvSpPr>
+        <p:spPr>
+          <a:xfrm>
+            <a:off x="7333488" y="5225796"/>
+            <a:ext cx="4498848" cy="16459"/>
+          </a:xfrm>
+          <a:prstGeom prst="rect">
+            <a:avLst/>
+          </a:prstGeom>
+          <a:solidFill>
+            <a:srgbClr val="171A1F"/>
+          </a:solidFill>
+          <a:ln>
+            <a:noFill/>
+          </a:ln>
+        </p:spPr>
+        <p:style>
+          <a:lnRef idx="1">
+            <a:schemeClr val="accent1"/>
+          </a:lnRef>
+          <a:fillRef idx="3">
+            <a:schemeClr val="accent1"/>
+          </a:fillRef>
+          <a:effectRef idx="2">
+            <a:schemeClr val="accent1"/>
+          </a:effectRef>
+          <a:fontRef idx="minor">
+            <a:schemeClr val="lt1"/>
+          </a:fontRef>
+        </p:style>
+        <p:txBody>
+          <a:bodyPr rtlCol="0" anchor="ctr"/>
+          <a:lstStyle/>
+          <a:p>
+            <a:pPr algn="ctr"/>
+          </a:p>
+        </p:txBody>
+      </p:sp>
+      <p:sp>
+        <p:nvSpPr>
+          <p:cNvPr id="130" name="TextBox 129"/>
+          <p:cNvSpPr txBox="1"/>
+          <p:nvPr/>
+        </p:nvSpPr>
+        <p:spPr>
+          <a:xfrm>
+            <a:off x="7333488" y="5367528"/>
+            <a:ext cx="4498848" cy="164592"/>
+          </a:xfrm>
+          <a:prstGeom prst="rect">
+            <a:avLst/>
+          </a:prstGeom>
+          <a:noFill/>
+        </p:spPr>
+        <p:txBody>
+          <a:bodyPr wrap="square" lIns="0" rIns="0" tIns="0" bIns="0" anchor="t">
+            <a:spAutoFit/>
+          </a:bodyPr>
+          <a:lstStyle/>
+          <a:p>
+            <a:pPr algn="l">
+              <a:lnSpc>
+                <a:spcPct val="100000"/>
+              </a:lnSpc>
+              <a:spcBef>
+                <a:spcPts val="0"/>
+              </a:spcBef>
+              <a:spcAft>
+                <a:spcPts val="0"/>
+              </a:spcAft>
+            </a:pPr>
+            <a:r>
+              <a:rPr sz="819" b="1" i="0">
+                <a:solidFill>
+                  <a:srgbClr val="9D1B32"/>
+                </a:solidFill>
+                <a:latin typeface="Aptos"/>
+              </a:rPr>
+              <a:t>TRANSFER + RESOURCE EVIDENCE</a:t>
+            </a:r>
+          </a:p>
+        </p:txBody>
+      </p:sp>
+      <p:sp>
+        <p:nvSpPr>
+          <p:cNvPr id="131" name="Rounded Rectangle 130"/>
+          <p:cNvSpPr/>
+          <p:nvPr/>
+        </p:nvSpPr>
+        <p:spPr>
+          <a:xfrm>
+            <a:off x="7333488" y="5577840"/>
+            <a:ext cx="4498848" cy="822960"/>
+          </a:xfrm>
+          <a:prstGeom prst="roundRect">
+            <a:avLst>
+              <a:gd name="adj" fmla="val 8000"/>
+            </a:avLst>
+          </a:prstGeom>
+          <a:solidFill>
+            <a:srgbClr val="FFFFFF"/>
+          </a:solidFill>
+          <a:ln w="8890">
+            <a:solidFill>
+              <a:srgbClr val="D9D4CB"/>
+            </a:solidFill>
+          </a:ln>
+        </p:spPr>
+        <p:style>
+          <a:lnRef idx="1">
+            <a:schemeClr val="accent1"/>
+          </a:lnRef>
+          <a:fillRef idx="3">
+            <a:schemeClr val="accent1"/>
+          </a:fillRef>
+          <a:effectRef idx="2">
+            <a:schemeClr val="accent1"/>
+          </a:effectRef>
+          <a:fontRef idx="minor">
+            <a:schemeClr val="lt1"/>
+          </a:fontRef>
+        </p:style>
+        <p:txBody>
+          <a:bodyPr rtlCol="0" anchor="ctr"/>
+          <a:lstStyle/>
+          <a:p>
+            <a:pPr algn="ctr"/>
+          </a:p>
+        </p:txBody>
+      </p:sp>
+      <p:sp>
+        <p:nvSpPr>
+          <p:cNvPr id="132" name="Rectangle 131"/>
+          <p:cNvSpPr/>
+          <p:nvPr/>
+        </p:nvSpPr>
+        <p:spPr>
+          <a:xfrm>
+            <a:off x="7333488" y="5577840"/>
+            <a:ext cx="41148" cy="822960"/>
+          </a:xfrm>
+          <a:prstGeom prst="rect">
+            <a:avLst/>
+          </a:prstGeom>
+          <a:solidFill>
+            <a:srgbClr val="0F7670"/>
+          </a:solidFill>
+          <a:ln>
+            <a:noFill/>
+          </a:ln>
+        </p:spPr>
+        <p:style>
+          <a:lnRef idx="1">
+            <a:schemeClr val="accent1"/>
+          </a:lnRef>
+          <a:fillRef idx="3">
+            <a:schemeClr val="accent1"/>
+          </a:fillRef>
+          <a:effectRef idx="2">
+            <a:schemeClr val="accent1"/>
+          </a:effectRef>
+          <a:fontRef idx="minor">
+            <a:schemeClr val="lt1"/>
+          </a:fontRef>
+        </p:style>
+        <p:txBody>
+          <a:bodyPr rtlCol="0" anchor="ctr"/>
+          <a:lstStyle/>
+          <a:p>
+            <a:pPr algn="ctr"/>
+          </a:p>
+        </p:txBody>
+      </p:sp>
+      <p:sp>
+        <p:nvSpPr>
+          <p:cNvPr id="133" name="TextBox 132"/>
+          <p:cNvSpPr txBox="1"/>
+          <p:nvPr/>
+        </p:nvSpPr>
+        <p:spPr>
+          <a:xfrm>
+            <a:off x="7470648" y="5669280"/>
+            <a:ext cx="2103120" cy="603504"/>
+          </a:xfrm>
+          <a:prstGeom prst="rect">
+            <a:avLst/>
+          </a:prstGeom>
+          <a:noFill/>
+        </p:spPr>
+        <p:txBody>
+          <a:bodyPr wrap="square" lIns="0" rIns="0" tIns="0" bIns="0" anchor="t">
+            <a:spAutoFit/>
+          </a:bodyPr>
+          <a:lstStyle/>
+          <a:p>
+            <a:pPr algn="l">
+              <a:lnSpc>
+                <a:spcPct val="103000"/>
+              </a:lnSpc>
+              <a:spcBef>
+                <a:spcPts val="0"/>
+              </a:spcBef>
+              <a:spcAft>
+                <a:spcPts val="0"/>
+              </a:spcAft>
+            </a:pPr>
+            <a:r>
+              <a:rPr sz="730" b="1" i="0">
+                <a:solidFill>
+                  <a:srgbClr val="0F7670"/>
+                </a:solidFill>
+                <a:latin typeface="Aptos"/>
+              </a:rPr>
+              <a:t>Cora → Citeseer</a:t>
+            </a:r>
+            <a:r>
+              <a:rPr sz="670" b="0" i="0">
+                <a:solidFill>
+                  <a:srgbClr val="434952"/>
+                </a:solidFill>
+                <a:latin typeface="Aptos"/>
+              </a:rPr>
+              <a:t>  At the 25% cap, the transferred rule reaches 44.9 MRR, beating Citeseer's own noisy validation pick (37.9).</a:t>
+            </a:r>
+          </a:p>
+        </p:txBody>
+      </p:sp>
+      <p:sp>
+        <p:nvSpPr>
+          <p:cNvPr id="134" name="Rectangle 133"/>
+          <p:cNvSpPr/>
+          <p:nvPr/>
+        </p:nvSpPr>
+        <p:spPr>
+          <a:xfrm>
+            <a:off x="9646919" y="5687568"/>
+            <a:ext cx="9144" cy="502920"/>
+          </a:xfrm>
+          <a:prstGeom prst="rect">
+            <a:avLst/>
+          </a:prstGeom>
+          <a:solidFill>
+            <a:srgbClr val="D9D4CB"/>
+          </a:solidFill>
+          <a:ln>
+            <a:noFill/>
+          </a:ln>
+        </p:spPr>
+        <p:style>
+          <a:lnRef idx="1">
+            <a:schemeClr val="accent1"/>
+          </a:lnRef>
+          <a:fillRef idx="3">
+            <a:schemeClr val="accent1"/>
+          </a:fillRef>
+          <a:effectRef idx="2">
+            <a:schemeClr val="accent1"/>
+          </a:effectRef>
+          <a:fontRef idx="minor">
+            <a:schemeClr val="lt1"/>
+          </a:fontRef>
+        </p:style>
+        <p:txBody>
+          <a:bodyPr rtlCol="0" anchor="ctr"/>
+          <a:lstStyle/>
+          <a:p>
+            <a:pPr algn="ctr"/>
+          </a:p>
+        </p:txBody>
+      </p:sp>
+      <p:sp>
+        <p:nvSpPr>
+          <p:cNvPr id="135" name="TextBox 134"/>
+          <p:cNvSpPr txBox="1"/>
+          <p:nvPr/>
+        </p:nvSpPr>
+        <p:spPr>
+          <a:xfrm>
+            <a:off x="9793224" y="5669280"/>
+            <a:ext cx="1865376" cy="603504"/>
+          </a:xfrm>
+          <a:prstGeom prst="rect">
+            <a:avLst/>
+          </a:prstGeom>
+          <a:noFill/>
+        </p:spPr>
+        <p:txBody>
+          <a:bodyPr wrap="square" lIns="0" rIns="0" tIns="0" bIns="0" anchor="t">
+            <a:spAutoFit/>
+          </a:bodyPr>
+          <a:lstStyle/>
+          <a:p>
+            <a:pPr algn="l">
+              <a:lnSpc>
+                <a:spcPct val="103000"/>
+              </a:lnSpc>
+              <a:spcBef>
+                <a:spcPts val="0"/>
+              </a:spcBef>
+              <a:spcAft>
+                <a:spcPts val="0"/>
+              </a:spcAft>
+            </a:pPr>
+            <a:r>
+              <a:rPr sz="730" b="1" i="0">
+                <a:solidFill>
+                  <a:srgbClr val="203657"/>
+                </a:solidFill>
+                <a:latin typeface="Aptos"/>
+              </a:rPr>
+              <a:t>Peak VRAM · Cora HeaRT</a:t>
+            </a:r>
+            <a:r>
+              <a:rPr sz="670" b="0" i="0">
+                <a:solidFill>
+                  <a:srgbClr val="434952"/>
+                </a:solidFill>
+                <a:latin typeface="Aptos"/>
+              </a:rPr>
+              <a:t>  2,219 MB (2×20) → 1,347 MB (2×10) → 558 MB (2×2).</a:t>
+            </a:r>
+          </a:p>
+        </p:txBody>
+      </p:sp>
+      <p:sp>
+        <p:nvSpPr>
+          <p:cNvPr id="136" name="Rectangle 135"/>
+          <p:cNvSpPr/>
+          <p:nvPr/>
+        </p:nvSpPr>
+        <p:spPr>
+          <a:xfrm>
+            <a:off x="356616" y="6565392"/>
+            <a:ext cx="11475720" cy="10972"/>
+          </a:xfrm>
+          <a:prstGeom prst="rect">
+            <a:avLst/>
+          </a:prstGeom>
+          <a:solidFill>
+            <a:srgbClr val="D9D4CB"/>
+          </a:solidFill>
+          <a:ln>
+            <a:noFill/>
+          </a:ln>
+        </p:spPr>
+        <p:style>
+          <a:lnRef idx="1">
+            <a:schemeClr val="accent1"/>
+          </a:lnRef>
+          <a:fillRef idx="3">
+            <a:schemeClr val="accent1"/>
+          </a:fillRef>
+          <a:effectRef idx="2">
+            <a:schemeClr val="accent1"/>
+          </a:effectRef>
+          <a:fontRef idx="minor">
+            <a:schemeClr val="lt1"/>
+          </a:fontRef>
+        </p:style>
+        <p:txBody>
+          <a:bodyPr rtlCol="0" anchor="ctr"/>
+          <a:lstStyle/>
+          <a:p>
+            <a:pPr algn="ctr"/>
+          </a:p>
+        </p:txBody>
+      </p:sp>
+      <p:sp>
+        <p:nvSpPr>
+          <p:cNvPr id="137" name="TextBox 136"/>
+          <p:cNvSpPr txBox="1"/>
+          <p:nvPr/>
+        </p:nvSpPr>
+        <p:spPr>
+          <a:xfrm>
+            <a:off x="356616" y="6629400"/>
+            <a:ext cx="11475720" cy="128016"/>
+          </a:xfrm>
+          <a:prstGeom prst="rect">
+            <a:avLst/>
+          </a:prstGeom>
+          <a:noFill/>
+        </p:spPr>
+        <p:txBody>
+          <a:bodyPr wrap="square" lIns="0" rIns="0" tIns="0" bIns="0" anchor="t">
+            <a:spAutoFit/>
+          </a:bodyPr>
+          <a:lstStyle/>
+          <a:p>
+            <a:pPr algn="ctr">
+              <a:lnSpc>
+                <a:spcPct val="100000"/>
+              </a:lnSpc>
+              <a:spcBef>
+                <a:spcPts val="0"/>
+              </a:spcBef>
+              <a:spcAft>
+                <a:spcPts val="0"/>
+              </a:spcAft>
+            </a:pPr>
+            <a:r>
+              <a:rPr sz="640" b="1" i="0">
+                <a:solidFill>
+                  <a:srgbClr val="777D85"/>
+                </a:solidFill>
+                <a:latin typeface="Consolas"/>
+              </a:rPr>
+              <a:t>Reproducible code + 112 score dumps: github.com/Ask-812/da4022-pencil-budget</a:t>
             </a:r>
           </a:p>
         </p:txBody>

--- a/docs/MIDREPORT_public.pptx
+++ b/docs/MIDREPORT_public.pptx
@@ -3588,7 +3588,7 @@
                 </a:solidFill>
                 <a:latin typeface="Aptos"/>
               </a:rPr>
-              <a:t>01  METHOD + REPRODUCTION</a:t>
+              <a:t>WHAT WE ARE DOING</a:t>
             </a:r>
           </a:p>
         </p:txBody>
@@ -3602,7 +3602,7 @@
         <p:spPr>
           <a:xfrm>
             <a:off x="356616" y="1280160"/>
-            <a:ext cx="2743200" cy="1197864"/>
+            <a:ext cx="2743200" cy="1508760"/>
           </a:xfrm>
           <a:prstGeom prst="roundRect">
             <a:avLst>
@@ -3649,7 +3649,7 @@
         <p:spPr>
           <a:xfrm>
             <a:off x="356616" y="1280160"/>
-            <a:ext cx="41148" cy="1197864"/>
+            <a:ext cx="41148" cy="1508760"/>
           </a:xfrm>
           <a:prstGeom prst="rect">
             <a:avLst/>
@@ -3692,7 +3692,7 @@
         <p:spPr>
           <a:xfrm>
             <a:off x="475488" y="1371600"/>
-            <a:ext cx="2523744" cy="365760"/>
+            <a:ext cx="2523744" cy="621792"/>
           </a:xfrm>
           <a:prstGeom prst="rect">
             <a:avLst/>
@@ -3707,7 +3707,7 @@
           <a:p>
             <a:pPr algn="l">
               <a:lnSpc>
-                <a:spcPct val="102000"/>
+                <a:spcPct val="105000"/>
               </a:lnSpc>
               <a:spcBef>
                 <a:spcPts val="0"/>
@@ -3717,22 +3717,22 @@
               </a:spcAft>
             </a:pPr>
             <a:r>
-              <a:rPr sz="750" b="1" i="0">
-                <a:solidFill>
-                  <a:srgbClr val="9D1B32"/>
+              <a:rPr sz="750" b="0" i="0">
+                <a:solidFill>
+                  <a:srgbClr val="434952"/>
                 </a:solidFill>
                 <a:latin typeface="Aptos"/>
               </a:rPr>
-              <a:t>Research question</a:t>
-            </a:r>
-            <a:r>
-              <a:rPr sz="819" b="1" i="0">
+              <a:t>We rank every candidate link with Adamic–Adar, run PENCIL only on the top-k candidates, and vary PENCIL's sampled subgraph budget s. </a:t>
+            </a:r>
+            <a:r>
+              <a:rPr sz="750" b="1" i="0">
                 <a:solidFill>
                   <a:srgbClr val="171A1F"/>
                 </a:solidFill>
-                <a:latin typeface="Georgia"/>
+                <a:latin typeface="Aptos"/>
               </a:rPr>
-              <a:t>  Can a cheap graph heuristic decide where expensive PENCIL inference is worth paying for?</a:t>
+              <a:t>The (k, s) sweep measures how much accuracy remains at each GPU budget. The model is not retrained.</a:t>
             </a:r>
           </a:p>
         </p:txBody>
@@ -3745,7 +3745,7 @@
         </p:nvSpPr>
         <p:spPr>
           <a:xfrm>
-            <a:off x="466344" y="1837943"/>
+            <a:off x="466344" y="2121408"/>
             <a:ext cx="749808" cy="502920"/>
           </a:xfrm>
           <a:prstGeom prst="roundRect">
@@ -3792,7 +3792,7 @@
         </p:nvSpPr>
         <p:spPr>
           <a:xfrm>
-            <a:off x="512064" y="1892807"/>
+            <a:off x="512064" y="2176272"/>
             <a:ext cx="658368" cy="146304"/>
           </a:xfrm>
           <a:prstGeom prst="rect">
@@ -3837,7 +3837,7 @@
         </p:nvSpPr>
         <p:spPr>
           <a:xfrm>
-            <a:off x="493776" y="2112264"/>
+            <a:off x="493776" y="2395728"/>
             <a:ext cx="694944" cy="137160"/>
           </a:xfrm>
           <a:prstGeom prst="rect">
@@ -3882,7 +3882,7 @@
         </p:nvSpPr>
         <p:spPr>
           <a:xfrm>
-            <a:off x="1216152" y="1984248"/>
+            <a:off x="1216152" y="2267712"/>
             <a:ext cx="109728" cy="164592"/>
           </a:xfrm>
           <a:prstGeom prst="rect">
@@ -3927,7 +3927,7 @@
         </p:nvSpPr>
         <p:spPr>
           <a:xfrm>
-            <a:off x="1325880" y="1837943"/>
+            <a:off x="1325880" y="2121408"/>
             <a:ext cx="749808" cy="502920"/>
           </a:xfrm>
           <a:prstGeom prst="roundRect">
@@ -3974,7 +3974,7 @@
         </p:nvSpPr>
         <p:spPr>
           <a:xfrm>
-            <a:off x="1371600" y="1892807"/>
+            <a:off x="1371600" y="2176272"/>
             <a:ext cx="658368" cy="146304"/>
           </a:xfrm>
           <a:prstGeom prst="rect">
@@ -4019,7 +4019,7 @@
         </p:nvSpPr>
         <p:spPr>
           <a:xfrm>
-            <a:off x="1353312" y="2112264"/>
+            <a:off x="1353312" y="2395728"/>
             <a:ext cx="694944" cy="137160"/>
           </a:xfrm>
           <a:prstGeom prst="rect">
@@ -4064,7 +4064,7 @@
         </p:nvSpPr>
         <p:spPr>
           <a:xfrm>
-            <a:off x="2075688" y="1984248"/>
+            <a:off x="2075688" y="2267712"/>
             <a:ext cx="109728" cy="164592"/>
           </a:xfrm>
           <a:prstGeom prst="rect">
@@ -4109,7 +4109,7 @@
         </p:nvSpPr>
         <p:spPr>
           <a:xfrm>
-            <a:off x="2185415" y="1837943"/>
+            <a:off x="2185415" y="2121408"/>
             <a:ext cx="749808" cy="502920"/>
           </a:xfrm>
           <a:prstGeom prst="roundRect">
@@ -4156,7 +4156,7 @@
         </p:nvSpPr>
         <p:spPr>
           <a:xfrm>
-            <a:off x="2231135" y="1892807"/>
+            <a:off x="2231135" y="2176272"/>
             <a:ext cx="658368" cy="146304"/>
           </a:xfrm>
           <a:prstGeom prst="rect">
@@ -4201,7 +4201,7 @@
         </p:nvSpPr>
         <p:spPr>
           <a:xfrm>
-            <a:off x="2212847" y="2112264"/>
+            <a:off x="2212847" y="2395728"/>
             <a:ext cx="694944" cy="137160"/>
           </a:xfrm>
           <a:prstGeom prst="rect">
@@ -4246,7 +4246,7 @@
         </p:nvSpPr>
         <p:spPr>
           <a:xfrm>
-            <a:off x="356616" y="2615184"/>
+            <a:off x="356616" y="2926080"/>
             <a:ext cx="2743200" cy="164592"/>
           </a:xfrm>
           <a:prstGeom prst="rect">
@@ -4291,7 +4291,7 @@
         </p:nvSpPr>
         <p:spPr>
           <a:xfrm>
-            <a:off x="356616" y="2834640"/>
+            <a:off x="356616" y="3145536"/>
             <a:ext cx="841248" cy="749808"/>
           </a:xfrm>
           <a:prstGeom prst="roundRect">
@@ -4338,7 +4338,7 @@
         </p:nvSpPr>
         <p:spPr>
           <a:xfrm>
-            <a:off x="356616" y="2834640"/>
+            <a:off x="356616" y="3145536"/>
             <a:ext cx="841248" cy="36576"/>
           </a:xfrm>
           <a:prstGeom prst="rect">
@@ -4381,7 +4381,7 @@
         </p:nvSpPr>
         <p:spPr>
           <a:xfrm>
-            <a:off x="411480" y="2944368"/>
+            <a:off x="411480" y="3255264"/>
             <a:ext cx="731520" cy="228600"/>
           </a:xfrm>
           <a:prstGeom prst="rect">
@@ -4426,7 +4426,7 @@
         </p:nvSpPr>
         <p:spPr>
           <a:xfrm>
-            <a:off x="393192" y="3191256"/>
+            <a:off x="393192" y="3502152"/>
             <a:ext cx="768096" cy="128016"/>
           </a:xfrm>
           <a:prstGeom prst="rect">
@@ -4471,7 +4471,7 @@
         </p:nvSpPr>
         <p:spPr>
           <a:xfrm>
-            <a:off x="393192" y="3364992"/>
+            <a:off x="393192" y="3675887"/>
             <a:ext cx="768096" cy="118872"/>
           </a:xfrm>
           <a:prstGeom prst="rect">
@@ -4516,7 +4516,7 @@
         </p:nvSpPr>
         <p:spPr>
           <a:xfrm>
-            <a:off x="1280160" y="2834640"/>
+            <a:off x="1280160" y="3145536"/>
             <a:ext cx="841248" cy="749808"/>
           </a:xfrm>
           <a:prstGeom prst="roundRect">
@@ -4563,7 +4563,7 @@
         </p:nvSpPr>
         <p:spPr>
           <a:xfrm>
-            <a:off x="1280160" y="2834640"/>
+            <a:off x="1280160" y="3145536"/>
             <a:ext cx="841248" cy="36576"/>
           </a:xfrm>
           <a:prstGeom prst="rect">
@@ -4606,7 +4606,7 @@
         </p:nvSpPr>
         <p:spPr>
           <a:xfrm>
-            <a:off x="1335024" y="2944368"/>
+            <a:off x="1335024" y="3255264"/>
             <a:ext cx="731520" cy="228600"/>
           </a:xfrm>
           <a:prstGeom prst="rect">
@@ -4651,7 +4651,7 @@
         </p:nvSpPr>
         <p:spPr>
           <a:xfrm>
-            <a:off x="1316736" y="3191256"/>
+            <a:off x="1316736" y="3502152"/>
             <a:ext cx="768096" cy="128016"/>
           </a:xfrm>
           <a:prstGeom prst="rect">
@@ -4696,7 +4696,7 @@
         </p:nvSpPr>
         <p:spPr>
           <a:xfrm>
-            <a:off x="1316736" y="3364992"/>
+            <a:off x="1316736" y="3675887"/>
             <a:ext cx="768096" cy="118872"/>
           </a:xfrm>
           <a:prstGeom prst="rect">
@@ -4741,7 +4741,7 @@
         </p:nvSpPr>
         <p:spPr>
           <a:xfrm>
-            <a:off x="2203704" y="2834640"/>
+            <a:off x="2203704" y="3145536"/>
             <a:ext cx="841248" cy="749808"/>
           </a:xfrm>
           <a:prstGeom prst="roundRect">
@@ -4788,7 +4788,7 @@
         </p:nvSpPr>
         <p:spPr>
           <a:xfrm>
-            <a:off x="2203704" y="2834640"/>
+            <a:off x="2203704" y="3145536"/>
             <a:ext cx="841248" cy="36576"/>
           </a:xfrm>
           <a:prstGeom prst="rect">
@@ -4831,7 +4831,7 @@
         </p:nvSpPr>
         <p:spPr>
           <a:xfrm>
-            <a:off x="2258568" y="2944368"/>
+            <a:off x="2258568" y="3255264"/>
             <a:ext cx="731520" cy="228600"/>
           </a:xfrm>
           <a:prstGeom prst="rect">
@@ -4876,7 +4876,7 @@
         </p:nvSpPr>
         <p:spPr>
           <a:xfrm>
-            <a:off x="2240280" y="3191256"/>
+            <a:off x="2240280" y="3502152"/>
             <a:ext cx="768096" cy="128016"/>
           </a:xfrm>
           <a:prstGeom prst="rect">
@@ -4921,7 +4921,7 @@
         </p:nvSpPr>
         <p:spPr>
           <a:xfrm>
-            <a:off x="2240280" y="3364992"/>
+            <a:off x="2240280" y="3675887"/>
             <a:ext cx="768096" cy="118872"/>
           </a:xfrm>
           <a:prstGeom prst="rect">
@@ -4966,7 +4966,7 @@
         </p:nvSpPr>
         <p:spPr>
           <a:xfrm>
-            <a:off x="356616" y="3749039"/>
+            <a:off x="356616" y="4069080"/>
             <a:ext cx="2743200" cy="164592"/>
           </a:xfrm>
           <a:prstGeom prst="rect">
@@ -4998,7 +4998,7 @@
                 </a:solidFill>
                 <a:latin typeface="Aptos"/>
               </a:rPr>
-              <a:t>EXPERIMENTAL AUDIT</a:t>
+              <a:t>EXPERIMENT SETUP</a:t>
             </a:r>
           </a:p>
         </p:txBody>
@@ -5011,8 +5011,8 @@
         </p:nvSpPr>
         <p:spPr>
           <a:xfrm>
-            <a:off x="356616" y="3968496"/>
-            <a:ext cx="2743200" cy="1188720"/>
+            <a:off x="356616" y="4288536"/>
+            <a:ext cx="2743200" cy="1261872"/>
           </a:xfrm>
           <a:prstGeom prst="roundRect">
             <a:avLst>
@@ -5058,8 +5058,8 @@
         </p:nvSpPr>
         <p:spPr>
           <a:xfrm>
-            <a:off x="475488" y="4078224"/>
-            <a:ext cx="749808" cy="164592"/>
+            <a:off x="475488" y="4379976"/>
+            <a:ext cx="603504" cy="146304"/>
           </a:xfrm>
           <a:prstGeom prst="rect">
             <a:avLst/>
@@ -5090,7 +5090,7 @@
                 </a:solidFill>
                 <a:latin typeface="Aptos"/>
               </a:rPr>
-              <a:t>4 regimes</a:t>
+              <a:t>Data</a:t>
             </a:r>
           </a:p>
         </p:txBody>
@@ -5103,8 +5103,8 @@
         </p:nvSpPr>
         <p:spPr>
           <a:xfrm>
-            <a:off x="1197864" y="4078224"/>
-            <a:ext cx="1773936" cy="246888"/>
+            <a:off x="1078992" y="4379976"/>
+            <a:ext cx="1874519" cy="173736"/>
           </a:xfrm>
           <a:prstGeom prst="rect">
             <a:avLst/>
@@ -5129,13 +5129,13 @@
               </a:spcAft>
             </a:pPr>
             <a:r>
-              <a:rPr sz="645" b="0" i="0">
+              <a:rPr sz="655" b="0" i="0">
                 <a:solidFill>
                   <a:srgbClr val="434952"/>
                 </a:solidFill>
                 <a:latin typeface="Aptos"/>
               </a:rPr>
-              <a:t>Cora + Citeseer × shared-pool + HeaRT hard negatives</a:t>
+              <a:t>Cora and Citeseer</a:t>
             </a:r>
           </a:p>
         </p:txBody>
@@ -5148,7 +5148,7 @@
         </p:nvSpPr>
         <p:spPr>
           <a:xfrm>
-            <a:off x="466344" y="4361688"/>
+            <a:off x="466344" y="4613148"/>
             <a:ext cx="2523744" cy="7315"/>
           </a:xfrm>
           <a:prstGeom prst="rect">
@@ -5191,8 +5191,8 @@
         </p:nvSpPr>
         <p:spPr>
           <a:xfrm>
-            <a:off x="475488" y="4425696"/>
-            <a:ext cx="749808" cy="164592"/>
+            <a:off x="475488" y="4654296"/>
+            <a:ext cx="603504" cy="146304"/>
           </a:xfrm>
           <a:prstGeom prst="rect">
             <a:avLst/>
@@ -5223,7 +5223,7 @@
                 </a:solidFill>
                 <a:latin typeface="Aptos"/>
               </a:rPr>
-              <a:t>Validation only</a:t>
+              <a:t>Tests</a:t>
             </a:r>
           </a:p>
         </p:txBody>
@@ -5236,8 +5236,8 @@
         </p:nvSpPr>
         <p:spPr>
           <a:xfrm>
-            <a:off x="1197864" y="4425696"/>
-            <a:ext cx="1773936" cy="246888"/>
+            <a:off x="1078992" y="4654296"/>
+            <a:ext cx="1874519" cy="173736"/>
           </a:xfrm>
           <a:prstGeom prst="rect">
             <a:avLst/>
@@ -5262,13 +5262,13 @@
               </a:spcAft>
             </a:pPr>
             <a:r>
-              <a:rPr sz="645" b="0" i="0">
+              <a:rPr sz="655" b="0" i="0">
                 <a:solidFill>
                   <a:srgbClr val="434952"/>
                 </a:solidFill>
                 <a:latin typeface="Aptos"/>
               </a:rPr>
-              <a:t>select (k, s) under 5%, 10%, 25%, 50%, 75%, 100% caps</a:t>
+              <a:t>shared negative pool and HeaRT hard negatives</a:t>
             </a:r>
           </a:p>
         </p:txBody>
@@ -5281,7 +5281,7 @@
         </p:nvSpPr>
         <p:spPr>
           <a:xfrm>
-            <a:off x="466344" y="4709159"/>
+            <a:off x="466344" y="4887468"/>
             <a:ext cx="2523744" cy="7315"/>
           </a:xfrm>
           <a:prstGeom prst="rect">
@@ -5324,8 +5324,8 @@
         </p:nvSpPr>
         <p:spPr>
           <a:xfrm>
-            <a:off x="475488" y="4773168"/>
-            <a:ext cx="749808" cy="164592"/>
+            <a:off x="475488" y="4928616"/>
+            <a:ext cx="603504" cy="146304"/>
           </a:xfrm>
           <a:prstGeom prst="rect">
             <a:avLst/>
@@ -5356,7 +5356,7 @@
                 </a:solidFill>
                 <a:latin typeface="Aptos"/>
               </a:rPr>
-              <a:t>Bias checks</a:t>
+              <a:t>Selection</a:t>
             </a:r>
           </a:p>
         </p:txBody>
@@ -5369,8 +5369,8 @@
         </p:nvSpPr>
         <p:spPr>
           <a:xfrm>
-            <a:off x="1197864" y="4773168"/>
-            <a:ext cx="1773936" cy="246888"/>
+            <a:off x="1078992" y="4928616"/>
+            <a:ext cx="1874519" cy="173736"/>
           </a:xfrm>
           <a:prstGeom prst="rect">
             <a:avLst/>
@@ -5395,27 +5395,70 @@
               </a:spcAft>
             </a:pPr>
             <a:r>
-              <a:rPr sz="645" b="0" i="0">
+              <a:rPr sz="655" b="0" i="0">
                 <a:solidFill>
                   <a:srgbClr val="434952"/>
                 </a:solidFill>
                 <a:latin typeface="Aptos"/>
               </a:rPr>
-              <a:t>fixed float32 score collapse and shortlist tie-position bias</a:t>
-            </a:r>
-          </a:p>
-        </p:txBody>
-      </p:sp>
-      <p:sp>
-        <p:nvSpPr>
-          <p:cNvPr id="53" name="TextBox 52"/>
+              <a:t>choose (k, s) on validation under fixed compute caps</a:t>
+            </a:r>
+          </a:p>
+        </p:txBody>
+      </p:sp>
+      <p:sp>
+        <p:nvSpPr>
+          <p:cNvPr id="53" name="Rectangle 52"/>
+          <p:cNvSpPr/>
+          <p:nvPr/>
+        </p:nvSpPr>
+        <p:spPr>
+          <a:xfrm>
+            <a:off x="466344" y="5161788"/>
+            <a:ext cx="2523744" cy="7315"/>
+          </a:xfrm>
+          <a:prstGeom prst="rect">
+            <a:avLst/>
+          </a:prstGeom>
+          <a:solidFill>
+            <a:srgbClr val="D9D4CB"/>
+          </a:solidFill>
+          <a:ln>
+            <a:noFill/>
+          </a:ln>
+        </p:spPr>
+        <p:style>
+          <a:lnRef idx="1">
+            <a:schemeClr val="accent1"/>
+          </a:lnRef>
+          <a:fillRef idx="3">
+            <a:schemeClr val="accent1"/>
+          </a:fillRef>
+          <a:effectRef idx="2">
+            <a:schemeClr val="accent1"/>
+          </a:effectRef>
+          <a:fontRef idx="minor">
+            <a:schemeClr val="lt1"/>
+          </a:fontRef>
+        </p:style>
+        <p:txBody>
+          <a:bodyPr rtlCol="0" anchor="ctr"/>
+          <a:lstStyle/>
+          <a:p>
+            <a:pPr algn="ctr"/>
+          </a:p>
+        </p:txBody>
+      </p:sp>
+      <p:sp>
+        <p:nvSpPr>
+          <p:cNvPr id="54" name="TextBox 53"/>
           <p:cNvSpPr txBox="1"/>
           <p:nvPr/>
         </p:nvSpPr>
         <p:spPr>
           <a:xfrm>
-            <a:off x="356616" y="5330952"/>
-            <a:ext cx="2743200" cy="164592"/>
+            <a:off x="475488" y="5202936"/>
+            <a:ext cx="603504" cy="146304"/>
           </a:xfrm>
           <a:prstGeom prst="rect">
             <a:avLst/>
@@ -5440,27 +5483,117 @@
               </a:spcAft>
             </a:pPr>
             <a:r>
-              <a:rPr sz="819" b="1" i="0">
-                <a:solidFill>
-                  <a:srgbClr val="9D1B32"/>
+              <a:rPr sz="700" b="1" i="0">
+                <a:solidFill>
+                  <a:srgbClr val="203657"/>
                 </a:solidFill>
                 <a:latin typeface="Aptos"/>
               </a:rPr>
-              <a:t>ROAD TO FINAL SUBMISSION  ·  26 NOV</a:t>
-            </a:r>
-          </a:p>
-        </p:txBody>
-      </p:sp>
-      <p:sp>
-        <p:nvSpPr>
-          <p:cNvPr id="54" name="Rounded Rectangle 53"/>
+              <a:t>Checks</a:t>
+            </a:r>
+          </a:p>
+        </p:txBody>
+      </p:sp>
+      <p:sp>
+        <p:nvSpPr>
+          <p:cNvPr id="55" name="TextBox 54"/>
+          <p:cNvSpPr txBox="1"/>
+          <p:nvPr/>
+        </p:nvSpPr>
+        <p:spPr>
+          <a:xfrm>
+            <a:off x="1078992" y="5202936"/>
+            <a:ext cx="1874519" cy="173736"/>
+          </a:xfrm>
+          <a:prstGeom prst="rect">
+            <a:avLst/>
+          </a:prstGeom>
+          <a:noFill/>
+        </p:spPr>
+        <p:txBody>
+          <a:bodyPr wrap="square" lIns="0" rIns="0" tIns="0" bIns="0" anchor="t">
+            <a:spAutoFit/>
+          </a:bodyPr>
+          <a:lstStyle/>
+          <a:p>
+            <a:pPr algn="l">
+              <a:lnSpc>
+                <a:spcPct val="100000"/>
+              </a:lnSpc>
+              <a:spcBef>
+                <a:spcPts val="0"/>
+              </a:spcBef>
+              <a:spcAft>
+                <a:spcPts val="0"/>
+              </a:spcAft>
+            </a:pPr>
+            <a:r>
+              <a:rPr sz="655" b="0" i="0">
+                <a:solidFill>
+                  <a:srgbClr val="434952"/>
+                </a:solidFill>
+                <a:latin typeface="Aptos"/>
+              </a:rPr>
+              <a:t>corrected score-precision and shortlist tie bias</a:t>
+            </a:r>
+          </a:p>
+        </p:txBody>
+      </p:sp>
+      <p:sp>
+        <p:nvSpPr>
+          <p:cNvPr id="56" name="TextBox 55"/>
+          <p:cNvSpPr txBox="1"/>
+          <p:nvPr/>
+        </p:nvSpPr>
+        <p:spPr>
+          <a:xfrm>
+            <a:off x="356616" y="5733288"/>
+            <a:ext cx="2743200" cy="164592"/>
+          </a:xfrm>
+          <a:prstGeom prst="rect">
+            <a:avLst/>
+          </a:prstGeom>
+          <a:noFill/>
+        </p:spPr>
+        <p:txBody>
+          <a:bodyPr wrap="square" lIns="0" rIns="0" tIns="0" bIns="0" anchor="t">
+            <a:spAutoFit/>
+          </a:bodyPr>
+          <a:lstStyle/>
+          <a:p>
+            <a:pPr algn="l">
+              <a:lnSpc>
+                <a:spcPct val="100000"/>
+              </a:lnSpc>
+              <a:spcBef>
+                <a:spcPts val="0"/>
+              </a:spcBef>
+              <a:spcAft>
+                <a:spcPts val="0"/>
+              </a:spcAft>
+            </a:pPr>
+            <a:r>
+              <a:rPr sz="819" b="1" i="0">
+                <a:solidFill>
+                  <a:srgbClr val="9D1B32"/>
+                </a:solidFill>
+                <a:latin typeface="Aptos"/>
+              </a:rPr>
+              <a:t>WHAT WE MEASURE</a:t>
+            </a:r>
+          </a:p>
+        </p:txBody>
+      </p:sp>
+      <p:sp>
+        <p:nvSpPr>
+          <p:cNvPr id="57" name="Rounded Rectangle 56"/>
           <p:cNvSpPr/>
           <p:nvPr/>
         </p:nvSpPr>
         <p:spPr>
           <a:xfrm>
-            <a:off x="356616" y="5550408"/>
-            <a:ext cx="2743200" cy="850392"/>
+            <a:off x="356616" y="5952744"/>
+            <a:ext cx="2743200" cy="448056"/>
           </a:xfrm>
           <a:prstGeom prst="roundRect">
             <a:avLst>
@@ -5500,14 +5633,14 @@
       </p:sp>
       <p:sp>
         <p:nvSpPr>
-          <p:cNvPr id="55" name="TextBox 54"/>
+          <p:cNvPr id="58" name="TextBox 57"/>
           <p:cNvSpPr txBox="1"/>
           <p:nvPr/>
         </p:nvSpPr>
         <p:spPr>
           <a:xfrm>
-            <a:off x="475488" y="5650992"/>
-            <a:ext cx="2505456" cy="640080"/>
+            <a:off x="475488" y="6062472"/>
+            <a:ext cx="2505456" cy="201168"/>
           </a:xfrm>
           <a:prstGeom prst="rect">
             <a:avLst/>
@@ -5520,72 +5653,32 @@
           </a:bodyPr>
           <a:lstStyle/>
           <a:p>
-            <a:pPr algn="l">
+            <a:pPr algn="ctr">
               <a:lnSpc>
-                <a:spcPct val="102000"/>
+                <a:spcPct val="100000"/>
               </a:lnSpc>
               <a:spcBef>
                 <a:spcPts val="0"/>
               </a:spcBef>
               <a:spcAft>
-                <a:spcPts val="300"/>
+                <a:spcPts val="0"/>
               </a:spcAft>
             </a:pPr>
             <a:r>
-              <a:rPr sz="720" b="1" i="0">
-                <a:solidFill>
-                  <a:srgbClr val="B46318"/>
+              <a:rPr sz="680" b="1" i="0">
+                <a:solidFill>
+                  <a:srgbClr val="434952"/>
                 </a:solidFill>
                 <a:latin typeface="Aptos"/>
               </a:rPr>
-              <a:t>1  Training law</a:t>
-            </a:r>
-            <a:r>
-              <a:rPr sz="680" b="0" i="0">
-                <a:solidFill>
-                  <a:srgbClr val="434952"/>
-                </a:solidFill>
-                <a:latin typeface="Aptos"/>
-              </a:rPr>
-              <a:t>  93% of final Cora MRR is reached by epoch 42/150.</a:t>
-            </a:r>
-          </a:p>
-          <a:p>
-            <a:pPr algn="l">
-              <a:lnSpc>
-                <a:spcPct val="102000"/>
-              </a:lnSpc>
-              <a:spcBef>
-                <a:spcPts val="0"/>
-              </a:spcBef>
-              <a:spcAft>
-                <a:spcPts val="0"/>
-              </a:spcAft>
-            </a:pPr>
-            <a:r>
-              <a:rPr sz="720" b="1" i="0">
-                <a:solidFill>
-                  <a:srgbClr val="B46318"/>
-                </a:solidFill>
-                <a:latin typeface="Aptos"/>
-              </a:rPr>
-              <a:t>2  Deliverables</a:t>
-            </a:r>
-            <a:r>
-              <a:rPr sz="680" b="0" i="0">
-                <a:solidFill>
-                  <a:srgbClr val="434952"/>
-                </a:solidFill>
-                <a:latin typeface="Aptos"/>
-              </a:rPr>
-              <a:t>  closed-form selector · latency/VRAM Pareto · final report · PPT video · reproducible code.</a:t>
-            </a:r>
-          </a:p>
-        </p:txBody>
-      </p:sp>
-      <p:sp>
-        <p:nvSpPr>
-          <p:cNvPr id="56" name="TextBox 55"/>
+              <a:t>Test MRR ×100  ·  measured T4 GPU time  ·  peak VRAM  ·  three random seeds per budget</a:t>
+            </a:r>
+          </a:p>
+        </p:txBody>
+      </p:sp>
+      <p:sp>
+        <p:nvSpPr>
+          <p:cNvPr id="59" name="TextBox 58"/>
           <p:cNvSpPr txBox="1"/>
           <p:nvPr/>
         </p:nvSpPr>
@@ -5623,14 +5716,14 @@
                 </a:solidFill>
                 <a:latin typeface="Aptos"/>
               </a:rPr>
-              <a:t>02  FOUR EMPIRICAL COMPUTE-ALLOCATION LAWS</a:t>
-            </a:r>
-          </a:p>
-        </p:txBody>
-      </p:sp>
-      <p:sp>
-        <p:nvSpPr>
-          <p:cNvPr id="57" name="Rounded Rectangle 56"/>
+              <a:t>RESULTS FROM THE BUDGET SWEEP</a:t>
+            </a:r>
+          </a:p>
+        </p:txBody>
+      </p:sp>
+      <p:sp>
+        <p:nvSpPr>
+          <p:cNvPr id="60" name="Rounded Rectangle 59"/>
           <p:cNvSpPr/>
           <p:nvPr/>
         </p:nvSpPr>
@@ -5677,7 +5770,7 @@
       </p:sp>
       <p:sp>
         <p:nvSpPr>
-          <p:cNvPr id="58" name="Rectangle 57"/>
+          <p:cNvPr id="61" name="Rectangle 60"/>
           <p:cNvSpPr/>
           <p:nvPr/>
         </p:nvSpPr>
@@ -5720,7 +5813,7 @@
       </p:sp>
       <p:sp>
         <p:nvSpPr>
-          <p:cNvPr id="59" name="Oval 58"/>
+          <p:cNvPr id="62" name="Oval 61"/>
           <p:cNvSpPr/>
           <p:nvPr/>
         </p:nvSpPr>
@@ -5765,7 +5858,7 @@
       </p:sp>
       <p:sp>
         <p:nvSpPr>
-          <p:cNvPr id="60" name="TextBox 59"/>
+          <p:cNvPr id="63" name="TextBox 62"/>
           <p:cNvSpPr txBox="1"/>
           <p:nvPr/>
         </p:nvSpPr>
@@ -5810,7 +5903,7 @@
       </p:sp>
       <p:sp>
         <p:nvSpPr>
-          <p:cNvPr id="61" name="TextBox 60"/>
+          <p:cNvPr id="64" name="TextBox 63"/>
           <p:cNvSpPr txBox="1"/>
           <p:nvPr/>
         </p:nvSpPr>
@@ -5855,7 +5948,7 @@
       </p:sp>
       <p:sp>
         <p:nvSpPr>
-          <p:cNvPr id="62" name="TextBox 61"/>
+          <p:cNvPr id="65" name="TextBox 64"/>
           <p:cNvSpPr txBox="1"/>
           <p:nvPr/>
         </p:nvSpPr>
@@ -5900,7 +5993,7 @@
       </p:sp>
       <p:sp>
         <p:nvSpPr>
-          <p:cNvPr id="63" name="Rounded Rectangle 62"/>
+          <p:cNvPr id="66" name="Rounded Rectangle 65"/>
           <p:cNvSpPr/>
           <p:nvPr/>
         </p:nvSpPr>
@@ -5947,7 +6040,7 @@
       </p:sp>
       <p:sp>
         <p:nvSpPr>
-          <p:cNvPr id="64" name="Rectangle 63"/>
+          <p:cNvPr id="67" name="Rectangle 66"/>
           <p:cNvSpPr/>
           <p:nvPr/>
         </p:nvSpPr>
@@ -5990,7 +6083,7 @@
       </p:sp>
       <p:sp>
         <p:nvSpPr>
-          <p:cNvPr id="65" name="Oval 64"/>
+          <p:cNvPr id="68" name="Oval 67"/>
           <p:cNvSpPr/>
           <p:nvPr/>
         </p:nvSpPr>
@@ -6035,7 +6128,7 @@
       </p:sp>
       <p:sp>
         <p:nvSpPr>
-          <p:cNvPr id="66" name="TextBox 65"/>
+          <p:cNvPr id="69" name="TextBox 68"/>
           <p:cNvSpPr txBox="1"/>
           <p:nvPr/>
         </p:nvSpPr>
@@ -6080,7 +6173,7 @@
       </p:sp>
       <p:sp>
         <p:nvSpPr>
-          <p:cNvPr id="67" name="TextBox 66"/>
+          <p:cNvPr id="70" name="TextBox 69"/>
           <p:cNvSpPr txBox="1"/>
           <p:nvPr/>
         </p:nvSpPr>
@@ -6125,7 +6218,7 @@
       </p:sp>
       <p:sp>
         <p:nvSpPr>
-          <p:cNvPr id="68" name="TextBox 67"/>
+          <p:cNvPr id="71" name="TextBox 70"/>
           <p:cNvSpPr txBox="1"/>
           <p:nvPr/>
         </p:nvSpPr>
@@ -6170,7 +6263,7 @@
       </p:sp>
       <p:sp>
         <p:nvSpPr>
-          <p:cNvPr id="69" name="Rounded Rectangle 68"/>
+          <p:cNvPr id="72" name="Rounded Rectangle 71"/>
           <p:cNvSpPr/>
           <p:nvPr/>
         </p:nvSpPr>
@@ -6217,7 +6310,7 @@
       </p:sp>
       <p:sp>
         <p:nvSpPr>
-          <p:cNvPr id="70" name="Rectangle 69"/>
+          <p:cNvPr id="73" name="Rectangle 72"/>
           <p:cNvSpPr/>
           <p:nvPr/>
         </p:nvSpPr>
@@ -6260,7 +6353,7 @@
       </p:sp>
       <p:sp>
         <p:nvSpPr>
-          <p:cNvPr id="71" name="Oval 70"/>
+          <p:cNvPr id="74" name="Oval 73"/>
           <p:cNvSpPr/>
           <p:nvPr/>
         </p:nvSpPr>
@@ -6305,7 +6398,7 @@
       </p:sp>
       <p:sp>
         <p:nvSpPr>
-          <p:cNvPr id="72" name="TextBox 71"/>
+          <p:cNvPr id="75" name="TextBox 74"/>
           <p:cNvSpPr txBox="1"/>
           <p:nvPr/>
         </p:nvSpPr>
@@ -6350,7 +6443,7 @@
       </p:sp>
       <p:sp>
         <p:nvSpPr>
-          <p:cNvPr id="73" name="TextBox 72"/>
+          <p:cNvPr id="76" name="TextBox 75"/>
           <p:cNvSpPr txBox="1"/>
           <p:nvPr/>
         </p:nvSpPr>
@@ -6395,7 +6488,7 @@
       </p:sp>
       <p:sp>
         <p:nvSpPr>
-          <p:cNvPr id="74" name="TextBox 73"/>
+          <p:cNvPr id="77" name="TextBox 76"/>
           <p:cNvSpPr txBox="1"/>
           <p:nvPr/>
         </p:nvSpPr>
@@ -6440,7 +6533,7 @@
       </p:sp>
       <p:sp>
         <p:nvSpPr>
-          <p:cNvPr id="75" name="Rounded Rectangle 74"/>
+          <p:cNvPr id="78" name="Rounded Rectangle 77"/>
           <p:cNvSpPr/>
           <p:nvPr/>
         </p:nvSpPr>
@@ -6487,7 +6580,7 @@
       </p:sp>
       <p:sp>
         <p:nvSpPr>
-          <p:cNvPr id="76" name="Rectangle 75"/>
+          <p:cNvPr id="79" name="Rectangle 78"/>
           <p:cNvSpPr/>
           <p:nvPr/>
         </p:nvSpPr>
@@ -6530,7 +6623,7 @@
       </p:sp>
       <p:sp>
         <p:nvSpPr>
-          <p:cNvPr id="77" name="Oval 76"/>
+          <p:cNvPr id="80" name="Oval 79"/>
           <p:cNvSpPr/>
           <p:nvPr/>
         </p:nvSpPr>
@@ -6575,7 +6668,7 @@
       </p:sp>
       <p:sp>
         <p:nvSpPr>
-          <p:cNvPr id="78" name="TextBox 77"/>
+          <p:cNvPr id="81" name="TextBox 80"/>
           <p:cNvSpPr txBox="1"/>
           <p:nvPr/>
         </p:nvSpPr>
@@ -6620,7 +6713,7 @@
       </p:sp>
       <p:sp>
         <p:nvSpPr>
-          <p:cNvPr id="79" name="TextBox 78"/>
+          <p:cNvPr id="82" name="TextBox 81"/>
           <p:cNvSpPr txBox="1"/>
           <p:nvPr/>
         </p:nvSpPr>
@@ -6665,7 +6758,7 @@
       </p:sp>
       <p:sp>
         <p:nvSpPr>
-          <p:cNvPr id="80" name="TextBox 79"/>
+          <p:cNvPr id="83" name="TextBox 82"/>
           <p:cNvSpPr txBox="1"/>
           <p:nvPr/>
         </p:nvSpPr>
@@ -6710,7 +6803,7 @@
       </p:sp>
       <p:sp>
         <p:nvSpPr>
-          <p:cNvPr id="81" name="Rounded Rectangle 80"/>
+          <p:cNvPr id="84" name="Rounded Rectangle 83"/>
           <p:cNvSpPr/>
           <p:nvPr/>
         </p:nvSpPr>
@@ -6755,7 +6848,7 @@
       </p:sp>
       <p:sp>
         <p:nvSpPr>
-          <p:cNvPr id="82" name="TextBox 81"/>
+          <p:cNvPr id="85" name="TextBox 84"/>
           <p:cNvSpPr txBox="1"/>
           <p:nvPr/>
         </p:nvSpPr>
@@ -6793,7 +6886,7 @@
                 </a:solidFill>
                 <a:latin typeface="Aptos"/>
               </a:rPr>
-              <a:t>INTERIM LAW  </a:t>
+              <a:t>Main result: </a:t>
             </a:r>
             <a:r>
               <a:rPr sz="760" b="1" i="0">
@@ -6802,14 +6895,14 @@
                 </a:solidFill>
                 <a:latin typeface="Aptos"/>
               </a:rPr>
-              <a:t>reduce fanout first; reserve full context for the hard regime.</a:t>
-            </a:r>
-          </a:p>
-        </p:txBody>
-      </p:sp>
-      <p:sp>
-        <p:nvSpPr>
-          <p:cNvPr id="83" name="TextBox 82"/>
+              <a:t>reducing fanout is usually safer than shortening the candidate list.</a:t>
+            </a:r>
+          </a:p>
+        </p:txBody>
+      </p:sp>
+      <p:sp>
+        <p:nvSpPr>
+          <p:cNvPr id="86" name="TextBox 85"/>
           <p:cNvSpPr txBox="1"/>
           <p:nvPr/>
         </p:nvSpPr>
@@ -6847,14 +6940,14 @@
                 </a:solidFill>
                 <a:latin typeface="Aptos"/>
               </a:rPr>
-              <a:t>03  EVIDENCE ACROSS FOUR TEST REGIMES</a:t>
-            </a:r>
-          </a:p>
-        </p:txBody>
-      </p:sp>
-      <p:sp>
-        <p:nvSpPr>
-          <p:cNvPr id="84" name="Rounded Rectangle 83"/>
+              <a:t>BUDGET SWEEPS</a:t>
+            </a:r>
+          </a:p>
+        </p:txBody>
+      </p:sp>
+      <p:sp>
+        <p:nvSpPr>
+          <p:cNvPr id="87" name="Rounded Rectangle 86"/>
           <p:cNvSpPr/>
           <p:nvPr/>
         </p:nvSpPr>
@@ -6901,7 +6994,7 @@
       </p:sp>
       <p:pic>
         <p:nvPicPr>
-          <p:cNvPr id="85" name="Picture 84" descr="fig_mid.png"/>
+          <p:cNvPr id="88" name="Picture 87" descr="fig_mid.png"/>
           <p:cNvPicPr>
             <a:picLocks noChangeAspect="1"/>
           </p:cNvPicPr>
@@ -6925,7 +7018,7 @@
       </p:pic>
       <p:sp>
         <p:nvSpPr>
-          <p:cNvPr id="86" name="TextBox 85"/>
+          <p:cNvPr id="89" name="TextBox 88"/>
           <p:cNvSpPr txBox="1"/>
           <p:nvPr/>
         </p:nvSpPr>
@@ -6970,7 +7063,7 @@
       </p:sp>
       <p:sp>
         <p:nvSpPr>
-          <p:cNvPr id="87" name="TextBox 86"/>
+          <p:cNvPr id="90" name="TextBox 89"/>
           <p:cNvSpPr txBox="1"/>
           <p:nvPr/>
         </p:nvSpPr>
@@ -7015,7 +7108,7 @@
       </p:sp>
       <p:sp>
         <p:nvSpPr>
-          <p:cNvPr id="88" name="Rectangle 87"/>
+          <p:cNvPr id="91" name="Rectangle 90"/>
           <p:cNvSpPr/>
           <p:nvPr/>
         </p:nvSpPr>
@@ -7058,7 +7151,7 @@
       </p:sp>
       <p:sp>
         <p:nvSpPr>
-          <p:cNvPr id="89" name="TextBox 88"/>
+          <p:cNvPr id="92" name="TextBox 91"/>
           <p:cNvSpPr txBox="1"/>
           <p:nvPr/>
         </p:nvSpPr>
@@ -7103,7 +7196,7 @@
       </p:sp>
       <p:sp>
         <p:nvSpPr>
-          <p:cNvPr id="90" name="TextBox 89"/>
+          <p:cNvPr id="93" name="TextBox 92"/>
           <p:cNvSpPr txBox="1"/>
           <p:nvPr/>
         </p:nvSpPr>
@@ -7149,7 +7242,7 @@
       </p:sp>
       <p:sp>
         <p:nvSpPr>
-          <p:cNvPr id="91" name="TextBox 90"/>
+          <p:cNvPr id="94" name="TextBox 93"/>
           <p:cNvSpPr txBox="1"/>
           <p:nvPr/>
         </p:nvSpPr>
@@ -7195,7 +7288,7 @@
       </p:sp>
       <p:sp>
         <p:nvSpPr>
-          <p:cNvPr id="92" name="TextBox 91"/>
+          <p:cNvPr id="95" name="TextBox 94"/>
           <p:cNvSpPr txBox="1"/>
           <p:nvPr/>
         </p:nvSpPr>
@@ -7241,7 +7334,7 @@
       </p:sp>
       <p:sp>
         <p:nvSpPr>
-          <p:cNvPr id="93" name="TextBox 92"/>
+          <p:cNvPr id="96" name="TextBox 95"/>
           <p:cNvSpPr txBox="1"/>
           <p:nvPr/>
         </p:nvSpPr>
@@ -7287,7 +7380,7 @@
       </p:sp>
       <p:sp>
         <p:nvSpPr>
-          <p:cNvPr id="94" name="Rectangle 93"/>
+          <p:cNvPr id="97" name="Rectangle 96"/>
           <p:cNvSpPr/>
           <p:nvPr/>
         </p:nvSpPr>
@@ -7330,7 +7423,7 @@
       </p:sp>
       <p:sp>
         <p:nvSpPr>
-          <p:cNvPr id="95" name="Rectangle 94"/>
+          <p:cNvPr id="98" name="Rectangle 97"/>
           <p:cNvSpPr/>
           <p:nvPr/>
         </p:nvSpPr>
@@ -7373,7 +7466,7 @@
       </p:sp>
       <p:sp>
         <p:nvSpPr>
-          <p:cNvPr id="96" name="TextBox 95"/>
+          <p:cNvPr id="99" name="TextBox 98"/>
           <p:cNvSpPr txBox="1"/>
           <p:nvPr/>
         </p:nvSpPr>
@@ -7418,7 +7511,7 @@
       </p:sp>
       <p:sp>
         <p:nvSpPr>
-          <p:cNvPr id="97" name="TextBox 96"/>
+          <p:cNvPr id="100" name="TextBox 99"/>
           <p:cNvSpPr txBox="1"/>
           <p:nvPr/>
         </p:nvSpPr>
@@ -7463,7 +7556,7 @@
       </p:sp>
       <p:sp>
         <p:nvSpPr>
-          <p:cNvPr id="98" name="TextBox 97"/>
+          <p:cNvPr id="101" name="TextBox 100"/>
           <p:cNvSpPr txBox="1"/>
           <p:nvPr/>
         </p:nvSpPr>
@@ -7508,7 +7601,7 @@
       </p:sp>
       <p:sp>
         <p:nvSpPr>
-          <p:cNvPr id="99" name="TextBox 98"/>
+          <p:cNvPr id="102" name="TextBox 101"/>
           <p:cNvSpPr txBox="1"/>
           <p:nvPr/>
         </p:nvSpPr>
@@ -7553,7 +7646,7 @@
       </p:sp>
       <p:sp>
         <p:nvSpPr>
-          <p:cNvPr id="100" name="TextBox 99"/>
+          <p:cNvPr id="103" name="TextBox 102"/>
           <p:cNvSpPr txBox="1"/>
           <p:nvPr/>
         </p:nvSpPr>
@@ -7598,7 +7691,7 @@
       </p:sp>
       <p:sp>
         <p:nvSpPr>
-          <p:cNvPr id="101" name="Rectangle 100"/>
+          <p:cNvPr id="104" name="Rectangle 103"/>
           <p:cNvSpPr/>
           <p:nvPr/>
         </p:nvSpPr>
@@ -7641,7 +7734,7 @@
       </p:sp>
       <p:sp>
         <p:nvSpPr>
-          <p:cNvPr id="102" name="Rectangle 101"/>
+          <p:cNvPr id="105" name="Rectangle 104"/>
           <p:cNvSpPr/>
           <p:nvPr/>
         </p:nvSpPr>
@@ -7684,7 +7777,7 @@
       </p:sp>
       <p:sp>
         <p:nvSpPr>
-          <p:cNvPr id="103" name="TextBox 102"/>
+          <p:cNvPr id="106" name="TextBox 105"/>
           <p:cNvSpPr txBox="1"/>
           <p:nvPr/>
         </p:nvSpPr>
@@ -7729,7 +7822,7 @@
       </p:sp>
       <p:sp>
         <p:nvSpPr>
-          <p:cNvPr id="104" name="TextBox 103"/>
+          <p:cNvPr id="107" name="TextBox 106"/>
           <p:cNvSpPr txBox="1"/>
           <p:nvPr/>
         </p:nvSpPr>
@@ -7774,7 +7867,7 @@
       </p:sp>
       <p:sp>
         <p:nvSpPr>
-          <p:cNvPr id="105" name="TextBox 104"/>
+          <p:cNvPr id="108" name="TextBox 107"/>
           <p:cNvSpPr txBox="1"/>
           <p:nvPr/>
         </p:nvSpPr>
@@ -7819,7 +7912,7 @@
       </p:sp>
       <p:sp>
         <p:nvSpPr>
-          <p:cNvPr id="106" name="TextBox 105"/>
+          <p:cNvPr id="109" name="TextBox 108"/>
           <p:cNvSpPr txBox="1"/>
           <p:nvPr/>
         </p:nvSpPr>
@@ -7864,7 +7957,7 @@
       </p:sp>
       <p:sp>
         <p:nvSpPr>
-          <p:cNvPr id="107" name="TextBox 106"/>
+          <p:cNvPr id="110" name="TextBox 109"/>
           <p:cNvSpPr txBox="1"/>
           <p:nvPr/>
         </p:nvSpPr>
@@ -7909,7 +8002,7 @@
       </p:sp>
       <p:sp>
         <p:nvSpPr>
-          <p:cNvPr id="108" name="Rectangle 107"/>
+          <p:cNvPr id="111" name="Rectangle 110"/>
           <p:cNvSpPr/>
           <p:nvPr/>
         </p:nvSpPr>
@@ -7952,7 +8045,7 @@
       </p:sp>
       <p:sp>
         <p:nvSpPr>
-          <p:cNvPr id="109" name="Rectangle 108"/>
+          <p:cNvPr id="112" name="Rectangle 111"/>
           <p:cNvSpPr/>
           <p:nvPr/>
         </p:nvSpPr>
@@ -7995,7 +8088,7 @@
       </p:sp>
       <p:sp>
         <p:nvSpPr>
-          <p:cNvPr id="110" name="TextBox 109"/>
+          <p:cNvPr id="113" name="TextBox 112"/>
           <p:cNvSpPr txBox="1"/>
           <p:nvPr/>
         </p:nvSpPr>
@@ -8040,7 +8133,7 @@
       </p:sp>
       <p:sp>
         <p:nvSpPr>
-          <p:cNvPr id="111" name="TextBox 110"/>
+          <p:cNvPr id="114" name="TextBox 113"/>
           <p:cNvSpPr txBox="1"/>
           <p:nvPr/>
         </p:nvSpPr>
@@ -8085,7 +8178,7 @@
       </p:sp>
       <p:sp>
         <p:nvSpPr>
-          <p:cNvPr id="112" name="TextBox 111"/>
+          <p:cNvPr id="115" name="TextBox 114"/>
           <p:cNvSpPr txBox="1"/>
           <p:nvPr/>
         </p:nvSpPr>
@@ -8130,7 +8223,7 @@
       </p:sp>
       <p:sp>
         <p:nvSpPr>
-          <p:cNvPr id="113" name="TextBox 112"/>
+          <p:cNvPr id="116" name="TextBox 115"/>
           <p:cNvSpPr txBox="1"/>
           <p:nvPr/>
         </p:nvSpPr>
@@ -8175,7 +8268,7 @@
       </p:sp>
       <p:sp>
         <p:nvSpPr>
-          <p:cNvPr id="114" name="TextBox 113"/>
+          <p:cNvPr id="117" name="TextBox 116"/>
           <p:cNvSpPr txBox="1"/>
           <p:nvPr/>
         </p:nvSpPr>
@@ -8220,7 +8313,7 @@
       </p:sp>
       <p:sp>
         <p:nvSpPr>
-          <p:cNvPr id="115" name="Rectangle 114"/>
+          <p:cNvPr id="118" name="Rectangle 117"/>
           <p:cNvSpPr/>
           <p:nvPr/>
         </p:nvSpPr>
@@ -8263,7 +8356,7 @@
       </p:sp>
       <p:sp>
         <p:nvSpPr>
-          <p:cNvPr id="116" name="Rectangle 115"/>
+          <p:cNvPr id="119" name="Rectangle 118"/>
           <p:cNvSpPr/>
           <p:nvPr/>
         </p:nvSpPr>
@@ -8306,7 +8399,7 @@
       </p:sp>
       <p:sp>
         <p:nvSpPr>
-          <p:cNvPr id="117" name="TextBox 116"/>
+          <p:cNvPr id="120" name="TextBox 119"/>
           <p:cNvSpPr txBox="1"/>
           <p:nvPr/>
         </p:nvSpPr>
@@ -8351,7 +8444,7 @@
       </p:sp>
       <p:sp>
         <p:nvSpPr>
-          <p:cNvPr id="118" name="TextBox 117"/>
+          <p:cNvPr id="121" name="TextBox 120"/>
           <p:cNvSpPr txBox="1"/>
           <p:nvPr/>
         </p:nvSpPr>
@@ -8396,7 +8489,7 @@
       </p:sp>
       <p:sp>
         <p:nvSpPr>
-          <p:cNvPr id="119" name="TextBox 118"/>
+          <p:cNvPr id="122" name="TextBox 121"/>
           <p:cNvSpPr txBox="1"/>
           <p:nvPr/>
         </p:nvSpPr>
@@ -8441,7 +8534,7 @@
       </p:sp>
       <p:sp>
         <p:nvSpPr>
-          <p:cNvPr id="120" name="TextBox 119"/>
+          <p:cNvPr id="123" name="TextBox 122"/>
           <p:cNvSpPr txBox="1"/>
           <p:nvPr/>
         </p:nvSpPr>
@@ -8486,7 +8579,7 @@
       </p:sp>
       <p:sp>
         <p:nvSpPr>
-          <p:cNvPr id="121" name="TextBox 120"/>
+          <p:cNvPr id="124" name="TextBox 123"/>
           <p:cNvSpPr txBox="1"/>
           <p:nvPr/>
         </p:nvSpPr>
@@ -8531,7 +8624,7 @@
       </p:sp>
       <p:sp>
         <p:nvSpPr>
-          <p:cNvPr id="122" name="Rectangle 121"/>
+          <p:cNvPr id="125" name="Rectangle 124"/>
           <p:cNvSpPr/>
           <p:nvPr/>
         </p:nvSpPr>
@@ -8574,7 +8667,7 @@
       </p:sp>
       <p:sp>
         <p:nvSpPr>
-          <p:cNvPr id="123" name="Rectangle 122"/>
+          <p:cNvPr id="126" name="Rectangle 125"/>
           <p:cNvSpPr/>
           <p:nvPr/>
         </p:nvSpPr>
@@ -8617,7 +8710,7 @@
       </p:sp>
       <p:sp>
         <p:nvSpPr>
-          <p:cNvPr id="124" name="TextBox 123"/>
+          <p:cNvPr id="127" name="TextBox 126"/>
           <p:cNvSpPr txBox="1"/>
           <p:nvPr/>
         </p:nvSpPr>
@@ -8662,7 +8755,7 @@
       </p:sp>
       <p:sp>
         <p:nvSpPr>
-          <p:cNvPr id="125" name="TextBox 124"/>
+          <p:cNvPr id="128" name="TextBox 127"/>
           <p:cNvSpPr txBox="1"/>
           <p:nvPr/>
         </p:nvSpPr>
@@ -8707,7 +8800,7 @@
       </p:sp>
       <p:sp>
         <p:nvSpPr>
-          <p:cNvPr id="126" name="TextBox 125"/>
+          <p:cNvPr id="129" name="TextBox 128"/>
           <p:cNvSpPr txBox="1"/>
           <p:nvPr/>
         </p:nvSpPr>
@@ -8752,7 +8845,7 @@
       </p:sp>
       <p:sp>
         <p:nvSpPr>
-          <p:cNvPr id="127" name="TextBox 126"/>
+          <p:cNvPr id="130" name="TextBox 129"/>
           <p:cNvSpPr txBox="1"/>
           <p:nvPr/>
         </p:nvSpPr>
@@ -8797,7 +8890,7 @@
       </p:sp>
       <p:sp>
         <p:nvSpPr>
-          <p:cNvPr id="128" name="TextBox 127"/>
+          <p:cNvPr id="131" name="TextBox 130"/>
           <p:cNvSpPr txBox="1"/>
           <p:nvPr/>
         </p:nvSpPr>
@@ -8842,7 +8935,7 @@
       </p:sp>
       <p:sp>
         <p:nvSpPr>
-          <p:cNvPr id="129" name="Rectangle 128"/>
+          <p:cNvPr id="132" name="Rectangle 131"/>
           <p:cNvSpPr/>
           <p:nvPr/>
         </p:nvSpPr>
@@ -8885,7 +8978,7 @@
       </p:sp>
       <p:sp>
         <p:nvSpPr>
-          <p:cNvPr id="130" name="TextBox 129"/>
+          <p:cNvPr id="133" name="TextBox 132"/>
           <p:cNvSpPr txBox="1"/>
           <p:nvPr/>
         </p:nvSpPr>
@@ -8923,14 +9016,14 @@
                 </a:solidFill>
                 <a:latin typeface="Aptos"/>
               </a:rPr>
-              <a:t>TRANSFER + RESOURCE EVIDENCE</a:t>
-            </a:r>
-          </a:p>
-        </p:txBody>
-      </p:sp>
-      <p:sp>
-        <p:nvSpPr>
-          <p:cNvPr id="131" name="Rounded Rectangle 130"/>
+              <a:t>ADDITIONAL RESULTS</a:t>
+            </a:r>
+          </a:p>
+        </p:txBody>
+      </p:sp>
+      <p:sp>
+        <p:nvSpPr>
+          <p:cNvPr id="134" name="Rounded Rectangle 133"/>
           <p:cNvSpPr/>
           <p:nvPr/>
         </p:nvSpPr>
@@ -8977,7 +9070,7 @@
       </p:sp>
       <p:sp>
         <p:nvSpPr>
-          <p:cNvPr id="132" name="Rectangle 131"/>
+          <p:cNvPr id="135" name="Rectangle 134"/>
           <p:cNvSpPr/>
           <p:nvPr/>
         </p:nvSpPr>
@@ -9020,7 +9113,7 @@
       </p:sp>
       <p:sp>
         <p:nvSpPr>
-          <p:cNvPr id="133" name="TextBox 132"/>
+          <p:cNvPr id="136" name="TextBox 135"/>
           <p:cNvSpPr txBox="1"/>
           <p:nvPr/>
         </p:nvSpPr>
@@ -9074,7 +9167,7 @@
       </p:sp>
       <p:sp>
         <p:nvSpPr>
-          <p:cNvPr id="134" name="Rectangle 133"/>
+          <p:cNvPr id="137" name="Rectangle 136"/>
           <p:cNvSpPr/>
           <p:nvPr/>
         </p:nvSpPr>
@@ -9117,7 +9210,7 @@
       </p:sp>
       <p:sp>
         <p:nvSpPr>
-          <p:cNvPr id="135" name="TextBox 134"/>
+          <p:cNvPr id="138" name="TextBox 137"/>
           <p:cNvSpPr txBox="1"/>
           <p:nvPr/>
         </p:nvSpPr>
@@ -9171,7 +9264,7 @@
       </p:sp>
       <p:sp>
         <p:nvSpPr>
-          <p:cNvPr id="136" name="Rectangle 135"/>
+          <p:cNvPr id="139" name="Rectangle 138"/>
           <p:cNvSpPr/>
           <p:nvPr/>
         </p:nvSpPr>
@@ -9214,7 +9307,7 @@
       </p:sp>
       <p:sp>
         <p:nvSpPr>
-          <p:cNvPr id="137" name="TextBox 136"/>
+          <p:cNvPr id="140" name="TextBox 139"/>
           <p:cNvSpPr txBox="1"/>
           <p:nvPr/>
         </p:nvSpPr>
@@ -9246,13 +9339,13 @@
               </a:spcAft>
             </a:pPr>
             <a:r>
-              <a:rPr sz="640" b="1" i="0">
+              <a:rPr sz="650" b="1" i="0">
                 <a:solidFill>
                   <a:srgbClr val="777D85"/>
                 </a:solidFill>
-                <a:latin typeface="Consolas"/>
+                <a:latin typeface="Aptos"/>
               </a:rPr>
-              <a:t>Reproducible code + 112 score dumps: github.com/Ask-812/da4022-pencil-budget</a:t>
+              <a:t>All operating points are selected on validation data; test data are used only for the reported results.</a:t>
             </a:r>
           </a:p>
         </p:txBody>

--- a/docs/MIDREPORT_public.pptx
+++ b/docs/MIDREPORT_public.pptx
@@ -3140,7 +3140,7 @@
         <p:spPr>
           <a:xfrm>
             <a:off x="0" y="0"/>
-            <a:ext cx="12191695" cy="68580"/>
+            <a:ext cx="12191695" cy="64008"/>
           </a:xfrm>
           <a:prstGeom prst="rect">
             <a:avLst/>
@@ -3176,57 +3176,14 @@
       </p:sp>
       <p:sp>
         <p:nvSpPr>
-          <p:cNvPr id="4" name="Rectangle 3"/>
-          <p:cNvSpPr/>
-          <p:nvPr/>
-        </p:nvSpPr>
-        <p:spPr>
-          <a:xfrm>
-            <a:off x="164592" y="182880"/>
-            <a:ext cx="45720" cy="6437376"/>
-          </a:xfrm>
-          <a:prstGeom prst="rect">
-            <a:avLst/>
-          </a:prstGeom>
-          <a:solidFill>
-            <a:srgbClr val="9D1B32"/>
-          </a:solidFill>
-          <a:ln>
-            <a:noFill/>
-          </a:ln>
-        </p:spPr>
-        <p:style>
-          <a:lnRef idx="1">
-            <a:schemeClr val="accent1"/>
-          </a:lnRef>
-          <a:fillRef idx="3">
-            <a:schemeClr val="accent1"/>
-          </a:fillRef>
-          <a:effectRef idx="2">
-            <a:schemeClr val="accent1"/>
-          </a:effectRef>
-          <a:fontRef idx="minor">
-            <a:schemeClr val="lt1"/>
-          </a:fontRef>
-        </p:style>
-        <p:txBody>
-          <a:bodyPr rtlCol="0" anchor="ctr"/>
-          <a:lstStyle/>
-          <a:p>
-            <a:pPr algn="ctr"/>
-          </a:p>
-        </p:txBody>
-      </p:sp>
-      <p:sp>
-        <p:nvSpPr>
-          <p:cNvPr id="5" name="TextBox 4"/>
+          <p:cNvPr id="4" name="TextBox 3"/>
           <p:cNvSpPr txBox="1"/>
           <p:nvPr/>
         </p:nvSpPr>
         <p:spPr>
           <a:xfrm>
-            <a:off x="356616" y="173736"/>
-            <a:ext cx="7086600" cy="164592"/>
+            <a:off x="384048" y="164592"/>
+            <a:ext cx="7223760" cy="164592"/>
           </a:xfrm>
           <a:prstGeom prst="rect">
             <a:avLst/>
@@ -3251,27 +3208,27 @@
               </a:spcAft>
             </a:pPr>
             <a:r>
-              <a:rPr sz="780" b="1" i="0">
+              <a:rPr sz="819" b="1" i="0">
                 <a:solidFill>
                   <a:srgbClr val="9D1B32"/>
                 </a:solidFill>
-                <a:latin typeface="Aptos"/>
+                <a:latin typeface="Segoe UI"/>
               </a:rPr>
-              <a:t>DA4022 MID-PROJECT REPORT  ·  SELF-PROPOSED PENCIL EXTENSION  ·  15 OCT 2026</a:t>
-            </a:r>
-          </a:p>
-        </p:txBody>
-      </p:sp>
-      <p:sp>
-        <p:nvSpPr>
-          <p:cNvPr id="6" name="TextBox 5"/>
+              <a:t>DA4022 mid-project report  ·  PENCIL extension  ·  15 October 2026</a:t>
+            </a:r>
+          </a:p>
+        </p:txBody>
+      </p:sp>
+      <p:sp>
+        <p:nvSpPr>
+          <p:cNvPr id="5" name="TextBox 4"/>
           <p:cNvSpPr txBox="1"/>
           <p:nvPr/>
         </p:nvSpPr>
         <p:spPr>
           <a:xfrm>
-            <a:off x="356616" y="356616"/>
-            <a:ext cx="6995160" cy="393192"/>
+            <a:off x="384048" y="356616"/>
+            <a:ext cx="7498079" cy="411480"/>
           </a:xfrm>
           <a:prstGeom prst="rect">
             <a:avLst/>
@@ -3296,7 +3253,7 @@
               </a:spcAft>
             </a:pPr>
             <a:r>
-              <a:rPr sz="2300" b="1" i="0">
+              <a:rPr sz="2450" b="1" i="0">
                 <a:solidFill>
                   <a:srgbClr val="171A1F"/>
                 </a:solidFill>
@@ -3309,14 +3266,14 @@
       </p:sp>
       <p:sp>
         <p:nvSpPr>
-          <p:cNvPr id="7" name="TextBox 6"/>
+          <p:cNvPr id="6" name="TextBox 5"/>
           <p:cNvSpPr txBox="1"/>
           <p:nvPr/>
         </p:nvSpPr>
         <p:spPr>
           <a:xfrm>
-            <a:off x="356616" y="722376"/>
-            <a:ext cx="6995160" cy="164592"/>
+            <a:off x="384048" y="749808"/>
+            <a:ext cx="7498079" cy="182880"/>
           </a:xfrm>
           <a:prstGeom prst="rect">
             <a:avLst/>
@@ -3341,27 +3298,27 @@
               </a:spcAft>
             </a:pPr>
             <a:r>
-              <a:rPr sz="880" b="1" i="0">
+              <a:rPr sz="1000" b="0" i="0">
                 <a:solidFill>
                   <a:srgbClr val="434952"/>
                 </a:solidFill>
-                <a:latin typeface="Aptos"/>
+                <a:latin typeface="Segoe UI"/>
               </a:rPr>
-              <a:t>Compute-allocation laws for link prediction  ·  choosing shortlist k and context budget s without retraining</a:t>
-            </a:r>
-          </a:p>
-        </p:txBody>
-      </p:sp>
-      <p:sp>
-        <p:nvSpPr>
-          <p:cNvPr id="8" name="TextBox 7"/>
+              <a:t>Compute allocation for link prediction through candidate shortlisting and smaller sampled subgraphs</a:t>
+            </a:r>
+          </a:p>
+        </p:txBody>
+      </p:sp>
+      <p:sp>
+        <p:nvSpPr>
+          <p:cNvPr id="7" name="TextBox 6"/>
           <p:cNvSpPr txBox="1"/>
           <p:nvPr/>
         </p:nvSpPr>
         <p:spPr>
           <a:xfrm>
-            <a:off x="7360920" y="210312"/>
-            <a:ext cx="4471416" cy="548640"/>
+            <a:off x="7909560" y="237744"/>
+            <a:ext cx="3886200" cy="566928"/>
           </a:xfrm>
           <a:prstGeom prst="rect">
             <a:avLst/>
@@ -3376,7 +3333,7 @@
           <a:p>
             <a:pPr algn="r">
               <a:lnSpc>
-                <a:spcPct val="100000"/>
+                <a:spcPct val="108000"/>
               </a:lnSpc>
               <a:spcBef>
                 <a:spcPts val="0"/>
@@ -3386,33 +3343,11 @@
               </a:spcAft>
             </a:pPr>
             <a:r>
-              <a:rPr sz="740" b="1" i="0">
-                <a:solidFill>
-                  <a:srgbClr val="9D1B32"/>
-                </a:solidFill>
-                <a:latin typeface="Aptos"/>
-              </a:rPr>
-              <a:t>TEAM</a:t>
-            </a:r>
-          </a:p>
-          <a:p>
-            <a:pPr algn="r">
-              <a:lnSpc>
-                <a:spcPct val="105000"/>
-              </a:lnSpc>
-              <a:spcBef>
-                <a:spcPts val="200"/>
-              </a:spcBef>
-              <a:spcAft>
-                <a:spcPts val="0"/>
-              </a:spcAft>
-            </a:pPr>
-            <a:r>
-              <a:rPr sz="660" b="0" i="0">
+              <a:rPr sz="710" b="0" i="0">
                 <a:solidFill>
                   <a:srgbClr val="777D85"/>
                 </a:solidFill>
-                <a:latin typeface="Aptos"/>
+                <a:latin typeface="Segoe UI"/>
               </a:rPr>
               <a:t>Amit Kumar  ·  Ashmit Satpute  ·  Arnav Kshirsagar  ·  Pranav Shalya  ·  Atharv Wankhede</a:t>
             </a:r>
@@ -3421,14 +3356,14 @@
       </p:sp>
       <p:sp>
         <p:nvSpPr>
-          <p:cNvPr id="9" name="Rectangle 8"/>
+          <p:cNvPr id="8" name="Rectangle 7"/>
           <p:cNvSpPr/>
           <p:nvPr/>
         </p:nvSpPr>
         <p:spPr>
           <a:xfrm>
-            <a:off x="356616" y="932688"/>
-            <a:ext cx="11475720" cy="10972"/>
+            <a:off x="384048" y="978408"/>
+            <a:ext cx="11411712" cy="10972"/>
           </a:xfrm>
           <a:prstGeom prst="rect">
             <a:avLst/>
@@ -3464,100 +3399,14 @@
       </p:sp>
       <p:sp>
         <p:nvSpPr>
-          <p:cNvPr id="10" name="Rectangle 9"/>
-          <p:cNvSpPr/>
-          <p:nvPr/>
-        </p:nvSpPr>
-        <p:spPr>
-          <a:xfrm>
-            <a:off x="3163824" y="1097280"/>
-            <a:ext cx="10972" cy="5404104"/>
-          </a:xfrm>
-          <a:prstGeom prst="rect">
-            <a:avLst/>
-          </a:prstGeom>
-          <a:solidFill>
-            <a:srgbClr val="D9D4CB"/>
-          </a:solidFill>
-          <a:ln>
-            <a:noFill/>
-          </a:ln>
-        </p:spPr>
-        <p:style>
-          <a:lnRef idx="1">
-            <a:schemeClr val="accent1"/>
-          </a:lnRef>
-          <a:fillRef idx="3">
-            <a:schemeClr val="accent1"/>
-          </a:fillRef>
-          <a:effectRef idx="2">
-            <a:schemeClr val="accent1"/>
-          </a:effectRef>
-          <a:fontRef idx="minor">
-            <a:schemeClr val="lt1"/>
-          </a:fontRef>
-        </p:style>
-        <p:txBody>
-          <a:bodyPr rtlCol="0" anchor="ctr"/>
-          <a:lstStyle/>
-          <a:p>
-            <a:pPr algn="ctr"/>
-          </a:p>
-        </p:txBody>
-      </p:sp>
-      <p:sp>
-        <p:nvSpPr>
-          <p:cNvPr id="11" name="Rectangle 10"/>
-          <p:cNvSpPr/>
-          <p:nvPr/>
-        </p:nvSpPr>
-        <p:spPr>
-          <a:xfrm>
-            <a:off x="7251192" y="1097280"/>
-            <a:ext cx="10972" cy="5404104"/>
-          </a:xfrm>
-          <a:prstGeom prst="rect">
-            <a:avLst/>
-          </a:prstGeom>
-          <a:solidFill>
-            <a:srgbClr val="D9D4CB"/>
-          </a:solidFill>
-          <a:ln>
-            <a:noFill/>
-          </a:ln>
-        </p:spPr>
-        <p:style>
-          <a:lnRef idx="1">
-            <a:schemeClr val="accent1"/>
-          </a:lnRef>
-          <a:fillRef idx="3">
-            <a:schemeClr val="accent1"/>
-          </a:fillRef>
-          <a:effectRef idx="2">
-            <a:schemeClr val="accent1"/>
-          </a:effectRef>
-          <a:fontRef idx="minor">
-            <a:schemeClr val="lt1"/>
-          </a:fontRef>
-        </p:style>
-        <p:txBody>
-          <a:bodyPr rtlCol="0" anchor="ctr"/>
-          <a:lstStyle/>
-          <a:p>
-            <a:pPr algn="ctr"/>
-          </a:p>
-        </p:txBody>
-      </p:sp>
-      <p:sp>
-        <p:nvSpPr>
-          <p:cNvPr id="12" name="TextBox 11"/>
+          <p:cNvPr id="9" name="TextBox 8"/>
           <p:cNvSpPr txBox="1"/>
           <p:nvPr/>
         </p:nvSpPr>
         <p:spPr>
           <a:xfrm>
-            <a:off x="356616" y="1051560"/>
-            <a:ext cx="2743200" cy="164592"/>
+            <a:off x="384048" y="1115568"/>
+            <a:ext cx="3675887" cy="228600"/>
           </a:xfrm>
           <a:prstGeom prst="rect">
             <a:avLst/>
@@ -3582,27 +3431,27 @@
               </a:spcAft>
             </a:pPr>
             <a:r>
-              <a:rPr sz="819" b="1" i="0">
-                <a:solidFill>
-                  <a:srgbClr val="9D1B32"/>
-                </a:solidFill>
-                <a:latin typeface="Aptos"/>
+              <a:rPr sz="1200" b="1" i="0">
+                <a:solidFill>
+                  <a:srgbClr val="171A1F"/>
+                </a:solidFill>
+                <a:latin typeface="Georgia"/>
               </a:rPr>
-              <a:t>WHAT WE ARE DOING</a:t>
-            </a:r>
-          </a:p>
-        </p:txBody>
-      </p:sp>
-      <p:sp>
-        <p:nvSpPr>
-          <p:cNvPr id="13" name="Rounded Rectangle 12"/>
+              <a:t>What we are testing</a:t>
+            </a:r>
+          </a:p>
+        </p:txBody>
+      </p:sp>
+      <p:sp>
+        <p:nvSpPr>
+          <p:cNvPr id="10" name="Rounded Rectangle 9"/>
           <p:cNvSpPr/>
           <p:nvPr/>
         </p:nvSpPr>
         <p:spPr>
           <a:xfrm>
-            <a:off x="356616" y="1280160"/>
-            <a:ext cx="2743200" cy="1508760"/>
+            <a:off x="384048" y="1399032"/>
+            <a:ext cx="3675887" cy="1225296"/>
           </a:xfrm>
           <a:prstGeom prst="roundRect">
             <a:avLst>
@@ -3642,20 +3491,20 @@
       </p:sp>
       <p:sp>
         <p:nvSpPr>
-          <p:cNvPr id="14" name="Rectangle 13"/>
+          <p:cNvPr id="11" name="Rectangle 10"/>
           <p:cNvSpPr/>
           <p:nvPr/>
         </p:nvSpPr>
         <p:spPr>
           <a:xfrm>
-            <a:off x="356616" y="1280160"/>
-            <a:ext cx="41148" cy="1508760"/>
+            <a:off x="384048" y="1399032"/>
+            <a:ext cx="41148" cy="1225296"/>
           </a:xfrm>
           <a:prstGeom prst="rect">
             <a:avLst/>
           </a:prstGeom>
           <a:solidFill>
-            <a:srgbClr val="203657"/>
+            <a:srgbClr val="9D1B32"/>
           </a:solidFill>
           <a:ln>
             <a:noFill/>
@@ -3685,14 +3534,14 @@
       </p:sp>
       <p:sp>
         <p:nvSpPr>
-          <p:cNvPr id="15" name="TextBox 14"/>
+          <p:cNvPr id="12" name="TextBox 11"/>
           <p:cNvSpPr txBox="1"/>
           <p:nvPr/>
         </p:nvSpPr>
         <p:spPr>
           <a:xfrm>
-            <a:off x="475488" y="1371600"/>
-            <a:ext cx="2523744" cy="621792"/>
+            <a:off x="512064" y="1499616"/>
+            <a:ext cx="3428999" cy="621792"/>
           </a:xfrm>
           <a:prstGeom prst="rect">
             <a:avLst/>
@@ -3707,7 +3556,7 @@
           <a:p>
             <a:pPr algn="l">
               <a:lnSpc>
-                <a:spcPct val="105000"/>
+                <a:spcPct val="106000"/>
               </a:lnSpc>
               <a:spcBef>
                 <a:spcPts val="0"/>
@@ -3717,36 +3566,36 @@
               </a:spcAft>
             </a:pPr>
             <a:r>
-              <a:rPr sz="750" b="0" i="0">
+              <a:rPr sz="919" b="0" i="0">
                 <a:solidFill>
                   <a:srgbClr val="434952"/>
                 </a:solidFill>
-                <a:latin typeface="Aptos"/>
+                <a:latin typeface="Segoe UI"/>
               </a:rPr>
-              <a:t>We rank every candidate link with Adamic–Adar, run PENCIL only on the top-k candidates, and vary PENCIL's sampled subgraph budget s. </a:t>
-            </a:r>
-            <a:r>
-              <a:rPr sz="750" b="1" i="0">
+              <a:t>We rank candidate links with Adamic–Adar, run PENCIL only on the top-k candidates, and reduce the sampled subgraph budget s. </a:t>
+            </a:r>
+            <a:r>
+              <a:rPr sz="919" b="1" i="0">
                 <a:solidFill>
                   <a:srgbClr val="171A1F"/>
                 </a:solidFill>
-                <a:latin typeface="Aptos"/>
+                <a:latin typeface="Segoe UI"/>
               </a:rPr>
-              <a:t>The (k, s) sweep measures how much accuracy remains at each GPU budget. The model is not retrained.</a:t>
-            </a:r>
-          </a:p>
-        </p:txBody>
-      </p:sp>
-      <p:sp>
-        <p:nvSpPr>
-          <p:cNvPr id="16" name="Rounded Rectangle 15"/>
+              <a:t>Sweeping (k, s) measures the accuracy retained at each GPU budget without retraining.</a:t>
+            </a:r>
+          </a:p>
+        </p:txBody>
+      </p:sp>
+      <p:sp>
+        <p:nvSpPr>
+          <p:cNvPr id="13" name="Rounded Rectangle 12"/>
           <p:cNvSpPr/>
           <p:nvPr/>
         </p:nvSpPr>
         <p:spPr>
           <a:xfrm>
-            <a:off x="466344" y="2121408"/>
-            <a:ext cx="749808" cy="502920"/>
+            <a:off x="512064" y="2185416"/>
+            <a:ext cx="1042415" cy="329184"/>
           </a:xfrm>
           <a:prstGeom prst="roundRect">
             <a:avLst>
@@ -3786,14 +3635,14 @@
       </p:sp>
       <p:sp>
         <p:nvSpPr>
-          <p:cNvPr id="17" name="TextBox 16"/>
+          <p:cNvPr id="14" name="TextBox 13"/>
           <p:cNvSpPr txBox="1"/>
           <p:nvPr/>
         </p:nvSpPr>
         <p:spPr>
           <a:xfrm>
-            <a:off x="512064" y="2176272"/>
-            <a:ext cx="658368" cy="146304"/>
+            <a:off x="566928" y="2217420"/>
+            <a:ext cx="932688" cy="237744"/>
           </a:xfrm>
           <a:prstGeom prst="rect">
             <a:avLst/>
@@ -3801,7 +3650,7 @@
           <a:noFill/>
         </p:spPr>
         <p:txBody>
-          <a:bodyPr wrap="square" lIns="0" rIns="0" tIns="0" bIns="0" anchor="t">
+          <a:bodyPr wrap="square" lIns="0" rIns="0" tIns="0" bIns="0" anchor="ctr">
             <a:spAutoFit/>
           </a:bodyPr>
           <a:lstStyle/>
@@ -3818,27 +3667,36 @@
               </a:spcAft>
             </a:pPr>
             <a:r>
-              <a:rPr sz="730" b="1" i="0">
+              <a:rPr sz="770" b="1" i="0">
                 <a:solidFill>
                   <a:srgbClr val="B46318"/>
                 </a:solidFill>
-                <a:latin typeface="Aptos"/>
+                <a:latin typeface="Segoe UI"/>
               </a:rPr>
-              <a:t>1  AA rank</a:t>
-            </a:r>
-          </a:p>
-        </p:txBody>
-      </p:sp>
-      <p:sp>
-        <p:nvSpPr>
-          <p:cNvPr id="18" name="TextBox 17"/>
+              <a:t>1  AA ranking</a:t>
+            </a:r>
+            <a:r>
+              <a:rPr sz="730" b="0" i="0">
+                <a:solidFill>
+                  <a:srgbClr val="434952"/>
+                </a:solidFill>
+                <a:latin typeface="Segoe UI"/>
+              </a:rPr>
+              <a:t>  ·  CPU</a:t>
+            </a:r>
+          </a:p>
+        </p:txBody>
+      </p:sp>
+      <p:sp>
+        <p:nvSpPr>
+          <p:cNvPr id="15" name="TextBox 14"/>
           <p:cNvSpPr txBox="1"/>
           <p:nvPr/>
         </p:nvSpPr>
         <p:spPr>
           <a:xfrm>
-            <a:off x="493776" y="2395728"/>
-            <a:ext cx="694944" cy="137160"/>
+            <a:off x="1554480" y="2258568"/>
+            <a:ext cx="118872" cy="146304"/>
           </a:xfrm>
           <a:prstGeom prst="rect">
             <a:avLst/>
@@ -3863,56 +3721,11 @@
               </a:spcAft>
             </a:pPr>
             <a:r>
-              <a:rPr sz="590" b="0" i="0">
-                <a:solidFill>
-                  <a:srgbClr val="434952"/>
-                </a:solidFill>
-                <a:latin typeface="Aptos"/>
-              </a:rPr>
-              <a:t>CPU &lt;1 ms</a:t>
-            </a:r>
-          </a:p>
-        </p:txBody>
-      </p:sp>
-      <p:sp>
-        <p:nvSpPr>
-          <p:cNvPr id="19" name="TextBox 18"/>
-          <p:cNvSpPr txBox="1"/>
-          <p:nvPr/>
-        </p:nvSpPr>
-        <p:spPr>
-          <a:xfrm>
-            <a:off x="1216152" y="2267712"/>
-            <a:ext cx="109728" cy="164592"/>
-          </a:xfrm>
-          <a:prstGeom prst="rect">
-            <a:avLst/>
-          </a:prstGeom>
-          <a:noFill/>
-        </p:spPr>
-        <p:txBody>
-          <a:bodyPr wrap="square" lIns="0" rIns="0" tIns="0" bIns="0" anchor="t">
-            <a:spAutoFit/>
-          </a:bodyPr>
-          <a:lstStyle/>
-          <a:p>
-            <a:pPr algn="ctr">
-              <a:lnSpc>
-                <a:spcPct val="100000"/>
-              </a:lnSpc>
-              <a:spcBef>
-                <a:spcPts val="0"/>
-              </a:spcBef>
-              <a:spcAft>
-                <a:spcPts val="0"/>
-              </a:spcAft>
-            </a:pPr>
-            <a:r>
-              <a:rPr sz="850" b="1" i="0">
+              <a:rPr sz="900" b="1" i="0">
                 <a:solidFill>
                   <a:srgbClr val="777D85"/>
                 </a:solidFill>
-                <a:latin typeface="Aptos"/>
+                <a:latin typeface="Segoe UI"/>
               </a:rPr>
               <a:t>→</a:t>
             </a:r>
@@ -3921,14 +3734,14 @@
       </p:sp>
       <p:sp>
         <p:nvSpPr>
-          <p:cNvPr id="20" name="Rounded Rectangle 19"/>
+          <p:cNvPr id="16" name="Rounded Rectangle 15"/>
           <p:cNvSpPr/>
           <p:nvPr/>
         </p:nvSpPr>
         <p:spPr>
           <a:xfrm>
-            <a:off x="1325880" y="2121408"/>
-            <a:ext cx="749808" cy="502920"/>
+            <a:off x="1673352" y="2185416"/>
+            <a:ext cx="1042415" cy="329184"/>
           </a:xfrm>
           <a:prstGeom prst="roundRect">
             <a:avLst>
@@ -3968,14 +3781,14 @@
       </p:sp>
       <p:sp>
         <p:nvSpPr>
-          <p:cNvPr id="21" name="TextBox 20"/>
+          <p:cNvPr id="17" name="TextBox 16"/>
           <p:cNvSpPr txBox="1"/>
           <p:nvPr/>
         </p:nvSpPr>
         <p:spPr>
           <a:xfrm>
-            <a:off x="1371600" y="2176272"/>
-            <a:ext cx="658368" cy="146304"/>
+            <a:off x="1728216" y="2217420"/>
+            <a:ext cx="932688" cy="237744"/>
           </a:xfrm>
           <a:prstGeom prst="rect">
             <a:avLst/>
@@ -3983,7 +3796,7 @@
           <a:noFill/>
         </p:spPr>
         <p:txBody>
-          <a:bodyPr wrap="square" lIns="0" rIns="0" tIns="0" bIns="0" anchor="t">
+          <a:bodyPr wrap="square" lIns="0" rIns="0" tIns="0" bIns="0" anchor="ctr">
             <a:spAutoFit/>
           </a:bodyPr>
           <a:lstStyle/>
@@ -4000,27 +3813,36 @@
               </a:spcAft>
             </a:pPr>
             <a:r>
-              <a:rPr sz="730" b="1" i="0">
+              <a:rPr sz="770" b="1" i="0">
                 <a:solidFill>
                   <a:srgbClr val="9D1B32"/>
                 </a:solidFill>
-                <a:latin typeface="Aptos"/>
+                <a:latin typeface="Segoe UI"/>
               </a:rPr>
-              <a:t>2  top-k</a:t>
-            </a:r>
-          </a:p>
-        </p:txBody>
-      </p:sp>
-      <p:sp>
-        <p:nvSpPr>
-          <p:cNvPr id="22" name="TextBox 21"/>
+              <a:t>2  Top-k shortlist</a:t>
+            </a:r>
+            <a:r>
+              <a:rPr sz="730" b="0" i="0">
+                <a:solidFill>
+                  <a:srgbClr val="434952"/>
+                </a:solidFill>
+                <a:latin typeface="Segoe UI"/>
+              </a:rPr>
+              <a:t>  ·  candidate count</a:t>
+            </a:r>
+          </a:p>
+        </p:txBody>
+      </p:sp>
+      <p:sp>
+        <p:nvSpPr>
+          <p:cNvPr id="18" name="TextBox 17"/>
           <p:cNvSpPr txBox="1"/>
           <p:nvPr/>
         </p:nvSpPr>
         <p:spPr>
           <a:xfrm>
-            <a:off x="1353312" y="2395728"/>
-            <a:ext cx="694944" cy="137160"/>
+            <a:off x="2715768" y="2258568"/>
+            <a:ext cx="118872" cy="146304"/>
           </a:xfrm>
           <a:prstGeom prst="rect">
             <a:avLst/>
@@ -4045,56 +3867,11 @@
               </a:spcAft>
             </a:pPr>
             <a:r>
-              <a:rPr sz="590" b="0" i="0">
-                <a:solidFill>
-                  <a:srgbClr val="434952"/>
-                </a:solidFill>
-                <a:latin typeface="Aptos"/>
-              </a:rPr>
-              <a:t>shortlist 0–100%</a:t>
-            </a:r>
-          </a:p>
-        </p:txBody>
-      </p:sp>
-      <p:sp>
-        <p:nvSpPr>
-          <p:cNvPr id="23" name="TextBox 22"/>
-          <p:cNvSpPr txBox="1"/>
-          <p:nvPr/>
-        </p:nvSpPr>
-        <p:spPr>
-          <a:xfrm>
-            <a:off x="2075688" y="2267712"/>
-            <a:ext cx="109728" cy="164592"/>
-          </a:xfrm>
-          <a:prstGeom prst="rect">
-            <a:avLst/>
-          </a:prstGeom>
-          <a:noFill/>
-        </p:spPr>
-        <p:txBody>
-          <a:bodyPr wrap="square" lIns="0" rIns="0" tIns="0" bIns="0" anchor="t">
-            <a:spAutoFit/>
-          </a:bodyPr>
-          <a:lstStyle/>
-          <a:p>
-            <a:pPr algn="ctr">
-              <a:lnSpc>
-                <a:spcPct val="100000"/>
-              </a:lnSpc>
-              <a:spcBef>
-                <a:spcPts val="0"/>
-              </a:spcBef>
-              <a:spcAft>
-                <a:spcPts val="0"/>
-              </a:spcAft>
-            </a:pPr>
-            <a:r>
-              <a:rPr sz="850" b="1" i="0">
+              <a:rPr sz="900" b="1" i="0">
                 <a:solidFill>
                   <a:srgbClr val="777D85"/>
                 </a:solidFill>
-                <a:latin typeface="Aptos"/>
+                <a:latin typeface="Segoe UI"/>
               </a:rPr>
               <a:t>→</a:t>
             </a:r>
@@ -4103,14 +3880,14 @@
       </p:sp>
       <p:sp>
         <p:nvSpPr>
-          <p:cNvPr id="24" name="Rounded Rectangle 23"/>
+          <p:cNvPr id="19" name="Rounded Rectangle 18"/>
           <p:cNvSpPr/>
           <p:nvPr/>
         </p:nvSpPr>
         <p:spPr>
           <a:xfrm>
-            <a:off x="2185415" y="2121408"/>
-            <a:ext cx="749808" cy="502920"/>
+            <a:off x="2834640" y="2185416"/>
+            <a:ext cx="1042415" cy="329184"/>
           </a:xfrm>
           <a:prstGeom prst="roundRect">
             <a:avLst>
@@ -4150,14 +3927,14 @@
       </p:sp>
       <p:sp>
         <p:nvSpPr>
-          <p:cNvPr id="25" name="TextBox 24"/>
+          <p:cNvPr id="20" name="TextBox 19"/>
           <p:cNvSpPr txBox="1"/>
           <p:nvPr/>
         </p:nvSpPr>
         <p:spPr>
           <a:xfrm>
-            <a:off x="2231135" y="2176272"/>
-            <a:ext cx="658368" cy="146304"/>
+            <a:off x="2889504" y="2217420"/>
+            <a:ext cx="932688" cy="237744"/>
           </a:xfrm>
           <a:prstGeom prst="rect">
             <a:avLst/>
@@ -4165,7 +3942,7 @@
           <a:noFill/>
         </p:spPr>
         <p:txBody>
-          <a:bodyPr wrap="square" lIns="0" rIns="0" tIns="0" bIns="0" anchor="t">
+          <a:bodyPr wrap="square" lIns="0" rIns="0" tIns="0" bIns="0" anchor="ctr">
             <a:spAutoFit/>
           </a:bodyPr>
           <a:lstStyle/>
@@ -4182,72 +3959,36 @@
               </a:spcAft>
             </a:pPr>
             <a:r>
-              <a:rPr sz="730" b="1" i="0">
+              <a:rPr sz="770" b="1" i="0">
                 <a:solidFill>
                   <a:srgbClr val="203657"/>
                 </a:solidFill>
-                <a:latin typeface="Aptos"/>
+                <a:latin typeface="Segoe UI"/>
               </a:rPr>
               <a:t>3  PENCIL</a:t>
             </a:r>
-          </a:p>
-        </p:txBody>
-      </p:sp>
-      <p:sp>
-        <p:nvSpPr>
-          <p:cNvPr id="26" name="TextBox 25"/>
+            <a:r>
+              <a:rPr sz="730" b="0" i="0">
+                <a:solidFill>
+                  <a:srgbClr val="434952"/>
+                </a:solidFill>
+                <a:latin typeface="Segoe UI"/>
+              </a:rPr>
+              <a:t>  ·  context budget s</a:t>
+            </a:r>
+          </a:p>
+        </p:txBody>
+      </p:sp>
+      <p:sp>
+        <p:nvSpPr>
+          <p:cNvPr id="21" name="TextBox 20"/>
           <p:cNvSpPr txBox="1"/>
           <p:nvPr/>
         </p:nvSpPr>
         <p:spPr>
           <a:xfrm>
-            <a:off x="2212847" y="2395728"/>
-            <a:ext cx="694944" cy="137160"/>
-          </a:xfrm>
-          <a:prstGeom prst="rect">
-            <a:avLst/>
-          </a:prstGeom>
-          <a:noFill/>
-        </p:spPr>
-        <p:txBody>
-          <a:bodyPr wrap="square" lIns="0" rIns="0" tIns="0" bIns="0" anchor="t">
-            <a:spAutoFit/>
-          </a:bodyPr>
-          <a:lstStyle/>
-          <a:p>
-            <a:pPr algn="ctr">
-              <a:lnSpc>
-                <a:spcPct val="100000"/>
-              </a:lnSpc>
-              <a:spcBef>
-                <a:spcPts val="0"/>
-              </a:spcBef>
-              <a:spcAft>
-                <a:spcPts val="0"/>
-              </a:spcAft>
-            </a:pPr>
-            <a:r>
-              <a:rPr sz="590" b="0" i="0">
-                <a:solidFill>
-                  <a:srgbClr val="434952"/>
-                </a:solidFill>
-                <a:latin typeface="Aptos"/>
-              </a:rPr>
-              <a:t>re-rank with s</a:t>
-            </a:r>
-          </a:p>
-        </p:txBody>
-      </p:sp>
-      <p:sp>
-        <p:nvSpPr>
-          <p:cNvPr id="27" name="TextBox 26"/>
-          <p:cNvSpPr txBox="1"/>
-          <p:nvPr/>
-        </p:nvSpPr>
-        <p:spPr>
-          <a:xfrm>
-            <a:off x="356616" y="2926080"/>
-            <a:ext cx="2743200" cy="164592"/>
+            <a:off x="384048" y="2761488"/>
+            <a:ext cx="3675887" cy="228600"/>
           </a:xfrm>
           <a:prstGeom prst="rect">
             <a:avLst/>
@@ -4272,27 +4013,27 @@
               </a:spcAft>
             </a:pPr>
             <a:r>
-              <a:rPr sz="770" b="1" i="0">
-                <a:solidFill>
-                  <a:srgbClr val="9D1B32"/>
-                </a:solidFill>
-                <a:latin typeface="Aptos"/>
+              <a:rPr sz="1200" b="1" i="0">
+                <a:solidFill>
+                  <a:srgbClr val="171A1F"/>
+                </a:solidFill>
+                <a:latin typeface="Georgia"/>
               </a:rPr>
-              <a:t>FREE-GPU REPRODUCTION  ·  PAPER USED 4–8× A100</a:t>
-            </a:r>
-          </a:p>
-        </p:txBody>
-      </p:sp>
-      <p:sp>
-        <p:nvSpPr>
-          <p:cNvPr id="28" name="Rounded Rectangle 27"/>
+              <a:t>Experiment</a:t>
+            </a:r>
+          </a:p>
+        </p:txBody>
+      </p:sp>
+      <p:sp>
+        <p:nvSpPr>
+          <p:cNvPr id="22" name="Rounded Rectangle 21"/>
           <p:cNvSpPr/>
           <p:nvPr/>
         </p:nvSpPr>
         <p:spPr>
           <a:xfrm>
-            <a:off x="356616" y="3145536"/>
-            <a:ext cx="841248" cy="749808"/>
+            <a:off x="384048" y="3054096"/>
+            <a:ext cx="3675887" cy="914400"/>
           </a:xfrm>
           <a:prstGeom prst="roundRect">
             <a:avLst>
@@ -4332,57 +4073,14 @@
       </p:sp>
       <p:sp>
         <p:nvSpPr>
-          <p:cNvPr id="29" name="Rectangle 28"/>
-          <p:cNvSpPr/>
-          <p:nvPr/>
-        </p:nvSpPr>
-        <p:spPr>
-          <a:xfrm>
-            <a:off x="356616" y="3145536"/>
-            <a:ext cx="841248" cy="36576"/>
-          </a:xfrm>
-          <a:prstGeom prst="rect">
-            <a:avLst/>
-          </a:prstGeom>
-          <a:solidFill>
-            <a:srgbClr val="203657"/>
-          </a:solidFill>
-          <a:ln>
-            <a:noFill/>
-          </a:ln>
-        </p:spPr>
-        <p:style>
-          <a:lnRef idx="1">
-            <a:schemeClr val="accent1"/>
-          </a:lnRef>
-          <a:fillRef idx="3">
-            <a:schemeClr val="accent1"/>
-          </a:fillRef>
-          <a:effectRef idx="2">
-            <a:schemeClr val="accent1"/>
-          </a:effectRef>
-          <a:fontRef idx="minor">
-            <a:schemeClr val="lt1"/>
-          </a:fontRef>
-        </p:style>
-        <p:txBody>
-          <a:bodyPr rtlCol="0" anchor="ctr"/>
-          <a:lstStyle/>
-          <a:p>
-            <a:pPr algn="ctr"/>
-          </a:p>
-        </p:txBody>
-      </p:sp>
-      <p:sp>
-        <p:nvSpPr>
-          <p:cNvPr id="30" name="TextBox 29"/>
+          <p:cNvPr id="23" name="TextBox 22"/>
           <p:cNvSpPr txBox="1"/>
           <p:nvPr/>
         </p:nvSpPr>
         <p:spPr>
           <a:xfrm>
-            <a:off x="411480" y="3255264"/>
-            <a:ext cx="731520" cy="228600"/>
+            <a:off x="530352" y="3154680"/>
+            <a:ext cx="713232" cy="155448"/>
           </a:xfrm>
           <a:prstGeom prst="rect">
             <a:avLst/>
@@ -4395,7 +4093,7 @@
           </a:bodyPr>
           <a:lstStyle/>
           <a:p>
-            <a:pPr algn="ctr">
+            <a:pPr algn="l">
               <a:lnSpc>
                 <a:spcPct val="100000"/>
               </a:lnSpc>
@@ -4407,27 +4105,27 @@
               </a:spcAft>
             </a:pPr>
             <a:r>
-              <a:rPr sz="1450" b="1" i="0">
+              <a:rPr sz="810" b="1" i="0">
                 <a:solidFill>
                   <a:srgbClr val="203657"/>
                 </a:solidFill>
-                <a:latin typeface="Georgia"/>
+                <a:latin typeface="Segoe UI"/>
               </a:rPr>
-              <a:t>44.00</a:t>
-            </a:r>
-          </a:p>
-        </p:txBody>
-      </p:sp>
-      <p:sp>
-        <p:nvSpPr>
-          <p:cNvPr id="31" name="TextBox 30"/>
+              <a:t>Data</a:t>
+            </a:r>
+          </a:p>
+        </p:txBody>
+      </p:sp>
+      <p:sp>
+        <p:nvSpPr>
+          <p:cNvPr id="24" name="TextBox 23"/>
           <p:cNvSpPr txBox="1"/>
           <p:nvPr/>
         </p:nvSpPr>
         <p:spPr>
           <a:xfrm>
-            <a:off x="393192" y="3502152"/>
-            <a:ext cx="768096" cy="128016"/>
+            <a:off x="1243584" y="3154680"/>
+            <a:ext cx="2651760" cy="155448"/>
           </a:xfrm>
           <a:prstGeom prst="rect">
             <a:avLst/>
@@ -4440,7 +4138,7 @@
           </a:bodyPr>
           <a:lstStyle/>
           <a:p>
-            <a:pPr algn="ctr">
+            <a:pPr algn="l">
               <a:lnSpc>
                 <a:spcPct val="100000"/>
               </a:lnSpc>
@@ -4452,27 +4150,27 @@
               </a:spcAft>
             </a:pPr>
             <a:r>
-              <a:rPr sz="680" b="1" i="0">
-                <a:solidFill>
-                  <a:srgbClr val="171A1F"/>
-                </a:solidFill>
-                <a:latin typeface="Aptos"/>
+              <a:rPr sz="810" b="0" i="0">
+                <a:solidFill>
+                  <a:srgbClr val="434952"/>
+                </a:solidFill>
+                <a:latin typeface="Segoe UI"/>
               </a:rPr>
-              <a:t>Cora test</a:t>
-            </a:r>
-          </a:p>
-        </p:txBody>
-      </p:sp>
-      <p:sp>
-        <p:nvSpPr>
-          <p:cNvPr id="32" name="TextBox 31"/>
+              <a:t>Cora and Citeseer</a:t>
+            </a:r>
+          </a:p>
+        </p:txBody>
+      </p:sp>
+      <p:sp>
+        <p:nvSpPr>
+          <p:cNvPr id="25" name="TextBox 24"/>
           <p:cNvSpPr txBox="1"/>
           <p:nvPr/>
         </p:nvSpPr>
         <p:spPr>
           <a:xfrm>
-            <a:off x="393192" y="3675887"/>
-            <a:ext cx="768096" cy="118872"/>
+            <a:off x="530352" y="3346704"/>
+            <a:ext cx="713232" cy="155448"/>
           </a:xfrm>
           <a:prstGeom prst="rect">
             <a:avLst/>
@@ -4485,7 +4183,7 @@
           </a:bodyPr>
           <a:lstStyle/>
           <a:p>
-            <a:pPr algn="ctr">
+            <a:pPr algn="l">
               <a:lnSpc>
                 <a:spcPct val="100000"/>
               </a:lnSpc>
@@ -4497,27 +4195,297 @@
               </a:spcAft>
             </a:pPr>
             <a:r>
-              <a:rPr sz="620" b="0" i="0">
-                <a:solidFill>
-                  <a:srgbClr val="777D85"/>
-                </a:solidFill>
-                <a:latin typeface="Consolas"/>
+              <a:rPr sz="810" b="1" i="0">
+                <a:solidFill>
+                  <a:srgbClr val="203657"/>
+                </a:solidFill>
+                <a:latin typeface="Segoe UI"/>
               </a:rPr>
-              <a:t>paper 42.23</a:t>
-            </a:r>
-          </a:p>
-        </p:txBody>
-      </p:sp>
-      <p:sp>
-        <p:nvSpPr>
-          <p:cNvPr id="33" name="Rounded Rectangle 32"/>
+              <a:t>Evaluation</a:t>
+            </a:r>
+          </a:p>
+        </p:txBody>
+      </p:sp>
+      <p:sp>
+        <p:nvSpPr>
+          <p:cNvPr id="26" name="TextBox 25"/>
+          <p:cNvSpPr txBox="1"/>
+          <p:nvPr/>
+        </p:nvSpPr>
+        <p:spPr>
+          <a:xfrm>
+            <a:off x="1243584" y="3346704"/>
+            <a:ext cx="2651760" cy="155448"/>
+          </a:xfrm>
+          <a:prstGeom prst="rect">
+            <a:avLst/>
+          </a:prstGeom>
+          <a:noFill/>
+        </p:spPr>
+        <p:txBody>
+          <a:bodyPr wrap="square" lIns="0" rIns="0" tIns="0" bIns="0" anchor="t">
+            <a:spAutoFit/>
+          </a:bodyPr>
+          <a:lstStyle/>
+          <a:p>
+            <a:pPr algn="l">
+              <a:lnSpc>
+                <a:spcPct val="100000"/>
+              </a:lnSpc>
+              <a:spcBef>
+                <a:spcPts val="0"/>
+              </a:spcBef>
+              <a:spcAft>
+                <a:spcPts val="0"/>
+              </a:spcAft>
+            </a:pPr>
+            <a:r>
+              <a:rPr sz="810" b="0" i="0">
+                <a:solidFill>
+                  <a:srgbClr val="434952"/>
+                </a:solidFill>
+                <a:latin typeface="Segoe UI"/>
+              </a:rPr>
+              <a:t>shared negative pool and HeaRT hard negatives</a:t>
+            </a:r>
+          </a:p>
+        </p:txBody>
+      </p:sp>
+      <p:sp>
+        <p:nvSpPr>
+          <p:cNvPr id="27" name="TextBox 26"/>
+          <p:cNvSpPr txBox="1"/>
+          <p:nvPr/>
+        </p:nvSpPr>
+        <p:spPr>
+          <a:xfrm>
+            <a:off x="530352" y="3538728"/>
+            <a:ext cx="713232" cy="155448"/>
+          </a:xfrm>
+          <a:prstGeom prst="rect">
+            <a:avLst/>
+          </a:prstGeom>
+          <a:noFill/>
+        </p:spPr>
+        <p:txBody>
+          <a:bodyPr wrap="square" lIns="0" rIns="0" tIns="0" bIns="0" anchor="t">
+            <a:spAutoFit/>
+          </a:bodyPr>
+          <a:lstStyle/>
+          <a:p>
+            <a:pPr algn="l">
+              <a:lnSpc>
+                <a:spcPct val="100000"/>
+              </a:lnSpc>
+              <a:spcBef>
+                <a:spcPts val="0"/>
+              </a:spcBef>
+              <a:spcAft>
+                <a:spcPts val="0"/>
+              </a:spcAft>
+            </a:pPr>
+            <a:r>
+              <a:rPr sz="810" b="1" i="0">
+                <a:solidFill>
+                  <a:srgbClr val="203657"/>
+                </a:solidFill>
+                <a:latin typeface="Segoe UI"/>
+              </a:rPr>
+              <a:t>Selection</a:t>
+            </a:r>
+          </a:p>
+        </p:txBody>
+      </p:sp>
+      <p:sp>
+        <p:nvSpPr>
+          <p:cNvPr id="28" name="TextBox 27"/>
+          <p:cNvSpPr txBox="1"/>
+          <p:nvPr/>
+        </p:nvSpPr>
+        <p:spPr>
+          <a:xfrm>
+            <a:off x="1243584" y="3538728"/>
+            <a:ext cx="2651760" cy="155448"/>
+          </a:xfrm>
+          <a:prstGeom prst="rect">
+            <a:avLst/>
+          </a:prstGeom>
+          <a:noFill/>
+        </p:spPr>
+        <p:txBody>
+          <a:bodyPr wrap="square" lIns="0" rIns="0" tIns="0" bIns="0" anchor="t">
+            <a:spAutoFit/>
+          </a:bodyPr>
+          <a:lstStyle/>
+          <a:p>
+            <a:pPr algn="l">
+              <a:lnSpc>
+                <a:spcPct val="100000"/>
+              </a:lnSpc>
+              <a:spcBef>
+                <a:spcPts val="0"/>
+              </a:spcBef>
+              <a:spcAft>
+                <a:spcPts val="0"/>
+              </a:spcAft>
+            </a:pPr>
+            <a:r>
+              <a:rPr sz="810" b="0" i="0">
+                <a:solidFill>
+                  <a:srgbClr val="434952"/>
+                </a:solidFill>
+                <a:latin typeface="Segoe UI"/>
+              </a:rPr>
+              <a:t>(k, s) chosen on validation data under fixed compute caps</a:t>
+            </a:r>
+          </a:p>
+        </p:txBody>
+      </p:sp>
+      <p:sp>
+        <p:nvSpPr>
+          <p:cNvPr id="29" name="TextBox 28"/>
+          <p:cNvSpPr txBox="1"/>
+          <p:nvPr/>
+        </p:nvSpPr>
+        <p:spPr>
+          <a:xfrm>
+            <a:off x="530352" y="3730752"/>
+            <a:ext cx="713232" cy="155448"/>
+          </a:xfrm>
+          <a:prstGeom prst="rect">
+            <a:avLst/>
+          </a:prstGeom>
+          <a:noFill/>
+        </p:spPr>
+        <p:txBody>
+          <a:bodyPr wrap="square" lIns="0" rIns="0" tIns="0" bIns="0" anchor="t">
+            <a:spAutoFit/>
+          </a:bodyPr>
+          <a:lstStyle/>
+          <a:p>
+            <a:pPr algn="l">
+              <a:lnSpc>
+                <a:spcPct val="100000"/>
+              </a:lnSpc>
+              <a:spcBef>
+                <a:spcPts val="0"/>
+              </a:spcBef>
+              <a:spcAft>
+                <a:spcPts val="0"/>
+              </a:spcAft>
+            </a:pPr>
+            <a:r>
+              <a:rPr sz="810" b="1" i="0">
+                <a:solidFill>
+                  <a:srgbClr val="203657"/>
+                </a:solidFill>
+                <a:latin typeface="Segoe UI"/>
+              </a:rPr>
+              <a:t>Recorded</a:t>
+            </a:r>
+          </a:p>
+        </p:txBody>
+      </p:sp>
+      <p:sp>
+        <p:nvSpPr>
+          <p:cNvPr id="30" name="TextBox 29"/>
+          <p:cNvSpPr txBox="1"/>
+          <p:nvPr/>
+        </p:nvSpPr>
+        <p:spPr>
+          <a:xfrm>
+            <a:off x="1243584" y="3730752"/>
+            <a:ext cx="2651760" cy="155448"/>
+          </a:xfrm>
+          <a:prstGeom prst="rect">
+            <a:avLst/>
+          </a:prstGeom>
+          <a:noFill/>
+        </p:spPr>
+        <p:txBody>
+          <a:bodyPr wrap="square" lIns="0" rIns="0" tIns="0" bIns="0" anchor="t">
+            <a:spAutoFit/>
+          </a:bodyPr>
+          <a:lstStyle/>
+          <a:p>
+            <a:pPr algn="l">
+              <a:lnSpc>
+                <a:spcPct val="100000"/>
+              </a:lnSpc>
+              <a:spcBef>
+                <a:spcPts val="0"/>
+              </a:spcBef>
+              <a:spcAft>
+                <a:spcPts val="0"/>
+              </a:spcAft>
+            </a:pPr>
+            <a:r>
+              <a:rPr sz="810" b="0" i="0">
+                <a:solidFill>
+                  <a:srgbClr val="434952"/>
+                </a:solidFill>
+                <a:latin typeface="Segoe UI"/>
+              </a:rPr>
+              <a:t>test MRR, measured T4 time, peak VRAM, three seeds</a:t>
+            </a:r>
+          </a:p>
+        </p:txBody>
+      </p:sp>
+      <p:sp>
+        <p:nvSpPr>
+          <p:cNvPr id="31" name="TextBox 30"/>
+          <p:cNvSpPr txBox="1"/>
+          <p:nvPr/>
+        </p:nvSpPr>
+        <p:spPr>
+          <a:xfrm>
+            <a:off x="384048" y="4133087"/>
+            <a:ext cx="3675887" cy="228600"/>
+          </a:xfrm>
+          <a:prstGeom prst="rect">
+            <a:avLst/>
+          </a:prstGeom>
+          <a:noFill/>
+        </p:spPr>
+        <p:txBody>
+          <a:bodyPr wrap="square" lIns="0" rIns="0" tIns="0" bIns="0" anchor="t">
+            <a:spAutoFit/>
+          </a:bodyPr>
+          <a:lstStyle/>
+          <a:p>
+            <a:pPr algn="l">
+              <a:lnSpc>
+                <a:spcPct val="100000"/>
+              </a:lnSpc>
+              <a:spcBef>
+                <a:spcPts val="0"/>
+              </a:spcBef>
+              <a:spcAft>
+                <a:spcPts val="0"/>
+              </a:spcAft>
+            </a:pPr>
+            <a:r>
+              <a:rPr sz="1200" b="1" i="0">
+                <a:solidFill>
+                  <a:srgbClr val="171A1F"/>
+                </a:solidFill>
+                <a:latin typeface="Georgia"/>
+              </a:rPr>
+              <a:t>Reproduction check</a:t>
+            </a:r>
+          </a:p>
+        </p:txBody>
+      </p:sp>
+      <p:sp>
+        <p:nvSpPr>
+          <p:cNvPr id="32" name="Rounded Rectangle 31"/>
           <p:cNvSpPr/>
           <p:nvPr/>
         </p:nvSpPr>
         <p:spPr>
           <a:xfrm>
-            <a:off x="1280160" y="3145536"/>
-            <a:ext cx="841248" cy="749808"/>
+            <a:off x="384048" y="4416552"/>
+            <a:ext cx="1124712" cy="475488"/>
           </a:xfrm>
           <a:prstGeom prst="roundRect">
             <a:avLst>
@@ -4557,57 +4525,14 @@
       </p:sp>
       <p:sp>
         <p:nvSpPr>
-          <p:cNvPr id="34" name="Rectangle 33"/>
-          <p:cNvSpPr/>
-          <p:nvPr/>
-        </p:nvSpPr>
-        <p:spPr>
-          <a:xfrm>
-            <a:off x="1280160" y="3145536"/>
-            <a:ext cx="841248" cy="36576"/>
-          </a:xfrm>
-          <a:prstGeom prst="rect">
-            <a:avLst/>
-          </a:prstGeom>
-          <a:solidFill>
-            <a:srgbClr val="0F7670"/>
-          </a:solidFill>
-          <a:ln>
-            <a:noFill/>
-          </a:ln>
-        </p:spPr>
-        <p:style>
-          <a:lnRef idx="1">
-            <a:schemeClr val="accent1"/>
-          </a:lnRef>
-          <a:fillRef idx="3">
-            <a:schemeClr val="accent1"/>
-          </a:fillRef>
-          <a:effectRef idx="2">
-            <a:schemeClr val="accent1"/>
-          </a:effectRef>
-          <a:fontRef idx="minor">
-            <a:schemeClr val="lt1"/>
-          </a:fontRef>
-        </p:style>
-        <p:txBody>
-          <a:bodyPr rtlCol="0" anchor="ctr"/>
-          <a:lstStyle/>
-          <a:p>
-            <a:pPr algn="ctr"/>
-          </a:p>
-        </p:txBody>
-      </p:sp>
-      <p:sp>
-        <p:nvSpPr>
-          <p:cNvPr id="35" name="TextBox 34"/>
+          <p:cNvPr id="33" name="TextBox 32"/>
           <p:cNvSpPr txBox="1"/>
           <p:nvPr/>
         </p:nvSpPr>
         <p:spPr>
           <a:xfrm>
-            <a:off x="1335024" y="3255264"/>
-            <a:ext cx="731520" cy="228600"/>
+            <a:off x="429768" y="4489704"/>
+            <a:ext cx="566928" cy="201168"/>
           </a:xfrm>
           <a:prstGeom prst="rect">
             <a:avLst/>
@@ -4632,27 +4557,27 @@
               </a:spcAft>
             </a:pPr>
             <a:r>
-              <a:rPr sz="1450" b="1" i="0">
-                <a:solidFill>
-                  <a:srgbClr val="0F7670"/>
+              <a:rPr sz="1220" b="1" i="0">
+                <a:solidFill>
+                  <a:srgbClr val="203657"/>
                 </a:solidFill>
                 <a:latin typeface="Georgia"/>
               </a:rPr>
-              <a:t>50.46</a:t>
-            </a:r>
-          </a:p>
-        </p:txBody>
-      </p:sp>
-      <p:sp>
-        <p:nvSpPr>
-          <p:cNvPr id="36" name="TextBox 35"/>
+              <a:t>44.00</a:t>
+            </a:r>
+          </a:p>
+        </p:txBody>
+      </p:sp>
+      <p:sp>
+        <p:nvSpPr>
+          <p:cNvPr id="34" name="TextBox 33"/>
           <p:cNvSpPr txBox="1"/>
           <p:nvPr/>
         </p:nvSpPr>
         <p:spPr>
           <a:xfrm>
-            <a:off x="1316736" y="3502152"/>
-            <a:ext cx="768096" cy="128016"/>
+            <a:off x="1014983" y="4443984"/>
+            <a:ext cx="429768" cy="438912"/>
           </a:xfrm>
           <a:prstGeom prst="rect">
             <a:avLst/>
@@ -4665,9 +4590,9 @@
           </a:bodyPr>
           <a:lstStyle/>
           <a:p>
-            <a:pPr algn="ctr">
+            <a:pPr algn="l">
               <a:lnSpc>
-                <a:spcPct val="100000"/>
+                <a:spcPct val="95000"/>
               </a:lnSpc>
               <a:spcBef>
                 <a:spcPts val="0"/>
@@ -4677,72 +4602,37 @@
               </a:spcAft>
             </a:pPr>
             <a:r>
-              <a:rPr sz="680" b="1" i="0">
+              <a:rPr sz="760" b="1" i="0">
                 <a:solidFill>
                   <a:srgbClr val="171A1F"/>
                 </a:solidFill>
-                <a:latin typeface="Aptos"/>
+                <a:latin typeface="Segoe UI"/>
               </a:rPr>
-              <a:t>Citeseer test</a:t>
-            </a:r>
-          </a:p>
-        </p:txBody>
-      </p:sp>
-      <p:sp>
-        <p:nvSpPr>
-          <p:cNvPr id="37" name="TextBox 36"/>
-          <p:cNvSpPr txBox="1"/>
-          <p:nvPr/>
-        </p:nvSpPr>
-        <p:spPr>
-          <a:xfrm>
-            <a:off x="1316736" y="3675887"/>
-            <a:ext cx="768096" cy="118872"/>
-          </a:xfrm>
-          <a:prstGeom prst="rect">
-            <a:avLst/>
-          </a:prstGeom>
-          <a:noFill/>
-        </p:spPr>
-        <p:txBody>
-          <a:bodyPr wrap="square" lIns="0" rIns="0" tIns="0" bIns="0" anchor="t">
-            <a:spAutoFit/>
-          </a:bodyPr>
-          <a:lstStyle/>
-          <a:p>
-            <a:pPr algn="ctr">
-              <a:lnSpc>
-                <a:spcPct val="100000"/>
-              </a:lnSpc>
-              <a:spcBef>
-                <a:spcPts val="0"/>
-              </a:spcBef>
-              <a:spcAft>
-                <a:spcPts val="0"/>
-              </a:spcAft>
-            </a:pPr>
-            <a:r>
-              <a:rPr sz="620" b="0" i="0">
+              <a:t>Cora test</a:t>
+            </a:r>
+            <a:r>
+              <a:rPr sz="700" b="0" i="0">
                 <a:solidFill>
                   <a:srgbClr val="777D85"/>
                 </a:solidFill>
-                <a:latin typeface="Consolas"/>
+                <a:latin typeface="Segoe UI"/>
               </a:rPr>
-              <a:t>paper 47.51</a:t>
-            </a:r>
-          </a:p>
-        </p:txBody>
-      </p:sp>
-      <p:sp>
-        <p:nvSpPr>
-          <p:cNvPr id="38" name="Rounded Rectangle 37"/>
+              <a:t>
+paper 42.23</a:t>
+            </a:r>
+          </a:p>
+        </p:txBody>
+      </p:sp>
+      <p:sp>
+        <p:nvSpPr>
+          <p:cNvPr id="35" name="Rounded Rectangle 34"/>
           <p:cNvSpPr/>
           <p:nvPr/>
         </p:nvSpPr>
         <p:spPr>
           <a:xfrm>
-            <a:off x="2203704" y="3145536"/>
-            <a:ext cx="841248" cy="749808"/>
+            <a:off x="1627632" y="4416552"/>
+            <a:ext cx="1124712" cy="475488"/>
           </a:xfrm>
           <a:prstGeom prst="roundRect">
             <a:avLst>
@@ -4782,57 +4672,14 @@
       </p:sp>
       <p:sp>
         <p:nvSpPr>
-          <p:cNvPr id="39" name="Rectangle 38"/>
-          <p:cNvSpPr/>
-          <p:nvPr/>
-        </p:nvSpPr>
-        <p:spPr>
-          <a:xfrm>
-            <a:off x="2203704" y="3145536"/>
-            <a:ext cx="841248" cy="36576"/>
-          </a:xfrm>
-          <a:prstGeom prst="rect">
-            <a:avLst/>
-          </a:prstGeom>
-          <a:solidFill>
-            <a:srgbClr val="9D1B32"/>
-          </a:solidFill>
-          <a:ln>
-            <a:noFill/>
-          </a:ln>
-        </p:spPr>
-        <p:style>
-          <a:lnRef idx="1">
-            <a:schemeClr val="accent1"/>
-          </a:lnRef>
-          <a:fillRef idx="3">
-            <a:schemeClr val="accent1"/>
-          </a:fillRef>
-          <a:effectRef idx="2">
-            <a:schemeClr val="accent1"/>
-          </a:effectRef>
-          <a:fontRef idx="minor">
-            <a:schemeClr val="lt1"/>
-          </a:fontRef>
-        </p:style>
-        <p:txBody>
-          <a:bodyPr rtlCol="0" anchor="ctr"/>
-          <a:lstStyle/>
-          <a:p>
-            <a:pPr algn="ctr"/>
-          </a:p>
-        </p:txBody>
-      </p:sp>
-      <p:sp>
-        <p:nvSpPr>
-          <p:cNvPr id="40" name="TextBox 39"/>
+          <p:cNvPr id="36" name="TextBox 35"/>
           <p:cNvSpPr txBox="1"/>
           <p:nvPr/>
         </p:nvSpPr>
         <p:spPr>
           <a:xfrm>
-            <a:off x="2258568" y="3255264"/>
-            <a:ext cx="731520" cy="228600"/>
+            <a:off x="1673352" y="4489704"/>
+            <a:ext cx="566928" cy="201168"/>
           </a:xfrm>
           <a:prstGeom prst="rect">
             <a:avLst/>
@@ -4857,27 +4704,27 @@
               </a:spcAft>
             </a:pPr>
             <a:r>
-              <a:rPr sz="1450" b="1" i="0">
-                <a:solidFill>
-                  <a:srgbClr val="9D1B32"/>
+              <a:rPr sz="1220" b="1" i="0">
+                <a:solidFill>
+                  <a:srgbClr val="0F7670"/>
                 </a:solidFill>
                 <a:latin typeface="Georgia"/>
               </a:rPr>
-              <a:t>112</a:t>
-            </a:r>
-          </a:p>
-        </p:txBody>
-      </p:sp>
-      <p:sp>
-        <p:nvSpPr>
-          <p:cNvPr id="41" name="TextBox 40"/>
+              <a:t>50.46</a:t>
+            </a:r>
+          </a:p>
+        </p:txBody>
+      </p:sp>
+      <p:sp>
+        <p:nvSpPr>
+          <p:cNvPr id="37" name="TextBox 36"/>
           <p:cNvSpPr txBox="1"/>
           <p:nvPr/>
         </p:nvSpPr>
         <p:spPr>
           <a:xfrm>
-            <a:off x="2240280" y="3502152"/>
-            <a:ext cx="768096" cy="128016"/>
+            <a:off x="2258568" y="4443984"/>
+            <a:ext cx="429768" cy="438912"/>
           </a:xfrm>
           <a:prstGeom prst="rect">
             <a:avLst/>
@@ -4890,9 +4737,9 @@
           </a:bodyPr>
           <a:lstStyle/>
           <a:p>
-            <a:pPr algn="ctr">
+            <a:pPr algn="l">
               <a:lnSpc>
-                <a:spcPct val="100000"/>
+                <a:spcPct val="95000"/>
               </a:lnSpc>
               <a:spcBef>
                 <a:spcPts val="0"/>
@@ -4902,117 +4749,37 @@
               </a:spcAft>
             </a:pPr>
             <a:r>
-              <a:rPr sz="680" b="1" i="0">
+              <a:rPr sz="760" b="1" i="0">
                 <a:solidFill>
                   <a:srgbClr val="171A1F"/>
                 </a:solidFill>
-                <a:latin typeface="Aptos"/>
+                <a:latin typeface="Segoe UI"/>
               </a:rPr>
-              <a:t>score dumps</a:t>
-            </a:r>
-          </a:p>
-        </p:txBody>
-      </p:sp>
-      <p:sp>
-        <p:nvSpPr>
-          <p:cNvPr id="42" name="TextBox 41"/>
-          <p:cNvSpPr txBox="1"/>
-          <p:nvPr/>
-        </p:nvSpPr>
-        <p:spPr>
-          <a:xfrm>
-            <a:off x="2240280" y="3675887"/>
-            <a:ext cx="768096" cy="118872"/>
-          </a:xfrm>
-          <a:prstGeom prst="rect">
-            <a:avLst/>
-          </a:prstGeom>
-          <a:noFill/>
-        </p:spPr>
-        <p:txBody>
-          <a:bodyPr wrap="square" lIns="0" rIns="0" tIns="0" bIns="0" anchor="t">
-            <a:spAutoFit/>
-          </a:bodyPr>
-          <a:lstStyle/>
-          <a:p>
-            <a:pPr algn="ctr">
-              <a:lnSpc>
-                <a:spcPct val="100000"/>
-              </a:lnSpc>
-              <a:spcBef>
-                <a:spcPts val="0"/>
-              </a:spcBef>
-              <a:spcAft>
-                <a:spcPts val="0"/>
-              </a:spcAft>
-            </a:pPr>
-            <a:r>
-              <a:rPr sz="620" b="0" i="0">
+              <a:t>Citeseer test</a:t>
+            </a:r>
+            <a:r>
+              <a:rPr sz="700" b="0" i="0">
                 <a:solidFill>
                   <a:srgbClr val="777D85"/>
                 </a:solidFill>
-                <a:latin typeface="Consolas"/>
+                <a:latin typeface="Segoe UI"/>
               </a:rPr>
-              <a:t>4 regimes</a:t>
-            </a:r>
-          </a:p>
-        </p:txBody>
-      </p:sp>
-      <p:sp>
-        <p:nvSpPr>
-          <p:cNvPr id="43" name="TextBox 42"/>
-          <p:cNvSpPr txBox="1"/>
-          <p:nvPr/>
-        </p:nvSpPr>
-        <p:spPr>
-          <a:xfrm>
-            <a:off x="356616" y="4069080"/>
-            <a:ext cx="2743200" cy="164592"/>
-          </a:xfrm>
-          <a:prstGeom prst="rect">
-            <a:avLst/>
-          </a:prstGeom>
-          <a:noFill/>
-        </p:spPr>
-        <p:txBody>
-          <a:bodyPr wrap="square" lIns="0" rIns="0" tIns="0" bIns="0" anchor="t">
-            <a:spAutoFit/>
-          </a:bodyPr>
-          <a:lstStyle/>
-          <a:p>
-            <a:pPr algn="l">
-              <a:lnSpc>
-                <a:spcPct val="100000"/>
-              </a:lnSpc>
-              <a:spcBef>
-                <a:spcPts val="0"/>
-              </a:spcBef>
-              <a:spcAft>
-                <a:spcPts val="0"/>
-              </a:spcAft>
-            </a:pPr>
-            <a:r>
-              <a:rPr sz="819" b="1" i="0">
-                <a:solidFill>
-                  <a:srgbClr val="9D1B32"/>
-                </a:solidFill>
-                <a:latin typeface="Aptos"/>
-              </a:rPr>
-              <a:t>EXPERIMENT SETUP</a:t>
-            </a:r>
-          </a:p>
-        </p:txBody>
-      </p:sp>
-      <p:sp>
-        <p:nvSpPr>
-          <p:cNvPr id="44" name="Rounded Rectangle 43"/>
+              <a:t>
+paper 47.51</a:t>
+            </a:r>
+          </a:p>
+        </p:txBody>
+      </p:sp>
+      <p:sp>
+        <p:nvSpPr>
+          <p:cNvPr id="38" name="Rounded Rectangle 37"/>
           <p:cNvSpPr/>
           <p:nvPr/>
         </p:nvSpPr>
         <p:spPr>
           <a:xfrm>
-            <a:off x="356616" y="4288536"/>
-            <a:ext cx="2743200" cy="1261872"/>
+            <a:off x="2871216" y="4416552"/>
+            <a:ext cx="1124712" cy="475488"/>
           </a:xfrm>
           <a:prstGeom prst="roundRect">
             <a:avLst>
@@ -5052,14 +4819,114 @@
       </p:sp>
       <p:sp>
         <p:nvSpPr>
-          <p:cNvPr id="45" name="TextBox 44"/>
+          <p:cNvPr id="39" name="TextBox 38"/>
           <p:cNvSpPr txBox="1"/>
           <p:nvPr/>
         </p:nvSpPr>
         <p:spPr>
           <a:xfrm>
-            <a:off x="475488" y="4379976"/>
-            <a:ext cx="603504" cy="146304"/>
+            <a:off x="2916936" y="4489704"/>
+            <a:ext cx="566928" cy="201168"/>
+          </a:xfrm>
+          <a:prstGeom prst="rect">
+            <a:avLst/>
+          </a:prstGeom>
+          <a:noFill/>
+        </p:spPr>
+        <p:txBody>
+          <a:bodyPr wrap="square" lIns="0" rIns="0" tIns="0" bIns="0" anchor="t">
+            <a:spAutoFit/>
+          </a:bodyPr>
+          <a:lstStyle/>
+          <a:p>
+            <a:pPr algn="ctr">
+              <a:lnSpc>
+                <a:spcPct val="100000"/>
+              </a:lnSpc>
+              <a:spcBef>
+                <a:spcPts val="0"/>
+              </a:spcBef>
+              <a:spcAft>
+                <a:spcPts val="0"/>
+              </a:spcAft>
+            </a:pPr>
+            <a:r>
+              <a:rPr sz="1220" b="1" i="0">
+                <a:solidFill>
+                  <a:srgbClr val="9D1B32"/>
+                </a:solidFill>
+                <a:latin typeface="Georgia"/>
+              </a:rPr>
+              <a:t>112</a:t>
+            </a:r>
+          </a:p>
+        </p:txBody>
+      </p:sp>
+      <p:sp>
+        <p:nvSpPr>
+          <p:cNvPr id="40" name="TextBox 39"/>
+          <p:cNvSpPr txBox="1"/>
+          <p:nvPr/>
+        </p:nvSpPr>
+        <p:spPr>
+          <a:xfrm>
+            <a:off x="3502152" y="4443984"/>
+            <a:ext cx="429768" cy="438912"/>
+          </a:xfrm>
+          <a:prstGeom prst="rect">
+            <a:avLst/>
+          </a:prstGeom>
+          <a:noFill/>
+        </p:spPr>
+        <p:txBody>
+          <a:bodyPr wrap="square" lIns="0" rIns="0" tIns="0" bIns="0" anchor="t">
+            <a:spAutoFit/>
+          </a:bodyPr>
+          <a:lstStyle/>
+          <a:p>
+            <a:pPr algn="l">
+              <a:lnSpc>
+                <a:spcPct val="95000"/>
+              </a:lnSpc>
+              <a:spcBef>
+                <a:spcPts val="0"/>
+              </a:spcBef>
+              <a:spcAft>
+                <a:spcPts val="0"/>
+              </a:spcAft>
+            </a:pPr>
+            <a:r>
+              <a:rPr sz="760" b="1" i="0">
+                <a:solidFill>
+                  <a:srgbClr val="171A1F"/>
+                </a:solidFill>
+                <a:latin typeface="Segoe UI"/>
+              </a:rPr>
+              <a:t>score dumps</a:t>
+            </a:r>
+            <a:r>
+              <a:rPr sz="700" b="0" i="0">
+                <a:solidFill>
+                  <a:srgbClr val="777D85"/>
+                </a:solidFill>
+                <a:latin typeface="Segoe UI"/>
+              </a:rPr>
+              <a:t>
+four regimes</a:t>
+            </a:r>
+          </a:p>
+        </p:txBody>
+      </p:sp>
+      <p:sp>
+        <p:nvSpPr>
+          <p:cNvPr id="41" name="TextBox 40"/>
+          <p:cNvSpPr txBox="1"/>
+          <p:nvPr/>
+        </p:nvSpPr>
+        <p:spPr>
+          <a:xfrm>
+            <a:off x="4279392" y="1115568"/>
+            <a:ext cx="7516368" cy="228600"/>
           </a:xfrm>
           <a:prstGeom prst="rect">
             <a:avLst/>
@@ -5084,653 +4951,27 @@
               </a:spcAft>
             </a:pPr>
             <a:r>
-              <a:rPr sz="700" b="1" i="0">
-                <a:solidFill>
-                  <a:srgbClr val="203657"/>
-                </a:solidFill>
-                <a:latin typeface="Aptos"/>
+              <a:rPr sz="1200" b="1" i="0">
+                <a:solidFill>
+                  <a:srgbClr val="171A1F"/>
+                </a:solidFill>
+                <a:latin typeface="Georgia"/>
               </a:rPr>
-              <a:t>Data</a:t>
-            </a:r>
-          </a:p>
-        </p:txBody>
-      </p:sp>
-      <p:sp>
-        <p:nvSpPr>
-          <p:cNvPr id="46" name="TextBox 45"/>
-          <p:cNvSpPr txBox="1"/>
-          <p:nvPr/>
-        </p:nvSpPr>
-        <p:spPr>
-          <a:xfrm>
-            <a:off x="1078992" y="4379976"/>
-            <a:ext cx="1874519" cy="173736"/>
-          </a:xfrm>
-          <a:prstGeom prst="rect">
-            <a:avLst/>
-          </a:prstGeom>
-          <a:noFill/>
-        </p:spPr>
-        <p:txBody>
-          <a:bodyPr wrap="square" lIns="0" rIns="0" tIns="0" bIns="0" anchor="t">
-            <a:spAutoFit/>
-          </a:bodyPr>
-          <a:lstStyle/>
-          <a:p>
-            <a:pPr algn="l">
-              <a:lnSpc>
-                <a:spcPct val="100000"/>
-              </a:lnSpc>
-              <a:spcBef>
-                <a:spcPts val="0"/>
-              </a:spcBef>
-              <a:spcAft>
-                <a:spcPts val="0"/>
-              </a:spcAft>
-            </a:pPr>
-            <a:r>
-              <a:rPr sz="655" b="0" i="0">
-                <a:solidFill>
-                  <a:srgbClr val="434952"/>
-                </a:solidFill>
-                <a:latin typeface="Aptos"/>
-              </a:rPr>
-              <a:t>Cora and Citeseer</a:t>
-            </a:r>
-          </a:p>
-        </p:txBody>
-      </p:sp>
-      <p:sp>
-        <p:nvSpPr>
-          <p:cNvPr id="47" name="Rectangle 46"/>
+              <a:t>Results</a:t>
+            </a:r>
+          </a:p>
+        </p:txBody>
+      </p:sp>
+      <p:sp>
+        <p:nvSpPr>
+          <p:cNvPr id="42" name="Rounded Rectangle 41"/>
           <p:cNvSpPr/>
           <p:nvPr/>
         </p:nvSpPr>
         <p:spPr>
           <a:xfrm>
-            <a:off x="466344" y="4613148"/>
-            <a:ext cx="2523744" cy="7315"/>
-          </a:xfrm>
-          <a:prstGeom prst="rect">
-            <a:avLst/>
-          </a:prstGeom>
-          <a:solidFill>
-            <a:srgbClr val="D9D4CB"/>
-          </a:solidFill>
-          <a:ln>
-            <a:noFill/>
-          </a:ln>
-        </p:spPr>
-        <p:style>
-          <a:lnRef idx="1">
-            <a:schemeClr val="accent1"/>
-          </a:lnRef>
-          <a:fillRef idx="3">
-            <a:schemeClr val="accent1"/>
-          </a:fillRef>
-          <a:effectRef idx="2">
-            <a:schemeClr val="accent1"/>
-          </a:effectRef>
-          <a:fontRef idx="minor">
-            <a:schemeClr val="lt1"/>
-          </a:fontRef>
-        </p:style>
-        <p:txBody>
-          <a:bodyPr rtlCol="0" anchor="ctr"/>
-          <a:lstStyle/>
-          <a:p>
-            <a:pPr algn="ctr"/>
-          </a:p>
-        </p:txBody>
-      </p:sp>
-      <p:sp>
-        <p:nvSpPr>
-          <p:cNvPr id="48" name="TextBox 47"/>
-          <p:cNvSpPr txBox="1"/>
-          <p:nvPr/>
-        </p:nvSpPr>
-        <p:spPr>
-          <a:xfrm>
-            <a:off x="475488" y="4654296"/>
-            <a:ext cx="603504" cy="146304"/>
-          </a:xfrm>
-          <a:prstGeom prst="rect">
-            <a:avLst/>
-          </a:prstGeom>
-          <a:noFill/>
-        </p:spPr>
-        <p:txBody>
-          <a:bodyPr wrap="square" lIns="0" rIns="0" tIns="0" bIns="0" anchor="t">
-            <a:spAutoFit/>
-          </a:bodyPr>
-          <a:lstStyle/>
-          <a:p>
-            <a:pPr algn="l">
-              <a:lnSpc>
-                <a:spcPct val="100000"/>
-              </a:lnSpc>
-              <a:spcBef>
-                <a:spcPts val="0"/>
-              </a:spcBef>
-              <a:spcAft>
-                <a:spcPts val="0"/>
-              </a:spcAft>
-            </a:pPr>
-            <a:r>
-              <a:rPr sz="700" b="1" i="0">
-                <a:solidFill>
-                  <a:srgbClr val="203657"/>
-                </a:solidFill>
-                <a:latin typeface="Aptos"/>
-              </a:rPr>
-              <a:t>Tests</a:t>
-            </a:r>
-          </a:p>
-        </p:txBody>
-      </p:sp>
-      <p:sp>
-        <p:nvSpPr>
-          <p:cNvPr id="49" name="TextBox 48"/>
-          <p:cNvSpPr txBox="1"/>
-          <p:nvPr/>
-        </p:nvSpPr>
-        <p:spPr>
-          <a:xfrm>
-            <a:off x="1078992" y="4654296"/>
-            <a:ext cx="1874519" cy="173736"/>
-          </a:xfrm>
-          <a:prstGeom prst="rect">
-            <a:avLst/>
-          </a:prstGeom>
-          <a:noFill/>
-        </p:spPr>
-        <p:txBody>
-          <a:bodyPr wrap="square" lIns="0" rIns="0" tIns="0" bIns="0" anchor="t">
-            <a:spAutoFit/>
-          </a:bodyPr>
-          <a:lstStyle/>
-          <a:p>
-            <a:pPr algn="l">
-              <a:lnSpc>
-                <a:spcPct val="100000"/>
-              </a:lnSpc>
-              <a:spcBef>
-                <a:spcPts val="0"/>
-              </a:spcBef>
-              <a:spcAft>
-                <a:spcPts val="0"/>
-              </a:spcAft>
-            </a:pPr>
-            <a:r>
-              <a:rPr sz="655" b="0" i="0">
-                <a:solidFill>
-                  <a:srgbClr val="434952"/>
-                </a:solidFill>
-                <a:latin typeface="Aptos"/>
-              </a:rPr>
-              <a:t>shared negative pool and HeaRT hard negatives</a:t>
-            </a:r>
-          </a:p>
-        </p:txBody>
-      </p:sp>
-      <p:sp>
-        <p:nvSpPr>
-          <p:cNvPr id="50" name="Rectangle 49"/>
-          <p:cNvSpPr/>
-          <p:nvPr/>
-        </p:nvSpPr>
-        <p:spPr>
-          <a:xfrm>
-            <a:off x="466344" y="4887468"/>
-            <a:ext cx="2523744" cy="7315"/>
-          </a:xfrm>
-          <a:prstGeom prst="rect">
-            <a:avLst/>
-          </a:prstGeom>
-          <a:solidFill>
-            <a:srgbClr val="D9D4CB"/>
-          </a:solidFill>
-          <a:ln>
-            <a:noFill/>
-          </a:ln>
-        </p:spPr>
-        <p:style>
-          <a:lnRef idx="1">
-            <a:schemeClr val="accent1"/>
-          </a:lnRef>
-          <a:fillRef idx="3">
-            <a:schemeClr val="accent1"/>
-          </a:fillRef>
-          <a:effectRef idx="2">
-            <a:schemeClr val="accent1"/>
-          </a:effectRef>
-          <a:fontRef idx="minor">
-            <a:schemeClr val="lt1"/>
-          </a:fontRef>
-        </p:style>
-        <p:txBody>
-          <a:bodyPr rtlCol="0" anchor="ctr"/>
-          <a:lstStyle/>
-          <a:p>
-            <a:pPr algn="ctr"/>
-          </a:p>
-        </p:txBody>
-      </p:sp>
-      <p:sp>
-        <p:nvSpPr>
-          <p:cNvPr id="51" name="TextBox 50"/>
-          <p:cNvSpPr txBox="1"/>
-          <p:nvPr/>
-        </p:nvSpPr>
-        <p:spPr>
-          <a:xfrm>
-            <a:off x="475488" y="4928616"/>
-            <a:ext cx="603504" cy="146304"/>
-          </a:xfrm>
-          <a:prstGeom prst="rect">
-            <a:avLst/>
-          </a:prstGeom>
-          <a:noFill/>
-        </p:spPr>
-        <p:txBody>
-          <a:bodyPr wrap="square" lIns="0" rIns="0" tIns="0" bIns="0" anchor="t">
-            <a:spAutoFit/>
-          </a:bodyPr>
-          <a:lstStyle/>
-          <a:p>
-            <a:pPr algn="l">
-              <a:lnSpc>
-                <a:spcPct val="100000"/>
-              </a:lnSpc>
-              <a:spcBef>
-                <a:spcPts val="0"/>
-              </a:spcBef>
-              <a:spcAft>
-                <a:spcPts val="0"/>
-              </a:spcAft>
-            </a:pPr>
-            <a:r>
-              <a:rPr sz="700" b="1" i="0">
-                <a:solidFill>
-                  <a:srgbClr val="203657"/>
-                </a:solidFill>
-                <a:latin typeface="Aptos"/>
-              </a:rPr>
-              <a:t>Selection</a:t>
-            </a:r>
-          </a:p>
-        </p:txBody>
-      </p:sp>
-      <p:sp>
-        <p:nvSpPr>
-          <p:cNvPr id="52" name="TextBox 51"/>
-          <p:cNvSpPr txBox="1"/>
-          <p:nvPr/>
-        </p:nvSpPr>
-        <p:spPr>
-          <a:xfrm>
-            <a:off x="1078992" y="4928616"/>
-            <a:ext cx="1874519" cy="173736"/>
-          </a:xfrm>
-          <a:prstGeom prst="rect">
-            <a:avLst/>
-          </a:prstGeom>
-          <a:noFill/>
-        </p:spPr>
-        <p:txBody>
-          <a:bodyPr wrap="square" lIns="0" rIns="0" tIns="0" bIns="0" anchor="t">
-            <a:spAutoFit/>
-          </a:bodyPr>
-          <a:lstStyle/>
-          <a:p>
-            <a:pPr algn="l">
-              <a:lnSpc>
-                <a:spcPct val="100000"/>
-              </a:lnSpc>
-              <a:spcBef>
-                <a:spcPts val="0"/>
-              </a:spcBef>
-              <a:spcAft>
-                <a:spcPts val="0"/>
-              </a:spcAft>
-            </a:pPr>
-            <a:r>
-              <a:rPr sz="655" b="0" i="0">
-                <a:solidFill>
-                  <a:srgbClr val="434952"/>
-                </a:solidFill>
-                <a:latin typeface="Aptos"/>
-              </a:rPr>
-              <a:t>choose (k, s) on validation under fixed compute caps</a:t>
-            </a:r>
-          </a:p>
-        </p:txBody>
-      </p:sp>
-      <p:sp>
-        <p:nvSpPr>
-          <p:cNvPr id="53" name="Rectangle 52"/>
-          <p:cNvSpPr/>
-          <p:nvPr/>
-        </p:nvSpPr>
-        <p:spPr>
-          <a:xfrm>
-            <a:off x="466344" y="5161788"/>
-            <a:ext cx="2523744" cy="7315"/>
-          </a:xfrm>
-          <a:prstGeom prst="rect">
-            <a:avLst/>
-          </a:prstGeom>
-          <a:solidFill>
-            <a:srgbClr val="D9D4CB"/>
-          </a:solidFill>
-          <a:ln>
-            <a:noFill/>
-          </a:ln>
-        </p:spPr>
-        <p:style>
-          <a:lnRef idx="1">
-            <a:schemeClr val="accent1"/>
-          </a:lnRef>
-          <a:fillRef idx="3">
-            <a:schemeClr val="accent1"/>
-          </a:fillRef>
-          <a:effectRef idx="2">
-            <a:schemeClr val="accent1"/>
-          </a:effectRef>
-          <a:fontRef idx="minor">
-            <a:schemeClr val="lt1"/>
-          </a:fontRef>
-        </p:style>
-        <p:txBody>
-          <a:bodyPr rtlCol="0" anchor="ctr"/>
-          <a:lstStyle/>
-          <a:p>
-            <a:pPr algn="ctr"/>
-          </a:p>
-        </p:txBody>
-      </p:sp>
-      <p:sp>
-        <p:nvSpPr>
-          <p:cNvPr id="54" name="TextBox 53"/>
-          <p:cNvSpPr txBox="1"/>
-          <p:nvPr/>
-        </p:nvSpPr>
-        <p:spPr>
-          <a:xfrm>
-            <a:off x="475488" y="5202936"/>
-            <a:ext cx="603504" cy="146304"/>
-          </a:xfrm>
-          <a:prstGeom prst="rect">
-            <a:avLst/>
-          </a:prstGeom>
-          <a:noFill/>
-        </p:spPr>
-        <p:txBody>
-          <a:bodyPr wrap="square" lIns="0" rIns="0" tIns="0" bIns="0" anchor="t">
-            <a:spAutoFit/>
-          </a:bodyPr>
-          <a:lstStyle/>
-          <a:p>
-            <a:pPr algn="l">
-              <a:lnSpc>
-                <a:spcPct val="100000"/>
-              </a:lnSpc>
-              <a:spcBef>
-                <a:spcPts val="0"/>
-              </a:spcBef>
-              <a:spcAft>
-                <a:spcPts val="0"/>
-              </a:spcAft>
-            </a:pPr>
-            <a:r>
-              <a:rPr sz="700" b="1" i="0">
-                <a:solidFill>
-                  <a:srgbClr val="203657"/>
-                </a:solidFill>
-                <a:latin typeface="Aptos"/>
-              </a:rPr>
-              <a:t>Checks</a:t>
-            </a:r>
-          </a:p>
-        </p:txBody>
-      </p:sp>
-      <p:sp>
-        <p:nvSpPr>
-          <p:cNvPr id="55" name="TextBox 54"/>
-          <p:cNvSpPr txBox="1"/>
-          <p:nvPr/>
-        </p:nvSpPr>
-        <p:spPr>
-          <a:xfrm>
-            <a:off x="1078992" y="5202936"/>
-            <a:ext cx="1874519" cy="173736"/>
-          </a:xfrm>
-          <a:prstGeom prst="rect">
-            <a:avLst/>
-          </a:prstGeom>
-          <a:noFill/>
-        </p:spPr>
-        <p:txBody>
-          <a:bodyPr wrap="square" lIns="0" rIns="0" tIns="0" bIns="0" anchor="t">
-            <a:spAutoFit/>
-          </a:bodyPr>
-          <a:lstStyle/>
-          <a:p>
-            <a:pPr algn="l">
-              <a:lnSpc>
-                <a:spcPct val="100000"/>
-              </a:lnSpc>
-              <a:spcBef>
-                <a:spcPts val="0"/>
-              </a:spcBef>
-              <a:spcAft>
-                <a:spcPts val="0"/>
-              </a:spcAft>
-            </a:pPr>
-            <a:r>
-              <a:rPr sz="655" b="0" i="0">
-                <a:solidFill>
-                  <a:srgbClr val="434952"/>
-                </a:solidFill>
-                <a:latin typeface="Aptos"/>
-              </a:rPr>
-              <a:t>corrected score-precision and shortlist tie bias</a:t>
-            </a:r>
-          </a:p>
-        </p:txBody>
-      </p:sp>
-      <p:sp>
-        <p:nvSpPr>
-          <p:cNvPr id="56" name="TextBox 55"/>
-          <p:cNvSpPr txBox="1"/>
-          <p:nvPr/>
-        </p:nvSpPr>
-        <p:spPr>
-          <a:xfrm>
-            <a:off x="356616" y="5733288"/>
-            <a:ext cx="2743200" cy="164592"/>
-          </a:xfrm>
-          <a:prstGeom prst="rect">
-            <a:avLst/>
-          </a:prstGeom>
-          <a:noFill/>
-        </p:spPr>
-        <p:txBody>
-          <a:bodyPr wrap="square" lIns="0" rIns="0" tIns="0" bIns="0" anchor="t">
-            <a:spAutoFit/>
-          </a:bodyPr>
-          <a:lstStyle/>
-          <a:p>
-            <a:pPr algn="l">
-              <a:lnSpc>
-                <a:spcPct val="100000"/>
-              </a:lnSpc>
-              <a:spcBef>
-                <a:spcPts val="0"/>
-              </a:spcBef>
-              <a:spcAft>
-                <a:spcPts val="0"/>
-              </a:spcAft>
-            </a:pPr>
-            <a:r>
-              <a:rPr sz="819" b="1" i="0">
-                <a:solidFill>
-                  <a:srgbClr val="9D1B32"/>
-                </a:solidFill>
-                <a:latin typeface="Aptos"/>
-              </a:rPr>
-              <a:t>WHAT WE MEASURE</a:t>
-            </a:r>
-          </a:p>
-        </p:txBody>
-      </p:sp>
-      <p:sp>
-        <p:nvSpPr>
-          <p:cNvPr id="57" name="Rounded Rectangle 56"/>
-          <p:cNvSpPr/>
-          <p:nvPr/>
-        </p:nvSpPr>
-        <p:spPr>
-          <a:xfrm>
-            <a:off x="356616" y="5952744"/>
-            <a:ext cx="2743200" cy="448056"/>
-          </a:xfrm>
-          <a:prstGeom prst="roundRect">
-            <a:avLst>
-              <a:gd name="adj" fmla="val 8000"/>
-            </a:avLst>
-          </a:prstGeom>
-          <a:solidFill>
-            <a:srgbClr val="F5EADA"/>
-          </a:solidFill>
-          <a:ln w="8890">
-            <a:solidFill>
-              <a:srgbClr val="DCBE99"/>
-            </a:solidFill>
-          </a:ln>
-        </p:spPr>
-        <p:style>
-          <a:lnRef idx="1">
-            <a:schemeClr val="accent1"/>
-          </a:lnRef>
-          <a:fillRef idx="3">
-            <a:schemeClr val="accent1"/>
-          </a:fillRef>
-          <a:effectRef idx="2">
-            <a:schemeClr val="accent1"/>
-          </a:effectRef>
-          <a:fontRef idx="minor">
-            <a:schemeClr val="lt1"/>
-          </a:fontRef>
-        </p:style>
-        <p:txBody>
-          <a:bodyPr rtlCol="0" anchor="ctr"/>
-          <a:lstStyle/>
-          <a:p>
-            <a:pPr algn="ctr"/>
-          </a:p>
-        </p:txBody>
-      </p:sp>
-      <p:sp>
-        <p:nvSpPr>
-          <p:cNvPr id="58" name="TextBox 57"/>
-          <p:cNvSpPr txBox="1"/>
-          <p:nvPr/>
-        </p:nvSpPr>
-        <p:spPr>
-          <a:xfrm>
-            <a:off x="475488" y="6062472"/>
-            <a:ext cx="2505456" cy="201168"/>
-          </a:xfrm>
-          <a:prstGeom prst="rect">
-            <a:avLst/>
-          </a:prstGeom>
-          <a:noFill/>
-        </p:spPr>
-        <p:txBody>
-          <a:bodyPr wrap="square" lIns="0" rIns="0" tIns="0" bIns="0" anchor="t">
-            <a:spAutoFit/>
-          </a:bodyPr>
-          <a:lstStyle/>
-          <a:p>
-            <a:pPr algn="ctr">
-              <a:lnSpc>
-                <a:spcPct val="100000"/>
-              </a:lnSpc>
-              <a:spcBef>
-                <a:spcPts val="0"/>
-              </a:spcBef>
-              <a:spcAft>
-                <a:spcPts val="0"/>
-              </a:spcAft>
-            </a:pPr>
-            <a:r>
-              <a:rPr sz="680" b="1" i="0">
-                <a:solidFill>
-                  <a:srgbClr val="434952"/>
-                </a:solidFill>
-                <a:latin typeface="Aptos"/>
-              </a:rPr>
-              <a:t>Test MRR ×100  ·  measured T4 GPU time  ·  peak VRAM  ·  three random seeds per budget</a:t>
-            </a:r>
-          </a:p>
-        </p:txBody>
-      </p:sp>
-      <p:sp>
-        <p:nvSpPr>
-          <p:cNvPr id="59" name="TextBox 58"/>
-          <p:cNvSpPr txBox="1"/>
-          <p:nvPr/>
-        </p:nvSpPr>
-        <p:spPr>
-          <a:xfrm>
-            <a:off x="3246120" y="1051560"/>
-            <a:ext cx="3941063" cy="164592"/>
-          </a:xfrm>
-          <a:prstGeom prst="rect">
-            <a:avLst/>
-          </a:prstGeom>
-          <a:noFill/>
-        </p:spPr>
-        <p:txBody>
-          <a:bodyPr wrap="square" lIns="0" rIns="0" tIns="0" bIns="0" anchor="t">
-            <a:spAutoFit/>
-          </a:bodyPr>
-          <a:lstStyle/>
-          <a:p>
-            <a:pPr algn="l">
-              <a:lnSpc>
-                <a:spcPct val="100000"/>
-              </a:lnSpc>
-              <a:spcBef>
-                <a:spcPts val="0"/>
-              </a:spcBef>
-              <a:spcAft>
-                <a:spcPts val="0"/>
-              </a:spcAft>
-            </a:pPr>
-            <a:r>
-              <a:rPr sz="819" b="1" i="0">
-                <a:solidFill>
-                  <a:srgbClr val="9D1B32"/>
-                </a:solidFill>
-                <a:latin typeface="Aptos"/>
-              </a:rPr>
-              <a:t>RESULTS FROM THE BUDGET SWEEP</a:t>
-            </a:r>
-          </a:p>
-        </p:txBody>
-      </p:sp>
-      <p:sp>
-        <p:nvSpPr>
-          <p:cNvPr id="60" name="Rounded Rectangle 59"/>
-          <p:cNvSpPr/>
-          <p:nvPr/>
-        </p:nvSpPr>
-        <p:spPr>
-          <a:xfrm>
-            <a:off x="3246120" y="1280160"/>
-            <a:ext cx="3941063" cy="1024128"/>
+            <a:off x="4279392" y="1399032"/>
+            <a:ext cx="7516368" cy="1719072"/>
           </a:xfrm>
           <a:prstGeom prst="roundRect">
             <a:avLst>
@@ -5768,16 +5009,85 @@
           </a:p>
         </p:txBody>
       </p:sp>
-      <p:sp>
-        <p:nvSpPr>
-          <p:cNvPr id="61" name="Rectangle 60"/>
+      <p:pic>
+        <p:nvPicPr>
+          <p:cNvPr id="43" name="Picture 42" descr="fig_mid_v2.png"/>
+          <p:cNvPicPr>
+            <a:picLocks noChangeAspect="1"/>
+          </p:cNvPicPr>
+          <p:nvPr/>
+        </p:nvPicPr>
+        <p:blipFill>
+          <a:blip r:embed="rId2"/>
+          <a:stretch>
+            <a:fillRect/>
+          </a:stretch>
+        </p:blipFill>
+        <p:spPr>
+          <a:xfrm>
+            <a:off x="4352544" y="1472184"/>
+            <a:ext cx="7370064" cy="1572768"/>
+          </a:xfrm>
+          <a:prstGeom prst="rect">
+            <a:avLst/>
+          </a:prstGeom>
+        </p:spPr>
+      </p:pic>
+      <p:sp>
+        <p:nvSpPr>
+          <p:cNvPr id="44" name="TextBox 43"/>
+          <p:cNvSpPr txBox="1"/>
+          <p:nvPr/>
+        </p:nvSpPr>
+        <p:spPr>
+          <a:xfrm>
+            <a:off x="4279392" y="3273552"/>
+            <a:ext cx="7516368" cy="228600"/>
+          </a:xfrm>
+          <a:prstGeom prst="rect">
+            <a:avLst/>
+          </a:prstGeom>
+          <a:noFill/>
+        </p:spPr>
+        <p:txBody>
+          <a:bodyPr wrap="square" lIns="0" rIns="0" tIns="0" bIns="0" anchor="t">
+            <a:spAutoFit/>
+          </a:bodyPr>
+          <a:lstStyle/>
+          <a:p>
+            <a:pPr algn="l">
+              <a:lnSpc>
+                <a:spcPct val="100000"/>
+              </a:lnSpc>
+              <a:spcBef>
+                <a:spcPts val="0"/>
+              </a:spcBef>
+              <a:spcAft>
+                <a:spcPts val="0"/>
+              </a:spcAft>
+            </a:pPr>
+            <a:r>
+              <a:rPr sz="1200" b="1" i="0">
+                <a:solidFill>
+                  <a:srgbClr val="171A1F"/>
+                </a:solidFill>
+                <a:latin typeface="Georgia"/>
+              </a:rPr>
+              <a:t>Test MRR at selected budgets</a:t>
+            </a:r>
+          </a:p>
+        </p:txBody>
+      </p:sp>
+      <p:sp>
+        <p:nvSpPr>
+          <p:cNvPr id="45" name="Rectangle 44"/>
           <p:cNvSpPr/>
           <p:nvPr/>
         </p:nvSpPr>
         <p:spPr>
           <a:xfrm>
-            <a:off x="3246120" y="1280160"/>
-            <a:ext cx="41148" cy="1024128"/>
+            <a:off x="4279392" y="3557016"/>
+            <a:ext cx="7516368" cy="274320"/>
           </a:xfrm>
           <a:prstGeom prst="rect">
             <a:avLst/>
@@ -5813,25 +5123,248 @@
       </p:sp>
       <p:sp>
         <p:nvSpPr>
-          <p:cNvPr id="62" name="Oval 61"/>
+          <p:cNvPr id="46" name="TextBox 45"/>
+          <p:cNvSpPr txBox="1"/>
+          <p:nvPr/>
+        </p:nvSpPr>
+        <p:spPr>
+          <a:xfrm>
+            <a:off x="4325112" y="3625596"/>
+            <a:ext cx="1536192" cy="146304"/>
+          </a:xfrm>
+          <a:prstGeom prst="rect">
+            <a:avLst/>
+          </a:prstGeom>
+          <a:noFill/>
+        </p:spPr>
+        <p:txBody>
+          <a:bodyPr wrap="square" lIns="0" rIns="0" tIns="0" bIns="0" anchor="t">
+            <a:spAutoFit/>
+          </a:bodyPr>
+          <a:lstStyle/>
+          <a:p>
+            <a:pPr algn="l">
+              <a:lnSpc>
+                <a:spcPct val="100000"/>
+              </a:lnSpc>
+              <a:spcBef>
+                <a:spcPts val="0"/>
+              </a:spcBef>
+              <a:spcAft>
+                <a:spcPts val="0"/>
+              </a:spcAft>
+            </a:pPr>
+            <a:r>
+              <a:rPr sz="750" b="1" i="0">
+                <a:solidFill>
+                  <a:srgbClr val="FFFFFF"/>
+                </a:solidFill>
+                <a:latin typeface="Segoe UI"/>
+              </a:rPr>
+              <a:t>Policy</a:t>
+            </a:r>
+          </a:p>
+        </p:txBody>
+      </p:sp>
+      <p:sp>
+        <p:nvSpPr>
+          <p:cNvPr id="47" name="TextBox 46"/>
+          <p:cNvSpPr txBox="1"/>
+          <p:nvPr/>
+        </p:nvSpPr>
+        <p:spPr>
+          <a:xfrm>
+            <a:off x="5952744" y="3625596"/>
+            <a:ext cx="1353312" cy="146304"/>
+          </a:xfrm>
+          <a:prstGeom prst="rect">
+            <a:avLst/>
+          </a:prstGeom>
+          <a:noFill/>
+        </p:spPr>
+        <p:txBody>
+          <a:bodyPr wrap="square" lIns="0" rIns="0" tIns="0" bIns="0" anchor="t">
+            <a:spAutoFit/>
+          </a:bodyPr>
+          <a:lstStyle/>
+          <a:p>
+            <a:pPr algn="ctr">
+              <a:lnSpc>
+                <a:spcPct val="100000"/>
+              </a:lnSpc>
+              <a:spcBef>
+                <a:spcPts val="0"/>
+              </a:spcBef>
+              <a:spcAft>
+                <a:spcPts val="0"/>
+              </a:spcAft>
+            </a:pPr>
+            <a:r>
+              <a:rPr sz="750" b="1" i="0">
+                <a:solidFill>
+                  <a:srgbClr val="FFFFFF"/>
+                </a:solidFill>
+                <a:latin typeface="Segoe UI"/>
+              </a:rPr>
+              <a:t>Cora Pool</a:t>
+            </a:r>
+          </a:p>
+        </p:txBody>
+      </p:sp>
+      <p:sp>
+        <p:nvSpPr>
+          <p:cNvPr id="48" name="TextBox 47"/>
+          <p:cNvSpPr txBox="1"/>
+          <p:nvPr/>
+        </p:nvSpPr>
+        <p:spPr>
+          <a:xfrm>
+            <a:off x="7397496" y="3625596"/>
+            <a:ext cx="1389888" cy="146304"/>
+          </a:xfrm>
+          <a:prstGeom prst="rect">
+            <a:avLst/>
+          </a:prstGeom>
+          <a:noFill/>
+        </p:spPr>
+        <p:txBody>
+          <a:bodyPr wrap="square" lIns="0" rIns="0" tIns="0" bIns="0" anchor="t">
+            <a:spAutoFit/>
+          </a:bodyPr>
+          <a:lstStyle/>
+          <a:p>
+            <a:pPr algn="ctr">
+              <a:lnSpc>
+                <a:spcPct val="100000"/>
+              </a:lnSpc>
+              <a:spcBef>
+                <a:spcPts val="0"/>
+              </a:spcBef>
+              <a:spcAft>
+                <a:spcPts val="0"/>
+              </a:spcAft>
+            </a:pPr>
+            <a:r>
+              <a:rPr sz="750" b="1" i="0">
+                <a:solidFill>
+                  <a:srgbClr val="FFFFFF"/>
+                </a:solidFill>
+                <a:latin typeface="Segoe UI"/>
+              </a:rPr>
+              <a:t>Citeseer Pool</a:t>
+            </a:r>
+          </a:p>
+        </p:txBody>
+      </p:sp>
+      <p:sp>
+        <p:nvSpPr>
+          <p:cNvPr id="49" name="TextBox 48"/>
+          <p:cNvSpPr txBox="1"/>
+          <p:nvPr/>
+        </p:nvSpPr>
+        <p:spPr>
+          <a:xfrm>
+            <a:off x="8878824" y="3625596"/>
+            <a:ext cx="1371600" cy="146304"/>
+          </a:xfrm>
+          <a:prstGeom prst="rect">
+            <a:avLst/>
+          </a:prstGeom>
+          <a:noFill/>
+        </p:spPr>
+        <p:txBody>
+          <a:bodyPr wrap="square" lIns="0" rIns="0" tIns="0" bIns="0" anchor="t">
+            <a:spAutoFit/>
+          </a:bodyPr>
+          <a:lstStyle/>
+          <a:p>
+            <a:pPr algn="ctr">
+              <a:lnSpc>
+                <a:spcPct val="100000"/>
+              </a:lnSpc>
+              <a:spcBef>
+                <a:spcPts val="0"/>
+              </a:spcBef>
+              <a:spcAft>
+                <a:spcPts val="0"/>
+              </a:spcAft>
+            </a:pPr>
+            <a:r>
+              <a:rPr sz="750" b="1" i="0">
+                <a:solidFill>
+                  <a:srgbClr val="FFFFFF"/>
+                </a:solidFill>
+                <a:latin typeface="Segoe UI"/>
+              </a:rPr>
+              <a:t>Cora HeaRT</a:t>
+            </a:r>
+          </a:p>
+        </p:txBody>
+      </p:sp>
+      <p:sp>
+        <p:nvSpPr>
+          <p:cNvPr id="50" name="TextBox 49"/>
+          <p:cNvSpPr txBox="1"/>
+          <p:nvPr/>
+        </p:nvSpPr>
+        <p:spPr>
+          <a:xfrm>
+            <a:off x="10341864" y="3625596"/>
+            <a:ext cx="1408175" cy="146304"/>
+          </a:xfrm>
+          <a:prstGeom prst="rect">
+            <a:avLst/>
+          </a:prstGeom>
+          <a:noFill/>
+        </p:spPr>
+        <p:txBody>
+          <a:bodyPr wrap="square" lIns="0" rIns="0" tIns="0" bIns="0" anchor="t">
+            <a:spAutoFit/>
+          </a:bodyPr>
+          <a:lstStyle/>
+          <a:p>
+            <a:pPr algn="ctr">
+              <a:lnSpc>
+                <a:spcPct val="100000"/>
+              </a:lnSpc>
+              <a:spcBef>
+                <a:spcPts val="0"/>
+              </a:spcBef>
+              <a:spcAft>
+                <a:spcPts val="0"/>
+              </a:spcAft>
+            </a:pPr>
+            <a:r>
+              <a:rPr sz="750" b="1" i="0">
+                <a:solidFill>
+                  <a:srgbClr val="FFFFFF"/>
+                </a:solidFill>
+                <a:latin typeface="Segoe UI"/>
+              </a:rPr>
+              <a:t>Citeseer HeaRT</a:t>
+            </a:r>
+          </a:p>
+        </p:txBody>
+      </p:sp>
+      <p:sp>
+        <p:nvSpPr>
+          <p:cNvPr id="51" name="Rectangle 50"/>
           <p:cNvSpPr/>
           <p:nvPr/>
         </p:nvSpPr>
         <p:spPr>
           <a:xfrm>
-            <a:off x="3383279" y="1444751"/>
-            <a:ext cx="384048" cy="384048"/>
-          </a:xfrm>
-          <a:prstGeom prst="ellipse">
+            <a:off x="4279392" y="3831336"/>
+            <a:ext cx="7516368" cy="224028"/>
+          </a:xfrm>
+          <a:prstGeom prst="rect">
             <a:avLst/>
           </a:prstGeom>
           <a:solidFill>
-            <a:srgbClr val="E8EDF3"/>
+            <a:srgbClr val="FFFFFF"/>
           </a:solidFill>
-          <a:ln w="10160">
-            <a:solidFill>
-              <a:srgbClr val="203657"/>
-            </a:solidFill>
+          <a:ln>
+            <a:noFill/>
           </a:ln>
         </p:spPr>
         <p:style>
@@ -5858,14 +5391,57 @@
       </p:sp>
       <p:sp>
         <p:nvSpPr>
-          <p:cNvPr id="63" name="TextBox 62"/>
+          <p:cNvPr id="52" name="Rectangle 51"/>
+          <p:cNvSpPr/>
+          <p:nvPr/>
+        </p:nvSpPr>
+        <p:spPr>
+          <a:xfrm>
+            <a:off x="4279392" y="4048048"/>
+            <a:ext cx="7516368" cy="7315"/>
+          </a:xfrm>
+          <a:prstGeom prst="rect">
+            <a:avLst/>
+          </a:prstGeom>
+          <a:solidFill>
+            <a:srgbClr val="D9D4CB"/>
+          </a:solidFill>
+          <a:ln>
+            <a:noFill/>
+          </a:ln>
+        </p:spPr>
+        <p:style>
+          <a:lnRef idx="1">
+            <a:schemeClr val="accent1"/>
+          </a:lnRef>
+          <a:fillRef idx="3">
+            <a:schemeClr val="accent1"/>
+          </a:fillRef>
+          <a:effectRef idx="2">
+            <a:schemeClr val="accent1"/>
+          </a:effectRef>
+          <a:fontRef idx="minor">
+            <a:schemeClr val="lt1"/>
+          </a:fontRef>
+        </p:style>
+        <p:txBody>
+          <a:bodyPr rtlCol="0" anchor="ctr"/>
+          <a:lstStyle/>
+          <a:p>
+            <a:pPr algn="ctr"/>
+          </a:p>
+        </p:txBody>
+      </p:sp>
+      <p:sp>
+        <p:nvSpPr>
+          <p:cNvPr id="53" name="TextBox 52"/>
           <p:cNvSpPr txBox="1"/>
           <p:nvPr/>
         </p:nvSpPr>
         <p:spPr>
           <a:xfrm>
-            <a:off x="3383279" y="1508760"/>
-            <a:ext cx="384048" cy="164592"/>
+            <a:off x="4325112" y="3881628"/>
+            <a:ext cx="1536192" cy="137160"/>
           </a:xfrm>
           <a:prstGeom prst="rect">
             <a:avLst/>
@@ -5873,7 +5449,52 @@
           <a:noFill/>
         </p:spPr>
         <p:txBody>
-          <a:bodyPr wrap="square" lIns="0" rIns="0" tIns="0" bIns="0" anchor="ctr">
+          <a:bodyPr wrap="square" lIns="0" rIns="0" tIns="0" bIns="0" anchor="t">
+            <a:spAutoFit/>
+          </a:bodyPr>
+          <a:lstStyle/>
+          <a:p>
+            <a:pPr algn="l">
+              <a:lnSpc>
+                <a:spcPct val="100000"/>
+              </a:lnSpc>
+              <a:spcBef>
+                <a:spcPts val="0"/>
+              </a:spcBef>
+              <a:spcAft>
+                <a:spcPts val="0"/>
+              </a:spcAft>
+            </a:pPr>
+            <a:r>
+              <a:rPr sz="760" b="1" i="0">
+                <a:solidFill>
+                  <a:srgbClr val="171A1F"/>
+                </a:solidFill>
+                <a:latin typeface="Segoe UI"/>
+              </a:rPr>
+              <a:t>Chance</a:t>
+            </a:r>
+          </a:p>
+        </p:txBody>
+      </p:sp>
+      <p:sp>
+        <p:nvSpPr>
+          <p:cNvPr id="54" name="TextBox 53"/>
+          <p:cNvSpPr txBox="1"/>
+          <p:nvPr/>
+        </p:nvSpPr>
+        <p:spPr>
+          <a:xfrm>
+            <a:off x="5952744" y="3881628"/>
+            <a:ext cx="1353312" cy="137160"/>
+          </a:xfrm>
+          <a:prstGeom prst="rect">
+            <a:avLst/>
+          </a:prstGeom>
+          <a:noFill/>
+        </p:spPr>
+        <p:txBody>
+          <a:bodyPr wrap="square" lIns="0" rIns="0" tIns="0" bIns="0" anchor="t">
             <a:spAutoFit/>
           </a:bodyPr>
           <a:lstStyle/>
@@ -5890,27 +5511,248 @@
               </a:spcAft>
             </a:pPr>
             <a:r>
-              <a:rPr sz="800" b="1" i="0">
-                <a:solidFill>
-                  <a:srgbClr val="203657"/>
-                </a:solidFill>
-                <a:latin typeface="Georgia"/>
+              <a:rPr sz="760" b="0" i="0">
+                <a:solidFill>
+                  <a:srgbClr val="171A1F"/>
+                </a:solidFill>
+                <a:latin typeface="Segoe UI"/>
               </a:rPr>
-              <a:t>01</a:t>
-            </a:r>
-          </a:p>
-        </p:txBody>
-      </p:sp>
-      <p:sp>
-        <p:nvSpPr>
-          <p:cNvPr id="64" name="TextBox 63"/>
+              <a:t>1.3</a:t>
+            </a:r>
+          </a:p>
+        </p:txBody>
+      </p:sp>
+      <p:sp>
+        <p:nvSpPr>
+          <p:cNvPr id="55" name="TextBox 54"/>
           <p:cNvSpPr txBox="1"/>
           <p:nvPr/>
         </p:nvSpPr>
         <p:spPr>
           <a:xfrm>
-            <a:off x="3877056" y="1399031"/>
-            <a:ext cx="3172968" cy="228600"/>
+            <a:off x="7397496" y="3881628"/>
+            <a:ext cx="1389888" cy="137160"/>
+          </a:xfrm>
+          <a:prstGeom prst="rect">
+            <a:avLst/>
+          </a:prstGeom>
+          <a:noFill/>
+        </p:spPr>
+        <p:txBody>
+          <a:bodyPr wrap="square" lIns="0" rIns="0" tIns="0" bIns="0" anchor="t">
+            <a:spAutoFit/>
+          </a:bodyPr>
+          <a:lstStyle/>
+          <a:p>
+            <a:pPr algn="ctr">
+              <a:lnSpc>
+                <a:spcPct val="100000"/>
+              </a:lnSpc>
+              <a:spcBef>
+                <a:spcPts val="0"/>
+              </a:spcBef>
+              <a:spcAft>
+                <a:spcPts val="0"/>
+              </a:spcAft>
+            </a:pPr>
+            <a:r>
+              <a:rPr sz="760" b="0" i="0">
+                <a:solidFill>
+                  <a:srgbClr val="171A1F"/>
+                </a:solidFill>
+                <a:latin typeface="Segoe UI"/>
+              </a:rPr>
+              <a:t>1.5</a:t>
+            </a:r>
+          </a:p>
+        </p:txBody>
+      </p:sp>
+      <p:sp>
+        <p:nvSpPr>
+          <p:cNvPr id="56" name="TextBox 55"/>
+          <p:cNvSpPr txBox="1"/>
+          <p:nvPr/>
+        </p:nvSpPr>
+        <p:spPr>
+          <a:xfrm>
+            <a:off x="8878824" y="3881628"/>
+            <a:ext cx="1371600" cy="137160"/>
+          </a:xfrm>
+          <a:prstGeom prst="rect">
+            <a:avLst/>
+          </a:prstGeom>
+          <a:noFill/>
+        </p:spPr>
+        <p:txBody>
+          <a:bodyPr wrap="square" lIns="0" rIns="0" tIns="0" bIns="0" anchor="t">
+            <a:spAutoFit/>
+          </a:bodyPr>
+          <a:lstStyle/>
+          <a:p>
+            <a:pPr algn="ctr">
+              <a:lnSpc>
+                <a:spcPct val="100000"/>
+              </a:lnSpc>
+              <a:spcBef>
+                <a:spcPts val="0"/>
+              </a:spcBef>
+              <a:spcAft>
+                <a:spcPts val="0"/>
+              </a:spcAft>
+            </a:pPr>
+            <a:r>
+              <a:rPr sz="760" b="0" i="0">
+                <a:solidFill>
+                  <a:srgbClr val="171A1F"/>
+                </a:solidFill>
+                <a:latin typeface="Segoe UI"/>
+              </a:rPr>
+              <a:t>1.4</a:t>
+            </a:r>
+          </a:p>
+        </p:txBody>
+      </p:sp>
+      <p:sp>
+        <p:nvSpPr>
+          <p:cNvPr id="57" name="TextBox 56"/>
+          <p:cNvSpPr txBox="1"/>
+          <p:nvPr/>
+        </p:nvSpPr>
+        <p:spPr>
+          <a:xfrm>
+            <a:off x="10341864" y="3881628"/>
+            <a:ext cx="1408175" cy="137160"/>
+          </a:xfrm>
+          <a:prstGeom prst="rect">
+            <a:avLst/>
+          </a:prstGeom>
+          <a:noFill/>
+        </p:spPr>
+        <p:txBody>
+          <a:bodyPr wrap="square" lIns="0" rIns="0" tIns="0" bIns="0" anchor="t">
+            <a:spAutoFit/>
+          </a:bodyPr>
+          <a:lstStyle/>
+          <a:p>
+            <a:pPr algn="ctr">
+              <a:lnSpc>
+                <a:spcPct val="100000"/>
+              </a:lnSpc>
+              <a:spcBef>
+                <a:spcPts val="0"/>
+              </a:spcBef>
+              <a:spcAft>
+                <a:spcPts val="0"/>
+              </a:spcAft>
+            </a:pPr>
+            <a:r>
+              <a:rPr sz="760" b="0" i="0">
+                <a:solidFill>
+                  <a:srgbClr val="171A1F"/>
+                </a:solidFill>
+                <a:latin typeface="Segoe UI"/>
+              </a:rPr>
+              <a:t>1.4</a:t>
+            </a:r>
+          </a:p>
+        </p:txBody>
+      </p:sp>
+      <p:sp>
+        <p:nvSpPr>
+          <p:cNvPr id="58" name="Rectangle 57"/>
+          <p:cNvSpPr/>
+          <p:nvPr/>
+        </p:nvSpPr>
+        <p:spPr>
+          <a:xfrm>
+            <a:off x="4279392" y="4055364"/>
+            <a:ext cx="7516368" cy="224028"/>
+          </a:xfrm>
+          <a:prstGeom prst="rect">
+            <a:avLst/>
+          </a:prstGeom>
+          <a:solidFill>
+            <a:srgbClr val="FFFFFF"/>
+          </a:solidFill>
+          <a:ln>
+            <a:noFill/>
+          </a:ln>
+        </p:spPr>
+        <p:style>
+          <a:lnRef idx="1">
+            <a:schemeClr val="accent1"/>
+          </a:lnRef>
+          <a:fillRef idx="3">
+            <a:schemeClr val="accent1"/>
+          </a:fillRef>
+          <a:effectRef idx="2">
+            <a:schemeClr val="accent1"/>
+          </a:effectRef>
+          <a:fontRef idx="minor">
+            <a:schemeClr val="lt1"/>
+          </a:fontRef>
+        </p:style>
+        <p:txBody>
+          <a:bodyPr rtlCol="0" anchor="ctr"/>
+          <a:lstStyle/>
+          <a:p>
+            <a:pPr algn="ctr"/>
+          </a:p>
+        </p:txBody>
+      </p:sp>
+      <p:sp>
+        <p:nvSpPr>
+          <p:cNvPr id="59" name="Rectangle 58"/>
+          <p:cNvSpPr/>
+          <p:nvPr/>
+        </p:nvSpPr>
+        <p:spPr>
+          <a:xfrm>
+            <a:off x="4279392" y="4272076"/>
+            <a:ext cx="7516368" cy="7315"/>
+          </a:xfrm>
+          <a:prstGeom prst="rect">
+            <a:avLst/>
+          </a:prstGeom>
+          <a:solidFill>
+            <a:srgbClr val="D9D4CB"/>
+          </a:solidFill>
+          <a:ln>
+            <a:noFill/>
+          </a:ln>
+        </p:spPr>
+        <p:style>
+          <a:lnRef idx="1">
+            <a:schemeClr val="accent1"/>
+          </a:lnRef>
+          <a:fillRef idx="3">
+            <a:schemeClr val="accent1"/>
+          </a:fillRef>
+          <a:effectRef idx="2">
+            <a:schemeClr val="accent1"/>
+          </a:effectRef>
+          <a:fontRef idx="minor">
+            <a:schemeClr val="lt1"/>
+          </a:fontRef>
+        </p:style>
+        <p:txBody>
+          <a:bodyPr rtlCol="0" anchor="ctr"/>
+          <a:lstStyle/>
+          <a:p>
+            <a:pPr algn="ctr"/>
+          </a:p>
+        </p:txBody>
+      </p:sp>
+      <p:sp>
+        <p:nvSpPr>
+          <p:cNvPr id="60" name="TextBox 59"/>
+          <p:cNvSpPr txBox="1"/>
+          <p:nvPr/>
+        </p:nvSpPr>
+        <p:spPr>
+          <a:xfrm>
+            <a:off x="4325112" y="4105656"/>
+            <a:ext cx="1536192" cy="137160"/>
           </a:xfrm>
           <a:prstGeom prst="rect">
             <a:avLst/>
@@ -5935,27 +5777,27 @@
               </a:spcAft>
             </a:pPr>
             <a:r>
-              <a:rPr sz="919" b="1" i="0">
+              <a:rPr sz="760" b="1" i="0">
                 <a:solidFill>
                   <a:srgbClr val="171A1F"/>
                 </a:solidFill>
-                <a:latin typeface="Georgia"/>
+                <a:latin typeface="Segoe UI"/>
               </a:rPr>
-              <a:t>Half fanout is enough in 3 of 4 regimes</a:t>
-            </a:r>
-          </a:p>
-        </p:txBody>
-      </p:sp>
-      <p:sp>
-        <p:nvSpPr>
-          <p:cNvPr id="65" name="TextBox 64"/>
+              <a:t>Adamic–Adar · 0%</a:t>
+            </a:r>
+          </a:p>
+        </p:txBody>
+      </p:sp>
+      <p:sp>
+        <p:nvSpPr>
+          <p:cNvPr id="61" name="TextBox 60"/>
           <p:cNvSpPr txBox="1"/>
           <p:nvPr/>
         </p:nvSpPr>
         <p:spPr>
           <a:xfrm>
-            <a:off x="3877056" y="1673351"/>
-            <a:ext cx="3172968" cy="521207"/>
+            <a:off x="5952744" y="4105656"/>
+            <a:ext cx="1353312" cy="137160"/>
           </a:xfrm>
           <a:prstGeom prst="rect">
             <a:avLst/>
@@ -5968,9 +5810,275 @@
           </a:bodyPr>
           <a:lstStyle/>
           <a:p>
+            <a:pPr algn="ctr">
+              <a:lnSpc>
+                <a:spcPct val="100000"/>
+              </a:lnSpc>
+              <a:spcBef>
+                <a:spcPts val="0"/>
+              </a:spcBef>
+              <a:spcAft>
+                <a:spcPts val="0"/>
+              </a:spcAft>
+            </a:pPr>
+            <a:r>
+              <a:rPr sz="760" b="0" i="0">
+                <a:solidFill>
+                  <a:srgbClr val="171A1F"/>
+                </a:solidFill>
+                <a:latin typeface="Segoe UI"/>
+              </a:rPr>
+              <a:t>33.1</a:t>
+            </a:r>
+          </a:p>
+        </p:txBody>
+      </p:sp>
+      <p:sp>
+        <p:nvSpPr>
+          <p:cNvPr id="62" name="TextBox 61"/>
+          <p:cNvSpPr txBox="1"/>
+          <p:nvPr/>
+        </p:nvSpPr>
+        <p:spPr>
+          <a:xfrm>
+            <a:off x="7397496" y="4105656"/>
+            <a:ext cx="1389888" cy="137160"/>
+          </a:xfrm>
+          <a:prstGeom prst="rect">
+            <a:avLst/>
+          </a:prstGeom>
+          <a:noFill/>
+        </p:spPr>
+        <p:txBody>
+          <a:bodyPr wrap="square" lIns="0" rIns="0" tIns="0" bIns="0" anchor="t">
+            <a:spAutoFit/>
+          </a:bodyPr>
+          <a:lstStyle/>
+          <a:p>
+            <a:pPr algn="ctr">
+              <a:lnSpc>
+                <a:spcPct val="100000"/>
+              </a:lnSpc>
+              <a:spcBef>
+                <a:spcPts val="0"/>
+              </a:spcBef>
+              <a:spcAft>
+                <a:spcPts val="0"/>
+              </a:spcAft>
+            </a:pPr>
+            <a:r>
+              <a:rPr sz="760" b="0" i="0">
+                <a:solidFill>
+                  <a:srgbClr val="171A1F"/>
+                </a:solidFill>
+                <a:latin typeface="Segoe UI"/>
+              </a:rPr>
+              <a:t>31.5</a:t>
+            </a:r>
+          </a:p>
+        </p:txBody>
+      </p:sp>
+      <p:sp>
+        <p:nvSpPr>
+          <p:cNvPr id="63" name="TextBox 62"/>
+          <p:cNvSpPr txBox="1"/>
+          <p:nvPr/>
+        </p:nvSpPr>
+        <p:spPr>
+          <a:xfrm>
+            <a:off x="8878824" y="4105656"/>
+            <a:ext cx="1371600" cy="137160"/>
+          </a:xfrm>
+          <a:prstGeom prst="rect">
+            <a:avLst/>
+          </a:prstGeom>
+          <a:noFill/>
+        </p:spPr>
+        <p:txBody>
+          <a:bodyPr wrap="square" lIns="0" rIns="0" tIns="0" bIns="0" anchor="t">
+            <a:spAutoFit/>
+          </a:bodyPr>
+          <a:lstStyle/>
+          <a:p>
+            <a:pPr algn="ctr">
+              <a:lnSpc>
+                <a:spcPct val="100000"/>
+              </a:lnSpc>
+              <a:spcBef>
+                <a:spcPts val="0"/>
+              </a:spcBef>
+              <a:spcAft>
+                <a:spcPts val="0"/>
+              </a:spcAft>
+            </a:pPr>
+            <a:r>
+              <a:rPr sz="760" b="0" i="0">
+                <a:solidFill>
+                  <a:srgbClr val="171A1F"/>
+                </a:solidFill>
+                <a:latin typeface="Segoe UI"/>
+              </a:rPr>
+              <a:t>12.0</a:t>
+            </a:r>
+          </a:p>
+        </p:txBody>
+      </p:sp>
+      <p:sp>
+        <p:nvSpPr>
+          <p:cNvPr id="64" name="TextBox 63"/>
+          <p:cNvSpPr txBox="1"/>
+          <p:nvPr/>
+        </p:nvSpPr>
+        <p:spPr>
+          <a:xfrm>
+            <a:off x="10341864" y="4105656"/>
+            <a:ext cx="1408175" cy="137160"/>
+          </a:xfrm>
+          <a:prstGeom prst="rect">
+            <a:avLst/>
+          </a:prstGeom>
+          <a:noFill/>
+        </p:spPr>
+        <p:txBody>
+          <a:bodyPr wrap="square" lIns="0" rIns="0" tIns="0" bIns="0" anchor="t">
+            <a:spAutoFit/>
+          </a:bodyPr>
+          <a:lstStyle/>
+          <a:p>
+            <a:pPr algn="ctr">
+              <a:lnSpc>
+                <a:spcPct val="100000"/>
+              </a:lnSpc>
+              <a:spcBef>
+                <a:spcPts val="0"/>
+              </a:spcBef>
+              <a:spcAft>
+                <a:spcPts val="0"/>
+              </a:spcAft>
+            </a:pPr>
+            <a:r>
+              <a:rPr sz="760" b="0" i="0">
+                <a:solidFill>
+                  <a:srgbClr val="171A1F"/>
+                </a:solidFill>
+                <a:latin typeface="Segoe UI"/>
+              </a:rPr>
+              <a:t>11.0</a:t>
+            </a:r>
+          </a:p>
+        </p:txBody>
+      </p:sp>
+      <p:sp>
+        <p:nvSpPr>
+          <p:cNvPr id="65" name="Rectangle 64"/>
+          <p:cNvSpPr/>
+          <p:nvPr/>
+        </p:nvSpPr>
+        <p:spPr>
+          <a:xfrm>
+            <a:off x="4279392" y="4279392"/>
+            <a:ext cx="7516368" cy="224028"/>
+          </a:xfrm>
+          <a:prstGeom prst="rect">
+            <a:avLst/>
+          </a:prstGeom>
+          <a:solidFill>
+            <a:srgbClr val="F5EADA"/>
+          </a:solidFill>
+          <a:ln>
+            <a:noFill/>
+          </a:ln>
+        </p:spPr>
+        <p:style>
+          <a:lnRef idx="1">
+            <a:schemeClr val="accent1"/>
+          </a:lnRef>
+          <a:fillRef idx="3">
+            <a:schemeClr val="accent1"/>
+          </a:fillRef>
+          <a:effectRef idx="2">
+            <a:schemeClr val="accent1"/>
+          </a:effectRef>
+          <a:fontRef idx="minor">
+            <a:schemeClr val="lt1"/>
+          </a:fontRef>
+        </p:style>
+        <p:txBody>
+          <a:bodyPr rtlCol="0" anchor="ctr"/>
+          <a:lstStyle/>
+          <a:p>
+            <a:pPr algn="ctr"/>
+          </a:p>
+        </p:txBody>
+      </p:sp>
+      <p:sp>
+        <p:nvSpPr>
+          <p:cNvPr id="66" name="Rectangle 65"/>
+          <p:cNvSpPr/>
+          <p:nvPr/>
+        </p:nvSpPr>
+        <p:spPr>
+          <a:xfrm>
+            <a:off x="4279392" y="4496104"/>
+            <a:ext cx="7516368" cy="7315"/>
+          </a:xfrm>
+          <a:prstGeom prst="rect">
+            <a:avLst/>
+          </a:prstGeom>
+          <a:solidFill>
+            <a:srgbClr val="D9D4CB"/>
+          </a:solidFill>
+          <a:ln>
+            <a:noFill/>
+          </a:ln>
+        </p:spPr>
+        <p:style>
+          <a:lnRef idx="1">
+            <a:schemeClr val="accent1"/>
+          </a:lnRef>
+          <a:fillRef idx="3">
+            <a:schemeClr val="accent1"/>
+          </a:fillRef>
+          <a:effectRef idx="2">
+            <a:schemeClr val="accent1"/>
+          </a:effectRef>
+          <a:fontRef idx="minor">
+            <a:schemeClr val="lt1"/>
+          </a:fontRef>
+        </p:style>
+        <p:txBody>
+          <a:bodyPr rtlCol="0" anchor="ctr"/>
+          <a:lstStyle/>
+          <a:p>
+            <a:pPr algn="ctr"/>
+          </a:p>
+        </p:txBody>
+      </p:sp>
+      <p:sp>
+        <p:nvSpPr>
+          <p:cNvPr id="67" name="TextBox 66"/>
+          <p:cNvSpPr txBox="1"/>
+          <p:nvPr/>
+        </p:nvSpPr>
+        <p:spPr>
+          <a:xfrm>
+            <a:off x="4325112" y="4329684"/>
+            <a:ext cx="1536192" cy="137160"/>
+          </a:xfrm>
+          <a:prstGeom prst="rect">
+            <a:avLst/>
+          </a:prstGeom>
+          <a:noFill/>
+        </p:spPr>
+        <p:txBody>
+          <a:bodyPr wrap="square" lIns="0" rIns="0" tIns="0" bIns="0" anchor="t">
+            <a:spAutoFit/>
+          </a:bodyPr>
+          <a:lstStyle/>
+          <a:p>
             <a:pPr algn="l">
               <a:lnSpc>
-                <a:spcPct val="104000"/>
+                <a:spcPct val="100000"/>
               </a:lnSpc>
               <a:spcBef>
                 <a:spcPts val="0"/>
@@ -5980,27 +6088,917 @@
               </a:spcAft>
             </a:pPr>
             <a:r>
-              <a:rPr sz="705" b="0" i="0">
-                <a:solidFill>
-                  <a:srgbClr val="434952"/>
-                </a:solidFill>
-                <a:latin typeface="Aptos"/>
+              <a:rPr sz="760" b="1" i="0">
+                <a:solidFill>
+                  <a:srgbClr val="171A1F"/>
+                </a:solidFill>
+                <a:latin typeface="Segoe UI"/>
               </a:rPr>
-              <a:t>At s=2×10 (~65% GPU), PENCIL matches Cora Pool (42.9 vs 43.7) and beats full s=2×20 on Citeseer Pool (51.4 vs 49.7) and Cora HeaRT (14.3 vs 13.3). Citeseer HeaRT is the exception: 14.2 vs 17.8.</a:t>
-            </a:r>
-          </a:p>
-        </p:txBody>
-      </p:sp>
-      <p:sp>
-        <p:nvSpPr>
-          <p:cNvPr id="66" name="Rounded Rectangle 65"/>
+              <a:t>Hybrid · ≤10%</a:t>
+            </a:r>
+          </a:p>
+        </p:txBody>
+      </p:sp>
+      <p:sp>
+        <p:nvSpPr>
+          <p:cNvPr id="68" name="TextBox 67"/>
+          <p:cNvSpPr txBox="1"/>
+          <p:nvPr/>
+        </p:nvSpPr>
+        <p:spPr>
+          <a:xfrm>
+            <a:off x="5952744" y="4329684"/>
+            <a:ext cx="1353312" cy="137160"/>
+          </a:xfrm>
+          <a:prstGeom prst="rect">
+            <a:avLst/>
+          </a:prstGeom>
+          <a:noFill/>
+        </p:spPr>
+        <p:txBody>
+          <a:bodyPr wrap="square" lIns="0" rIns="0" tIns="0" bIns="0" anchor="t">
+            <a:spAutoFit/>
+          </a:bodyPr>
+          <a:lstStyle/>
+          <a:p>
+            <a:pPr algn="ctr">
+              <a:lnSpc>
+                <a:spcPct val="100000"/>
+              </a:lnSpc>
+              <a:spcBef>
+                <a:spcPts val="0"/>
+              </a:spcBef>
+              <a:spcAft>
+                <a:spcPts val="0"/>
+              </a:spcAft>
+            </a:pPr>
+            <a:r>
+              <a:rPr sz="760" b="1" i="0">
+                <a:solidFill>
+                  <a:srgbClr val="B46318"/>
+                </a:solidFill>
+                <a:latin typeface="Segoe UI"/>
+              </a:rPr>
+              <a:t>38.4 · 7%</a:t>
+            </a:r>
+          </a:p>
+        </p:txBody>
+      </p:sp>
+      <p:sp>
+        <p:nvSpPr>
+          <p:cNvPr id="69" name="TextBox 68"/>
+          <p:cNvSpPr txBox="1"/>
+          <p:nvPr/>
+        </p:nvSpPr>
+        <p:spPr>
+          <a:xfrm>
+            <a:off x="7397496" y="4329684"/>
+            <a:ext cx="1389888" cy="137160"/>
+          </a:xfrm>
+          <a:prstGeom prst="rect">
+            <a:avLst/>
+          </a:prstGeom>
+          <a:noFill/>
+        </p:spPr>
+        <p:txBody>
+          <a:bodyPr wrap="square" lIns="0" rIns="0" tIns="0" bIns="0" anchor="t">
+            <a:spAutoFit/>
+          </a:bodyPr>
+          <a:lstStyle/>
+          <a:p>
+            <a:pPr algn="ctr">
+              <a:lnSpc>
+                <a:spcPct val="100000"/>
+              </a:lnSpc>
+              <a:spcBef>
+                <a:spcPts val="0"/>
+              </a:spcBef>
+              <a:spcAft>
+                <a:spcPts val="0"/>
+              </a:spcAft>
+            </a:pPr>
+            <a:r>
+              <a:rPr sz="760" b="1" i="0">
+                <a:solidFill>
+                  <a:srgbClr val="171A1F"/>
+                </a:solidFill>
+                <a:latin typeface="Segoe UI"/>
+              </a:rPr>
+              <a:t>34.7 · 9%</a:t>
+            </a:r>
+          </a:p>
+        </p:txBody>
+      </p:sp>
+      <p:sp>
+        <p:nvSpPr>
+          <p:cNvPr id="70" name="TextBox 69"/>
+          <p:cNvSpPr txBox="1"/>
+          <p:nvPr/>
+        </p:nvSpPr>
+        <p:spPr>
+          <a:xfrm>
+            <a:off x="8878824" y="4329684"/>
+            <a:ext cx="1371600" cy="137160"/>
+          </a:xfrm>
+          <a:prstGeom prst="rect">
+            <a:avLst/>
+          </a:prstGeom>
+          <a:noFill/>
+        </p:spPr>
+        <p:txBody>
+          <a:bodyPr wrap="square" lIns="0" rIns="0" tIns="0" bIns="0" anchor="t">
+            <a:spAutoFit/>
+          </a:bodyPr>
+          <a:lstStyle/>
+          <a:p>
+            <a:pPr algn="ctr">
+              <a:lnSpc>
+                <a:spcPct val="100000"/>
+              </a:lnSpc>
+              <a:spcBef>
+                <a:spcPts val="0"/>
+              </a:spcBef>
+              <a:spcAft>
+                <a:spcPts val="0"/>
+              </a:spcAft>
+            </a:pPr>
+            <a:r>
+              <a:rPr sz="760" b="1" i="0">
+                <a:solidFill>
+                  <a:srgbClr val="171A1F"/>
+                </a:solidFill>
+                <a:latin typeface="Segoe UI"/>
+              </a:rPr>
+              <a:t>12.8 · 0.4%</a:t>
+            </a:r>
+          </a:p>
+        </p:txBody>
+      </p:sp>
+      <p:sp>
+        <p:nvSpPr>
+          <p:cNvPr id="71" name="TextBox 70"/>
+          <p:cNvSpPr txBox="1"/>
+          <p:nvPr/>
+        </p:nvSpPr>
+        <p:spPr>
+          <a:xfrm>
+            <a:off x="10341864" y="4329684"/>
+            <a:ext cx="1408175" cy="137160"/>
+          </a:xfrm>
+          <a:prstGeom prst="rect">
+            <a:avLst/>
+          </a:prstGeom>
+          <a:noFill/>
+        </p:spPr>
+        <p:txBody>
+          <a:bodyPr wrap="square" lIns="0" rIns="0" tIns="0" bIns="0" anchor="t">
+            <a:spAutoFit/>
+          </a:bodyPr>
+          <a:lstStyle/>
+          <a:p>
+            <a:pPr algn="ctr">
+              <a:lnSpc>
+                <a:spcPct val="100000"/>
+              </a:lnSpc>
+              <a:spcBef>
+                <a:spcPts val="0"/>
+              </a:spcBef>
+              <a:spcAft>
+                <a:spcPts val="0"/>
+              </a:spcAft>
+            </a:pPr>
+            <a:r>
+              <a:rPr sz="760" b="1" i="0">
+                <a:solidFill>
+                  <a:srgbClr val="B46318"/>
+                </a:solidFill>
+                <a:latin typeface="Segoe UI"/>
+              </a:rPr>
+              <a:t>13.8 · 8%</a:t>
+            </a:r>
+          </a:p>
+        </p:txBody>
+      </p:sp>
+      <p:sp>
+        <p:nvSpPr>
+          <p:cNvPr id="72" name="Rectangle 71"/>
           <p:cNvSpPr/>
           <p:nvPr/>
         </p:nvSpPr>
         <p:spPr>
           <a:xfrm>
-            <a:off x="3246120" y="2450592"/>
-            <a:ext cx="3941063" cy="1024128"/>
+            <a:off x="4279392" y="4503420"/>
+            <a:ext cx="7516368" cy="224028"/>
+          </a:xfrm>
+          <a:prstGeom prst="rect">
+            <a:avLst/>
+          </a:prstGeom>
+          <a:solidFill>
+            <a:srgbClr val="E4F0ED"/>
+          </a:solidFill>
+          <a:ln>
+            <a:noFill/>
+          </a:ln>
+        </p:spPr>
+        <p:style>
+          <a:lnRef idx="1">
+            <a:schemeClr val="accent1"/>
+          </a:lnRef>
+          <a:fillRef idx="3">
+            <a:schemeClr val="accent1"/>
+          </a:fillRef>
+          <a:effectRef idx="2">
+            <a:schemeClr val="accent1"/>
+          </a:effectRef>
+          <a:fontRef idx="minor">
+            <a:schemeClr val="lt1"/>
+          </a:fontRef>
+        </p:style>
+        <p:txBody>
+          <a:bodyPr rtlCol="0" anchor="ctr"/>
+          <a:lstStyle/>
+          <a:p>
+            <a:pPr algn="ctr"/>
+          </a:p>
+        </p:txBody>
+      </p:sp>
+      <p:sp>
+        <p:nvSpPr>
+          <p:cNvPr id="73" name="Rectangle 72"/>
+          <p:cNvSpPr/>
+          <p:nvPr/>
+        </p:nvSpPr>
+        <p:spPr>
+          <a:xfrm>
+            <a:off x="4279392" y="4720132"/>
+            <a:ext cx="7516368" cy="7315"/>
+          </a:xfrm>
+          <a:prstGeom prst="rect">
+            <a:avLst/>
+          </a:prstGeom>
+          <a:solidFill>
+            <a:srgbClr val="D9D4CB"/>
+          </a:solidFill>
+          <a:ln>
+            <a:noFill/>
+          </a:ln>
+        </p:spPr>
+        <p:style>
+          <a:lnRef idx="1">
+            <a:schemeClr val="accent1"/>
+          </a:lnRef>
+          <a:fillRef idx="3">
+            <a:schemeClr val="accent1"/>
+          </a:fillRef>
+          <a:effectRef idx="2">
+            <a:schemeClr val="accent1"/>
+          </a:effectRef>
+          <a:fontRef idx="minor">
+            <a:schemeClr val="lt1"/>
+          </a:fontRef>
+        </p:style>
+        <p:txBody>
+          <a:bodyPr rtlCol="0" anchor="ctr"/>
+          <a:lstStyle/>
+          <a:p>
+            <a:pPr algn="ctr"/>
+          </a:p>
+        </p:txBody>
+      </p:sp>
+      <p:sp>
+        <p:nvSpPr>
+          <p:cNvPr id="74" name="TextBox 73"/>
+          <p:cNvSpPr txBox="1"/>
+          <p:nvPr/>
+        </p:nvSpPr>
+        <p:spPr>
+          <a:xfrm>
+            <a:off x="4325112" y="4553712"/>
+            <a:ext cx="1536192" cy="137160"/>
+          </a:xfrm>
+          <a:prstGeom prst="rect">
+            <a:avLst/>
+          </a:prstGeom>
+          <a:noFill/>
+        </p:spPr>
+        <p:txBody>
+          <a:bodyPr wrap="square" lIns="0" rIns="0" tIns="0" bIns="0" anchor="t">
+            <a:spAutoFit/>
+          </a:bodyPr>
+          <a:lstStyle/>
+          <a:p>
+            <a:pPr algn="l">
+              <a:lnSpc>
+                <a:spcPct val="100000"/>
+              </a:lnSpc>
+              <a:spcBef>
+                <a:spcPts val="0"/>
+              </a:spcBef>
+              <a:spcAft>
+                <a:spcPts val="0"/>
+              </a:spcAft>
+            </a:pPr>
+            <a:r>
+              <a:rPr sz="760" b="1" i="0">
+                <a:solidFill>
+                  <a:srgbClr val="171A1F"/>
+                </a:solidFill>
+                <a:latin typeface="Segoe UI"/>
+              </a:rPr>
+              <a:t>PENCIL · s=2×10</a:t>
+            </a:r>
+          </a:p>
+        </p:txBody>
+      </p:sp>
+      <p:sp>
+        <p:nvSpPr>
+          <p:cNvPr id="75" name="TextBox 74"/>
+          <p:cNvSpPr txBox="1"/>
+          <p:nvPr/>
+        </p:nvSpPr>
+        <p:spPr>
+          <a:xfrm>
+            <a:off x="5952744" y="4553712"/>
+            <a:ext cx="1353312" cy="137160"/>
+          </a:xfrm>
+          <a:prstGeom prst="rect">
+            <a:avLst/>
+          </a:prstGeom>
+          <a:noFill/>
+        </p:spPr>
+        <p:txBody>
+          <a:bodyPr wrap="square" lIns="0" rIns="0" tIns="0" bIns="0" anchor="t">
+            <a:spAutoFit/>
+          </a:bodyPr>
+          <a:lstStyle/>
+          <a:p>
+            <a:pPr algn="ctr">
+              <a:lnSpc>
+                <a:spcPct val="100000"/>
+              </a:lnSpc>
+              <a:spcBef>
+                <a:spcPts val="0"/>
+              </a:spcBef>
+              <a:spcAft>
+                <a:spcPts val="0"/>
+              </a:spcAft>
+            </a:pPr>
+            <a:r>
+              <a:rPr sz="760" b="1" i="0">
+                <a:solidFill>
+                  <a:srgbClr val="171A1F"/>
+                </a:solidFill>
+                <a:latin typeface="Segoe UI"/>
+              </a:rPr>
+              <a:t>42.9 · 67%</a:t>
+            </a:r>
+          </a:p>
+        </p:txBody>
+      </p:sp>
+      <p:sp>
+        <p:nvSpPr>
+          <p:cNvPr id="76" name="TextBox 75"/>
+          <p:cNvSpPr txBox="1"/>
+          <p:nvPr/>
+        </p:nvSpPr>
+        <p:spPr>
+          <a:xfrm>
+            <a:off x="7397496" y="4553712"/>
+            <a:ext cx="1389888" cy="137160"/>
+          </a:xfrm>
+          <a:prstGeom prst="rect">
+            <a:avLst/>
+          </a:prstGeom>
+          <a:noFill/>
+        </p:spPr>
+        <p:txBody>
+          <a:bodyPr wrap="square" lIns="0" rIns="0" tIns="0" bIns="0" anchor="t">
+            <a:spAutoFit/>
+          </a:bodyPr>
+          <a:lstStyle/>
+          <a:p>
+            <a:pPr algn="ctr">
+              <a:lnSpc>
+                <a:spcPct val="100000"/>
+              </a:lnSpc>
+              <a:spcBef>
+                <a:spcPts val="0"/>
+              </a:spcBef>
+              <a:spcAft>
+                <a:spcPts val="0"/>
+              </a:spcAft>
+            </a:pPr>
+            <a:r>
+              <a:rPr sz="760" b="1" i="0">
+                <a:solidFill>
+                  <a:srgbClr val="0F7670"/>
+                </a:solidFill>
+                <a:latin typeface="Segoe UI"/>
+              </a:rPr>
+              <a:t>51.4 · 63%</a:t>
+            </a:r>
+          </a:p>
+        </p:txBody>
+      </p:sp>
+      <p:sp>
+        <p:nvSpPr>
+          <p:cNvPr id="77" name="TextBox 76"/>
+          <p:cNvSpPr txBox="1"/>
+          <p:nvPr/>
+        </p:nvSpPr>
+        <p:spPr>
+          <a:xfrm>
+            <a:off x="8878824" y="4553712"/>
+            <a:ext cx="1371600" cy="137160"/>
+          </a:xfrm>
+          <a:prstGeom prst="rect">
+            <a:avLst/>
+          </a:prstGeom>
+          <a:noFill/>
+        </p:spPr>
+        <p:txBody>
+          <a:bodyPr wrap="square" lIns="0" rIns="0" tIns="0" bIns="0" anchor="t">
+            <a:spAutoFit/>
+          </a:bodyPr>
+          <a:lstStyle/>
+          <a:p>
+            <a:pPr algn="ctr">
+              <a:lnSpc>
+                <a:spcPct val="100000"/>
+              </a:lnSpc>
+              <a:spcBef>
+                <a:spcPts val="0"/>
+              </a:spcBef>
+              <a:spcAft>
+                <a:spcPts val="0"/>
+              </a:spcAft>
+            </a:pPr>
+            <a:r>
+              <a:rPr sz="760" b="1" i="0">
+                <a:solidFill>
+                  <a:srgbClr val="0F7670"/>
+                </a:solidFill>
+                <a:latin typeface="Segoe UI"/>
+              </a:rPr>
+              <a:t>14.3 · 65%</a:t>
+            </a:r>
+          </a:p>
+        </p:txBody>
+      </p:sp>
+      <p:sp>
+        <p:nvSpPr>
+          <p:cNvPr id="78" name="TextBox 77"/>
+          <p:cNvSpPr txBox="1"/>
+          <p:nvPr/>
+        </p:nvSpPr>
+        <p:spPr>
+          <a:xfrm>
+            <a:off x="10341864" y="4553712"/>
+            <a:ext cx="1408175" cy="137160"/>
+          </a:xfrm>
+          <a:prstGeom prst="rect">
+            <a:avLst/>
+          </a:prstGeom>
+          <a:noFill/>
+        </p:spPr>
+        <p:txBody>
+          <a:bodyPr wrap="square" lIns="0" rIns="0" tIns="0" bIns="0" anchor="t">
+            <a:spAutoFit/>
+          </a:bodyPr>
+          <a:lstStyle/>
+          <a:p>
+            <a:pPr algn="ctr">
+              <a:lnSpc>
+                <a:spcPct val="100000"/>
+              </a:lnSpc>
+              <a:spcBef>
+                <a:spcPts val="0"/>
+              </a:spcBef>
+              <a:spcAft>
+                <a:spcPts val="0"/>
+              </a:spcAft>
+            </a:pPr>
+            <a:r>
+              <a:rPr sz="760" b="1" i="0">
+                <a:solidFill>
+                  <a:srgbClr val="171A1F"/>
+                </a:solidFill>
+                <a:latin typeface="Segoe UI"/>
+              </a:rPr>
+              <a:t>14.2 · 69%</a:t>
+            </a:r>
+          </a:p>
+        </p:txBody>
+      </p:sp>
+      <p:sp>
+        <p:nvSpPr>
+          <p:cNvPr id="79" name="Rectangle 78"/>
+          <p:cNvSpPr/>
+          <p:nvPr/>
+        </p:nvSpPr>
+        <p:spPr>
+          <a:xfrm>
+            <a:off x="4279392" y="4727448"/>
+            <a:ext cx="7516368" cy="224028"/>
+          </a:xfrm>
+          <a:prstGeom prst="rect">
+            <a:avLst/>
+          </a:prstGeom>
+          <a:solidFill>
+            <a:srgbClr val="FFFFFF"/>
+          </a:solidFill>
+          <a:ln>
+            <a:noFill/>
+          </a:ln>
+        </p:spPr>
+        <p:style>
+          <a:lnRef idx="1">
+            <a:schemeClr val="accent1"/>
+          </a:lnRef>
+          <a:fillRef idx="3">
+            <a:schemeClr val="accent1"/>
+          </a:fillRef>
+          <a:effectRef idx="2">
+            <a:schemeClr val="accent1"/>
+          </a:effectRef>
+          <a:fontRef idx="minor">
+            <a:schemeClr val="lt1"/>
+          </a:fontRef>
+        </p:style>
+        <p:txBody>
+          <a:bodyPr rtlCol="0" anchor="ctr"/>
+          <a:lstStyle/>
+          <a:p>
+            <a:pPr algn="ctr"/>
+          </a:p>
+        </p:txBody>
+      </p:sp>
+      <p:sp>
+        <p:nvSpPr>
+          <p:cNvPr id="80" name="Rectangle 79"/>
+          <p:cNvSpPr/>
+          <p:nvPr/>
+        </p:nvSpPr>
+        <p:spPr>
+          <a:xfrm>
+            <a:off x="4279392" y="4944160"/>
+            <a:ext cx="7516368" cy="7315"/>
+          </a:xfrm>
+          <a:prstGeom prst="rect">
+            <a:avLst/>
+          </a:prstGeom>
+          <a:solidFill>
+            <a:srgbClr val="D9D4CB"/>
+          </a:solidFill>
+          <a:ln>
+            <a:noFill/>
+          </a:ln>
+        </p:spPr>
+        <p:style>
+          <a:lnRef idx="1">
+            <a:schemeClr val="accent1"/>
+          </a:lnRef>
+          <a:fillRef idx="3">
+            <a:schemeClr val="accent1"/>
+          </a:fillRef>
+          <a:effectRef idx="2">
+            <a:schemeClr val="accent1"/>
+          </a:effectRef>
+          <a:fontRef idx="minor">
+            <a:schemeClr val="lt1"/>
+          </a:fontRef>
+        </p:style>
+        <p:txBody>
+          <a:bodyPr rtlCol="0" anchor="ctr"/>
+          <a:lstStyle/>
+          <a:p>
+            <a:pPr algn="ctr"/>
+          </a:p>
+        </p:txBody>
+      </p:sp>
+      <p:sp>
+        <p:nvSpPr>
+          <p:cNvPr id="81" name="TextBox 80"/>
+          <p:cNvSpPr txBox="1"/>
+          <p:nvPr/>
+        </p:nvSpPr>
+        <p:spPr>
+          <a:xfrm>
+            <a:off x="4325112" y="4777740"/>
+            <a:ext cx="1536192" cy="137160"/>
+          </a:xfrm>
+          <a:prstGeom prst="rect">
+            <a:avLst/>
+          </a:prstGeom>
+          <a:noFill/>
+        </p:spPr>
+        <p:txBody>
+          <a:bodyPr wrap="square" lIns="0" rIns="0" tIns="0" bIns="0" anchor="t">
+            <a:spAutoFit/>
+          </a:bodyPr>
+          <a:lstStyle/>
+          <a:p>
+            <a:pPr algn="l">
+              <a:lnSpc>
+                <a:spcPct val="100000"/>
+              </a:lnSpc>
+              <a:spcBef>
+                <a:spcPts val="0"/>
+              </a:spcBef>
+              <a:spcAft>
+                <a:spcPts val="0"/>
+              </a:spcAft>
+            </a:pPr>
+            <a:r>
+              <a:rPr sz="760" b="1" i="0">
+                <a:solidFill>
+                  <a:srgbClr val="171A1F"/>
+                </a:solidFill>
+                <a:latin typeface="Segoe UI"/>
+              </a:rPr>
+              <a:t>PENCIL · s=2×20</a:t>
+            </a:r>
+          </a:p>
+        </p:txBody>
+      </p:sp>
+      <p:sp>
+        <p:nvSpPr>
+          <p:cNvPr id="82" name="TextBox 81"/>
+          <p:cNvSpPr txBox="1"/>
+          <p:nvPr/>
+        </p:nvSpPr>
+        <p:spPr>
+          <a:xfrm>
+            <a:off x="5952744" y="4777740"/>
+            <a:ext cx="1353312" cy="137160"/>
+          </a:xfrm>
+          <a:prstGeom prst="rect">
+            <a:avLst/>
+          </a:prstGeom>
+          <a:noFill/>
+        </p:spPr>
+        <p:txBody>
+          <a:bodyPr wrap="square" lIns="0" rIns="0" tIns="0" bIns="0" anchor="t">
+            <a:spAutoFit/>
+          </a:bodyPr>
+          <a:lstStyle/>
+          <a:p>
+            <a:pPr algn="ctr">
+              <a:lnSpc>
+                <a:spcPct val="100000"/>
+              </a:lnSpc>
+              <a:spcBef>
+                <a:spcPts val="0"/>
+              </a:spcBef>
+              <a:spcAft>
+                <a:spcPts val="0"/>
+              </a:spcAft>
+            </a:pPr>
+            <a:r>
+              <a:rPr sz="760" b="0" i="0">
+                <a:solidFill>
+                  <a:srgbClr val="171A1F"/>
+                </a:solidFill>
+                <a:latin typeface="Segoe UI"/>
+              </a:rPr>
+              <a:t>43.7</a:t>
+            </a:r>
+          </a:p>
+        </p:txBody>
+      </p:sp>
+      <p:sp>
+        <p:nvSpPr>
+          <p:cNvPr id="83" name="TextBox 82"/>
+          <p:cNvSpPr txBox="1"/>
+          <p:nvPr/>
+        </p:nvSpPr>
+        <p:spPr>
+          <a:xfrm>
+            <a:off x="7397496" y="4777740"/>
+            <a:ext cx="1389888" cy="137160"/>
+          </a:xfrm>
+          <a:prstGeom prst="rect">
+            <a:avLst/>
+          </a:prstGeom>
+          <a:noFill/>
+        </p:spPr>
+        <p:txBody>
+          <a:bodyPr wrap="square" lIns="0" rIns="0" tIns="0" bIns="0" anchor="t">
+            <a:spAutoFit/>
+          </a:bodyPr>
+          <a:lstStyle/>
+          <a:p>
+            <a:pPr algn="ctr">
+              <a:lnSpc>
+                <a:spcPct val="100000"/>
+              </a:lnSpc>
+              <a:spcBef>
+                <a:spcPts val="0"/>
+              </a:spcBef>
+              <a:spcAft>
+                <a:spcPts val="0"/>
+              </a:spcAft>
+            </a:pPr>
+            <a:r>
+              <a:rPr sz="760" b="0" i="0">
+                <a:solidFill>
+                  <a:srgbClr val="171A1F"/>
+                </a:solidFill>
+                <a:latin typeface="Segoe UI"/>
+              </a:rPr>
+              <a:t>49.7</a:t>
+            </a:r>
+          </a:p>
+        </p:txBody>
+      </p:sp>
+      <p:sp>
+        <p:nvSpPr>
+          <p:cNvPr id="84" name="TextBox 83"/>
+          <p:cNvSpPr txBox="1"/>
+          <p:nvPr/>
+        </p:nvSpPr>
+        <p:spPr>
+          <a:xfrm>
+            <a:off x="8878824" y="4777740"/>
+            <a:ext cx="1371600" cy="137160"/>
+          </a:xfrm>
+          <a:prstGeom prst="rect">
+            <a:avLst/>
+          </a:prstGeom>
+          <a:noFill/>
+        </p:spPr>
+        <p:txBody>
+          <a:bodyPr wrap="square" lIns="0" rIns="0" tIns="0" bIns="0" anchor="t">
+            <a:spAutoFit/>
+          </a:bodyPr>
+          <a:lstStyle/>
+          <a:p>
+            <a:pPr algn="ctr">
+              <a:lnSpc>
+                <a:spcPct val="100000"/>
+              </a:lnSpc>
+              <a:spcBef>
+                <a:spcPts val="0"/>
+              </a:spcBef>
+              <a:spcAft>
+                <a:spcPts val="0"/>
+              </a:spcAft>
+            </a:pPr>
+            <a:r>
+              <a:rPr sz="760" b="0" i="0">
+                <a:solidFill>
+                  <a:srgbClr val="171A1F"/>
+                </a:solidFill>
+                <a:latin typeface="Segoe UI"/>
+              </a:rPr>
+              <a:t>13.3</a:t>
+            </a:r>
+          </a:p>
+        </p:txBody>
+      </p:sp>
+      <p:sp>
+        <p:nvSpPr>
+          <p:cNvPr id="85" name="TextBox 84"/>
+          <p:cNvSpPr txBox="1"/>
+          <p:nvPr/>
+        </p:nvSpPr>
+        <p:spPr>
+          <a:xfrm>
+            <a:off x="10341864" y="4777740"/>
+            <a:ext cx="1408175" cy="137160"/>
+          </a:xfrm>
+          <a:prstGeom prst="rect">
+            <a:avLst/>
+          </a:prstGeom>
+          <a:noFill/>
+        </p:spPr>
+        <p:txBody>
+          <a:bodyPr wrap="square" lIns="0" rIns="0" tIns="0" bIns="0" anchor="t">
+            <a:spAutoFit/>
+          </a:bodyPr>
+          <a:lstStyle/>
+          <a:p>
+            <a:pPr algn="ctr">
+              <a:lnSpc>
+                <a:spcPct val="100000"/>
+              </a:lnSpc>
+              <a:spcBef>
+                <a:spcPts val="0"/>
+              </a:spcBef>
+              <a:spcAft>
+                <a:spcPts val="0"/>
+              </a:spcAft>
+            </a:pPr>
+            <a:r>
+              <a:rPr sz="760" b="0" i="0">
+                <a:solidFill>
+                  <a:srgbClr val="171A1F"/>
+                </a:solidFill>
+                <a:latin typeface="Segoe UI"/>
+              </a:rPr>
+              <a:t>17.8</a:t>
+            </a:r>
+          </a:p>
+        </p:txBody>
+      </p:sp>
+      <p:sp>
+        <p:nvSpPr>
+          <p:cNvPr id="86" name="Rectangle 85"/>
+          <p:cNvSpPr/>
+          <p:nvPr/>
+        </p:nvSpPr>
+        <p:spPr>
+          <a:xfrm>
+            <a:off x="4279392" y="4951476"/>
+            <a:ext cx="7516368" cy="16459"/>
+          </a:xfrm>
+          <a:prstGeom prst="rect">
+            <a:avLst/>
+          </a:prstGeom>
+          <a:solidFill>
+            <a:srgbClr val="171A1F"/>
+          </a:solidFill>
+          <a:ln>
+            <a:noFill/>
+          </a:ln>
+        </p:spPr>
+        <p:style>
+          <a:lnRef idx="1">
+            <a:schemeClr val="accent1"/>
+          </a:lnRef>
+          <a:fillRef idx="3">
+            <a:schemeClr val="accent1"/>
+          </a:fillRef>
+          <a:effectRef idx="2">
+            <a:schemeClr val="accent1"/>
+          </a:effectRef>
+          <a:fontRef idx="minor">
+            <a:schemeClr val="lt1"/>
+          </a:fontRef>
+        </p:style>
+        <p:txBody>
+          <a:bodyPr rtlCol="0" anchor="ctr"/>
+          <a:lstStyle/>
+          <a:p>
+            <a:pPr algn="ctr"/>
+          </a:p>
+        </p:txBody>
+      </p:sp>
+      <p:sp>
+        <p:nvSpPr>
+          <p:cNvPr id="87" name="TextBox 86"/>
+          <p:cNvSpPr txBox="1"/>
+          <p:nvPr/>
+        </p:nvSpPr>
+        <p:spPr>
+          <a:xfrm>
+            <a:off x="384048" y="4983480"/>
+            <a:ext cx="11411712" cy="228600"/>
+          </a:xfrm>
+          <a:prstGeom prst="rect">
+            <a:avLst/>
+          </a:prstGeom>
+          <a:noFill/>
+        </p:spPr>
+        <p:txBody>
+          <a:bodyPr wrap="square" lIns="0" rIns="0" tIns="0" bIns="0" anchor="t">
+            <a:spAutoFit/>
+          </a:bodyPr>
+          <a:lstStyle/>
+          <a:p>
+            <a:pPr algn="l">
+              <a:lnSpc>
+                <a:spcPct val="100000"/>
+              </a:lnSpc>
+              <a:spcBef>
+                <a:spcPts val="0"/>
+              </a:spcBef>
+              <a:spcAft>
+                <a:spcPts val="0"/>
+              </a:spcAft>
+            </a:pPr>
+            <a:r>
+              <a:rPr sz="1200" b="1" i="0">
+                <a:solidFill>
+                  <a:srgbClr val="171A1F"/>
+                </a:solidFill>
+                <a:latin typeface="Georgia"/>
+              </a:rPr>
+              <a:t>What the sweep shows</a:t>
+            </a:r>
+          </a:p>
+        </p:txBody>
+      </p:sp>
+      <p:sp>
+        <p:nvSpPr>
+          <p:cNvPr id="88" name="Rounded Rectangle 87"/>
+          <p:cNvSpPr/>
+          <p:nvPr/>
+        </p:nvSpPr>
+        <p:spPr>
+          <a:xfrm>
+            <a:off x="384048" y="5266944"/>
+            <a:ext cx="2770632" cy="1207008"/>
           </a:xfrm>
           <a:prstGeom prst="roundRect">
             <a:avLst>
@@ -6040,20 +7038,20 @@
       </p:sp>
       <p:sp>
         <p:nvSpPr>
-          <p:cNvPr id="67" name="Rectangle 66"/>
+          <p:cNvPr id="89" name="Rectangle 88"/>
           <p:cNvSpPr/>
           <p:nvPr/>
         </p:nvSpPr>
         <p:spPr>
           <a:xfrm>
-            <a:off x="3246120" y="2450592"/>
-            <a:ext cx="41148" cy="1024128"/>
+            <a:off x="384048" y="5266944"/>
+            <a:ext cx="2770632" cy="41148"/>
           </a:xfrm>
           <a:prstGeom prst="rect">
             <a:avLst/>
           </a:prstGeom>
           <a:solidFill>
-            <a:srgbClr val="0F7670"/>
+            <a:srgbClr val="203657"/>
           </a:solidFill>
           <a:ln>
             <a:noFill/>
@@ -6083,104 +7081,14 @@
       </p:sp>
       <p:sp>
         <p:nvSpPr>
-          <p:cNvPr id="68" name="Oval 67"/>
-          <p:cNvSpPr/>
-          <p:nvPr/>
-        </p:nvSpPr>
-        <p:spPr>
-          <a:xfrm>
-            <a:off x="3383279" y="2615184"/>
-            <a:ext cx="384048" cy="384048"/>
-          </a:xfrm>
-          <a:prstGeom prst="ellipse">
-            <a:avLst/>
-          </a:prstGeom>
-          <a:solidFill>
-            <a:srgbClr val="E4F0ED"/>
-          </a:solidFill>
-          <a:ln w="10160">
-            <a:solidFill>
-              <a:srgbClr val="0F7670"/>
-            </a:solidFill>
-          </a:ln>
-        </p:spPr>
-        <p:style>
-          <a:lnRef idx="1">
-            <a:schemeClr val="accent1"/>
-          </a:lnRef>
-          <a:fillRef idx="3">
-            <a:schemeClr val="accent1"/>
-          </a:fillRef>
-          <a:effectRef idx="2">
-            <a:schemeClr val="accent1"/>
-          </a:effectRef>
-          <a:fontRef idx="minor">
-            <a:schemeClr val="lt1"/>
-          </a:fontRef>
-        </p:style>
-        <p:txBody>
-          <a:bodyPr rtlCol="0" anchor="ctr"/>
-          <a:lstStyle/>
-          <a:p>
-            <a:pPr algn="ctr"/>
-          </a:p>
-        </p:txBody>
-      </p:sp>
-      <p:sp>
-        <p:nvSpPr>
-          <p:cNvPr id="69" name="TextBox 68"/>
+          <p:cNvPr id="90" name="TextBox 89"/>
           <p:cNvSpPr txBox="1"/>
           <p:nvPr/>
         </p:nvSpPr>
         <p:spPr>
           <a:xfrm>
-            <a:off x="3383279" y="2679192"/>
-            <a:ext cx="384048" cy="164592"/>
-          </a:xfrm>
-          <a:prstGeom prst="rect">
-            <a:avLst/>
-          </a:prstGeom>
-          <a:noFill/>
-        </p:spPr>
-        <p:txBody>
-          <a:bodyPr wrap="square" lIns="0" rIns="0" tIns="0" bIns="0" anchor="ctr">
-            <a:spAutoFit/>
-          </a:bodyPr>
-          <a:lstStyle/>
-          <a:p>
-            <a:pPr algn="ctr">
-              <a:lnSpc>
-                <a:spcPct val="100000"/>
-              </a:lnSpc>
-              <a:spcBef>
-                <a:spcPts val="0"/>
-              </a:spcBef>
-              <a:spcAft>
-                <a:spcPts val="0"/>
-              </a:spcAft>
-            </a:pPr>
-            <a:r>
-              <a:rPr sz="800" b="1" i="0">
-                <a:solidFill>
-                  <a:srgbClr val="0F7670"/>
-                </a:solidFill>
-                <a:latin typeface="Georgia"/>
-              </a:rPr>
-              <a:t>02</a:t>
-            </a:r>
-          </a:p>
-        </p:txBody>
-      </p:sp>
-      <p:sp>
-        <p:nvSpPr>
-          <p:cNvPr id="70" name="TextBox 69"/>
-          <p:cNvSpPr txBox="1"/>
-          <p:nvPr/>
-        </p:nvSpPr>
-        <p:spPr>
-          <a:xfrm>
-            <a:off x="3877056" y="2569464"/>
-            <a:ext cx="3172968" cy="228600"/>
+            <a:off x="521207" y="5394960"/>
+            <a:ext cx="310896" cy="219456"/>
           </a:xfrm>
           <a:prstGeom prst="rect">
             <a:avLst/>
@@ -6205,27 +7113,27 @@
               </a:spcAft>
             </a:pPr>
             <a:r>
-              <a:rPr sz="919" b="1" i="0">
-                <a:solidFill>
-                  <a:srgbClr val="171A1F"/>
+              <a:rPr sz="1300" b="1" i="0">
+                <a:solidFill>
+                  <a:srgbClr val="203657"/>
                 </a:solidFill>
                 <a:latin typeface="Georgia"/>
               </a:rPr>
-              <a:t>A ≤10% GPU hybrid beats heuristics everywhere</a:t>
-            </a:r>
-          </a:p>
-        </p:txBody>
-      </p:sp>
-      <p:sp>
-        <p:nvSpPr>
-          <p:cNvPr id="71" name="TextBox 70"/>
+              <a:t>01</a:t>
+            </a:r>
+          </a:p>
+        </p:txBody>
+      </p:sp>
+      <p:sp>
+        <p:nvSpPr>
+          <p:cNvPr id="91" name="TextBox 90"/>
           <p:cNvSpPr txBox="1"/>
           <p:nvPr/>
         </p:nvSpPr>
         <p:spPr>
           <a:xfrm>
-            <a:off x="3877056" y="2843784"/>
-            <a:ext cx="3172968" cy="521207"/>
+            <a:off x="859536" y="5376672"/>
+            <a:ext cx="2157984" cy="329184"/>
           </a:xfrm>
           <a:prstGeom prst="rect">
             <a:avLst/>
@@ -6240,7 +7148,7 @@
           <a:p>
             <a:pPr algn="l">
               <a:lnSpc>
-                <a:spcPct val="104000"/>
+                <a:spcPct val="100000"/>
               </a:lnSpc>
               <a:spcBef>
                 <a:spcPts val="0"/>
@@ -6250,27 +7158,72 @@
               </a:spcAft>
             </a:pPr>
             <a:r>
-              <a:rPr sz="705" b="0" i="0">
+              <a:rPr sz="1000" b="1" i="0">
+                <a:solidFill>
+                  <a:srgbClr val="171A1F"/>
+                </a:solidFill>
+                <a:latin typeface="Georgia"/>
+              </a:rPr>
+              <a:t>Half fanout is usually enough</a:t>
+            </a:r>
+          </a:p>
+        </p:txBody>
+      </p:sp>
+      <p:sp>
+        <p:nvSpPr>
+          <p:cNvPr id="92" name="TextBox 91"/>
+          <p:cNvSpPr txBox="1"/>
+          <p:nvPr/>
+        </p:nvSpPr>
+        <p:spPr>
+          <a:xfrm>
+            <a:off x="502920" y="5733288"/>
+            <a:ext cx="2532888" cy="603504"/>
+          </a:xfrm>
+          <a:prstGeom prst="rect">
+            <a:avLst/>
+          </a:prstGeom>
+          <a:noFill/>
+        </p:spPr>
+        <p:txBody>
+          <a:bodyPr wrap="square" lIns="0" rIns="0" tIns="0" bIns="0" anchor="t">
+            <a:spAutoFit/>
+          </a:bodyPr>
+          <a:lstStyle/>
+          <a:p>
+            <a:pPr algn="l">
+              <a:lnSpc>
+                <a:spcPct val="106000"/>
+              </a:lnSpc>
+              <a:spcBef>
+                <a:spcPts val="0"/>
+              </a:spcBef>
+              <a:spcAft>
+                <a:spcPts val="0"/>
+              </a:spcAft>
+            </a:pPr>
+            <a:r>
+              <a:rPr sz="840" b="0" i="0">
                 <a:solidFill>
                   <a:srgbClr val="434952"/>
                 </a:solidFill>
-                <a:latin typeface="Aptos"/>
+                <a:latin typeface="Segoe UI"/>
               </a:rPr>
-              <a:t>Validation-selected (k, s) improves over Adamic–Adar in all four tests: 33.1→38.4 on Cora Pool, 31.5→34.7 on Citeseer Pool, 12.0→12.8 on Cora HeaRT, and 11.0→13.8 on Citeseer HeaRT.</a:t>
-            </a:r>
-          </a:p>
-        </p:txBody>
-      </p:sp>
-      <p:sp>
-        <p:nvSpPr>
-          <p:cNvPr id="72" name="Rounded Rectangle 71"/>
+              <a:t>At s=2×10, PENCIL matches Cora Pool and beats full s=2×20 on Citeseer Pool and Cora HeaRT. Citeseer HeaRT is the only case that clearly needs full context.</a:t>
+            </a:r>
+          </a:p>
+        </p:txBody>
+      </p:sp>
+      <p:sp>
+        <p:nvSpPr>
+          <p:cNvPr id="93" name="Rounded Rectangle 92"/>
           <p:cNvSpPr/>
           <p:nvPr/>
         </p:nvSpPr>
         <p:spPr>
           <a:xfrm>
-            <a:off x="3246120" y="3621024"/>
-            <a:ext cx="3941063" cy="1024128"/>
+            <a:off x="3264408" y="5266944"/>
+            <a:ext cx="2770632" cy="1207008"/>
           </a:xfrm>
           <a:prstGeom prst="roundRect">
             <a:avLst>
@@ -6310,20 +7263,20 @@
       </p:sp>
       <p:sp>
         <p:nvSpPr>
-          <p:cNvPr id="73" name="Rectangle 72"/>
+          <p:cNvPr id="94" name="Rectangle 93"/>
           <p:cNvSpPr/>
           <p:nvPr/>
         </p:nvSpPr>
         <p:spPr>
           <a:xfrm>
-            <a:off x="3246120" y="3621024"/>
-            <a:ext cx="41148" cy="1024128"/>
+            <a:off x="3264408" y="5266944"/>
+            <a:ext cx="2770632" cy="41148"/>
           </a:xfrm>
           <a:prstGeom prst="rect">
             <a:avLst/>
           </a:prstGeom>
           <a:solidFill>
-            <a:srgbClr val="B46318"/>
+            <a:srgbClr val="0F7670"/>
           </a:solidFill>
           <a:ln>
             <a:noFill/>
@@ -6353,104 +7306,14 @@
       </p:sp>
       <p:sp>
         <p:nvSpPr>
-          <p:cNvPr id="74" name="Oval 73"/>
-          <p:cNvSpPr/>
-          <p:nvPr/>
-        </p:nvSpPr>
-        <p:spPr>
-          <a:xfrm>
-            <a:off x="3383279" y="3785615"/>
-            <a:ext cx="384048" cy="384048"/>
-          </a:xfrm>
-          <a:prstGeom prst="ellipse">
-            <a:avLst/>
-          </a:prstGeom>
-          <a:solidFill>
-            <a:srgbClr val="F5EADA"/>
-          </a:solidFill>
-          <a:ln w="10160">
-            <a:solidFill>
-              <a:srgbClr val="B46318"/>
-            </a:solidFill>
-          </a:ln>
-        </p:spPr>
-        <p:style>
-          <a:lnRef idx="1">
-            <a:schemeClr val="accent1"/>
-          </a:lnRef>
-          <a:fillRef idx="3">
-            <a:schemeClr val="accent1"/>
-          </a:fillRef>
-          <a:effectRef idx="2">
-            <a:schemeClr val="accent1"/>
-          </a:effectRef>
-          <a:fontRef idx="minor">
-            <a:schemeClr val="lt1"/>
-          </a:fontRef>
-        </p:style>
-        <p:txBody>
-          <a:bodyPr rtlCol="0" anchor="ctr"/>
-          <a:lstStyle/>
-          <a:p>
-            <a:pPr algn="ctr"/>
-          </a:p>
-        </p:txBody>
-      </p:sp>
-      <p:sp>
-        <p:nvSpPr>
-          <p:cNvPr id="75" name="TextBox 74"/>
+          <p:cNvPr id="95" name="TextBox 94"/>
           <p:cNvSpPr txBox="1"/>
           <p:nvPr/>
         </p:nvSpPr>
         <p:spPr>
           <a:xfrm>
-            <a:off x="3383279" y="3849624"/>
-            <a:ext cx="384048" cy="164592"/>
-          </a:xfrm>
-          <a:prstGeom prst="rect">
-            <a:avLst/>
-          </a:prstGeom>
-          <a:noFill/>
-        </p:spPr>
-        <p:txBody>
-          <a:bodyPr wrap="square" lIns="0" rIns="0" tIns="0" bIns="0" anchor="ctr">
-            <a:spAutoFit/>
-          </a:bodyPr>
-          <a:lstStyle/>
-          <a:p>
-            <a:pPr algn="ctr">
-              <a:lnSpc>
-                <a:spcPct val="100000"/>
-              </a:lnSpc>
-              <a:spcBef>
-                <a:spcPts val="0"/>
-              </a:spcBef>
-              <a:spcAft>
-                <a:spcPts val="0"/>
-              </a:spcAft>
-            </a:pPr>
-            <a:r>
-              <a:rPr sz="800" b="1" i="0">
-                <a:solidFill>
-                  <a:srgbClr val="B46318"/>
-                </a:solidFill>
-                <a:latin typeface="Georgia"/>
-              </a:rPr>
-              <a:t>03</a:t>
-            </a:r>
-          </a:p>
-        </p:txBody>
-      </p:sp>
-      <p:sp>
-        <p:nvSpPr>
-          <p:cNvPr id="76" name="TextBox 75"/>
-          <p:cNvSpPr txBox="1"/>
-          <p:nvPr/>
-        </p:nvSpPr>
-        <p:spPr>
-          <a:xfrm>
-            <a:off x="3877056" y="3739896"/>
-            <a:ext cx="3172968" cy="228600"/>
+            <a:off x="3401568" y="5394960"/>
+            <a:ext cx="310896" cy="219456"/>
           </a:xfrm>
           <a:prstGeom prst="rect">
             <a:avLst/>
@@ -6475,27 +7338,27 @@
               </a:spcAft>
             </a:pPr>
             <a:r>
-              <a:rPr sz="919" b="1" i="0">
-                <a:solidFill>
-                  <a:srgbClr val="171A1F"/>
+              <a:rPr sz="1300" b="1" i="0">
+                <a:solidFill>
+                  <a:srgbClr val="0F7670"/>
                 </a:solidFill>
                 <a:latin typeface="Georgia"/>
               </a:rPr>
-              <a:t>PENCIL pays off where graph structure is blind</a:t>
-            </a:r>
-          </a:p>
-        </p:txBody>
-      </p:sp>
-      <p:sp>
-        <p:nvSpPr>
-          <p:cNvPr id="77" name="TextBox 76"/>
+              <a:t>02</a:t>
+            </a:r>
+          </a:p>
+        </p:txBody>
+      </p:sp>
+      <p:sp>
+        <p:nvSpPr>
+          <p:cNvPr id="96" name="TextBox 95"/>
           <p:cNvSpPr txBox="1"/>
           <p:nvPr/>
         </p:nvSpPr>
         <p:spPr>
           <a:xfrm>
-            <a:off x="3877056" y="4014215"/>
-            <a:ext cx="3172968" cy="521207"/>
+            <a:off x="3739896" y="5376672"/>
+            <a:ext cx="2157984" cy="329184"/>
           </a:xfrm>
           <a:prstGeom prst="rect">
             <a:avLst/>
@@ -6510,7 +7373,7 @@
           <a:p>
             <a:pPr algn="l">
               <a:lnSpc>
-                <a:spcPct val="104000"/>
+                <a:spcPct val="100000"/>
               </a:lnSpc>
               <a:spcBef>
                 <a:spcPts val="0"/>
@@ -6520,27 +7383,72 @@
               </a:spcAft>
             </a:pPr>
             <a:r>
-              <a:rPr sz="705" b="0" i="0">
+              <a:rPr sz="1000" b="1" i="0">
+                <a:solidFill>
+                  <a:srgbClr val="171A1F"/>
+                </a:solidFill>
+                <a:latin typeface="Georgia"/>
+              </a:rPr>
+              <a:t>The cheap hybrid helps everywhere</a:t>
+            </a:r>
+          </a:p>
+        </p:txBody>
+      </p:sp>
+      <p:sp>
+        <p:nvSpPr>
+          <p:cNvPr id="97" name="TextBox 96"/>
+          <p:cNvSpPr txBox="1"/>
+          <p:nvPr/>
+        </p:nvSpPr>
+        <p:spPr>
+          <a:xfrm>
+            <a:off x="3383280" y="5733288"/>
+            <a:ext cx="2532888" cy="603504"/>
+          </a:xfrm>
+          <a:prstGeom prst="rect">
+            <a:avLst/>
+          </a:prstGeom>
+          <a:noFill/>
+        </p:spPr>
+        <p:txBody>
+          <a:bodyPr wrap="square" lIns="0" rIns="0" tIns="0" bIns="0" anchor="t">
+            <a:spAutoFit/>
+          </a:bodyPr>
+          <a:lstStyle/>
+          <a:p>
+            <a:pPr algn="l">
+              <a:lnSpc>
+                <a:spcPct val="106000"/>
+              </a:lnSpc>
+              <a:spcBef>
+                <a:spcPts val="0"/>
+              </a:spcBef>
+              <a:spcAft>
+                <a:spcPts val="0"/>
+              </a:spcAft>
+            </a:pPr>
+            <a:r>
+              <a:rPr sz="840" b="0" i="0">
                 <a:solidFill>
                   <a:srgbClr val="434952"/>
                 </a:solidFill>
-                <a:latin typeface="Aptos"/>
+                <a:latin typeface="Segoe UI"/>
               </a:rPr>
-              <a:t>Re-ranking only the top 10% changes almost nothing because AA already ranks easy links highly. The useful compute lies in the zero-common-neighbour tail: 57.3% of true Cora test links have zero shared neighbours.</a:t>
-            </a:r>
-          </a:p>
-        </p:txBody>
-      </p:sp>
-      <p:sp>
-        <p:nvSpPr>
-          <p:cNvPr id="78" name="Rounded Rectangle 77"/>
+              <a:t>A validation-selected hybrid using at most 10% of full GPU compute improves over Adamic–Adar in all four test settings.</a:t>
+            </a:r>
+          </a:p>
+        </p:txBody>
+      </p:sp>
+      <p:sp>
+        <p:nvSpPr>
+          <p:cNvPr id="98" name="Rounded Rectangle 97"/>
           <p:cNvSpPr/>
           <p:nvPr/>
         </p:nvSpPr>
         <p:spPr>
           <a:xfrm>
-            <a:off x="3246120" y="4791456"/>
-            <a:ext cx="3941063" cy="1024128"/>
+            <a:off x="6144768" y="5266944"/>
+            <a:ext cx="2770632" cy="1207008"/>
           </a:xfrm>
           <a:prstGeom prst="roundRect">
             <a:avLst>
@@ -6580,20 +7488,20 @@
       </p:sp>
       <p:sp>
         <p:nvSpPr>
-          <p:cNvPr id="79" name="Rectangle 78"/>
+          <p:cNvPr id="99" name="Rectangle 98"/>
           <p:cNvSpPr/>
           <p:nvPr/>
         </p:nvSpPr>
         <p:spPr>
           <a:xfrm>
-            <a:off x="3246120" y="4791456"/>
-            <a:ext cx="41148" cy="1024128"/>
+            <a:off x="6144768" y="5266944"/>
+            <a:ext cx="2770632" cy="41148"/>
           </a:xfrm>
           <a:prstGeom prst="rect">
             <a:avLst/>
           </a:prstGeom>
           <a:solidFill>
-            <a:srgbClr val="9D1B32"/>
+            <a:srgbClr val="B46318"/>
           </a:solidFill>
           <a:ln>
             <a:noFill/>
@@ -6623,104 +7531,14 @@
       </p:sp>
       <p:sp>
         <p:nvSpPr>
-          <p:cNvPr id="80" name="Oval 79"/>
-          <p:cNvSpPr/>
-          <p:nvPr/>
-        </p:nvSpPr>
-        <p:spPr>
-          <a:xfrm>
-            <a:off x="3383279" y="4956048"/>
-            <a:ext cx="384048" cy="384048"/>
-          </a:xfrm>
-          <a:prstGeom prst="ellipse">
-            <a:avLst/>
-          </a:prstGeom>
-          <a:solidFill>
-            <a:srgbClr val="F4E7E9"/>
-          </a:solidFill>
-          <a:ln w="10160">
-            <a:solidFill>
-              <a:srgbClr val="9D1B32"/>
-            </a:solidFill>
-          </a:ln>
-        </p:spPr>
-        <p:style>
-          <a:lnRef idx="1">
-            <a:schemeClr val="accent1"/>
-          </a:lnRef>
-          <a:fillRef idx="3">
-            <a:schemeClr val="accent1"/>
-          </a:fillRef>
-          <a:effectRef idx="2">
-            <a:schemeClr val="accent1"/>
-          </a:effectRef>
-          <a:fontRef idx="minor">
-            <a:schemeClr val="lt1"/>
-          </a:fontRef>
-        </p:style>
-        <p:txBody>
-          <a:bodyPr rtlCol="0" anchor="ctr"/>
-          <a:lstStyle/>
-          <a:p>
-            <a:pPr algn="ctr"/>
-          </a:p>
-        </p:txBody>
-      </p:sp>
-      <p:sp>
-        <p:nvSpPr>
-          <p:cNvPr id="81" name="TextBox 80"/>
+          <p:cNvPr id="100" name="TextBox 99"/>
           <p:cNvSpPr txBox="1"/>
           <p:nvPr/>
         </p:nvSpPr>
         <p:spPr>
           <a:xfrm>
-            <a:off x="3383279" y="5020056"/>
-            <a:ext cx="384048" cy="164592"/>
-          </a:xfrm>
-          <a:prstGeom prst="rect">
-            <a:avLst/>
-          </a:prstGeom>
-          <a:noFill/>
-        </p:spPr>
-        <p:txBody>
-          <a:bodyPr wrap="square" lIns="0" rIns="0" tIns="0" bIns="0" anchor="ctr">
-            <a:spAutoFit/>
-          </a:bodyPr>
-          <a:lstStyle/>
-          <a:p>
-            <a:pPr algn="ctr">
-              <a:lnSpc>
-                <a:spcPct val="100000"/>
-              </a:lnSpc>
-              <a:spcBef>
-                <a:spcPts val="0"/>
-              </a:spcBef>
-              <a:spcAft>
-                <a:spcPts val="0"/>
-              </a:spcAft>
-            </a:pPr>
-            <a:r>
-              <a:rPr sz="800" b="1" i="0">
-                <a:solidFill>
-                  <a:srgbClr val="9D1B32"/>
-                </a:solidFill>
-                <a:latin typeface="Georgia"/>
-              </a:rPr>
-              <a:t>04</a:t>
-            </a:r>
-          </a:p>
-        </p:txBody>
-      </p:sp>
-      <p:sp>
-        <p:nvSpPr>
-          <p:cNvPr id="82" name="TextBox 81"/>
-          <p:cNvSpPr txBox="1"/>
-          <p:nvPr/>
-        </p:nvSpPr>
-        <p:spPr>
-          <a:xfrm>
-            <a:off x="3877056" y="4910328"/>
-            <a:ext cx="3172968" cy="228600"/>
+            <a:off x="6281928" y="5394960"/>
+            <a:ext cx="310896" cy="219456"/>
           </a:xfrm>
           <a:prstGeom prst="rect">
             <a:avLst/>
@@ -6745,171 +7563,27 @@
               </a:spcAft>
             </a:pPr>
             <a:r>
-              <a:rPr sz="919" b="1" i="0">
-                <a:solidFill>
-                  <a:srgbClr val="171A1F"/>
+              <a:rPr sz="1300" b="1" i="0">
+                <a:solidFill>
+                  <a:srgbClr val="B46318"/>
                 </a:solidFill>
                 <a:latin typeface="Georgia"/>
               </a:rPr>
-              <a:t>Cross-graph rules can beat noisy local selection</a:t>
-            </a:r>
-          </a:p>
-        </p:txBody>
-      </p:sp>
-      <p:sp>
-        <p:nvSpPr>
-          <p:cNvPr id="83" name="TextBox 82"/>
+              <a:t>03</a:t>
+            </a:r>
+          </a:p>
+        </p:txBody>
+      </p:sp>
+      <p:sp>
+        <p:nvSpPr>
+          <p:cNvPr id="101" name="TextBox 100"/>
           <p:cNvSpPr txBox="1"/>
           <p:nvPr/>
         </p:nvSpPr>
         <p:spPr>
           <a:xfrm>
-            <a:off x="3877056" y="5184648"/>
-            <a:ext cx="3172968" cy="521207"/>
-          </a:xfrm>
-          <a:prstGeom prst="rect">
-            <a:avLst/>
-          </a:prstGeom>
-          <a:noFill/>
-        </p:spPr>
-        <p:txBody>
-          <a:bodyPr wrap="square" lIns="0" rIns="0" tIns="0" bIns="0" anchor="t">
-            <a:spAutoFit/>
-          </a:bodyPr>
-          <a:lstStyle/>
-          <a:p>
-            <a:pPr algn="l">
-              <a:lnSpc>
-                <a:spcPct val="104000"/>
-              </a:lnSpc>
-              <a:spcBef>
-                <a:spcPts val="0"/>
-              </a:spcBef>
-              <a:spcAft>
-                <a:spcPts val="0"/>
-              </a:spcAft>
-            </a:pPr>
-            <a:r>
-              <a:rPr sz="705" b="0" i="0">
-                <a:solidFill>
-                  <a:srgbClr val="434952"/>
-                </a:solidFill>
-                <a:latin typeface="Aptos"/>
-              </a:rPr>
-              <a:t>Applying Cora's validation-chosen rule unchanged to Citeseer beats Citeseer's own validation pick at every cap ≤50%; at the 25% cap, transferred MRR is 44.9 versus 37.9 from local selection.</a:t>
-            </a:r>
-          </a:p>
-        </p:txBody>
-      </p:sp>
-      <p:sp>
-        <p:nvSpPr>
-          <p:cNvPr id="84" name="Rounded Rectangle 83"/>
-          <p:cNvSpPr/>
-          <p:nvPr/>
-        </p:nvSpPr>
-        <p:spPr>
-          <a:xfrm>
-            <a:off x="3246120" y="5989320"/>
-            <a:ext cx="3941063" cy="411480"/>
-          </a:xfrm>
-          <a:prstGeom prst="roundRect">
-            <a:avLst>
-              <a:gd name="adj" fmla="val 8000"/>
-            </a:avLst>
-          </a:prstGeom>
-          <a:solidFill>
-            <a:srgbClr val="203657"/>
-          </a:solidFill>
-          <a:ln>
-            <a:noFill/>
-          </a:ln>
-        </p:spPr>
-        <p:style>
-          <a:lnRef idx="1">
-            <a:schemeClr val="accent1"/>
-          </a:lnRef>
-          <a:fillRef idx="3">
-            <a:schemeClr val="accent1"/>
-          </a:fillRef>
-          <a:effectRef idx="2">
-            <a:schemeClr val="accent1"/>
-          </a:effectRef>
-          <a:fontRef idx="minor">
-            <a:schemeClr val="lt1"/>
-          </a:fontRef>
-        </p:style>
-        <p:txBody>
-          <a:bodyPr rtlCol="0" anchor="ctr"/>
-          <a:lstStyle/>
-          <a:p>
-            <a:pPr algn="ctr"/>
-          </a:p>
-        </p:txBody>
-      </p:sp>
-      <p:sp>
-        <p:nvSpPr>
-          <p:cNvPr id="85" name="TextBox 84"/>
-          <p:cNvSpPr txBox="1"/>
-          <p:nvPr/>
-        </p:nvSpPr>
-        <p:spPr>
-          <a:xfrm>
-            <a:off x="3392424" y="6080760"/>
-            <a:ext cx="3648456" cy="210312"/>
-          </a:xfrm>
-          <a:prstGeom prst="rect">
-            <a:avLst/>
-          </a:prstGeom>
-          <a:noFill/>
-        </p:spPr>
-        <p:txBody>
-          <a:bodyPr wrap="square" lIns="0" rIns="0" tIns="0" bIns="0" anchor="ctr">
-            <a:spAutoFit/>
-          </a:bodyPr>
-          <a:lstStyle/>
-          <a:p>
-            <a:pPr algn="ctr">
-              <a:lnSpc>
-                <a:spcPct val="100000"/>
-              </a:lnSpc>
-              <a:spcBef>
-                <a:spcPts val="0"/>
-              </a:spcBef>
-              <a:spcAft>
-                <a:spcPts val="0"/>
-              </a:spcAft>
-            </a:pPr>
-            <a:r>
-              <a:rPr sz="740" b="1" i="0">
-                <a:solidFill>
-                  <a:srgbClr val="E8EDF3"/>
-                </a:solidFill>
-                <a:latin typeface="Aptos"/>
-              </a:rPr>
-              <a:t>Main result: </a:t>
-            </a:r>
-            <a:r>
-              <a:rPr sz="760" b="1" i="0">
-                <a:solidFill>
-                  <a:srgbClr val="FFFFFF"/>
-                </a:solidFill>
-                <a:latin typeface="Aptos"/>
-              </a:rPr>
-              <a:t>reducing fanout is usually safer than shortening the candidate list.</a:t>
-            </a:r>
-          </a:p>
-        </p:txBody>
-      </p:sp>
-      <p:sp>
-        <p:nvSpPr>
-          <p:cNvPr id="86" name="TextBox 85"/>
-          <p:cNvSpPr txBox="1"/>
-          <p:nvPr/>
-        </p:nvSpPr>
-        <p:spPr>
-          <a:xfrm>
-            <a:off x="7333488" y="1051560"/>
-            <a:ext cx="4498848" cy="164592"/>
+            <a:off x="6620256" y="5376672"/>
+            <a:ext cx="2157984" cy="329184"/>
           </a:xfrm>
           <a:prstGeom prst="rect">
             <a:avLst/>
@@ -6934,27 +7608,72 @@
               </a:spcAft>
             </a:pPr>
             <a:r>
-              <a:rPr sz="819" b="1" i="0">
-                <a:solidFill>
-                  <a:srgbClr val="9D1B32"/>
-                </a:solidFill>
-                <a:latin typeface="Aptos"/>
+              <a:rPr sz="1000" b="1" i="0">
+                <a:solidFill>
+                  <a:srgbClr val="171A1F"/>
+                </a:solidFill>
+                <a:latin typeface="Georgia"/>
               </a:rPr>
-              <a:t>BUDGET SWEEPS</a:t>
-            </a:r>
-          </a:p>
-        </p:txBody>
-      </p:sp>
-      <p:sp>
-        <p:nvSpPr>
-          <p:cNvPr id="87" name="Rounded Rectangle 86"/>
+              <a:t>Compute matters in the difficult tail</a:t>
+            </a:r>
+          </a:p>
+        </p:txBody>
+      </p:sp>
+      <p:sp>
+        <p:nvSpPr>
+          <p:cNvPr id="102" name="TextBox 101"/>
+          <p:cNvSpPr txBox="1"/>
+          <p:nvPr/>
+        </p:nvSpPr>
+        <p:spPr>
+          <a:xfrm>
+            <a:off x="6263640" y="5733288"/>
+            <a:ext cx="2532888" cy="603504"/>
+          </a:xfrm>
+          <a:prstGeom prst="rect">
+            <a:avLst/>
+          </a:prstGeom>
+          <a:noFill/>
+        </p:spPr>
+        <p:txBody>
+          <a:bodyPr wrap="square" lIns="0" rIns="0" tIns="0" bIns="0" anchor="t">
+            <a:spAutoFit/>
+          </a:bodyPr>
+          <a:lstStyle/>
+          <a:p>
+            <a:pPr algn="l">
+              <a:lnSpc>
+                <a:spcPct val="106000"/>
+              </a:lnSpc>
+              <a:spcBef>
+                <a:spcPts val="0"/>
+              </a:spcBef>
+              <a:spcAft>
+                <a:spcPts val="0"/>
+              </a:spcAft>
+            </a:pPr>
+            <a:r>
+              <a:rPr sz="840" b="0" i="0">
+                <a:solidFill>
+                  <a:srgbClr val="434952"/>
+                </a:solidFill>
+                <a:latin typeface="Segoe UI"/>
+              </a:rPr>
+              <a:t>Re-ranking the top 10% adds little. PENCIL is useful for links that graph heuristics cannot separate; 57.3% of true Cora test links have zero common neighbours.</a:t>
+            </a:r>
+          </a:p>
+        </p:txBody>
+      </p:sp>
+      <p:sp>
+        <p:nvSpPr>
+          <p:cNvPr id="103" name="Rounded Rectangle 102"/>
           <p:cNvSpPr/>
           <p:nvPr/>
         </p:nvSpPr>
         <p:spPr>
           <a:xfrm>
-            <a:off x="7333488" y="1280160"/>
-            <a:ext cx="4498848" cy="1755648"/>
+            <a:off x="9025128" y="5266944"/>
+            <a:ext cx="2770632" cy="1207008"/>
           </a:xfrm>
           <a:prstGeom prst="roundRect">
             <a:avLst>
@@ -6992,85 +7711,59 @@
           </a:p>
         </p:txBody>
       </p:sp>
-      <p:pic>
-        <p:nvPicPr>
-          <p:cNvPr id="88" name="Picture 87" descr="fig_mid.png"/>
-          <p:cNvPicPr>
-            <a:picLocks noChangeAspect="1"/>
-          </p:cNvPicPr>
-          <p:nvPr/>
-        </p:nvPicPr>
-        <p:blipFill>
-          <a:blip r:embed="rId2"/>
-          <a:stretch>
-            <a:fillRect/>
-          </a:stretch>
-        </p:blipFill>
-        <p:spPr>
-          <a:xfrm>
-            <a:off x="7406640" y="1371600"/>
-            <a:ext cx="4352544" cy="1316736"/>
-          </a:xfrm>
-          <a:prstGeom prst="rect">
-            <a:avLst/>
-          </a:prstGeom>
-        </p:spPr>
-      </p:pic>
-      <p:sp>
-        <p:nvSpPr>
-          <p:cNvPr id="89" name="TextBox 88"/>
+      <p:sp>
+        <p:nvSpPr>
+          <p:cNvPr id="104" name="Rectangle 103"/>
+          <p:cNvSpPr/>
+          <p:nvPr/>
+        </p:nvSpPr>
+        <p:spPr>
+          <a:xfrm>
+            <a:off x="9025128" y="5266944"/>
+            <a:ext cx="2770632" cy="41148"/>
+          </a:xfrm>
+          <a:prstGeom prst="rect">
+            <a:avLst/>
+          </a:prstGeom>
+          <a:solidFill>
+            <a:srgbClr val="9D1B32"/>
+          </a:solidFill>
+          <a:ln>
+            <a:noFill/>
+          </a:ln>
+        </p:spPr>
+        <p:style>
+          <a:lnRef idx="1">
+            <a:schemeClr val="accent1"/>
+          </a:lnRef>
+          <a:fillRef idx="3">
+            <a:schemeClr val="accent1"/>
+          </a:fillRef>
+          <a:effectRef idx="2">
+            <a:schemeClr val="accent1"/>
+          </a:effectRef>
+          <a:fontRef idx="minor">
+            <a:schemeClr val="lt1"/>
+          </a:fontRef>
+        </p:style>
+        <p:txBody>
+          <a:bodyPr rtlCol="0" anchor="ctr"/>
+          <a:lstStyle/>
+          <a:p>
+            <a:pPr algn="ctr"/>
+          </a:p>
+        </p:txBody>
+      </p:sp>
+      <p:sp>
+        <p:nvSpPr>
+          <p:cNvPr id="105" name="TextBox 104"/>
           <p:cNvSpPr txBox="1"/>
           <p:nvPr/>
         </p:nvSpPr>
         <p:spPr>
           <a:xfrm>
-            <a:off x="7470648" y="2743200"/>
-            <a:ext cx="4224528" cy="173736"/>
-          </a:xfrm>
-          <a:prstGeom prst="rect">
-            <a:avLst/>
-          </a:prstGeom>
-          <a:noFill/>
-        </p:spPr>
-        <p:txBody>
-          <a:bodyPr wrap="square" lIns="0" rIns="0" tIns="0" bIns="0" anchor="t">
-            <a:spAutoFit/>
-          </a:bodyPr>
-          <a:lstStyle/>
-          <a:p>
-            <a:pPr algn="ctr">
-              <a:lnSpc>
-                <a:spcPct val="100000"/>
-              </a:lnSpc>
-              <a:spcBef>
-                <a:spcPts val="0"/>
-              </a:spcBef>
-              <a:spcAft>
-                <a:spcPts val="0"/>
-              </a:spcAft>
-            </a:pPr>
-            <a:r>
-              <a:rPr sz="650" b="0" i="0">
-                <a:solidFill>
-                  <a:srgbClr val="777D85"/>
-                </a:solidFill>
-                <a:latin typeface="Aptos"/>
-              </a:rPr>
-              <a:t>Shortlist saturation  ·  compute Pareto frontiers  ·  HeaRT hard-negative stress test</a:t>
-            </a:r>
-          </a:p>
-        </p:txBody>
-      </p:sp>
-      <p:sp>
-        <p:nvSpPr>
-          <p:cNvPr id="90" name="TextBox 89"/>
-          <p:cNvSpPr txBox="1"/>
-          <p:nvPr/>
-        </p:nvSpPr>
-        <p:spPr>
-          <a:xfrm>
-            <a:off x="7333488" y="3191256"/>
-            <a:ext cx="4498848" cy="164592"/>
+            <a:off x="9162288" y="5394960"/>
+            <a:ext cx="310896" cy="219456"/>
           </a:xfrm>
           <a:prstGeom prst="rect">
             <a:avLst/>
@@ -7095,70 +7788,27 @@
               </a:spcAft>
             </a:pPr>
             <a:r>
-              <a:rPr sz="819" b="1" i="0">
+              <a:rPr sz="1300" b="1" i="0">
                 <a:solidFill>
                   <a:srgbClr val="9D1B32"/>
                 </a:solidFill>
-                <a:latin typeface="Aptos"/>
+                <a:latin typeface="Georgia"/>
               </a:rPr>
-              <a:t>VALIDATION-SELECTED OPERATING POINTS  ·  TEST MRR ×100</a:t>
-            </a:r>
-          </a:p>
-        </p:txBody>
-      </p:sp>
-      <p:sp>
-        <p:nvSpPr>
-          <p:cNvPr id="91" name="Rectangle 90"/>
-          <p:cNvSpPr/>
-          <p:nvPr/>
-        </p:nvSpPr>
-        <p:spPr>
-          <a:xfrm>
-            <a:off x="7333488" y="3419856"/>
-            <a:ext cx="4498848" cy="365760"/>
-          </a:xfrm>
-          <a:prstGeom prst="rect">
-            <a:avLst/>
-          </a:prstGeom>
-          <a:solidFill>
-            <a:srgbClr val="203657"/>
-          </a:solidFill>
-          <a:ln>
-            <a:noFill/>
-          </a:ln>
-        </p:spPr>
-        <p:style>
-          <a:lnRef idx="1">
-            <a:schemeClr val="accent1"/>
-          </a:lnRef>
-          <a:fillRef idx="3">
-            <a:schemeClr val="accent1"/>
-          </a:fillRef>
-          <a:effectRef idx="2">
-            <a:schemeClr val="accent1"/>
-          </a:effectRef>
-          <a:fontRef idx="minor">
-            <a:schemeClr val="lt1"/>
-          </a:fontRef>
-        </p:style>
-        <p:txBody>
-          <a:bodyPr rtlCol="0" anchor="ctr"/>
-          <a:lstStyle/>
-          <a:p>
-            <a:pPr algn="ctr"/>
-          </a:p>
-        </p:txBody>
-      </p:sp>
-      <p:sp>
-        <p:nvSpPr>
-          <p:cNvPr id="92" name="TextBox 91"/>
+              <a:t>04</a:t>
+            </a:r>
+          </a:p>
+        </p:txBody>
+      </p:sp>
+      <p:sp>
+        <p:nvSpPr>
+          <p:cNvPr id="106" name="TextBox 105"/>
           <p:cNvSpPr txBox="1"/>
           <p:nvPr/>
         </p:nvSpPr>
         <p:spPr>
           <a:xfrm>
-            <a:off x="7370063" y="3483864"/>
-            <a:ext cx="1152144" cy="246888"/>
+            <a:off x="9500616" y="5376672"/>
+            <a:ext cx="2157984" cy="329184"/>
           </a:xfrm>
           <a:prstGeom prst="rect">
             <a:avLst/>
@@ -7173,7 +7823,7 @@
           <a:p>
             <a:pPr algn="l">
               <a:lnSpc>
-                <a:spcPct val="95000"/>
+                <a:spcPct val="100000"/>
               </a:lnSpc>
               <a:spcBef>
                 <a:spcPts val="0"/>
@@ -7183,27 +7833,27 @@
               </a:spcAft>
             </a:pPr>
             <a:r>
-              <a:rPr sz="670" b="1" i="0">
-                <a:solidFill>
-                  <a:srgbClr val="FFFFFF"/>
-                </a:solidFill>
-                <a:latin typeface="Aptos"/>
+              <a:rPr sz="1000" b="1" i="0">
+                <a:solidFill>
+                  <a:srgbClr val="171A1F"/>
+                </a:solidFill>
+                <a:latin typeface="Georgia"/>
               </a:rPr>
-              <a:t>Policy</a:t>
-            </a:r>
-          </a:p>
-        </p:txBody>
-      </p:sp>
-      <p:sp>
-        <p:nvSpPr>
-          <p:cNvPr id="93" name="TextBox 92"/>
+              <a:t>The rule transfers across graphs</a:t>
+            </a:r>
+          </a:p>
+        </p:txBody>
+      </p:sp>
+      <p:sp>
+        <p:nvSpPr>
+          <p:cNvPr id="107" name="TextBox 106"/>
           <p:cNvSpPr txBox="1"/>
           <p:nvPr/>
         </p:nvSpPr>
         <p:spPr>
           <a:xfrm>
-            <a:off x="8595359" y="3483864"/>
-            <a:ext cx="731520" cy="246888"/>
+            <a:off x="9144000" y="5733288"/>
+            <a:ext cx="2532888" cy="603504"/>
           </a:xfrm>
           <a:prstGeom prst="rect">
             <a:avLst/>
@@ -7216,9 +7866,9 @@
           </a:bodyPr>
           <a:lstStyle/>
           <a:p>
-            <a:pPr algn="ctr">
+            <a:pPr algn="l">
               <a:lnSpc>
-                <a:spcPct val="95000"/>
+                <a:spcPct val="106000"/>
               </a:lnSpc>
               <a:spcBef>
                 <a:spcPts val="0"/>
@@ -7228,209 +7878,27 @@
               </a:spcAft>
             </a:pPr>
             <a:r>
-              <a:rPr sz="670" b="1" i="0">
-                <a:solidFill>
-                  <a:srgbClr val="FFFFFF"/>
-                </a:solidFill>
-                <a:latin typeface="Aptos"/>
+              <a:rPr sz="840" b="0" i="0">
+                <a:solidFill>
+                  <a:srgbClr val="434952"/>
+                </a:solidFill>
+                <a:latin typeface="Segoe UI"/>
               </a:rPr>
-              <a:t>Cora
-Pool</a:t>
-            </a:r>
-          </a:p>
-        </p:txBody>
-      </p:sp>
-      <p:sp>
-        <p:nvSpPr>
-          <p:cNvPr id="94" name="TextBox 93"/>
-          <p:cNvSpPr txBox="1"/>
-          <p:nvPr/>
-        </p:nvSpPr>
-        <p:spPr>
-          <a:xfrm>
-            <a:off x="9400032" y="3483864"/>
-            <a:ext cx="731520" cy="246888"/>
-          </a:xfrm>
-          <a:prstGeom prst="rect">
-            <a:avLst/>
-          </a:prstGeom>
-          <a:noFill/>
-        </p:spPr>
-        <p:txBody>
-          <a:bodyPr wrap="square" lIns="0" rIns="0" tIns="0" bIns="0" anchor="t">
-            <a:spAutoFit/>
-          </a:bodyPr>
-          <a:lstStyle/>
-          <a:p>
-            <a:pPr algn="ctr">
-              <a:lnSpc>
-                <a:spcPct val="95000"/>
-              </a:lnSpc>
-              <a:spcBef>
-                <a:spcPts val="0"/>
-              </a:spcBef>
-              <a:spcAft>
-                <a:spcPts val="0"/>
-              </a:spcAft>
-            </a:pPr>
-            <a:r>
-              <a:rPr sz="670" b="1" i="0">
-                <a:solidFill>
-                  <a:srgbClr val="FFFFFF"/>
-                </a:solidFill>
-                <a:latin typeface="Aptos"/>
-              </a:rPr>
-              <a:t>Citeseer
-Pool</a:t>
-            </a:r>
-          </a:p>
-        </p:txBody>
-      </p:sp>
-      <p:sp>
-        <p:nvSpPr>
-          <p:cNvPr id="95" name="TextBox 94"/>
-          <p:cNvSpPr txBox="1"/>
-          <p:nvPr/>
-        </p:nvSpPr>
-        <p:spPr>
-          <a:xfrm>
-            <a:off x="10204704" y="3483864"/>
-            <a:ext cx="749808" cy="246888"/>
-          </a:xfrm>
-          <a:prstGeom prst="rect">
-            <a:avLst/>
-          </a:prstGeom>
-          <a:noFill/>
-        </p:spPr>
-        <p:txBody>
-          <a:bodyPr wrap="square" lIns="0" rIns="0" tIns="0" bIns="0" anchor="t">
-            <a:spAutoFit/>
-          </a:bodyPr>
-          <a:lstStyle/>
-          <a:p>
-            <a:pPr algn="ctr">
-              <a:lnSpc>
-                <a:spcPct val="95000"/>
-              </a:lnSpc>
-              <a:spcBef>
-                <a:spcPts val="0"/>
-              </a:spcBef>
-              <a:spcAft>
-                <a:spcPts val="0"/>
-              </a:spcAft>
-            </a:pPr>
-            <a:r>
-              <a:rPr sz="670" b="1" i="0">
-                <a:solidFill>
-                  <a:srgbClr val="FFFFFF"/>
-                </a:solidFill>
-                <a:latin typeface="Aptos"/>
-              </a:rPr>
-              <a:t>Cora
-HeaRT</a:t>
-            </a:r>
-          </a:p>
-        </p:txBody>
-      </p:sp>
-      <p:sp>
-        <p:nvSpPr>
-          <p:cNvPr id="96" name="TextBox 95"/>
-          <p:cNvSpPr txBox="1"/>
-          <p:nvPr/>
-        </p:nvSpPr>
-        <p:spPr>
-          <a:xfrm>
-            <a:off x="11027664" y="3483864"/>
-            <a:ext cx="768096" cy="246888"/>
-          </a:xfrm>
-          <a:prstGeom prst="rect">
-            <a:avLst/>
-          </a:prstGeom>
-          <a:noFill/>
-        </p:spPr>
-        <p:txBody>
-          <a:bodyPr wrap="square" lIns="0" rIns="0" tIns="0" bIns="0" anchor="t">
-            <a:spAutoFit/>
-          </a:bodyPr>
-          <a:lstStyle/>
-          <a:p>
-            <a:pPr algn="ctr">
-              <a:lnSpc>
-                <a:spcPct val="95000"/>
-              </a:lnSpc>
-              <a:spcBef>
-                <a:spcPts val="0"/>
-              </a:spcBef>
-              <a:spcAft>
-                <a:spcPts val="0"/>
-              </a:spcAft>
-            </a:pPr>
-            <a:r>
-              <a:rPr sz="670" b="1" i="0">
-                <a:solidFill>
-                  <a:srgbClr val="FFFFFF"/>
-                </a:solidFill>
-                <a:latin typeface="Aptos"/>
-              </a:rPr>
-              <a:t>Citeseer
-HeaRT</a:t>
-            </a:r>
-          </a:p>
-        </p:txBody>
-      </p:sp>
-      <p:sp>
-        <p:nvSpPr>
-          <p:cNvPr id="97" name="Rectangle 96"/>
+              <a:t>At a 25% cap, the rule selected on Cora reaches 44.9 MRR on Citeseer, compared with 37.9 from Citeseer's noisier local validation choice.</a:t>
+            </a:r>
+          </a:p>
+        </p:txBody>
+      </p:sp>
+      <p:sp>
+        <p:nvSpPr>
+          <p:cNvPr id="108" name="Rectangle 107"/>
           <p:cNvSpPr/>
           <p:nvPr/>
         </p:nvSpPr>
         <p:spPr>
           <a:xfrm>
-            <a:off x="7333488" y="3785616"/>
-            <a:ext cx="4498848" cy="288036"/>
-          </a:xfrm>
-          <a:prstGeom prst="rect">
-            <a:avLst/>
-          </a:prstGeom>
-          <a:solidFill>
-            <a:srgbClr val="FFFFFF"/>
-          </a:solidFill>
-          <a:ln>
-            <a:noFill/>
-          </a:ln>
-        </p:spPr>
-        <p:style>
-          <a:lnRef idx="1">
-            <a:schemeClr val="accent1"/>
-          </a:lnRef>
-          <a:fillRef idx="3">
-            <a:schemeClr val="accent1"/>
-          </a:fillRef>
-          <a:effectRef idx="2">
-            <a:schemeClr val="accent1"/>
-          </a:effectRef>
-          <a:fontRef idx="minor">
-            <a:schemeClr val="lt1"/>
-          </a:fontRef>
-        </p:style>
-        <p:txBody>
-          <a:bodyPr rtlCol="0" anchor="ctr"/>
-          <a:lstStyle/>
-          <a:p>
-            <a:pPr algn="ctr"/>
-          </a:p>
-        </p:txBody>
-      </p:sp>
-      <p:sp>
-        <p:nvSpPr>
-          <p:cNvPr id="98" name="Rectangle 97"/>
-          <p:cNvSpPr/>
-          <p:nvPr/>
-        </p:nvSpPr>
-        <p:spPr>
-          <a:xfrm>
-            <a:off x="7333488" y="4066336"/>
-            <a:ext cx="4498848" cy="7315"/>
+            <a:off x="384048" y="6611112"/>
+            <a:ext cx="11411712" cy="10972"/>
           </a:xfrm>
           <a:prstGeom prst="rect">
             <a:avLst/>
@@ -7466,14 +7934,14 @@
       </p:sp>
       <p:sp>
         <p:nvSpPr>
-          <p:cNvPr id="99" name="TextBox 98"/>
+          <p:cNvPr id="109" name="TextBox 108"/>
           <p:cNvSpPr txBox="1"/>
           <p:nvPr/>
         </p:nvSpPr>
         <p:spPr>
           <a:xfrm>
-            <a:off x="7379208" y="3854196"/>
-            <a:ext cx="1133856" cy="146304"/>
+            <a:off x="384048" y="6675120"/>
+            <a:ext cx="11411712" cy="128016"/>
           </a:xfrm>
           <a:prstGeom prst="rect">
             <a:avLst/>
@@ -7481,52 +7949,7 @@
           <a:noFill/>
         </p:spPr>
         <p:txBody>
-          <a:bodyPr wrap="square" lIns="0" rIns="0" tIns="0" bIns="0" anchor="ctr">
-            <a:spAutoFit/>
-          </a:bodyPr>
-          <a:lstStyle/>
-          <a:p>
-            <a:pPr algn="l">
-              <a:lnSpc>
-                <a:spcPct val="100000"/>
-              </a:lnSpc>
-              <a:spcBef>
-                <a:spcPts val="0"/>
-              </a:spcBef>
-              <a:spcAft>
-                <a:spcPts val="0"/>
-              </a:spcAft>
-            </a:pPr>
-            <a:r>
-              <a:rPr sz="660" b="1" i="0">
-                <a:solidFill>
-                  <a:srgbClr val="171A1F"/>
-                </a:solidFill>
-                <a:latin typeface="Aptos"/>
-              </a:rPr>
-              <a:t>Chance</a:t>
-            </a:r>
-          </a:p>
-        </p:txBody>
-      </p:sp>
-      <p:sp>
-        <p:nvSpPr>
-          <p:cNvPr id="100" name="TextBox 99"/>
-          <p:cNvSpPr txBox="1"/>
-          <p:nvPr/>
-        </p:nvSpPr>
-        <p:spPr>
-          <a:xfrm>
-            <a:off x="8604504" y="3854196"/>
-            <a:ext cx="713232" cy="146304"/>
-          </a:xfrm>
-          <a:prstGeom prst="rect">
-            <a:avLst/>
-          </a:prstGeom>
-          <a:noFill/>
-        </p:spPr>
-        <p:txBody>
-          <a:bodyPr wrap="square" lIns="0" rIns="0" tIns="0" bIns="0" anchor="ctr">
+          <a:bodyPr wrap="square" lIns="0" rIns="0" tIns="0" bIns="0" anchor="t">
             <a:spAutoFit/>
           </a:bodyPr>
           <a:lstStyle/>
@@ -7543,1809 +7966,13 @@
               </a:spcAft>
             </a:pPr>
             <a:r>
-              <a:rPr sz="660" b="0" i="0">
-                <a:solidFill>
-                  <a:srgbClr val="171A1F"/>
-                </a:solidFill>
-                <a:latin typeface="Consolas"/>
+              <a:rPr sz="730" b="0" i="0">
+                <a:solidFill>
+                  <a:srgbClr val="777D85"/>
+                </a:solidFill>
+                <a:latin typeface="Segoe UI"/>
               </a:rPr>
-              <a:t>1.3</a:t>
-            </a:r>
-          </a:p>
-        </p:txBody>
-      </p:sp>
-      <p:sp>
-        <p:nvSpPr>
-          <p:cNvPr id="101" name="TextBox 100"/>
-          <p:cNvSpPr txBox="1"/>
-          <p:nvPr/>
-        </p:nvSpPr>
-        <p:spPr>
-          <a:xfrm>
-            <a:off x="9409176" y="3854196"/>
-            <a:ext cx="713232" cy="146304"/>
-          </a:xfrm>
-          <a:prstGeom prst="rect">
-            <a:avLst/>
-          </a:prstGeom>
-          <a:noFill/>
-        </p:spPr>
-        <p:txBody>
-          <a:bodyPr wrap="square" lIns="0" rIns="0" tIns="0" bIns="0" anchor="ctr">
-            <a:spAutoFit/>
-          </a:bodyPr>
-          <a:lstStyle/>
-          <a:p>
-            <a:pPr algn="ctr">
-              <a:lnSpc>
-                <a:spcPct val="100000"/>
-              </a:lnSpc>
-              <a:spcBef>
-                <a:spcPts val="0"/>
-              </a:spcBef>
-              <a:spcAft>
-                <a:spcPts val="0"/>
-              </a:spcAft>
-            </a:pPr>
-            <a:r>
-              <a:rPr sz="660" b="0" i="0">
-                <a:solidFill>
-                  <a:srgbClr val="171A1F"/>
-                </a:solidFill>
-                <a:latin typeface="Consolas"/>
-              </a:rPr>
-              <a:t>1.5</a:t>
-            </a:r>
-          </a:p>
-        </p:txBody>
-      </p:sp>
-      <p:sp>
-        <p:nvSpPr>
-          <p:cNvPr id="102" name="TextBox 101"/>
-          <p:cNvSpPr txBox="1"/>
-          <p:nvPr/>
-        </p:nvSpPr>
-        <p:spPr>
-          <a:xfrm>
-            <a:off x="10213848" y="3854196"/>
-            <a:ext cx="731520" cy="146304"/>
-          </a:xfrm>
-          <a:prstGeom prst="rect">
-            <a:avLst/>
-          </a:prstGeom>
-          <a:noFill/>
-        </p:spPr>
-        <p:txBody>
-          <a:bodyPr wrap="square" lIns="0" rIns="0" tIns="0" bIns="0" anchor="ctr">
-            <a:spAutoFit/>
-          </a:bodyPr>
-          <a:lstStyle/>
-          <a:p>
-            <a:pPr algn="ctr">
-              <a:lnSpc>
-                <a:spcPct val="100000"/>
-              </a:lnSpc>
-              <a:spcBef>
-                <a:spcPts val="0"/>
-              </a:spcBef>
-              <a:spcAft>
-                <a:spcPts val="0"/>
-              </a:spcAft>
-            </a:pPr>
-            <a:r>
-              <a:rPr sz="660" b="0" i="0">
-                <a:solidFill>
-                  <a:srgbClr val="171A1F"/>
-                </a:solidFill>
-                <a:latin typeface="Consolas"/>
-              </a:rPr>
-              <a:t>1.4</a:t>
-            </a:r>
-          </a:p>
-        </p:txBody>
-      </p:sp>
-      <p:sp>
-        <p:nvSpPr>
-          <p:cNvPr id="103" name="TextBox 102"/>
-          <p:cNvSpPr txBox="1"/>
-          <p:nvPr/>
-        </p:nvSpPr>
-        <p:spPr>
-          <a:xfrm>
-            <a:off x="11036808" y="3854196"/>
-            <a:ext cx="749808" cy="146304"/>
-          </a:xfrm>
-          <a:prstGeom prst="rect">
-            <a:avLst/>
-          </a:prstGeom>
-          <a:noFill/>
-        </p:spPr>
-        <p:txBody>
-          <a:bodyPr wrap="square" lIns="0" rIns="0" tIns="0" bIns="0" anchor="ctr">
-            <a:spAutoFit/>
-          </a:bodyPr>
-          <a:lstStyle/>
-          <a:p>
-            <a:pPr algn="ctr">
-              <a:lnSpc>
-                <a:spcPct val="100000"/>
-              </a:lnSpc>
-              <a:spcBef>
-                <a:spcPts val="0"/>
-              </a:spcBef>
-              <a:spcAft>
-                <a:spcPts val="0"/>
-              </a:spcAft>
-            </a:pPr>
-            <a:r>
-              <a:rPr sz="660" b="0" i="0">
-                <a:solidFill>
-                  <a:srgbClr val="171A1F"/>
-                </a:solidFill>
-                <a:latin typeface="Consolas"/>
-              </a:rPr>
-              <a:t>1.4</a:t>
-            </a:r>
-          </a:p>
-        </p:txBody>
-      </p:sp>
-      <p:sp>
-        <p:nvSpPr>
-          <p:cNvPr id="104" name="Rectangle 103"/>
-          <p:cNvSpPr/>
-          <p:nvPr/>
-        </p:nvSpPr>
-        <p:spPr>
-          <a:xfrm>
-            <a:off x="7333488" y="4073652"/>
-            <a:ext cx="4498848" cy="288036"/>
-          </a:xfrm>
-          <a:prstGeom prst="rect">
-            <a:avLst/>
-          </a:prstGeom>
-          <a:solidFill>
-            <a:srgbClr val="FFFFFF"/>
-          </a:solidFill>
-          <a:ln>
-            <a:noFill/>
-          </a:ln>
-        </p:spPr>
-        <p:style>
-          <a:lnRef idx="1">
-            <a:schemeClr val="accent1"/>
-          </a:lnRef>
-          <a:fillRef idx="3">
-            <a:schemeClr val="accent1"/>
-          </a:fillRef>
-          <a:effectRef idx="2">
-            <a:schemeClr val="accent1"/>
-          </a:effectRef>
-          <a:fontRef idx="minor">
-            <a:schemeClr val="lt1"/>
-          </a:fontRef>
-        </p:style>
-        <p:txBody>
-          <a:bodyPr rtlCol="0" anchor="ctr"/>
-          <a:lstStyle/>
-          <a:p>
-            <a:pPr algn="ctr"/>
-          </a:p>
-        </p:txBody>
-      </p:sp>
-      <p:sp>
-        <p:nvSpPr>
-          <p:cNvPr id="105" name="Rectangle 104"/>
-          <p:cNvSpPr/>
-          <p:nvPr/>
-        </p:nvSpPr>
-        <p:spPr>
-          <a:xfrm>
-            <a:off x="7333488" y="4354372"/>
-            <a:ext cx="4498848" cy="7315"/>
-          </a:xfrm>
-          <a:prstGeom prst="rect">
-            <a:avLst/>
-          </a:prstGeom>
-          <a:solidFill>
-            <a:srgbClr val="D9D4CB"/>
-          </a:solidFill>
-          <a:ln>
-            <a:noFill/>
-          </a:ln>
-        </p:spPr>
-        <p:style>
-          <a:lnRef idx="1">
-            <a:schemeClr val="accent1"/>
-          </a:lnRef>
-          <a:fillRef idx="3">
-            <a:schemeClr val="accent1"/>
-          </a:fillRef>
-          <a:effectRef idx="2">
-            <a:schemeClr val="accent1"/>
-          </a:effectRef>
-          <a:fontRef idx="minor">
-            <a:schemeClr val="lt1"/>
-          </a:fontRef>
-        </p:style>
-        <p:txBody>
-          <a:bodyPr rtlCol="0" anchor="ctr"/>
-          <a:lstStyle/>
-          <a:p>
-            <a:pPr algn="ctr"/>
-          </a:p>
-        </p:txBody>
-      </p:sp>
-      <p:sp>
-        <p:nvSpPr>
-          <p:cNvPr id="106" name="TextBox 105"/>
-          <p:cNvSpPr txBox="1"/>
-          <p:nvPr/>
-        </p:nvSpPr>
-        <p:spPr>
-          <a:xfrm>
-            <a:off x="7379208" y="4142232"/>
-            <a:ext cx="1133856" cy="146304"/>
-          </a:xfrm>
-          <a:prstGeom prst="rect">
-            <a:avLst/>
-          </a:prstGeom>
-          <a:noFill/>
-        </p:spPr>
-        <p:txBody>
-          <a:bodyPr wrap="square" lIns="0" rIns="0" tIns="0" bIns="0" anchor="ctr">
-            <a:spAutoFit/>
-          </a:bodyPr>
-          <a:lstStyle/>
-          <a:p>
-            <a:pPr algn="l">
-              <a:lnSpc>
-                <a:spcPct val="100000"/>
-              </a:lnSpc>
-              <a:spcBef>
-                <a:spcPts val="0"/>
-              </a:spcBef>
-              <a:spcAft>
-                <a:spcPts val="0"/>
-              </a:spcAft>
-            </a:pPr>
-            <a:r>
-              <a:rPr sz="660" b="1" i="0">
-                <a:solidFill>
-                  <a:srgbClr val="171A1F"/>
-                </a:solidFill>
-                <a:latin typeface="Aptos"/>
-              </a:rPr>
-              <a:t>AA · 0% GPU</a:t>
-            </a:r>
-          </a:p>
-        </p:txBody>
-      </p:sp>
-      <p:sp>
-        <p:nvSpPr>
-          <p:cNvPr id="107" name="TextBox 106"/>
-          <p:cNvSpPr txBox="1"/>
-          <p:nvPr/>
-        </p:nvSpPr>
-        <p:spPr>
-          <a:xfrm>
-            <a:off x="8604504" y="4142232"/>
-            <a:ext cx="713232" cy="146304"/>
-          </a:xfrm>
-          <a:prstGeom prst="rect">
-            <a:avLst/>
-          </a:prstGeom>
-          <a:noFill/>
-        </p:spPr>
-        <p:txBody>
-          <a:bodyPr wrap="square" lIns="0" rIns="0" tIns="0" bIns="0" anchor="ctr">
-            <a:spAutoFit/>
-          </a:bodyPr>
-          <a:lstStyle/>
-          <a:p>
-            <a:pPr algn="ctr">
-              <a:lnSpc>
-                <a:spcPct val="100000"/>
-              </a:lnSpc>
-              <a:spcBef>
-                <a:spcPts val="0"/>
-              </a:spcBef>
-              <a:spcAft>
-                <a:spcPts val="0"/>
-              </a:spcAft>
-            </a:pPr>
-            <a:r>
-              <a:rPr sz="660" b="0" i="0">
-                <a:solidFill>
-                  <a:srgbClr val="171A1F"/>
-                </a:solidFill>
-                <a:latin typeface="Consolas"/>
-              </a:rPr>
-              <a:t>33.1</a:t>
-            </a:r>
-          </a:p>
-        </p:txBody>
-      </p:sp>
-      <p:sp>
-        <p:nvSpPr>
-          <p:cNvPr id="108" name="TextBox 107"/>
-          <p:cNvSpPr txBox="1"/>
-          <p:nvPr/>
-        </p:nvSpPr>
-        <p:spPr>
-          <a:xfrm>
-            <a:off x="9409176" y="4142232"/>
-            <a:ext cx="713232" cy="146304"/>
-          </a:xfrm>
-          <a:prstGeom prst="rect">
-            <a:avLst/>
-          </a:prstGeom>
-          <a:noFill/>
-        </p:spPr>
-        <p:txBody>
-          <a:bodyPr wrap="square" lIns="0" rIns="0" tIns="0" bIns="0" anchor="ctr">
-            <a:spAutoFit/>
-          </a:bodyPr>
-          <a:lstStyle/>
-          <a:p>
-            <a:pPr algn="ctr">
-              <a:lnSpc>
-                <a:spcPct val="100000"/>
-              </a:lnSpc>
-              <a:spcBef>
-                <a:spcPts val="0"/>
-              </a:spcBef>
-              <a:spcAft>
-                <a:spcPts val="0"/>
-              </a:spcAft>
-            </a:pPr>
-            <a:r>
-              <a:rPr sz="660" b="0" i="0">
-                <a:solidFill>
-                  <a:srgbClr val="171A1F"/>
-                </a:solidFill>
-                <a:latin typeface="Consolas"/>
-              </a:rPr>
-              <a:t>31.5</a:t>
-            </a:r>
-          </a:p>
-        </p:txBody>
-      </p:sp>
-      <p:sp>
-        <p:nvSpPr>
-          <p:cNvPr id="109" name="TextBox 108"/>
-          <p:cNvSpPr txBox="1"/>
-          <p:nvPr/>
-        </p:nvSpPr>
-        <p:spPr>
-          <a:xfrm>
-            <a:off x="10213848" y="4142232"/>
-            <a:ext cx="731520" cy="146304"/>
-          </a:xfrm>
-          <a:prstGeom prst="rect">
-            <a:avLst/>
-          </a:prstGeom>
-          <a:noFill/>
-        </p:spPr>
-        <p:txBody>
-          <a:bodyPr wrap="square" lIns="0" rIns="0" tIns="0" bIns="0" anchor="ctr">
-            <a:spAutoFit/>
-          </a:bodyPr>
-          <a:lstStyle/>
-          <a:p>
-            <a:pPr algn="ctr">
-              <a:lnSpc>
-                <a:spcPct val="100000"/>
-              </a:lnSpc>
-              <a:spcBef>
-                <a:spcPts val="0"/>
-              </a:spcBef>
-              <a:spcAft>
-                <a:spcPts val="0"/>
-              </a:spcAft>
-            </a:pPr>
-            <a:r>
-              <a:rPr sz="660" b="0" i="0">
-                <a:solidFill>
-                  <a:srgbClr val="171A1F"/>
-                </a:solidFill>
-                <a:latin typeface="Consolas"/>
-              </a:rPr>
-              <a:t>12.0</a:t>
-            </a:r>
-          </a:p>
-        </p:txBody>
-      </p:sp>
-      <p:sp>
-        <p:nvSpPr>
-          <p:cNvPr id="110" name="TextBox 109"/>
-          <p:cNvSpPr txBox="1"/>
-          <p:nvPr/>
-        </p:nvSpPr>
-        <p:spPr>
-          <a:xfrm>
-            <a:off x="11036808" y="4142232"/>
-            <a:ext cx="749808" cy="146304"/>
-          </a:xfrm>
-          <a:prstGeom prst="rect">
-            <a:avLst/>
-          </a:prstGeom>
-          <a:noFill/>
-        </p:spPr>
-        <p:txBody>
-          <a:bodyPr wrap="square" lIns="0" rIns="0" tIns="0" bIns="0" anchor="ctr">
-            <a:spAutoFit/>
-          </a:bodyPr>
-          <a:lstStyle/>
-          <a:p>
-            <a:pPr algn="ctr">
-              <a:lnSpc>
-                <a:spcPct val="100000"/>
-              </a:lnSpc>
-              <a:spcBef>
-                <a:spcPts val="0"/>
-              </a:spcBef>
-              <a:spcAft>
-                <a:spcPts val="0"/>
-              </a:spcAft>
-            </a:pPr>
-            <a:r>
-              <a:rPr sz="660" b="0" i="0">
-                <a:solidFill>
-                  <a:srgbClr val="171A1F"/>
-                </a:solidFill>
-                <a:latin typeface="Consolas"/>
-              </a:rPr>
-              <a:t>11.0</a:t>
-            </a:r>
-          </a:p>
-        </p:txBody>
-      </p:sp>
-      <p:sp>
-        <p:nvSpPr>
-          <p:cNvPr id="111" name="Rectangle 110"/>
-          <p:cNvSpPr/>
-          <p:nvPr/>
-        </p:nvSpPr>
-        <p:spPr>
-          <a:xfrm>
-            <a:off x="7333488" y="4361688"/>
-            <a:ext cx="4498848" cy="288036"/>
-          </a:xfrm>
-          <a:prstGeom prst="rect">
-            <a:avLst/>
-          </a:prstGeom>
-          <a:solidFill>
-            <a:srgbClr val="F5EADA"/>
-          </a:solidFill>
-          <a:ln>
-            <a:noFill/>
-          </a:ln>
-        </p:spPr>
-        <p:style>
-          <a:lnRef idx="1">
-            <a:schemeClr val="accent1"/>
-          </a:lnRef>
-          <a:fillRef idx="3">
-            <a:schemeClr val="accent1"/>
-          </a:fillRef>
-          <a:effectRef idx="2">
-            <a:schemeClr val="accent1"/>
-          </a:effectRef>
-          <a:fontRef idx="minor">
-            <a:schemeClr val="lt1"/>
-          </a:fontRef>
-        </p:style>
-        <p:txBody>
-          <a:bodyPr rtlCol="0" anchor="ctr"/>
-          <a:lstStyle/>
-          <a:p>
-            <a:pPr algn="ctr"/>
-          </a:p>
-        </p:txBody>
-      </p:sp>
-      <p:sp>
-        <p:nvSpPr>
-          <p:cNvPr id="112" name="Rectangle 111"/>
-          <p:cNvSpPr/>
-          <p:nvPr/>
-        </p:nvSpPr>
-        <p:spPr>
-          <a:xfrm>
-            <a:off x="7333488" y="4642408"/>
-            <a:ext cx="4498848" cy="7315"/>
-          </a:xfrm>
-          <a:prstGeom prst="rect">
-            <a:avLst/>
-          </a:prstGeom>
-          <a:solidFill>
-            <a:srgbClr val="D9D4CB"/>
-          </a:solidFill>
-          <a:ln>
-            <a:noFill/>
-          </a:ln>
-        </p:spPr>
-        <p:style>
-          <a:lnRef idx="1">
-            <a:schemeClr val="accent1"/>
-          </a:lnRef>
-          <a:fillRef idx="3">
-            <a:schemeClr val="accent1"/>
-          </a:fillRef>
-          <a:effectRef idx="2">
-            <a:schemeClr val="accent1"/>
-          </a:effectRef>
-          <a:fontRef idx="minor">
-            <a:schemeClr val="lt1"/>
-          </a:fontRef>
-        </p:style>
-        <p:txBody>
-          <a:bodyPr rtlCol="0" anchor="ctr"/>
-          <a:lstStyle/>
-          <a:p>
-            <a:pPr algn="ctr"/>
-          </a:p>
-        </p:txBody>
-      </p:sp>
-      <p:sp>
-        <p:nvSpPr>
-          <p:cNvPr id="113" name="TextBox 112"/>
-          <p:cNvSpPr txBox="1"/>
-          <p:nvPr/>
-        </p:nvSpPr>
-        <p:spPr>
-          <a:xfrm>
-            <a:off x="7379208" y="4430268"/>
-            <a:ext cx="1133856" cy="146304"/>
-          </a:xfrm>
-          <a:prstGeom prst="rect">
-            <a:avLst/>
-          </a:prstGeom>
-          <a:noFill/>
-        </p:spPr>
-        <p:txBody>
-          <a:bodyPr wrap="square" lIns="0" rIns="0" tIns="0" bIns="0" anchor="ctr">
-            <a:spAutoFit/>
-          </a:bodyPr>
-          <a:lstStyle/>
-          <a:p>
-            <a:pPr algn="l">
-              <a:lnSpc>
-                <a:spcPct val="100000"/>
-              </a:lnSpc>
-              <a:spcBef>
-                <a:spcPts val="0"/>
-              </a:spcBef>
-              <a:spcAft>
-                <a:spcPts val="0"/>
-              </a:spcAft>
-            </a:pPr>
-            <a:r>
-              <a:rPr sz="660" b="1" i="0">
-                <a:solidFill>
-                  <a:srgbClr val="171A1F"/>
-                </a:solidFill>
-                <a:latin typeface="Aptos"/>
-              </a:rPr>
-              <a:t>Hybrid · ≤10%</a:t>
-            </a:r>
-          </a:p>
-        </p:txBody>
-      </p:sp>
-      <p:sp>
-        <p:nvSpPr>
-          <p:cNvPr id="114" name="TextBox 113"/>
-          <p:cNvSpPr txBox="1"/>
-          <p:nvPr/>
-        </p:nvSpPr>
-        <p:spPr>
-          <a:xfrm>
-            <a:off x="8604504" y="4430268"/>
-            <a:ext cx="713232" cy="146304"/>
-          </a:xfrm>
-          <a:prstGeom prst="rect">
-            <a:avLst/>
-          </a:prstGeom>
-          <a:noFill/>
-        </p:spPr>
-        <p:txBody>
-          <a:bodyPr wrap="square" lIns="0" rIns="0" tIns="0" bIns="0" anchor="ctr">
-            <a:spAutoFit/>
-          </a:bodyPr>
-          <a:lstStyle/>
-          <a:p>
-            <a:pPr algn="ctr">
-              <a:lnSpc>
-                <a:spcPct val="100000"/>
-              </a:lnSpc>
-              <a:spcBef>
-                <a:spcPts val="0"/>
-              </a:spcBef>
-              <a:spcAft>
-                <a:spcPts val="0"/>
-              </a:spcAft>
-            </a:pPr>
-            <a:r>
-              <a:rPr sz="660" b="1" i="0">
-                <a:solidFill>
-                  <a:srgbClr val="B46318"/>
-                </a:solidFill>
-                <a:latin typeface="Consolas"/>
-              </a:rPr>
-              <a:t>38.4 · 7%</a:t>
-            </a:r>
-          </a:p>
-        </p:txBody>
-      </p:sp>
-      <p:sp>
-        <p:nvSpPr>
-          <p:cNvPr id="115" name="TextBox 114"/>
-          <p:cNvSpPr txBox="1"/>
-          <p:nvPr/>
-        </p:nvSpPr>
-        <p:spPr>
-          <a:xfrm>
-            <a:off x="9409176" y="4430268"/>
-            <a:ext cx="713232" cy="146304"/>
-          </a:xfrm>
-          <a:prstGeom prst="rect">
-            <a:avLst/>
-          </a:prstGeom>
-          <a:noFill/>
-        </p:spPr>
-        <p:txBody>
-          <a:bodyPr wrap="square" lIns="0" rIns="0" tIns="0" bIns="0" anchor="ctr">
-            <a:spAutoFit/>
-          </a:bodyPr>
-          <a:lstStyle/>
-          <a:p>
-            <a:pPr algn="ctr">
-              <a:lnSpc>
-                <a:spcPct val="100000"/>
-              </a:lnSpc>
-              <a:spcBef>
-                <a:spcPts val="0"/>
-              </a:spcBef>
-              <a:spcAft>
-                <a:spcPts val="0"/>
-              </a:spcAft>
-            </a:pPr>
-            <a:r>
-              <a:rPr sz="660" b="1" i="0">
-                <a:solidFill>
-                  <a:srgbClr val="171A1F"/>
-                </a:solidFill>
-                <a:latin typeface="Consolas"/>
-              </a:rPr>
-              <a:t>34.7 · 9%</a:t>
-            </a:r>
-          </a:p>
-        </p:txBody>
-      </p:sp>
-      <p:sp>
-        <p:nvSpPr>
-          <p:cNvPr id="116" name="TextBox 115"/>
-          <p:cNvSpPr txBox="1"/>
-          <p:nvPr/>
-        </p:nvSpPr>
-        <p:spPr>
-          <a:xfrm>
-            <a:off x="10213848" y="4430268"/>
-            <a:ext cx="731520" cy="146304"/>
-          </a:xfrm>
-          <a:prstGeom prst="rect">
-            <a:avLst/>
-          </a:prstGeom>
-          <a:noFill/>
-        </p:spPr>
-        <p:txBody>
-          <a:bodyPr wrap="square" lIns="0" rIns="0" tIns="0" bIns="0" anchor="ctr">
-            <a:spAutoFit/>
-          </a:bodyPr>
-          <a:lstStyle/>
-          <a:p>
-            <a:pPr algn="ctr">
-              <a:lnSpc>
-                <a:spcPct val="100000"/>
-              </a:lnSpc>
-              <a:spcBef>
-                <a:spcPts val="0"/>
-              </a:spcBef>
-              <a:spcAft>
-                <a:spcPts val="0"/>
-              </a:spcAft>
-            </a:pPr>
-            <a:r>
-              <a:rPr sz="660" b="1" i="0">
-                <a:solidFill>
-                  <a:srgbClr val="171A1F"/>
-                </a:solidFill>
-                <a:latin typeface="Consolas"/>
-              </a:rPr>
-              <a:t>12.8 · 0.4%</a:t>
-            </a:r>
-          </a:p>
-        </p:txBody>
-      </p:sp>
-      <p:sp>
-        <p:nvSpPr>
-          <p:cNvPr id="117" name="TextBox 116"/>
-          <p:cNvSpPr txBox="1"/>
-          <p:nvPr/>
-        </p:nvSpPr>
-        <p:spPr>
-          <a:xfrm>
-            <a:off x="11036808" y="4430268"/>
-            <a:ext cx="749808" cy="146304"/>
-          </a:xfrm>
-          <a:prstGeom prst="rect">
-            <a:avLst/>
-          </a:prstGeom>
-          <a:noFill/>
-        </p:spPr>
-        <p:txBody>
-          <a:bodyPr wrap="square" lIns="0" rIns="0" tIns="0" bIns="0" anchor="ctr">
-            <a:spAutoFit/>
-          </a:bodyPr>
-          <a:lstStyle/>
-          <a:p>
-            <a:pPr algn="ctr">
-              <a:lnSpc>
-                <a:spcPct val="100000"/>
-              </a:lnSpc>
-              <a:spcBef>
-                <a:spcPts val="0"/>
-              </a:spcBef>
-              <a:spcAft>
-                <a:spcPts val="0"/>
-              </a:spcAft>
-            </a:pPr>
-            <a:r>
-              <a:rPr sz="660" b="1" i="0">
-                <a:solidFill>
-                  <a:srgbClr val="B46318"/>
-                </a:solidFill>
-                <a:latin typeface="Consolas"/>
-              </a:rPr>
-              <a:t>13.8 · 8%</a:t>
-            </a:r>
-          </a:p>
-        </p:txBody>
-      </p:sp>
-      <p:sp>
-        <p:nvSpPr>
-          <p:cNvPr id="118" name="Rectangle 117"/>
-          <p:cNvSpPr/>
-          <p:nvPr/>
-        </p:nvSpPr>
-        <p:spPr>
-          <a:xfrm>
-            <a:off x="7333488" y="4649724"/>
-            <a:ext cx="4498848" cy="288036"/>
-          </a:xfrm>
-          <a:prstGeom prst="rect">
-            <a:avLst/>
-          </a:prstGeom>
-          <a:solidFill>
-            <a:srgbClr val="E4F0ED"/>
-          </a:solidFill>
-          <a:ln>
-            <a:noFill/>
-          </a:ln>
-        </p:spPr>
-        <p:style>
-          <a:lnRef idx="1">
-            <a:schemeClr val="accent1"/>
-          </a:lnRef>
-          <a:fillRef idx="3">
-            <a:schemeClr val="accent1"/>
-          </a:fillRef>
-          <a:effectRef idx="2">
-            <a:schemeClr val="accent1"/>
-          </a:effectRef>
-          <a:fontRef idx="minor">
-            <a:schemeClr val="lt1"/>
-          </a:fontRef>
-        </p:style>
-        <p:txBody>
-          <a:bodyPr rtlCol="0" anchor="ctr"/>
-          <a:lstStyle/>
-          <a:p>
-            <a:pPr algn="ctr"/>
-          </a:p>
-        </p:txBody>
-      </p:sp>
-      <p:sp>
-        <p:nvSpPr>
-          <p:cNvPr id="119" name="Rectangle 118"/>
-          <p:cNvSpPr/>
-          <p:nvPr/>
-        </p:nvSpPr>
-        <p:spPr>
-          <a:xfrm>
-            <a:off x="7333488" y="4930444"/>
-            <a:ext cx="4498848" cy="7315"/>
-          </a:xfrm>
-          <a:prstGeom prst="rect">
-            <a:avLst/>
-          </a:prstGeom>
-          <a:solidFill>
-            <a:srgbClr val="D9D4CB"/>
-          </a:solidFill>
-          <a:ln>
-            <a:noFill/>
-          </a:ln>
-        </p:spPr>
-        <p:style>
-          <a:lnRef idx="1">
-            <a:schemeClr val="accent1"/>
-          </a:lnRef>
-          <a:fillRef idx="3">
-            <a:schemeClr val="accent1"/>
-          </a:fillRef>
-          <a:effectRef idx="2">
-            <a:schemeClr val="accent1"/>
-          </a:effectRef>
-          <a:fontRef idx="minor">
-            <a:schemeClr val="lt1"/>
-          </a:fontRef>
-        </p:style>
-        <p:txBody>
-          <a:bodyPr rtlCol="0" anchor="ctr"/>
-          <a:lstStyle/>
-          <a:p>
-            <a:pPr algn="ctr"/>
-          </a:p>
-        </p:txBody>
-      </p:sp>
-      <p:sp>
-        <p:nvSpPr>
-          <p:cNvPr id="120" name="TextBox 119"/>
-          <p:cNvSpPr txBox="1"/>
-          <p:nvPr/>
-        </p:nvSpPr>
-        <p:spPr>
-          <a:xfrm>
-            <a:off x="7379208" y="4718304"/>
-            <a:ext cx="1133856" cy="146304"/>
-          </a:xfrm>
-          <a:prstGeom prst="rect">
-            <a:avLst/>
-          </a:prstGeom>
-          <a:noFill/>
-        </p:spPr>
-        <p:txBody>
-          <a:bodyPr wrap="square" lIns="0" rIns="0" tIns="0" bIns="0" anchor="ctr">
-            <a:spAutoFit/>
-          </a:bodyPr>
-          <a:lstStyle/>
-          <a:p>
-            <a:pPr algn="l">
-              <a:lnSpc>
-                <a:spcPct val="100000"/>
-              </a:lnSpc>
-              <a:spcBef>
-                <a:spcPts val="0"/>
-              </a:spcBef>
-              <a:spcAft>
-                <a:spcPts val="0"/>
-              </a:spcAft>
-            </a:pPr>
-            <a:r>
-              <a:rPr sz="660" b="1" i="0">
-                <a:solidFill>
-                  <a:srgbClr val="171A1F"/>
-                </a:solidFill>
-                <a:latin typeface="Aptos"/>
-              </a:rPr>
-              <a:t>Half · s=2×10</a:t>
-            </a:r>
-          </a:p>
-        </p:txBody>
-      </p:sp>
-      <p:sp>
-        <p:nvSpPr>
-          <p:cNvPr id="121" name="TextBox 120"/>
-          <p:cNvSpPr txBox="1"/>
-          <p:nvPr/>
-        </p:nvSpPr>
-        <p:spPr>
-          <a:xfrm>
-            <a:off x="8604504" y="4718304"/>
-            <a:ext cx="713232" cy="146304"/>
-          </a:xfrm>
-          <a:prstGeom prst="rect">
-            <a:avLst/>
-          </a:prstGeom>
-          <a:noFill/>
-        </p:spPr>
-        <p:txBody>
-          <a:bodyPr wrap="square" lIns="0" rIns="0" tIns="0" bIns="0" anchor="ctr">
-            <a:spAutoFit/>
-          </a:bodyPr>
-          <a:lstStyle/>
-          <a:p>
-            <a:pPr algn="ctr">
-              <a:lnSpc>
-                <a:spcPct val="100000"/>
-              </a:lnSpc>
-              <a:spcBef>
-                <a:spcPts val="0"/>
-              </a:spcBef>
-              <a:spcAft>
-                <a:spcPts val="0"/>
-              </a:spcAft>
-            </a:pPr>
-            <a:r>
-              <a:rPr sz="660" b="1" i="0">
-                <a:solidFill>
-                  <a:srgbClr val="171A1F"/>
-                </a:solidFill>
-                <a:latin typeface="Consolas"/>
-              </a:rPr>
-              <a:t>42.9 · 67%</a:t>
-            </a:r>
-          </a:p>
-        </p:txBody>
-      </p:sp>
-      <p:sp>
-        <p:nvSpPr>
-          <p:cNvPr id="122" name="TextBox 121"/>
-          <p:cNvSpPr txBox="1"/>
-          <p:nvPr/>
-        </p:nvSpPr>
-        <p:spPr>
-          <a:xfrm>
-            <a:off x="9409176" y="4718304"/>
-            <a:ext cx="713232" cy="146304"/>
-          </a:xfrm>
-          <a:prstGeom prst="rect">
-            <a:avLst/>
-          </a:prstGeom>
-          <a:noFill/>
-        </p:spPr>
-        <p:txBody>
-          <a:bodyPr wrap="square" lIns="0" rIns="0" tIns="0" bIns="0" anchor="ctr">
-            <a:spAutoFit/>
-          </a:bodyPr>
-          <a:lstStyle/>
-          <a:p>
-            <a:pPr algn="ctr">
-              <a:lnSpc>
-                <a:spcPct val="100000"/>
-              </a:lnSpc>
-              <a:spcBef>
-                <a:spcPts val="0"/>
-              </a:spcBef>
-              <a:spcAft>
-                <a:spcPts val="0"/>
-              </a:spcAft>
-            </a:pPr>
-            <a:r>
-              <a:rPr sz="660" b="1" i="0">
-                <a:solidFill>
-                  <a:srgbClr val="0F7670"/>
-                </a:solidFill>
-                <a:latin typeface="Consolas"/>
-              </a:rPr>
-              <a:t>51.4 · 63%</a:t>
-            </a:r>
-          </a:p>
-        </p:txBody>
-      </p:sp>
-      <p:sp>
-        <p:nvSpPr>
-          <p:cNvPr id="123" name="TextBox 122"/>
-          <p:cNvSpPr txBox="1"/>
-          <p:nvPr/>
-        </p:nvSpPr>
-        <p:spPr>
-          <a:xfrm>
-            <a:off x="10213848" y="4718304"/>
-            <a:ext cx="731520" cy="146304"/>
-          </a:xfrm>
-          <a:prstGeom prst="rect">
-            <a:avLst/>
-          </a:prstGeom>
-          <a:noFill/>
-        </p:spPr>
-        <p:txBody>
-          <a:bodyPr wrap="square" lIns="0" rIns="0" tIns="0" bIns="0" anchor="ctr">
-            <a:spAutoFit/>
-          </a:bodyPr>
-          <a:lstStyle/>
-          <a:p>
-            <a:pPr algn="ctr">
-              <a:lnSpc>
-                <a:spcPct val="100000"/>
-              </a:lnSpc>
-              <a:spcBef>
-                <a:spcPts val="0"/>
-              </a:spcBef>
-              <a:spcAft>
-                <a:spcPts val="0"/>
-              </a:spcAft>
-            </a:pPr>
-            <a:r>
-              <a:rPr sz="660" b="1" i="0">
-                <a:solidFill>
-                  <a:srgbClr val="0F7670"/>
-                </a:solidFill>
-                <a:latin typeface="Consolas"/>
-              </a:rPr>
-              <a:t>14.3 · 65%</a:t>
-            </a:r>
-          </a:p>
-        </p:txBody>
-      </p:sp>
-      <p:sp>
-        <p:nvSpPr>
-          <p:cNvPr id="124" name="TextBox 123"/>
-          <p:cNvSpPr txBox="1"/>
-          <p:nvPr/>
-        </p:nvSpPr>
-        <p:spPr>
-          <a:xfrm>
-            <a:off x="11036808" y="4718304"/>
-            <a:ext cx="749808" cy="146304"/>
-          </a:xfrm>
-          <a:prstGeom prst="rect">
-            <a:avLst/>
-          </a:prstGeom>
-          <a:noFill/>
-        </p:spPr>
-        <p:txBody>
-          <a:bodyPr wrap="square" lIns="0" rIns="0" tIns="0" bIns="0" anchor="ctr">
-            <a:spAutoFit/>
-          </a:bodyPr>
-          <a:lstStyle/>
-          <a:p>
-            <a:pPr algn="ctr">
-              <a:lnSpc>
-                <a:spcPct val="100000"/>
-              </a:lnSpc>
-              <a:spcBef>
-                <a:spcPts val="0"/>
-              </a:spcBef>
-              <a:spcAft>
-                <a:spcPts val="0"/>
-              </a:spcAft>
-            </a:pPr>
-            <a:r>
-              <a:rPr sz="660" b="1" i="0">
-                <a:solidFill>
-                  <a:srgbClr val="171A1F"/>
-                </a:solidFill>
-                <a:latin typeface="Consolas"/>
-              </a:rPr>
-              <a:t>14.2 · 69%</a:t>
-            </a:r>
-          </a:p>
-        </p:txBody>
-      </p:sp>
-      <p:sp>
-        <p:nvSpPr>
-          <p:cNvPr id="125" name="Rectangle 124"/>
-          <p:cNvSpPr/>
-          <p:nvPr/>
-        </p:nvSpPr>
-        <p:spPr>
-          <a:xfrm>
-            <a:off x="7333488" y="4937760"/>
-            <a:ext cx="4498848" cy="288036"/>
-          </a:xfrm>
-          <a:prstGeom prst="rect">
-            <a:avLst/>
-          </a:prstGeom>
-          <a:solidFill>
-            <a:srgbClr val="FFFFFF"/>
-          </a:solidFill>
-          <a:ln>
-            <a:noFill/>
-          </a:ln>
-        </p:spPr>
-        <p:style>
-          <a:lnRef idx="1">
-            <a:schemeClr val="accent1"/>
-          </a:lnRef>
-          <a:fillRef idx="3">
-            <a:schemeClr val="accent1"/>
-          </a:fillRef>
-          <a:effectRef idx="2">
-            <a:schemeClr val="accent1"/>
-          </a:effectRef>
-          <a:fontRef idx="minor">
-            <a:schemeClr val="lt1"/>
-          </a:fontRef>
-        </p:style>
-        <p:txBody>
-          <a:bodyPr rtlCol="0" anchor="ctr"/>
-          <a:lstStyle/>
-          <a:p>
-            <a:pPr algn="ctr"/>
-          </a:p>
-        </p:txBody>
-      </p:sp>
-      <p:sp>
-        <p:nvSpPr>
-          <p:cNvPr id="126" name="Rectangle 125"/>
-          <p:cNvSpPr/>
-          <p:nvPr/>
-        </p:nvSpPr>
-        <p:spPr>
-          <a:xfrm>
-            <a:off x="7333488" y="5218480"/>
-            <a:ext cx="4498848" cy="7315"/>
-          </a:xfrm>
-          <a:prstGeom prst="rect">
-            <a:avLst/>
-          </a:prstGeom>
-          <a:solidFill>
-            <a:srgbClr val="D9D4CB"/>
-          </a:solidFill>
-          <a:ln>
-            <a:noFill/>
-          </a:ln>
-        </p:spPr>
-        <p:style>
-          <a:lnRef idx="1">
-            <a:schemeClr val="accent1"/>
-          </a:lnRef>
-          <a:fillRef idx="3">
-            <a:schemeClr val="accent1"/>
-          </a:fillRef>
-          <a:effectRef idx="2">
-            <a:schemeClr val="accent1"/>
-          </a:effectRef>
-          <a:fontRef idx="minor">
-            <a:schemeClr val="lt1"/>
-          </a:fontRef>
-        </p:style>
-        <p:txBody>
-          <a:bodyPr rtlCol="0" anchor="ctr"/>
-          <a:lstStyle/>
-          <a:p>
-            <a:pPr algn="ctr"/>
-          </a:p>
-        </p:txBody>
-      </p:sp>
-      <p:sp>
-        <p:nvSpPr>
-          <p:cNvPr id="127" name="TextBox 126"/>
-          <p:cNvSpPr txBox="1"/>
-          <p:nvPr/>
-        </p:nvSpPr>
-        <p:spPr>
-          <a:xfrm>
-            <a:off x="7379208" y="5006340"/>
-            <a:ext cx="1133856" cy="146304"/>
-          </a:xfrm>
-          <a:prstGeom prst="rect">
-            <a:avLst/>
-          </a:prstGeom>
-          <a:noFill/>
-        </p:spPr>
-        <p:txBody>
-          <a:bodyPr wrap="square" lIns="0" rIns="0" tIns="0" bIns="0" anchor="ctr">
-            <a:spAutoFit/>
-          </a:bodyPr>
-          <a:lstStyle/>
-          <a:p>
-            <a:pPr algn="l">
-              <a:lnSpc>
-                <a:spcPct val="100000"/>
-              </a:lnSpc>
-              <a:spcBef>
-                <a:spcPts val="0"/>
-              </a:spcBef>
-              <a:spcAft>
-                <a:spcPts val="0"/>
-              </a:spcAft>
-            </a:pPr>
-            <a:r>
-              <a:rPr sz="660" b="1" i="0">
-                <a:solidFill>
-                  <a:srgbClr val="171A1F"/>
-                </a:solidFill>
-                <a:latin typeface="Aptos"/>
-              </a:rPr>
-              <a:t>Full · s=2×20</a:t>
-            </a:r>
-          </a:p>
-        </p:txBody>
-      </p:sp>
-      <p:sp>
-        <p:nvSpPr>
-          <p:cNvPr id="128" name="TextBox 127"/>
-          <p:cNvSpPr txBox="1"/>
-          <p:nvPr/>
-        </p:nvSpPr>
-        <p:spPr>
-          <a:xfrm>
-            <a:off x="8604504" y="5006340"/>
-            <a:ext cx="713232" cy="146304"/>
-          </a:xfrm>
-          <a:prstGeom prst="rect">
-            <a:avLst/>
-          </a:prstGeom>
-          <a:noFill/>
-        </p:spPr>
-        <p:txBody>
-          <a:bodyPr wrap="square" lIns="0" rIns="0" tIns="0" bIns="0" anchor="ctr">
-            <a:spAutoFit/>
-          </a:bodyPr>
-          <a:lstStyle/>
-          <a:p>
-            <a:pPr algn="ctr">
-              <a:lnSpc>
-                <a:spcPct val="100000"/>
-              </a:lnSpc>
-              <a:spcBef>
-                <a:spcPts val="0"/>
-              </a:spcBef>
-              <a:spcAft>
-                <a:spcPts val="0"/>
-              </a:spcAft>
-            </a:pPr>
-            <a:r>
-              <a:rPr sz="660" b="0" i="0">
-                <a:solidFill>
-                  <a:srgbClr val="171A1F"/>
-                </a:solidFill>
-                <a:latin typeface="Consolas"/>
-              </a:rPr>
-              <a:t>43.7</a:t>
-            </a:r>
-          </a:p>
-        </p:txBody>
-      </p:sp>
-      <p:sp>
-        <p:nvSpPr>
-          <p:cNvPr id="129" name="TextBox 128"/>
-          <p:cNvSpPr txBox="1"/>
-          <p:nvPr/>
-        </p:nvSpPr>
-        <p:spPr>
-          <a:xfrm>
-            <a:off x="9409176" y="5006340"/>
-            <a:ext cx="713232" cy="146304"/>
-          </a:xfrm>
-          <a:prstGeom prst="rect">
-            <a:avLst/>
-          </a:prstGeom>
-          <a:noFill/>
-        </p:spPr>
-        <p:txBody>
-          <a:bodyPr wrap="square" lIns="0" rIns="0" tIns="0" bIns="0" anchor="ctr">
-            <a:spAutoFit/>
-          </a:bodyPr>
-          <a:lstStyle/>
-          <a:p>
-            <a:pPr algn="ctr">
-              <a:lnSpc>
-                <a:spcPct val="100000"/>
-              </a:lnSpc>
-              <a:spcBef>
-                <a:spcPts val="0"/>
-              </a:spcBef>
-              <a:spcAft>
-                <a:spcPts val="0"/>
-              </a:spcAft>
-            </a:pPr>
-            <a:r>
-              <a:rPr sz="660" b="0" i="0">
-                <a:solidFill>
-                  <a:srgbClr val="171A1F"/>
-                </a:solidFill>
-                <a:latin typeface="Consolas"/>
-              </a:rPr>
-              <a:t>49.7</a:t>
-            </a:r>
-          </a:p>
-        </p:txBody>
-      </p:sp>
-      <p:sp>
-        <p:nvSpPr>
-          <p:cNvPr id="130" name="TextBox 129"/>
-          <p:cNvSpPr txBox="1"/>
-          <p:nvPr/>
-        </p:nvSpPr>
-        <p:spPr>
-          <a:xfrm>
-            <a:off x="10213848" y="5006340"/>
-            <a:ext cx="731520" cy="146304"/>
-          </a:xfrm>
-          <a:prstGeom prst="rect">
-            <a:avLst/>
-          </a:prstGeom>
-          <a:noFill/>
-        </p:spPr>
-        <p:txBody>
-          <a:bodyPr wrap="square" lIns="0" rIns="0" tIns="0" bIns="0" anchor="ctr">
-            <a:spAutoFit/>
-          </a:bodyPr>
-          <a:lstStyle/>
-          <a:p>
-            <a:pPr algn="ctr">
-              <a:lnSpc>
-                <a:spcPct val="100000"/>
-              </a:lnSpc>
-              <a:spcBef>
-                <a:spcPts val="0"/>
-              </a:spcBef>
-              <a:spcAft>
-                <a:spcPts val="0"/>
-              </a:spcAft>
-            </a:pPr>
-            <a:r>
-              <a:rPr sz="660" b="0" i="0">
-                <a:solidFill>
-                  <a:srgbClr val="171A1F"/>
-                </a:solidFill>
-                <a:latin typeface="Consolas"/>
-              </a:rPr>
-              <a:t>13.3</a:t>
-            </a:r>
-          </a:p>
-        </p:txBody>
-      </p:sp>
-      <p:sp>
-        <p:nvSpPr>
-          <p:cNvPr id="131" name="TextBox 130"/>
-          <p:cNvSpPr txBox="1"/>
-          <p:nvPr/>
-        </p:nvSpPr>
-        <p:spPr>
-          <a:xfrm>
-            <a:off x="11036808" y="5006340"/>
-            <a:ext cx="749808" cy="146304"/>
-          </a:xfrm>
-          <a:prstGeom prst="rect">
-            <a:avLst/>
-          </a:prstGeom>
-          <a:noFill/>
-        </p:spPr>
-        <p:txBody>
-          <a:bodyPr wrap="square" lIns="0" rIns="0" tIns="0" bIns="0" anchor="ctr">
-            <a:spAutoFit/>
-          </a:bodyPr>
-          <a:lstStyle/>
-          <a:p>
-            <a:pPr algn="ctr">
-              <a:lnSpc>
-                <a:spcPct val="100000"/>
-              </a:lnSpc>
-              <a:spcBef>
-                <a:spcPts val="0"/>
-              </a:spcBef>
-              <a:spcAft>
-                <a:spcPts val="0"/>
-              </a:spcAft>
-            </a:pPr>
-            <a:r>
-              <a:rPr sz="660" b="0" i="0">
-                <a:solidFill>
-                  <a:srgbClr val="171A1F"/>
-                </a:solidFill>
-                <a:latin typeface="Consolas"/>
-              </a:rPr>
-              <a:t>17.8</a:t>
-            </a:r>
-          </a:p>
-        </p:txBody>
-      </p:sp>
-      <p:sp>
-        <p:nvSpPr>
-          <p:cNvPr id="132" name="Rectangle 131"/>
-          <p:cNvSpPr/>
-          <p:nvPr/>
-        </p:nvSpPr>
-        <p:spPr>
-          <a:xfrm>
-            <a:off x="7333488" y="5225796"/>
-            <a:ext cx="4498848" cy="16459"/>
-          </a:xfrm>
-          <a:prstGeom prst="rect">
-            <a:avLst/>
-          </a:prstGeom>
-          <a:solidFill>
-            <a:srgbClr val="171A1F"/>
-          </a:solidFill>
-          <a:ln>
-            <a:noFill/>
-          </a:ln>
-        </p:spPr>
-        <p:style>
-          <a:lnRef idx="1">
-            <a:schemeClr val="accent1"/>
-          </a:lnRef>
-          <a:fillRef idx="3">
-            <a:schemeClr val="accent1"/>
-          </a:fillRef>
-          <a:effectRef idx="2">
-            <a:schemeClr val="accent1"/>
-          </a:effectRef>
-          <a:fontRef idx="minor">
-            <a:schemeClr val="lt1"/>
-          </a:fontRef>
-        </p:style>
-        <p:txBody>
-          <a:bodyPr rtlCol="0" anchor="ctr"/>
-          <a:lstStyle/>
-          <a:p>
-            <a:pPr algn="ctr"/>
-          </a:p>
-        </p:txBody>
-      </p:sp>
-      <p:sp>
-        <p:nvSpPr>
-          <p:cNvPr id="133" name="TextBox 132"/>
-          <p:cNvSpPr txBox="1"/>
-          <p:nvPr/>
-        </p:nvSpPr>
-        <p:spPr>
-          <a:xfrm>
-            <a:off x="7333488" y="5367528"/>
-            <a:ext cx="4498848" cy="164592"/>
-          </a:xfrm>
-          <a:prstGeom prst="rect">
-            <a:avLst/>
-          </a:prstGeom>
-          <a:noFill/>
-        </p:spPr>
-        <p:txBody>
-          <a:bodyPr wrap="square" lIns="0" rIns="0" tIns="0" bIns="0" anchor="t">
-            <a:spAutoFit/>
-          </a:bodyPr>
-          <a:lstStyle/>
-          <a:p>
-            <a:pPr algn="l">
-              <a:lnSpc>
-                <a:spcPct val="100000"/>
-              </a:lnSpc>
-              <a:spcBef>
-                <a:spcPts val="0"/>
-              </a:spcBef>
-              <a:spcAft>
-                <a:spcPts val="0"/>
-              </a:spcAft>
-            </a:pPr>
-            <a:r>
-              <a:rPr sz="819" b="1" i="0">
-                <a:solidFill>
-                  <a:srgbClr val="9D1B32"/>
-                </a:solidFill>
-                <a:latin typeface="Aptos"/>
-              </a:rPr>
-              <a:t>ADDITIONAL RESULTS</a:t>
-            </a:r>
-          </a:p>
-        </p:txBody>
-      </p:sp>
-      <p:sp>
-        <p:nvSpPr>
-          <p:cNvPr id="134" name="Rounded Rectangle 133"/>
-          <p:cNvSpPr/>
-          <p:nvPr/>
-        </p:nvSpPr>
-        <p:spPr>
-          <a:xfrm>
-            <a:off x="7333488" y="5577840"/>
-            <a:ext cx="4498848" cy="822960"/>
-          </a:xfrm>
-          <a:prstGeom prst="roundRect">
-            <a:avLst>
-              <a:gd name="adj" fmla="val 8000"/>
-            </a:avLst>
-          </a:prstGeom>
-          <a:solidFill>
-            <a:srgbClr val="FFFFFF"/>
-          </a:solidFill>
-          <a:ln w="8890">
-            <a:solidFill>
-              <a:srgbClr val="D9D4CB"/>
-            </a:solidFill>
-          </a:ln>
-        </p:spPr>
-        <p:style>
-          <a:lnRef idx="1">
-            <a:schemeClr val="accent1"/>
-          </a:lnRef>
-          <a:fillRef idx="3">
-            <a:schemeClr val="accent1"/>
-          </a:fillRef>
-          <a:effectRef idx="2">
-            <a:schemeClr val="accent1"/>
-          </a:effectRef>
-          <a:fontRef idx="minor">
-            <a:schemeClr val="lt1"/>
-          </a:fontRef>
-        </p:style>
-        <p:txBody>
-          <a:bodyPr rtlCol="0" anchor="ctr"/>
-          <a:lstStyle/>
-          <a:p>
-            <a:pPr algn="ctr"/>
-          </a:p>
-        </p:txBody>
-      </p:sp>
-      <p:sp>
-        <p:nvSpPr>
-          <p:cNvPr id="135" name="Rectangle 134"/>
-          <p:cNvSpPr/>
-          <p:nvPr/>
-        </p:nvSpPr>
-        <p:spPr>
-          <a:xfrm>
-            <a:off x="7333488" y="5577840"/>
-            <a:ext cx="41148" cy="822960"/>
-          </a:xfrm>
-          <a:prstGeom prst="rect">
-            <a:avLst/>
-          </a:prstGeom>
-          <a:solidFill>
-            <a:srgbClr val="0F7670"/>
-          </a:solidFill>
-          <a:ln>
-            <a:noFill/>
-          </a:ln>
-        </p:spPr>
-        <p:style>
-          <a:lnRef idx="1">
-            <a:schemeClr val="accent1"/>
-          </a:lnRef>
-          <a:fillRef idx="3">
-            <a:schemeClr val="accent1"/>
-          </a:fillRef>
-          <a:effectRef idx="2">
-            <a:schemeClr val="accent1"/>
-          </a:effectRef>
-          <a:fontRef idx="minor">
-            <a:schemeClr val="lt1"/>
-          </a:fontRef>
-        </p:style>
-        <p:txBody>
-          <a:bodyPr rtlCol="0" anchor="ctr"/>
-          <a:lstStyle/>
-          <a:p>
-            <a:pPr algn="ctr"/>
-          </a:p>
-        </p:txBody>
-      </p:sp>
-      <p:sp>
-        <p:nvSpPr>
-          <p:cNvPr id="136" name="TextBox 135"/>
-          <p:cNvSpPr txBox="1"/>
-          <p:nvPr/>
-        </p:nvSpPr>
-        <p:spPr>
-          <a:xfrm>
-            <a:off x="7470648" y="5669280"/>
-            <a:ext cx="2103120" cy="603504"/>
-          </a:xfrm>
-          <a:prstGeom prst="rect">
-            <a:avLst/>
-          </a:prstGeom>
-          <a:noFill/>
-        </p:spPr>
-        <p:txBody>
-          <a:bodyPr wrap="square" lIns="0" rIns="0" tIns="0" bIns="0" anchor="t">
-            <a:spAutoFit/>
-          </a:bodyPr>
-          <a:lstStyle/>
-          <a:p>
-            <a:pPr algn="l">
-              <a:lnSpc>
-                <a:spcPct val="103000"/>
-              </a:lnSpc>
-              <a:spcBef>
-                <a:spcPts val="0"/>
-              </a:spcBef>
-              <a:spcAft>
-                <a:spcPts val="0"/>
-              </a:spcAft>
-            </a:pPr>
-            <a:r>
-              <a:rPr sz="730" b="1" i="0">
-                <a:solidFill>
-                  <a:srgbClr val="0F7670"/>
-                </a:solidFill>
-                <a:latin typeface="Aptos"/>
-              </a:rPr>
-              <a:t>Cora → Citeseer</a:t>
-            </a:r>
-            <a:r>
-              <a:rPr sz="670" b="0" i="0">
-                <a:solidFill>
-                  <a:srgbClr val="434952"/>
-                </a:solidFill>
-                <a:latin typeface="Aptos"/>
-              </a:rPr>
-              <a:t>  At the 25% cap, the transferred rule reaches 44.9 MRR, beating Citeseer's own noisy validation pick (37.9).</a:t>
-            </a:r>
-          </a:p>
-        </p:txBody>
-      </p:sp>
-      <p:sp>
-        <p:nvSpPr>
-          <p:cNvPr id="137" name="Rectangle 136"/>
-          <p:cNvSpPr/>
-          <p:nvPr/>
-        </p:nvSpPr>
-        <p:spPr>
-          <a:xfrm>
-            <a:off x="9646919" y="5687568"/>
-            <a:ext cx="9144" cy="502920"/>
-          </a:xfrm>
-          <a:prstGeom prst="rect">
-            <a:avLst/>
-          </a:prstGeom>
-          <a:solidFill>
-            <a:srgbClr val="D9D4CB"/>
-          </a:solidFill>
-          <a:ln>
-            <a:noFill/>
-          </a:ln>
-        </p:spPr>
-        <p:style>
-          <a:lnRef idx="1">
-            <a:schemeClr val="accent1"/>
-          </a:lnRef>
-          <a:fillRef idx="3">
-            <a:schemeClr val="accent1"/>
-          </a:fillRef>
-          <a:effectRef idx="2">
-            <a:schemeClr val="accent1"/>
-          </a:effectRef>
-          <a:fontRef idx="minor">
-            <a:schemeClr val="lt1"/>
-          </a:fontRef>
-        </p:style>
-        <p:txBody>
-          <a:bodyPr rtlCol="0" anchor="ctr"/>
-          <a:lstStyle/>
-          <a:p>
-            <a:pPr algn="ctr"/>
-          </a:p>
-        </p:txBody>
-      </p:sp>
-      <p:sp>
-        <p:nvSpPr>
-          <p:cNvPr id="138" name="TextBox 137"/>
-          <p:cNvSpPr txBox="1"/>
-          <p:nvPr/>
-        </p:nvSpPr>
-        <p:spPr>
-          <a:xfrm>
-            <a:off x="9793224" y="5669280"/>
-            <a:ext cx="1865376" cy="603504"/>
-          </a:xfrm>
-          <a:prstGeom prst="rect">
-            <a:avLst/>
-          </a:prstGeom>
-          <a:noFill/>
-        </p:spPr>
-        <p:txBody>
-          <a:bodyPr wrap="square" lIns="0" rIns="0" tIns="0" bIns="0" anchor="t">
-            <a:spAutoFit/>
-          </a:bodyPr>
-          <a:lstStyle/>
-          <a:p>
-            <a:pPr algn="l">
-              <a:lnSpc>
-                <a:spcPct val="103000"/>
-              </a:lnSpc>
-              <a:spcBef>
-                <a:spcPts val="0"/>
-              </a:spcBef>
-              <a:spcAft>
-                <a:spcPts val="0"/>
-              </a:spcAft>
-            </a:pPr>
-            <a:r>
-              <a:rPr sz="730" b="1" i="0">
-                <a:solidFill>
-                  <a:srgbClr val="203657"/>
-                </a:solidFill>
-                <a:latin typeface="Aptos"/>
-              </a:rPr>
-              <a:t>Peak VRAM · Cora HeaRT</a:t>
-            </a:r>
-            <a:r>
-              <a:rPr sz="670" b="0" i="0">
-                <a:solidFill>
-                  <a:srgbClr val="434952"/>
-                </a:solidFill>
-                <a:latin typeface="Aptos"/>
-              </a:rPr>
-              <a:t>  2,219 MB (2×20) → 1,347 MB (2×10) → 558 MB (2×2).</a:t>
-            </a:r>
-          </a:p>
-        </p:txBody>
-      </p:sp>
-      <p:sp>
-        <p:nvSpPr>
-          <p:cNvPr id="139" name="Rectangle 138"/>
-          <p:cNvSpPr/>
-          <p:nvPr/>
-        </p:nvSpPr>
-        <p:spPr>
-          <a:xfrm>
-            <a:off x="356616" y="6565392"/>
-            <a:ext cx="11475720" cy="10972"/>
-          </a:xfrm>
-          <a:prstGeom prst="rect">
-            <a:avLst/>
-          </a:prstGeom>
-          <a:solidFill>
-            <a:srgbClr val="D9D4CB"/>
-          </a:solidFill>
-          <a:ln>
-            <a:noFill/>
-          </a:ln>
-        </p:spPr>
-        <p:style>
-          <a:lnRef idx="1">
-            <a:schemeClr val="accent1"/>
-          </a:lnRef>
-          <a:fillRef idx="3">
-            <a:schemeClr val="accent1"/>
-          </a:fillRef>
-          <a:effectRef idx="2">
-            <a:schemeClr val="accent1"/>
-          </a:effectRef>
-          <a:fontRef idx="minor">
-            <a:schemeClr val="lt1"/>
-          </a:fontRef>
-        </p:style>
-        <p:txBody>
-          <a:bodyPr rtlCol="0" anchor="ctr"/>
-          <a:lstStyle/>
-          <a:p>
-            <a:pPr algn="ctr"/>
-          </a:p>
-        </p:txBody>
-      </p:sp>
-      <p:sp>
-        <p:nvSpPr>
-          <p:cNvPr id="140" name="TextBox 139"/>
-          <p:cNvSpPr txBox="1"/>
-          <p:nvPr/>
-        </p:nvSpPr>
-        <p:spPr>
-          <a:xfrm>
-            <a:off x="356616" y="6629400"/>
-            <a:ext cx="11475720" cy="128016"/>
-          </a:xfrm>
-          <a:prstGeom prst="rect">
-            <a:avLst/>
-          </a:prstGeom>
-          <a:noFill/>
-        </p:spPr>
-        <p:txBody>
-          <a:bodyPr wrap="square" lIns="0" rIns="0" tIns="0" bIns="0" anchor="t">
-            <a:spAutoFit/>
-          </a:bodyPr>
-          <a:lstStyle/>
-          <a:p>
-            <a:pPr algn="ctr">
-              <a:lnSpc>
-                <a:spcPct val="100000"/>
-              </a:lnSpc>
-              <a:spcBef>
-                <a:spcPts val="0"/>
-              </a:spcBef>
-              <a:spcAft>
-                <a:spcPts val="0"/>
-              </a:spcAft>
-            </a:pPr>
-            <a:r>
-              <a:rPr sz="650" b="1" i="0">
-                <a:solidFill>
-                  <a:srgbClr val="777D85"/>
-                </a:solidFill>
-                <a:latin typeface="Aptos"/>
-              </a:rPr>
-              <a:t>All operating points are selected on validation data; test data are used only for the reported results.</a:t>
+              <a:t>Operating points are selected on validation data; test data are used only for the reported results.</a:t>
             </a:r>
           </a:p>
         </p:txBody>
